--- a/NatioID – National Digital Identity & Voting Platform.pptx
+++ b/NatioID – National Digital Identity & Voting Platform.pptx
@@ -2,7 +2,7 @@
 <file path=ppt/presentation.xml><?xml version="1.0" encoding="utf-8"?>
 <p:presentation xmlns:a="http://schemas.openxmlformats.org/drawingml/2006/main" xmlns:r="http://schemas.openxmlformats.org/officeDocument/2006/relationships" xmlns:p="http://schemas.openxmlformats.org/presentationml/2006/main" saveSubsetFonts="1">
   <p:sldMasterIdLst>
-    <p:sldMasterId id="2147483661" r:id="rId1"/>
+    <p:sldMasterId id="2147483680" r:id="rId1"/>
   </p:sldMasterIdLst>
   <p:sldIdLst>
     <p:sldId id="256" r:id="rId2"/>
@@ -17,7 +17,10 @@
     <p:sldId id="265" r:id="rId11"/>
     <p:sldId id="266" r:id="rId12"/>
     <p:sldId id="267" r:id="rId13"/>
-    <p:sldId id="268" r:id="rId14"/>
+    <p:sldId id="269" r:id="rId14"/>
+    <p:sldId id="270" r:id="rId15"/>
+    <p:sldId id="271" r:id="rId16"/>
+    <p:sldId id="268" r:id="rId17"/>
   </p:sldIdLst>
   <p:sldSz cx="12192000" cy="6858000"/>
   <p:notesSz cx="6858000" cy="9144000"/>
@@ -120,7 +123,7 @@
 </file>
 
 <file path=ppt/slideLayouts/slideLayout1.xml><?xml version="1.0" encoding="utf-8"?>
-<p:sldLayout xmlns:a="http://schemas.openxmlformats.org/drawingml/2006/main" xmlns:r="http://schemas.openxmlformats.org/officeDocument/2006/relationships" xmlns:p="http://schemas.openxmlformats.org/presentationml/2006/main" type="title" preserve="1">
+<p:sldLayout xmlns:a="http://schemas.openxmlformats.org/drawingml/2006/main" xmlns:r="http://schemas.openxmlformats.org/officeDocument/2006/relationships" xmlns:p="http://schemas.openxmlformats.org/presentationml/2006/main" showMasterSp="0" type="title" preserve="1">
   <p:cSld name="Title Slide">
     <p:spTree>
       <p:nvGrpSpPr>
@@ -136,50 +139,333 @@
           <a:chExt cx="0" cy="0"/>
         </a:xfrm>
       </p:grpSpPr>
-      <p:pic>
-        <p:nvPicPr>
-          <p:cNvPr id="7" name="Picture 6" descr="C0-HD-BTM.png"/>
-          <p:cNvPicPr>
-            <a:picLocks noChangeAspect="1"/>
-          </p:cNvPicPr>
+      <p:grpSp>
+        <p:nvGrpSpPr>
+          <p:cNvPr id="19" name="Group 18"/>
+          <p:cNvGrpSpPr/>
           <p:nvPr/>
-        </p:nvPicPr>
-        <p:blipFill>
-          <a:blip r:embed="rId2">
-            <a:extLst>
-              <a:ext uri="{28A0092B-C50C-407E-A947-70E740481C1C}">
-                <a14:useLocalDpi xmlns:a14="http://schemas.microsoft.com/office/drawing/2010/main" val="0"/>
-              </a:ext>
-            </a:extLst>
-          </a:blip>
-          <a:stretch>
-            <a:fillRect/>
-          </a:stretch>
-        </p:blipFill>
+        </p:nvGrpSpPr>
+        <p:grpSpPr>
+          <a:xfrm>
+            <a:off x="546100" y="-4763"/>
+            <a:ext cx="5014912" cy="6862763"/>
+            <a:chOff x="2928938" y="-4763"/>
+            <a:chExt cx="5014912" cy="6862763"/>
+          </a:xfrm>
+        </p:grpSpPr>
+        <p:sp>
+          <p:nvSpPr>
+            <p:cNvPr id="22" name="Freeform 6"/>
+            <p:cNvSpPr/>
+            <p:nvPr/>
+          </p:nvSpPr>
+          <p:spPr bwMode="auto">
+            <a:xfrm>
+              <a:off x="3367088" y="-4763"/>
+              <a:ext cx="1063625" cy="2782888"/>
+            </a:xfrm>
+            <a:custGeom>
+              <a:avLst/>
+              <a:gdLst/>
+              <a:ahLst/>
+              <a:cxnLst/>
+              <a:rect l="0" t="0" r="r" b="b"/>
+              <a:pathLst>
+                <a:path w="670" h="1753">
+                  <a:moveTo>
+                    <a:pt x="0" y="1696"/>
+                  </a:moveTo>
+                  <a:lnTo>
+                    <a:pt x="225" y="1753"/>
+                  </a:lnTo>
+                  <a:lnTo>
+                    <a:pt x="670" y="0"/>
+                  </a:lnTo>
+                  <a:lnTo>
+                    <a:pt x="430" y="0"/>
+                  </a:lnTo>
+                  <a:lnTo>
+                    <a:pt x="0" y="1696"/>
+                  </a:lnTo>
+                  <a:close/>
+                </a:path>
+              </a:pathLst>
+            </a:custGeom>
+            <a:solidFill>
+              <a:schemeClr val="accent1"/>
+            </a:solidFill>
+            <a:ln>
+              <a:noFill/>
+            </a:ln>
+          </p:spPr>
+        </p:sp>
+        <p:sp>
+          <p:nvSpPr>
+            <p:cNvPr id="23" name="Freeform 7"/>
+            <p:cNvSpPr/>
+            <p:nvPr/>
+          </p:nvSpPr>
+          <p:spPr bwMode="auto">
+            <a:xfrm>
+              <a:off x="2928938" y="-4763"/>
+              <a:ext cx="1035050" cy="2673350"/>
+            </a:xfrm>
+            <a:custGeom>
+              <a:avLst/>
+              <a:gdLst/>
+              <a:ahLst/>
+              <a:cxnLst/>
+              <a:rect l="0" t="0" r="r" b="b"/>
+              <a:pathLst>
+                <a:path w="652" h="1684">
+                  <a:moveTo>
+                    <a:pt x="225" y="1684"/>
+                  </a:moveTo>
+                  <a:lnTo>
+                    <a:pt x="652" y="0"/>
+                  </a:lnTo>
+                  <a:lnTo>
+                    <a:pt x="411" y="0"/>
+                  </a:lnTo>
+                  <a:lnTo>
+                    <a:pt x="0" y="1627"/>
+                  </a:lnTo>
+                  <a:lnTo>
+                    <a:pt x="219" y="1681"/>
+                  </a:lnTo>
+                  <a:lnTo>
+                    <a:pt x="225" y="1684"/>
+                  </a:lnTo>
+                  <a:close/>
+                </a:path>
+              </a:pathLst>
+            </a:custGeom>
+            <a:solidFill>
+              <a:schemeClr val="tx1">
+                <a:lumMod val="65000"/>
+                <a:lumOff val="35000"/>
+              </a:schemeClr>
+            </a:solidFill>
+            <a:ln>
+              <a:noFill/>
+            </a:ln>
+          </p:spPr>
+        </p:sp>
+        <p:sp>
+          <p:nvSpPr>
+            <p:cNvPr id="24" name="Freeform 9"/>
+            <p:cNvSpPr/>
+            <p:nvPr/>
+          </p:nvSpPr>
+          <p:spPr bwMode="auto">
+            <a:xfrm>
+              <a:off x="2928938" y="2582862"/>
+              <a:ext cx="2693987" cy="4275138"/>
+            </a:xfrm>
+            <a:custGeom>
+              <a:avLst/>
+              <a:gdLst/>
+              <a:ahLst/>
+              <a:cxnLst/>
+              <a:rect l="0" t="0" r="r" b="b"/>
+              <a:pathLst>
+                <a:path w="1697" h="2693">
+                  <a:moveTo>
+                    <a:pt x="0" y="0"/>
+                  </a:moveTo>
+                  <a:lnTo>
+                    <a:pt x="1622" y="2693"/>
+                  </a:lnTo>
+                  <a:lnTo>
+                    <a:pt x="1697" y="2693"/>
+                  </a:lnTo>
+                  <a:lnTo>
+                    <a:pt x="0" y="0"/>
+                  </a:lnTo>
+                  <a:close/>
+                </a:path>
+              </a:pathLst>
+            </a:custGeom>
+            <a:solidFill>
+              <a:schemeClr val="tx1">
+                <a:lumMod val="85000"/>
+                <a:lumOff val="15000"/>
+              </a:schemeClr>
+            </a:solidFill>
+            <a:ln>
+              <a:noFill/>
+            </a:ln>
+          </p:spPr>
+        </p:sp>
+        <p:sp>
+          <p:nvSpPr>
+            <p:cNvPr id="25" name="Freeform 10"/>
+            <p:cNvSpPr/>
+            <p:nvPr/>
+          </p:nvSpPr>
+          <p:spPr bwMode="auto">
+            <a:xfrm>
+              <a:off x="3371850" y="2692400"/>
+              <a:ext cx="3332162" cy="4165600"/>
+            </a:xfrm>
+            <a:custGeom>
+              <a:avLst/>
+              <a:gdLst/>
+              <a:ahLst/>
+              <a:cxnLst/>
+              <a:rect l="0" t="0" r="r" b="b"/>
+              <a:pathLst>
+                <a:path w="2099" h="2624">
+                  <a:moveTo>
+                    <a:pt x="2099" y="2624"/>
+                  </a:moveTo>
+                  <a:lnTo>
+                    <a:pt x="0" y="0"/>
+                  </a:lnTo>
+                  <a:lnTo>
+                    <a:pt x="2021" y="2624"/>
+                  </a:lnTo>
+                  <a:lnTo>
+                    <a:pt x="2099" y="2624"/>
+                  </a:lnTo>
+                  <a:close/>
+                </a:path>
+              </a:pathLst>
+            </a:custGeom>
+            <a:solidFill>
+              <a:schemeClr val="accent1">
+                <a:lumMod val="50000"/>
+              </a:schemeClr>
+            </a:solidFill>
+            <a:ln>
+              <a:noFill/>
+            </a:ln>
+          </p:spPr>
+        </p:sp>
+        <p:sp>
+          <p:nvSpPr>
+            <p:cNvPr id="26" name="Freeform 11"/>
+            <p:cNvSpPr/>
+            <p:nvPr/>
+          </p:nvSpPr>
+          <p:spPr bwMode="auto">
+            <a:xfrm>
+              <a:off x="3367088" y="2687637"/>
+              <a:ext cx="4576762" cy="4170363"/>
+            </a:xfrm>
+            <a:custGeom>
+              <a:avLst/>
+              <a:gdLst/>
+              <a:ahLst/>
+              <a:cxnLst/>
+              <a:rect l="0" t="0" r="r" b="b"/>
+              <a:pathLst>
+                <a:path w="2883" h="2627">
+                  <a:moveTo>
+                    <a:pt x="0" y="0"/>
+                  </a:moveTo>
+                  <a:lnTo>
+                    <a:pt x="3" y="3"/>
+                  </a:lnTo>
+                  <a:lnTo>
+                    <a:pt x="2102" y="2627"/>
+                  </a:lnTo>
+                  <a:lnTo>
+                    <a:pt x="2883" y="2627"/>
+                  </a:lnTo>
+                  <a:lnTo>
+                    <a:pt x="225" y="57"/>
+                  </a:lnTo>
+                  <a:lnTo>
+                    <a:pt x="0" y="0"/>
+                  </a:lnTo>
+                  <a:close/>
+                </a:path>
+              </a:pathLst>
+            </a:custGeom>
+            <a:solidFill>
+              <a:schemeClr val="accent1">
+                <a:lumMod val="75000"/>
+              </a:schemeClr>
+            </a:solidFill>
+            <a:ln>
+              <a:noFill/>
+            </a:ln>
+          </p:spPr>
+        </p:sp>
+        <p:sp>
+          <p:nvSpPr>
+            <p:cNvPr id="27" name="Freeform 12"/>
+            <p:cNvSpPr/>
+            <p:nvPr/>
+          </p:nvSpPr>
+          <p:spPr bwMode="auto">
+            <a:xfrm>
+              <a:off x="2928938" y="2578100"/>
+              <a:ext cx="3584575" cy="4279900"/>
+            </a:xfrm>
+            <a:custGeom>
+              <a:avLst/>
+              <a:gdLst/>
+              <a:ahLst/>
+              <a:cxnLst/>
+              <a:rect l="0" t="0" r="r" b="b"/>
+              <a:pathLst>
+                <a:path w="2258" h="2696">
+                  <a:moveTo>
+                    <a:pt x="2258" y="2696"/>
+                  </a:moveTo>
+                  <a:lnTo>
+                    <a:pt x="264" y="111"/>
+                  </a:lnTo>
+                  <a:lnTo>
+                    <a:pt x="228" y="60"/>
+                  </a:lnTo>
+                  <a:lnTo>
+                    <a:pt x="225" y="57"/>
+                  </a:lnTo>
+                  <a:lnTo>
+                    <a:pt x="0" y="0"/>
+                  </a:lnTo>
+                  <a:lnTo>
+                    <a:pt x="0" y="3"/>
+                  </a:lnTo>
+                  <a:lnTo>
+                    <a:pt x="1697" y="2696"/>
+                  </a:lnTo>
+                  <a:lnTo>
+                    <a:pt x="2258" y="2696"/>
+                  </a:lnTo>
+                  <a:close/>
+                </a:path>
+              </a:pathLst>
+            </a:custGeom>
+            <a:solidFill>
+              <a:schemeClr val="tx1">
+                <a:lumMod val="75000"/>
+                <a:lumOff val="25000"/>
+              </a:schemeClr>
+            </a:solidFill>
+            <a:ln>
+              <a:noFill/>
+            </a:ln>
+          </p:spPr>
+        </p:sp>
+      </p:grpSp>
+      <p:sp>
+        <p:nvSpPr>
+          <p:cNvPr id="2" name="Title 1"/>
+          <p:cNvSpPr>
+            <a:spLocks noGrp="1"/>
+          </p:cNvSpPr>
+          <p:nvPr>
+            <p:ph type="ctrTitle"/>
+          </p:nvPr>
+        </p:nvSpPr>
         <p:spPr>
           <a:xfrm>
-            <a:off x="0" y="4375150"/>
-            <a:ext cx="12192000" cy="2482850"/>
-          </a:xfrm>
-          <a:prstGeom prst="rect">
-            <a:avLst/>
-          </a:prstGeom>
-        </p:spPr>
-      </p:pic>
-      <p:sp>
-        <p:nvSpPr>
-          <p:cNvPr id="2" name="Title 1"/>
-          <p:cNvSpPr>
-            <a:spLocks noGrp="1"/>
-          </p:cNvSpPr>
-          <p:nvPr>
-            <p:ph type="ctrTitle"/>
-          </p:nvPr>
-        </p:nvSpPr>
-        <p:spPr>
-          <a:xfrm>
-            <a:off x="1371600" y="1803405"/>
-            <a:ext cx="9448800" cy="1825096"/>
+            <a:off x="2928401" y="1380068"/>
+            <a:ext cx="8574622" cy="2616199"/>
           </a:xfrm>
         </p:spPr>
         <p:txBody>
@@ -187,8 +473,10 @@
             <a:normAutofit/>
           </a:bodyPr>
           <a:lstStyle>
-            <a:lvl1pPr algn="l">
-              <a:defRPr sz="6000"/>
+            <a:lvl1pPr algn="r">
+              <a:defRPr sz="6000">
+                <a:effectLst/>
+              </a:defRPr>
             </a:lvl1pPr>
           </a:lstStyle>
           <a:p>
@@ -212,50 +500,102 @@
         </p:nvSpPr>
         <p:spPr>
           <a:xfrm>
-            <a:off x="1371600" y="3632201"/>
-            <a:ext cx="9448800" cy="685800"/>
+            <a:off x="4515377" y="3996267"/>
+            <a:ext cx="6987645" cy="1388534"/>
           </a:xfrm>
         </p:spPr>
         <p:txBody>
-          <a:bodyPr>
+          <a:bodyPr anchor="t">
             <a:normAutofit/>
           </a:bodyPr>
           <a:lstStyle>
-            <a:lvl1pPr marL="0" indent="0" algn="l">
-              <a:buNone/>
-              <a:defRPr sz="2000"/>
+            <a:lvl1pPr marL="0" indent="0" algn="r">
+              <a:buNone/>
+              <a:defRPr sz="2100">
+                <a:solidFill>
+                  <a:schemeClr val="tx1"/>
+                </a:solidFill>
+              </a:defRPr>
             </a:lvl1pPr>
             <a:lvl2pPr marL="457200" indent="0" algn="ctr">
               <a:buNone/>
-              <a:defRPr sz="2000"/>
+              <a:defRPr>
+                <a:solidFill>
+                  <a:schemeClr val="tx1">
+                    <a:tint val="75000"/>
+                  </a:schemeClr>
+                </a:solidFill>
+              </a:defRPr>
             </a:lvl2pPr>
             <a:lvl3pPr marL="914400" indent="0" algn="ctr">
               <a:buNone/>
-              <a:defRPr sz="1800"/>
+              <a:defRPr>
+                <a:solidFill>
+                  <a:schemeClr val="tx1">
+                    <a:tint val="75000"/>
+                  </a:schemeClr>
+                </a:solidFill>
+              </a:defRPr>
             </a:lvl3pPr>
             <a:lvl4pPr marL="1371600" indent="0" algn="ctr">
               <a:buNone/>
-              <a:defRPr sz="1600"/>
+              <a:defRPr>
+                <a:solidFill>
+                  <a:schemeClr val="tx1">
+                    <a:tint val="75000"/>
+                  </a:schemeClr>
+                </a:solidFill>
+              </a:defRPr>
             </a:lvl4pPr>
             <a:lvl5pPr marL="1828800" indent="0" algn="ctr">
               <a:buNone/>
-              <a:defRPr sz="1600"/>
+              <a:defRPr>
+                <a:solidFill>
+                  <a:schemeClr val="tx1">
+                    <a:tint val="75000"/>
+                  </a:schemeClr>
+                </a:solidFill>
+              </a:defRPr>
             </a:lvl5pPr>
             <a:lvl6pPr marL="2286000" indent="0" algn="ctr">
               <a:buNone/>
-              <a:defRPr sz="1600"/>
+              <a:defRPr>
+                <a:solidFill>
+                  <a:schemeClr val="tx1">
+                    <a:tint val="75000"/>
+                  </a:schemeClr>
+                </a:solidFill>
+              </a:defRPr>
             </a:lvl6pPr>
             <a:lvl7pPr marL="2743200" indent="0" algn="ctr">
               <a:buNone/>
-              <a:defRPr sz="1600"/>
+              <a:defRPr>
+                <a:solidFill>
+                  <a:schemeClr val="tx1">
+                    <a:tint val="75000"/>
+                  </a:schemeClr>
+                </a:solidFill>
+              </a:defRPr>
             </a:lvl7pPr>
             <a:lvl8pPr marL="3200400" indent="0" algn="ctr">
               <a:buNone/>
-              <a:defRPr sz="1600"/>
+              <a:defRPr>
+                <a:solidFill>
+                  <a:schemeClr val="tx1">
+                    <a:tint val="75000"/>
+                  </a:schemeClr>
+                </a:solidFill>
+              </a:defRPr>
             </a:lvl8pPr>
             <a:lvl9pPr marL="3657600" indent="0" algn="ctr">
               <a:buNone/>
-              <a:defRPr sz="1600"/>
+              <a:defRPr>
+                <a:solidFill>
+                  <a:schemeClr val="tx1">
+                    <a:tint val="75000"/>
+                  </a:schemeClr>
+                </a:solidFill>
+              </a:defRPr>
             </a:lvl9pPr>
           </a:lstStyle>
           <a:p>
@@ -277,12 +617,7 @@
             <p:ph type="dt" sz="half" idx="10"/>
           </p:nvPr>
         </p:nvSpPr>
-        <p:spPr>
-          <a:xfrm>
-            <a:off x="7909561" y="4314328"/>
-            <a:ext cx="2910840" cy="374642"/>
-          </a:xfrm>
-        </p:spPr>
+        <p:spPr/>
         <p:txBody>
           <a:bodyPr/>
           <a:lstStyle/>
@@ -307,8 +642,8 @@
         </p:nvSpPr>
         <p:spPr>
           <a:xfrm>
-            <a:off x="1371600" y="4323845"/>
-            <a:ext cx="6400800" cy="365125"/>
+            <a:off x="5332412" y="5883275"/>
+            <a:ext cx="4324044" cy="365125"/>
           </a:xfrm>
         </p:spPr>
         <p:txBody>
@@ -329,12 +664,7 @@
             <p:ph type="sldNum" sz="quarter" idx="12"/>
           </p:nvPr>
         </p:nvSpPr>
-        <p:spPr>
-          <a:xfrm>
-            <a:off x="8077200" y="1430866"/>
-            <a:ext cx="2743200" cy="365125"/>
-          </a:xfrm>
-        </p:spPr>
+        <p:spPr/>
         <p:txBody>
           <a:bodyPr/>
           <a:lstStyle/>
@@ -350,13 +680,16 @@
     </p:spTree>
     <p:extLst>
       <p:ext uri="{BB962C8B-B14F-4D97-AF65-F5344CB8AC3E}">
-        <p14:creationId xmlns:p14="http://schemas.microsoft.com/office/powerpoint/2010/main" val="1715082437"/>
+        <p14:creationId xmlns:p14="http://schemas.microsoft.com/office/powerpoint/2010/main" val="2835474534"/>
       </p:ext>
     </p:extLst>
   </p:cSld>
   <p:clrMapOvr>
     <a:masterClrMapping/>
   </p:clrMapOvr>
+  <p:transition>
+    <p:fade/>
+  </p:transition>
 </p:sldLayout>
 </file>
 
@@ -389,15 +722,17 @@
         </p:nvSpPr>
         <p:spPr>
           <a:xfrm>
-            <a:off x="685777" y="4697360"/>
-            <a:ext cx="10822034" cy="819355"/>
+            <a:off x="1484311" y="4732865"/>
+            <a:ext cx="10018711" cy="566738"/>
           </a:xfrm>
         </p:spPr>
         <p:txBody>
-          <a:bodyPr anchor="b"/>
+          <a:bodyPr anchor="b">
+            <a:normAutofit/>
+          </a:bodyPr>
           <a:lstStyle>
-            <a:lvl1pPr algn="l">
-              <a:defRPr sz="3200"/>
+            <a:lvl1pPr algn="ctr">
+              <a:defRPr sz="2400" b="0"/>
             </a:lvl1pPr>
           </a:lstStyle>
           <a:p>
@@ -421,113 +756,145 @@
         </p:nvSpPr>
         <p:spPr>
           <a:xfrm>
-            <a:off x="681727" y="941439"/>
-            <a:ext cx="10821840" cy="3478161"/>
+            <a:off x="2386012" y="932112"/>
+            <a:ext cx="8225944" cy="3164976"/>
           </a:xfrm>
+          <a:prstGeom prst="roundRect">
+            <a:avLst>
+              <a:gd name="adj" fmla="val 4380"/>
+            </a:avLst>
+          </a:prstGeom>
+          <a:ln w="38100">
+            <a:gradFill flip="none" rotWithShape="1">
+              <a:gsLst>
+                <a:gs pos="0">
+                  <a:schemeClr val="bg2"/>
+                </a:gs>
+                <a:gs pos="100000">
+                  <a:schemeClr val="bg2">
+                    <a:lumMod val="75000"/>
+                  </a:schemeClr>
+                </a:gs>
+              </a:gsLst>
+              <a:lin ang="5400000" scaled="0"/>
+              <a:tileRect/>
+            </a:gradFill>
+          </a:ln>
+          <a:effectLst>
+            <a:innerShdw blurRad="57150" dist="38100" dir="14460000">
+              <a:srgbClr val="000000">
+                <a:alpha val="70000"/>
+              </a:srgbClr>
+            </a:innerShdw>
+          </a:effectLst>
         </p:spPr>
         <p:txBody>
-          <a:bodyPr anchor="t"/>
+          <a:bodyPr anchor="t">
+            <a:normAutofit/>
+          </a:bodyPr>
           <a:lstStyle>
-            <a:lvl1pPr marL="0" indent="0">
-              <a:buNone/>
-              <a:defRPr sz="3200"/>
-            </a:lvl1pPr>
-            <a:lvl2pPr marL="457200" indent="0">
-              <a:buNone/>
-              <a:defRPr sz="2800"/>
-            </a:lvl2pPr>
-            <a:lvl3pPr marL="914400" indent="0">
-              <a:buNone/>
-              <a:defRPr sz="2400"/>
-            </a:lvl3pPr>
-            <a:lvl4pPr marL="1371600" indent="0">
-              <a:buNone/>
-              <a:defRPr sz="2000"/>
-            </a:lvl4pPr>
-            <a:lvl5pPr marL="1828800" indent="0">
-              <a:buNone/>
-              <a:defRPr sz="2000"/>
-            </a:lvl5pPr>
-            <a:lvl6pPr marL="2286000" indent="0">
-              <a:buNone/>
-              <a:defRPr sz="2000"/>
-            </a:lvl6pPr>
-            <a:lvl7pPr marL="2743200" indent="0">
-              <a:buNone/>
-              <a:defRPr sz="2000"/>
-            </a:lvl7pPr>
-            <a:lvl8pPr marL="3200400" indent="0">
-              <a:buNone/>
-              <a:defRPr sz="2000"/>
-            </a:lvl8pPr>
-            <a:lvl9pPr marL="3657600" indent="0">
-              <a:buNone/>
-              <a:defRPr sz="2000"/>
-            </a:lvl9pPr>
-          </a:lstStyle>
-          <a:p>
-            <a:r>
-              <a:rPr lang="en-US"/>
-              <a:t>Click icon to add picture</a:t>
-            </a:r>
-            <a:endParaRPr lang="en-US" dirty="0"/>
-          </a:p>
-        </p:txBody>
-      </p:sp>
-      <p:sp>
-        <p:nvSpPr>
-          <p:cNvPr id="4" name="Text Placeholder 3"/>
-          <p:cNvSpPr>
-            <a:spLocks noGrp="1"/>
-          </p:cNvSpPr>
-          <p:nvPr>
-            <p:ph type="body" sz="half" idx="2"/>
-          </p:nvPr>
-        </p:nvSpPr>
-        <p:spPr>
-          <a:xfrm>
-            <a:off x="685800" y="5516715"/>
-            <a:ext cx="10820400" cy="701969"/>
-          </a:xfrm>
-        </p:spPr>
-        <p:txBody>
-          <a:bodyPr/>
-          <a:lstStyle>
-            <a:lvl1pPr marL="0" indent="0" algn="l">
+            <a:lvl1pPr marL="0" indent="0" algn="ctr">
               <a:buNone/>
               <a:defRPr sz="1600"/>
             </a:lvl1pPr>
             <a:lvl2pPr marL="457200" indent="0">
               <a:buNone/>
-              <a:defRPr sz="1400"/>
+              <a:defRPr sz="1600"/>
             </a:lvl2pPr>
             <a:lvl3pPr marL="914400" indent="0">
               <a:buNone/>
-              <a:defRPr sz="1200"/>
+              <a:defRPr sz="1600"/>
             </a:lvl3pPr>
             <a:lvl4pPr marL="1371600" indent="0">
               <a:buNone/>
-              <a:defRPr sz="1000"/>
+              <a:defRPr sz="1600"/>
             </a:lvl4pPr>
             <a:lvl5pPr marL="1828800" indent="0">
               <a:buNone/>
-              <a:defRPr sz="1000"/>
+              <a:defRPr sz="1600"/>
             </a:lvl5pPr>
             <a:lvl6pPr marL="2286000" indent="0">
               <a:buNone/>
-              <a:defRPr sz="1000"/>
+              <a:defRPr sz="1600"/>
             </a:lvl6pPr>
             <a:lvl7pPr marL="2743200" indent="0">
               <a:buNone/>
-              <a:defRPr sz="1000"/>
+              <a:defRPr sz="1600"/>
             </a:lvl7pPr>
             <a:lvl8pPr marL="3200400" indent="0">
               <a:buNone/>
-              <a:defRPr sz="1000"/>
+              <a:defRPr sz="1600"/>
             </a:lvl8pPr>
             <a:lvl9pPr marL="3657600" indent="0">
               <a:buNone/>
+              <a:defRPr sz="1600"/>
+            </a:lvl9pPr>
+          </a:lstStyle>
+          <a:p>
+            <a:r>
+              <a:rPr lang="en-US"/>
+              <a:t>Click icon to add picture</a:t>
+            </a:r>
+            <a:endParaRPr lang="en-US" dirty="0"/>
+          </a:p>
+        </p:txBody>
+      </p:sp>
+      <p:sp>
+        <p:nvSpPr>
+          <p:cNvPr id="4" name="Text Placeholder 3"/>
+          <p:cNvSpPr>
+            <a:spLocks noGrp="1"/>
+          </p:cNvSpPr>
+          <p:nvPr>
+            <p:ph type="body" sz="half" idx="2"/>
+          </p:nvPr>
+        </p:nvSpPr>
+        <p:spPr>
+          <a:xfrm>
+            <a:off x="1484311" y="5299603"/>
+            <a:ext cx="10018711" cy="493712"/>
+          </a:xfrm>
+        </p:spPr>
+        <p:txBody>
+          <a:bodyPr>
+            <a:normAutofit/>
+          </a:bodyPr>
+          <a:lstStyle>
+            <a:lvl1pPr marL="0" indent="0" algn="ctr">
+              <a:buNone/>
+              <a:defRPr sz="1400"/>
+            </a:lvl1pPr>
+            <a:lvl2pPr marL="457200" indent="0">
+              <a:buNone/>
+              <a:defRPr sz="1200"/>
+            </a:lvl2pPr>
+            <a:lvl3pPr marL="914400" indent="0">
+              <a:buNone/>
               <a:defRPr sz="1000"/>
+            </a:lvl3pPr>
+            <a:lvl4pPr marL="1371600" indent="0">
+              <a:buNone/>
+              <a:defRPr sz="900"/>
+            </a:lvl4pPr>
+            <a:lvl5pPr marL="1828800" indent="0">
+              <a:buNone/>
+              <a:defRPr sz="900"/>
+            </a:lvl5pPr>
+            <a:lvl6pPr marL="2286000" indent="0">
+              <a:buNone/>
+              <a:defRPr sz="900"/>
+            </a:lvl6pPr>
+            <a:lvl7pPr marL="2743200" indent="0">
+              <a:buNone/>
+              <a:defRPr sz="900"/>
+            </a:lvl7pPr>
+            <a:lvl8pPr marL="3200400" indent="0">
+              <a:buNone/>
+              <a:defRPr sz="900"/>
+            </a:lvl8pPr>
+            <a:lvl9pPr marL="3657600" indent="0">
+              <a:buNone/>
+              <a:defRPr sz="900"/>
             </a:lvl9pPr>
           </a:lstStyle>
           <a:p>
@@ -607,18 +974,21 @@
     </p:spTree>
     <p:extLst>
       <p:ext uri="{BB962C8B-B14F-4D97-AF65-F5344CB8AC3E}">
-        <p14:creationId xmlns:p14="http://schemas.microsoft.com/office/powerpoint/2010/main" val="2073703017"/>
+        <p14:creationId xmlns:p14="http://schemas.microsoft.com/office/powerpoint/2010/main" val="2106845107"/>
       </p:ext>
     </p:extLst>
   </p:cSld>
   <p:clrMapOvr>
     <a:masterClrMapping/>
   </p:clrMapOvr>
+  <p:transition>
+    <p:fade/>
+  </p:transition>
 </p:sldLayout>
 </file>
 
 <file path=ppt/slideLayouts/slideLayout11.xml><?xml version="1.0" encoding="utf-8"?>
-<p:sldLayout xmlns:a="http://schemas.openxmlformats.org/drawingml/2006/main" xmlns:r="http://schemas.openxmlformats.org/officeDocument/2006/relationships" xmlns:p="http://schemas.openxmlformats.org/presentationml/2006/main" showMasterSp="0" preserve="1">
+<p:sldLayout xmlns:a="http://schemas.openxmlformats.org/drawingml/2006/main" xmlns:r="http://schemas.openxmlformats.org/officeDocument/2006/relationships" xmlns:p="http://schemas.openxmlformats.org/presentationml/2006/main" preserve="1">
   <p:cSld name="Title and Caption">
     <p:spTree>
       <p:nvGrpSpPr>
@@ -634,122 +1004,148 @@
           <a:chExt cx="0" cy="0"/>
         </a:xfrm>
       </p:grpSpPr>
-      <p:pic>
-        <p:nvPicPr>
-          <p:cNvPr id="8" name="Picture 7" descr="C0-HD-BTM.png"/>
-          <p:cNvPicPr>
-            <a:picLocks noChangeAspect="1"/>
-          </p:cNvPicPr>
-          <p:nvPr/>
-        </p:nvPicPr>
-        <p:blipFill>
-          <a:blip r:embed="rId2">
-            <a:extLst>
-              <a:ext uri="{28A0092B-C50C-407E-A947-70E740481C1C}">
-                <a14:useLocalDpi xmlns:a14="http://schemas.microsoft.com/office/drawing/2010/main" val="0"/>
-              </a:ext>
-            </a:extLst>
-          </a:blip>
-          <a:stretch>
-            <a:fillRect/>
-          </a:stretch>
-        </p:blipFill>
+      <p:sp>
+        <p:nvSpPr>
+          <p:cNvPr id="2" name="Title 1"/>
+          <p:cNvSpPr>
+            <a:spLocks noGrp="1"/>
+          </p:cNvSpPr>
+          <p:nvPr>
+            <p:ph type="title"/>
+          </p:nvPr>
+        </p:nvSpPr>
         <p:spPr>
           <a:xfrm>
-            <a:off x="0" y="4375150"/>
-            <a:ext cx="12192000" cy="2482850"/>
+            <a:off x="1484312" y="685800"/>
+            <a:ext cx="10018711" cy="3048000"/>
           </a:xfrm>
-          <a:prstGeom prst="rect">
-            <a:avLst/>
-          </a:prstGeom>
         </p:spPr>
-      </p:pic>
-      <p:sp>
-        <p:nvSpPr>
-          <p:cNvPr id="2" name="Title 1"/>
-          <p:cNvSpPr>
-            <a:spLocks noGrp="1"/>
-          </p:cNvSpPr>
-          <p:nvPr>
-            <p:ph type="title"/>
+        <p:txBody>
+          <a:bodyPr anchor="ctr">
+            <a:normAutofit/>
+          </a:bodyPr>
+          <a:lstStyle>
+            <a:lvl1pPr algn="ctr">
+              <a:defRPr sz="3200" b="0" cap="none"/>
+            </a:lvl1pPr>
+          </a:lstStyle>
+          <a:p>
+            <a:r>
+              <a:rPr lang="en-US"/>
+              <a:t>Click to edit Master title style</a:t>
+            </a:r>
+            <a:endParaRPr lang="en-US" dirty="0"/>
+          </a:p>
+        </p:txBody>
+      </p:sp>
+      <p:sp>
+        <p:nvSpPr>
+          <p:cNvPr id="3" name="Text Placeholder 2"/>
+          <p:cNvSpPr>
+            <a:spLocks noGrp="1"/>
+          </p:cNvSpPr>
+          <p:nvPr>
+            <p:ph type="body" idx="1"/>
           </p:nvPr>
         </p:nvSpPr>
         <p:spPr>
           <a:xfrm>
-            <a:off x="685800" y="753532"/>
-            <a:ext cx="10820400" cy="2802467"/>
+            <a:off x="1484312" y="4343400"/>
+            <a:ext cx="10018713" cy="1447800"/>
           </a:xfrm>
         </p:spPr>
         <p:txBody>
-          <a:bodyPr anchor="ctr"/>
+          <a:bodyPr anchor="ctr">
+            <a:normAutofit/>
+          </a:bodyPr>
           <a:lstStyle>
-            <a:lvl1pPr algn="l">
-              <a:defRPr sz="3200"/>
-            </a:lvl1pPr>
-          </a:lstStyle>
-          <a:p>
-            <a:r>
-              <a:rPr lang="en-US"/>
-              <a:t>Click to edit Master title style</a:t>
-            </a:r>
-            <a:endParaRPr lang="en-US" dirty="0"/>
-          </a:p>
-        </p:txBody>
-      </p:sp>
-      <p:sp>
-        <p:nvSpPr>
-          <p:cNvPr id="4" name="Text Placeholder 3"/>
-          <p:cNvSpPr>
-            <a:spLocks noGrp="1"/>
-          </p:cNvSpPr>
-          <p:nvPr>
-            <p:ph type="body" sz="half" idx="2"/>
-          </p:nvPr>
-        </p:nvSpPr>
-        <p:spPr>
-          <a:xfrm>
-            <a:off x="1024467" y="3649133"/>
-            <a:ext cx="10130516" cy="999067"/>
-          </a:xfrm>
-        </p:spPr>
-        <p:txBody>
-          <a:bodyPr anchor="ctr"/>
-          <a:lstStyle>
-            <a:lvl1pPr marL="0" indent="0">
-              <a:buNone/>
-              <a:defRPr sz="1600"/>
+            <a:lvl1pPr marL="0" indent="0" algn="ctr">
+              <a:buNone/>
+              <a:defRPr sz="2000">
+                <a:solidFill>
+                  <a:schemeClr val="tx1"/>
+                </a:solidFill>
+              </a:defRPr>
             </a:lvl1pPr>
             <a:lvl2pPr marL="457200" indent="0">
               <a:buNone/>
-              <a:defRPr sz="1400"/>
+              <a:defRPr sz="1800">
+                <a:solidFill>
+                  <a:schemeClr val="tx1">
+                    <a:tint val="75000"/>
+                  </a:schemeClr>
+                </a:solidFill>
+              </a:defRPr>
             </a:lvl2pPr>
             <a:lvl3pPr marL="914400" indent="0">
               <a:buNone/>
-              <a:defRPr sz="1200"/>
+              <a:defRPr sz="1600">
+                <a:solidFill>
+                  <a:schemeClr val="tx1">
+                    <a:tint val="75000"/>
+                  </a:schemeClr>
+                </a:solidFill>
+              </a:defRPr>
             </a:lvl3pPr>
             <a:lvl4pPr marL="1371600" indent="0">
               <a:buNone/>
-              <a:defRPr sz="1000"/>
+              <a:defRPr sz="1400">
+                <a:solidFill>
+                  <a:schemeClr val="tx1">
+                    <a:tint val="75000"/>
+                  </a:schemeClr>
+                </a:solidFill>
+              </a:defRPr>
             </a:lvl4pPr>
             <a:lvl5pPr marL="1828800" indent="0">
               <a:buNone/>
-              <a:defRPr sz="1000"/>
+              <a:defRPr sz="1400">
+                <a:solidFill>
+                  <a:schemeClr val="tx1">
+                    <a:tint val="75000"/>
+                  </a:schemeClr>
+                </a:solidFill>
+              </a:defRPr>
             </a:lvl5pPr>
             <a:lvl6pPr marL="2286000" indent="0">
               <a:buNone/>
-              <a:defRPr sz="1000"/>
+              <a:defRPr sz="1400">
+                <a:solidFill>
+                  <a:schemeClr val="tx1">
+                    <a:tint val="75000"/>
+                  </a:schemeClr>
+                </a:solidFill>
+              </a:defRPr>
             </a:lvl6pPr>
             <a:lvl7pPr marL="2743200" indent="0">
               <a:buNone/>
-              <a:defRPr sz="1000"/>
+              <a:defRPr sz="1400">
+                <a:solidFill>
+                  <a:schemeClr val="tx1">
+                    <a:tint val="75000"/>
+                  </a:schemeClr>
+                </a:solidFill>
+              </a:defRPr>
             </a:lvl7pPr>
             <a:lvl8pPr marL="3200400" indent="0">
               <a:buNone/>
-              <a:defRPr sz="1000"/>
+              <a:defRPr sz="1400">
+                <a:solidFill>
+                  <a:schemeClr val="tx1">
+                    <a:tint val="75000"/>
+                  </a:schemeClr>
+                </a:solidFill>
+              </a:defRPr>
             </a:lvl8pPr>
             <a:lvl9pPr marL="3657600" indent="0">
               <a:buNone/>
-              <a:defRPr sz="1000"/>
+              <a:defRPr sz="1400">
+                <a:solidFill>
+                  <a:schemeClr val="tx1">
+                    <a:tint val="75000"/>
+                  </a:schemeClr>
+                </a:solidFill>
+              </a:defRPr>
             </a:lvl9pPr>
           </a:lstStyle>
           <a:p>
@@ -763,7 +1159,7 @@
       </p:sp>
       <p:sp>
         <p:nvSpPr>
-          <p:cNvPr id="5" name="Date Placeholder 4"/>
+          <p:cNvPr id="4" name="Date Placeholder 3"/>
           <p:cNvSpPr>
             <a:spLocks noGrp="1"/>
           </p:cNvSpPr>
@@ -771,19 +1167,10 @@
             <p:ph type="dt" sz="half" idx="10"/>
           </p:nvPr>
         </p:nvSpPr>
-        <p:spPr>
-          <a:xfrm>
-            <a:off x="7814452" y="381000"/>
-            <a:ext cx="2910840" cy="365125"/>
-          </a:xfrm>
-        </p:spPr>
+        <p:spPr/>
         <p:txBody>
           <a:bodyPr/>
-          <a:lstStyle>
-            <a:lvl1pPr algn="r">
-              <a:defRPr/>
-            </a:lvl1pPr>
-          </a:lstStyle>
+          <a:lstStyle/>
           <a:p>
             <a:fld id="{462A01D3-2F6B-42A1-9A4B-0488DC6A75CB}" type="datetimeFigureOut">
               <a:rPr lang="en-US" smtClean="0"/>
@@ -795,7 +1182,7 @@
       </p:sp>
       <p:sp>
         <p:nvSpPr>
-          <p:cNvPr id="6" name="Footer Placeholder 5"/>
+          <p:cNvPr id="5" name="Footer Placeholder 4"/>
           <p:cNvSpPr>
             <a:spLocks noGrp="1"/>
           </p:cNvSpPr>
@@ -803,12 +1190,7 @@
             <p:ph type="ftr" sz="quarter" idx="11"/>
           </p:nvPr>
         </p:nvSpPr>
-        <p:spPr>
-          <a:xfrm>
-            <a:off x="685800" y="379941"/>
-            <a:ext cx="6991492" cy="365125"/>
-          </a:xfrm>
-        </p:spPr>
+        <p:spPr/>
         <p:txBody>
           <a:bodyPr/>
           <a:lstStyle/>
@@ -819,7 +1201,7 @@
       </p:sp>
       <p:sp>
         <p:nvSpPr>
-          <p:cNvPr id="7" name="Slide Number Placeholder 6"/>
+          <p:cNvPr id="6" name="Slide Number Placeholder 5"/>
           <p:cNvSpPr>
             <a:spLocks noGrp="1"/>
           </p:cNvSpPr>
@@ -827,12 +1209,7 @@
             <p:ph type="sldNum" sz="quarter" idx="12"/>
           </p:nvPr>
         </p:nvSpPr>
-        <p:spPr>
-          <a:xfrm>
-            <a:off x="10862452" y="381000"/>
-            <a:ext cx="643748" cy="365125"/>
-          </a:xfrm>
-        </p:spPr>
+        <p:spPr/>
         <p:txBody>
           <a:bodyPr/>
           <a:lstStyle/>
@@ -848,18 +1225,21 @@
     </p:spTree>
     <p:extLst>
       <p:ext uri="{BB962C8B-B14F-4D97-AF65-F5344CB8AC3E}">
-        <p14:creationId xmlns:p14="http://schemas.microsoft.com/office/powerpoint/2010/main" val="1346666261"/>
+        <p14:creationId xmlns:p14="http://schemas.microsoft.com/office/powerpoint/2010/main" val="317277125"/>
       </p:ext>
     </p:extLst>
   </p:cSld>
   <p:clrMapOvr>
     <a:masterClrMapping/>
   </p:clrMapOvr>
+  <p:transition>
+    <p:fade/>
+  </p:transition>
 </p:sldLayout>
 </file>
 
 <file path=ppt/slideLayouts/slideLayout12.xml><?xml version="1.0" encoding="utf-8"?>
-<p:sldLayout xmlns:a="http://schemas.openxmlformats.org/drawingml/2006/main" xmlns:r="http://schemas.openxmlformats.org/officeDocument/2006/relationships" xmlns:p="http://schemas.openxmlformats.org/presentationml/2006/main" showMasterSp="0" preserve="1">
+<p:sldLayout xmlns:a="http://schemas.openxmlformats.org/drawingml/2006/main" xmlns:r="http://schemas.openxmlformats.org/officeDocument/2006/relationships" xmlns:p="http://schemas.openxmlformats.org/presentationml/2006/main" preserve="1">
   <p:cSld name="Quote with Caption">
     <p:spTree>
       <p:nvGrpSpPr>
@@ -875,295 +1255,15 @@
           <a:chExt cx="0" cy="0"/>
         </a:xfrm>
       </p:grpSpPr>
-      <p:pic>
-        <p:nvPicPr>
-          <p:cNvPr id="13" name="Picture 12" descr="C0-HD-BTM.png"/>
-          <p:cNvPicPr>
-            <a:picLocks noChangeAspect="1"/>
-          </p:cNvPicPr>
+      <p:sp>
+        <p:nvSpPr>
+          <p:cNvPr id="14" name="TextBox 13"/>
+          <p:cNvSpPr txBox="1"/>
           <p:nvPr/>
-        </p:nvPicPr>
-        <p:blipFill>
-          <a:blip r:embed="rId2">
-            <a:extLst>
-              <a:ext uri="{28A0092B-C50C-407E-A947-70E740481C1C}">
-                <a14:useLocalDpi xmlns:a14="http://schemas.microsoft.com/office/drawing/2010/main" val="0"/>
-              </a:ext>
-            </a:extLst>
-          </a:blip>
-          <a:stretch>
-            <a:fillRect/>
-          </a:stretch>
-        </p:blipFill>
+        </p:nvSpPr>
         <p:spPr>
           <a:xfrm>
-            <a:off x="0" y="4375150"/>
-            <a:ext cx="12192000" cy="2482850"/>
-          </a:xfrm>
-          <a:prstGeom prst="rect">
-            <a:avLst/>
-          </a:prstGeom>
-        </p:spPr>
-      </p:pic>
-      <p:sp>
-        <p:nvSpPr>
-          <p:cNvPr id="2" name="Title 1"/>
-          <p:cNvSpPr>
-            <a:spLocks noGrp="1"/>
-          </p:cNvSpPr>
-          <p:nvPr>
-            <p:ph type="title"/>
-          </p:nvPr>
-        </p:nvSpPr>
-        <p:spPr>
-          <a:xfrm>
-            <a:off x="1024467" y="753533"/>
-            <a:ext cx="10151533" cy="2604495"/>
-          </a:xfrm>
-        </p:spPr>
-        <p:txBody>
-          <a:bodyPr anchor="ctr"/>
-          <a:lstStyle>
-            <a:lvl1pPr algn="l">
-              <a:defRPr sz="3200"/>
-            </a:lvl1pPr>
-          </a:lstStyle>
-          <a:p>
-            <a:r>
-              <a:rPr lang="en-US"/>
-              <a:t>Click to edit Master title style</a:t>
-            </a:r>
-            <a:endParaRPr lang="en-US" dirty="0"/>
-          </a:p>
-        </p:txBody>
-      </p:sp>
-      <p:sp>
-        <p:nvSpPr>
-          <p:cNvPr id="12" name="Text Placeholder 3"/>
-          <p:cNvSpPr>
-            <a:spLocks noGrp="1"/>
-          </p:cNvSpPr>
-          <p:nvPr>
-            <p:ph type="body" sz="half" idx="13"/>
-          </p:nvPr>
-        </p:nvSpPr>
-        <p:spPr>
-          <a:xfrm>
-            <a:off x="1303865" y="3365556"/>
-            <a:ext cx="9592736" cy="444443"/>
-          </a:xfrm>
-        </p:spPr>
-        <p:txBody>
-          <a:bodyPr anchor="t">
-            <a:normAutofit/>
-          </a:bodyPr>
-          <a:lstStyle>
-            <a:lvl1pPr marL="0" indent="0">
-              <a:buNone/>
-              <a:defRPr sz="1400"/>
-            </a:lvl1pPr>
-            <a:lvl2pPr marL="457200" indent="0">
-              <a:buNone/>
-              <a:defRPr sz="1400"/>
-            </a:lvl2pPr>
-            <a:lvl3pPr marL="914400" indent="0">
-              <a:buNone/>
-              <a:defRPr sz="1200"/>
-            </a:lvl3pPr>
-            <a:lvl4pPr marL="1371600" indent="0">
-              <a:buNone/>
-              <a:defRPr sz="1000"/>
-            </a:lvl4pPr>
-            <a:lvl5pPr marL="1828800" indent="0">
-              <a:buNone/>
-              <a:defRPr sz="1000"/>
-            </a:lvl5pPr>
-            <a:lvl6pPr marL="2286000" indent="0">
-              <a:buNone/>
-              <a:defRPr sz="1000"/>
-            </a:lvl6pPr>
-            <a:lvl7pPr marL="2743200" indent="0">
-              <a:buNone/>
-              <a:defRPr sz="1000"/>
-            </a:lvl7pPr>
-            <a:lvl8pPr marL="3200400" indent="0">
-              <a:buNone/>
-              <a:defRPr sz="1000"/>
-            </a:lvl8pPr>
-            <a:lvl9pPr marL="3657600" indent="0">
-              <a:buNone/>
-              <a:defRPr sz="1000"/>
-            </a:lvl9pPr>
-          </a:lstStyle>
-          <a:p>
-            <a:pPr lvl="0"/>
-            <a:r>
-              <a:rPr lang="en-US"/>
-              <a:t>Click to edit Master text styles</a:t>
-            </a:r>
-          </a:p>
-        </p:txBody>
-      </p:sp>
-      <p:sp>
-        <p:nvSpPr>
-          <p:cNvPr id="4" name="Text Placeholder 3"/>
-          <p:cNvSpPr>
-            <a:spLocks noGrp="1"/>
-          </p:cNvSpPr>
-          <p:nvPr>
-            <p:ph type="body" sz="half" idx="2"/>
-          </p:nvPr>
-        </p:nvSpPr>
-        <p:spPr>
-          <a:xfrm>
-            <a:off x="1024467" y="3959862"/>
-            <a:ext cx="10151533" cy="679871"/>
-          </a:xfrm>
-        </p:spPr>
-        <p:txBody>
-          <a:bodyPr anchor="ctr">
-            <a:normAutofit/>
-          </a:bodyPr>
-          <a:lstStyle>
-            <a:lvl1pPr marL="0" indent="0">
-              <a:buNone/>
-              <a:defRPr sz="1600"/>
-            </a:lvl1pPr>
-            <a:lvl2pPr marL="457200" indent="0">
-              <a:buNone/>
-              <a:defRPr sz="1400"/>
-            </a:lvl2pPr>
-            <a:lvl3pPr marL="914400" indent="0">
-              <a:buNone/>
-              <a:defRPr sz="1200"/>
-            </a:lvl3pPr>
-            <a:lvl4pPr marL="1371600" indent="0">
-              <a:buNone/>
-              <a:defRPr sz="1000"/>
-            </a:lvl4pPr>
-            <a:lvl5pPr marL="1828800" indent="0">
-              <a:buNone/>
-              <a:defRPr sz="1000"/>
-            </a:lvl5pPr>
-            <a:lvl6pPr marL="2286000" indent="0">
-              <a:buNone/>
-              <a:defRPr sz="1000"/>
-            </a:lvl6pPr>
-            <a:lvl7pPr marL="2743200" indent="0">
-              <a:buNone/>
-              <a:defRPr sz="1000"/>
-            </a:lvl7pPr>
-            <a:lvl8pPr marL="3200400" indent="0">
-              <a:buNone/>
-              <a:defRPr sz="1000"/>
-            </a:lvl8pPr>
-            <a:lvl9pPr marL="3657600" indent="0">
-              <a:buNone/>
-              <a:defRPr sz="1000"/>
-            </a:lvl9pPr>
-          </a:lstStyle>
-          <a:p>
-            <a:pPr lvl="0"/>
-            <a:r>
-              <a:rPr lang="en-US"/>
-              <a:t>Click to edit Master text styles</a:t>
-            </a:r>
-          </a:p>
-        </p:txBody>
-      </p:sp>
-      <p:sp>
-        <p:nvSpPr>
-          <p:cNvPr id="5" name="Date Placeholder 4"/>
-          <p:cNvSpPr>
-            <a:spLocks noGrp="1"/>
-          </p:cNvSpPr>
-          <p:nvPr>
-            <p:ph type="dt" sz="half" idx="10"/>
-          </p:nvPr>
-        </p:nvSpPr>
-        <p:spPr>
-          <a:xfrm>
-            <a:off x="7814452" y="381000"/>
-            <a:ext cx="2910840" cy="365125"/>
-          </a:xfrm>
-        </p:spPr>
-        <p:txBody>
-          <a:bodyPr/>
-          <a:lstStyle>
-            <a:lvl1pPr algn="r">
-              <a:defRPr/>
-            </a:lvl1pPr>
-          </a:lstStyle>
-          <a:p>
-            <a:fld id="{462A01D3-2F6B-42A1-9A4B-0488DC6A75CB}" type="datetimeFigureOut">
-              <a:rPr lang="en-US" smtClean="0"/>
-              <a:t>10/20/2025</a:t>
-            </a:fld>
-            <a:endParaRPr lang="en-US"/>
-          </a:p>
-        </p:txBody>
-      </p:sp>
-      <p:sp>
-        <p:nvSpPr>
-          <p:cNvPr id="6" name="Footer Placeholder 5"/>
-          <p:cNvSpPr>
-            <a:spLocks noGrp="1"/>
-          </p:cNvSpPr>
-          <p:nvPr>
-            <p:ph type="ftr" sz="quarter" idx="11"/>
-          </p:nvPr>
-        </p:nvSpPr>
-        <p:spPr>
-          <a:xfrm>
-            <a:off x="685800" y="379941"/>
-            <a:ext cx="6991492" cy="365125"/>
-          </a:xfrm>
-        </p:spPr>
-        <p:txBody>
-          <a:bodyPr/>
-          <a:lstStyle/>
-          <a:p>
-            <a:endParaRPr lang="en-US"/>
-          </a:p>
-        </p:txBody>
-      </p:sp>
-      <p:sp>
-        <p:nvSpPr>
-          <p:cNvPr id="7" name="Slide Number Placeholder 6"/>
-          <p:cNvSpPr>
-            <a:spLocks noGrp="1"/>
-          </p:cNvSpPr>
-          <p:nvPr>
-            <p:ph type="sldNum" sz="quarter" idx="12"/>
-          </p:nvPr>
-        </p:nvSpPr>
-        <p:spPr>
-          <a:xfrm>
-            <a:off x="10862452" y="381000"/>
-            <a:ext cx="643748" cy="365125"/>
-          </a:xfrm>
-        </p:spPr>
-        <p:txBody>
-          <a:bodyPr/>
-          <a:lstStyle/>
-          <a:p>
-            <a:fld id="{7F1A634C-8ACB-48CC-B9B6-DB35777C77F9}" type="slidenum">
-              <a:rPr lang="en-US" smtClean="0"/>
-              <a:t>‹#›</a:t>
-            </a:fld>
-            <a:endParaRPr lang="en-US"/>
-          </a:p>
-        </p:txBody>
-      </p:sp>
-      <p:sp>
-        <p:nvSpPr>
-          <p:cNvPr id="9" name="TextBox 8"/>
-          <p:cNvSpPr txBox="1"/>
-          <p:nvPr/>
-        </p:nvSpPr>
-        <p:spPr>
-          <a:xfrm>
-            <a:off x="476250" y="933450"/>
+            <a:off x="1598612" y="863023"/>
             <a:ext cx="609600" cy="584776"/>
           </a:xfrm>
           <a:prstGeom prst="rect">
@@ -1273,13 +1373,13 @@
       </p:sp>
       <p:sp>
         <p:nvSpPr>
-          <p:cNvPr id="10" name="TextBox 9"/>
+          <p:cNvPr id="15" name="TextBox 14"/>
           <p:cNvSpPr txBox="1"/>
           <p:nvPr/>
         </p:nvSpPr>
         <p:spPr>
           <a:xfrm>
-            <a:off x="10984230" y="2701290"/>
+            <a:off x="10893425" y="2819399"/>
             <a:ext cx="609600" cy="584776"/>
           </a:xfrm>
           <a:prstGeom prst="rect">
@@ -1387,21 +1487,302 @@
           </a:p>
         </p:txBody>
       </p:sp>
+      <p:sp>
+        <p:nvSpPr>
+          <p:cNvPr id="2" name="Title 1"/>
+          <p:cNvSpPr>
+            <a:spLocks noGrp="1"/>
+          </p:cNvSpPr>
+          <p:nvPr>
+            <p:ph type="title"/>
+          </p:nvPr>
+        </p:nvSpPr>
+        <p:spPr>
+          <a:xfrm>
+            <a:off x="2208212" y="685800"/>
+            <a:ext cx="8990012" cy="2743199"/>
+          </a:xfrm>
+        </p:spPr>
+        <p:txBody>
+          <a:bodyPr anchor="ctr">
+            <a:normAutofit/>
+          </a:bodyPr>
+          <a:lstStyle>
+            <a:lvl1pPr algn="ctr">
+              <a:defRPr sz="3200" b="0" cap="none">
+                <a:solidFill>
+                  <a:schemeClr val="tx1"/>
+                </a:solidFill>
+              </a:defRPr>
+            </a:lvl1pPr>
+          </a:lstStyle>
+          <a:p>
+            <a:r>
+              <a:rPr lang="en-US"/>
+              <a:t>Click to edit Master title style</a:t>
+            </a:r>
+            <a:endParaRPr lang="en-US" dirty="0"/>
+          </a:p>
+        </p:txBody>
+      </p:sp>
+      <p:sp>
+        <p:nvSpPr>
+          <p:cNvPr id="10" name="Text Placeholder 9"/>
+          <p:cNvSpPr>
+            <a:spLocks noGrp="1"/>
+          </p:cNvSpPr>
+          <p:nvPr>
+            <p:ph type="body" sz="quarter" idx="13"/>
+          </p:nvPr>
+        </p:nvSpPr>
+        <p:spPr>
+          <a:xfrm>
+            <a:off x="2436811" y="3428999"/>
+            <a:ext cx="8532815" cy="381000"/>
+          </a:xfrm>
+        </p:spPr>
+        <p:txBody>
+          <a:bodyPr anchor="ctr">
+            <a:normAutofit/>
+          </a:bodyPr>
+          <a:lstStyle>
+            <a:lvl1pPr marL="0" indent="0">
+              <a:buFontTx/>
+              <a:buNone/>
+              <a:defRPr sz="1800"/>
+            </a:lvl1pPr>
+            <a:lvl2pPr marL="457200" indent="0">
+              <a:buFontTx/>
+              <a:buNone/>
+              <a:defRPr/>
+            </a:lvl2pPr>
+            <a:lvl3pPr marL="914400" indent="0">
+              <a:buFontTx/>
+              <a:buNone/>
+              <a:defRPr/>
+            </a:lvl3pPr>
+            <a:lvl4pPr marL="1371600" indent="0">
+              <a:buFontTx/>
+              <a:buNone/>
+              <a:defRPr/>
+            </a:lvl4pPr>
+            <a:lvl5pPr marL="1828800" indent="0">
+              <a:buFontTx/>
+              <a:buNone/>
+              <a:defRPr/>
+            </a:lvl5pPr>
+          </a:lstStyle>
+          <a:p>
+            <a:pPr lvl="0"/>
+            <a:r>
+              <a:rPr lang="en-US"/>
+              <a:t>Click to edit Master text styles</a:t>
+            </a:r>
+          </a:p>
+        </p:txBody>
+      </p:sp>
+      <p:sp>
+        <p:nvSpPr>
+          <p:cNvPr id="3" name="Text Placeholder 2"/>
+          <p:cNvSpPr>
+            <a:spLocks noGrp="1"/>
+          </p:cNvSpPr>
+          <p:nvPr>
+            <p:ph type="body" idx="1"/>
+          </p:nvPr>
+        </p:nvSpPr>
+        <p:spPr>
+          <a:xfrm>
+            <a:off x="1484311" y="4343400"/>
+            <a:ext cx="10018711" cy="1447800"/>
+          </a:xfrm>
+        </p:spPr>
+        <p:txBody>
+          <a:bodyPr anchor="ctr">
+            <a:normAutofit/>
+          </a:bodyPr>
+          <a:lstStyle>
+            <a:lvl1pPr marL="0" indent="0" algn="ctr">
+              <a:buNone/>
+              <a:defRPr sz="2000">
+                <a:solidFill>
+                  <a:schemeClr val="tx1"/>
+                </a:solidFill>
+              </a:defRPr>
+            </a:lvl1pPr>
+            <a:lvl2pPr marL="457200" indent="0">
+              <a:buNone/>
+              <a:defRPr sz="1800">
+                <a:solidFill>
+                  <a:schemeClr val="tx1">
+                    <a:tint val="75000"/>
+                  </a:schemeClr>
+                </a:solidFill>
+              </a:defRPr>
+            </a:lvl2pPr>
+            <a:lvl3pPr marL="914400" indent="0">
+              <a:buNone/>
+              <a:defRPr sz="1600">
+                <a:solidFill>
+                  <a:schemeClr val="tx1">
+                    <a:tint val="75000"/>
+                  </a:schemeClr>
+                </a:solidFill>
+              </a:defRPr>
+            </a:lvl3pPr>
+            <a:lvl4pPr marL="1371600" indent="0">
+              <a:buNone/>
+              <a:defRPr sz="1400">
+                <a:solidFill>
+                  <a:schemeClr val="tx1">
+                    <a:tint val="75000"/>
+                  </a:schemeClr>
+                </a:solidFill>
+              </a:defRPr>
+            </a:lvl4pPr>
+            <a:lvl5pPr marL="1828800" indent="0">
+              <a:buNone/>
+              <a:defRPr sz="1400">
+                <a:solidFill>
+                  <a:schemeClr val="tx1">
+                    <a:tint val="75000"/>
+                  </a:schemeClr>
+                </a:solidFill>
+              </a:defRPr>
+            </a:lvl5pPr>
+            <a:lvl6pPr marL="2286000" indent="0">
+              <a:buNone/>
+              <a:defRPr sz="1400">
+                <a:solidFill>
+                  <a:schemeClr val="tx1">
+                    <a:tint val="75000"/>
+                  </a:schemeClr>
+                </a:solidFill>
+              </a:defRPr>
+            </a:lvl6pPr>
+            <a:lvl7pPr marL="2743200" indent="0">
+              <a:buNone/>
+              <a:defRPr sz="1400">
+                <a:solidFill>
+                  <a:schemeClr val="tx1">
+                    <a:tint val="75000"/>
+                  </a:schemeClr>
+                </a:solidFill>
+              </a:defRPr>
+            </a:lvl7pPr>
+            <a:lvl8pPr marL="3200400" indent="0">
+              <a:buNone/>
+              <a:defRPr sz="1400">
+                <a:solidFill>
+                  <a:schemeClr val="tx1">
+                    <a:tint val="75000"/>
+                  </a:schemeClr>
+                </a:solidFill>
+              </a:defRPr>
+            </a:lvl8pPr>
+            <a:lvl9pPr marL="3657600" indent="0">
+              <a:buNone/>
+              <a:defRPr sz="1400">
+                <a:solidFill>
+                  <a:schemeClr val="tx1">
+                    <a:tint val="75000"/>
+                  </a:schemeClr>
+                </a:solidFill>
+              </a:defRPr>
+            </a:lvl9pPr>
+          </a:lstStyle>
+          <a:p>
+            <a:pPr lvl="0"/>
+            <a:r>
+              <a:rPr lang="en-US"/>
+              <a:t>Click to edit Master text styles</a:t>
+            </a:r>
+          </a:p>
+        </p:txBody>
+      </p:sp>
+      <p:sp>
+        <p:nvSpPr>
+          <p:cNvPr id="4" name="Date Placeholder 3"/>
+          <p:cNvSpPr>
+            <a:spLocks noGrp="1"/>
+          </p:cNvSpPr>
+          <p:nvPr>
+            <p:ph type="dt" sz="half" idx="10"/>
+          </p:nvPr>
+        </p:nvSpPr>
+        <p:spPr/>
+        <p:txBody>
+          <a:bodyPr/>
+          <a:lstStyle/>
+          <a:p>
+            <a:fld id="{462A01D3-2F6B-42A1-9A4B-0488DC6A75CB}" type="datetimeFigureOut">
+              <a:rPr lang="en-US" smtClean="0"/>
+              <a:t>10/20/2025</a:t>
+            </a:fld>
+            <a:endParaRPr lang="en-US"/>
+          </a:p>
+        </p:txBody>
+      </p:sp>
+      <p:sp>
+        <p:nvSpPr>
+          <p:cNvPr id="5" name="Footer Placeholder 4"/>
+          <p:cNvSpPr>
+            <a:spLocks noGrp="1"/>
+          </p:cNvSpPr>
+          <p:nvPr>
+            <p:ph type="ftr" sz="quarter" idx="11"/>
+          </p:nvPr>
+        </p:nvSpPr>
+        <p:spPr/>
+        <p:txBody>
+          <a:bodyPr/>
+          <a:lstStyle/>
+          <a:p>
+            <a:endParaRPr lang="en-US"/>
+          </a:p>
+        </p:txBody>
+      </p:sp>
+      <p:sp>
+        <p:nvSpPr>
+          <p:cNvPr id="6" name="Slide Number Placeholder 5"/>
+          <p:cNvSpPr>
+            <a:spLocks noGrp="1"/>
+          </p:cNvSpPr>
+          <p:nvPr>
+            <p:ph type="sldNum" sz="quarter" idx="12"/>
+          </p:nvPr>
+        </p:nvSpPr>
+        <p:spPr/>
+        <p:txBody>
+          <a:bodyPr/>
+          <a:lstStyle/>
+          <a:p>
+            <a:fld id="{7F1A634C-8ACB-48CC-B9B6-DB35777C77F9}" type="slidenum">
+              <a:rPr lang="en-US" smtClean="0"/>
+              <a:t>‹#›</a:t>
+            </a:fld>
+            <a:endParaRPr lang="en-US"/>
+          </a:p>
+        </p:txBody>
+      </p:sp>
     </p:spTree>
     <p:extLst>
       <p:ext uri="{BB962C8B-B14F-4D97-AF65-F5344CB8AC3E}">
-        <p14:creationId xmlns:p14="http://schemas.microsoft.com/office/powerpoint/2010/main" val="1805868442"/>
+        <p14:creationId xmlns:p14="http://schemas.microsoft.com/office/powerpoint/2010/main" val="4028396141"/>
       </p:ext>
     </p:extLst>
   </p:cSld>
   <p:clrMapOvr>
     <a:masterClrMapping/>
   </p:clrMapOvr>
+  <p:transition>
+    <p:fade/>
+  </p:transition>
 </p:sldLayout>
 </file>
 
 <file path=ppt/slideLayouts/slideLayout13.xml><?xml version="1.0" encoding="utf-8"?>
-<p:sldLayout xmlns:a="http://schemas.openxmlformats.org/drawingml/2006/main" xmlns:r="http://schemas.openxmlformats.org/officeDocument/2006/relationships" xmlns:p="http://schemas.openxmlformats.org/presentationml/2006/main" showMasterSp="0" preserve="1">
+<p:sldLayout xmlns:a="http://schemas.openxmlformats.org/drawingml/2006/main" xmlns:r="http://schemas.openxmlformats.org/officeDocument/2006/relationships" xmlns:p="http://schemas.openxmlformats.org/presentationml/2006/main" preserve="1">
   <p:cSld name="Name Card">
     <p:spTree>
       <p:nvGrpSpPr>
@@ -1417,122 +1798,148 @@
           <a:chExt cx="0" cy="0"/>
         </a:xfrm>
       </p:grpSpPr>
-      <p:pic>
-        <p:nvPicPr>
-          <p:cNvPr id="9" name="Picture 8" descr="C0-HD-BTM.png"/>
-          <p:cNvPicPr>
-            <a:picLocks noChangeAspect="1"/>
-          </p:cNvPicPr>
-          <p:nvPr/>
-        </p:nvPicPr>
-        <p:blipFill>
-          <a:blip r:embed="rId2">
-            <a:extLst>
-              <a:ext uri="{28A0092B-C50C-407E-A947-70E740481C1C}">
-                <a14:useLocalDpi xmlns:a14="http://schemas.microsoft.com/office/drawing/2010/main" val="0"/>
-              </a:ext>
-            </a:extLst>
-          </a:blip>
-          <a:stretch>
-            <a:fillRect/>
-          </a:stretch>
-        </p:blipFill>
+      <p:sp>
+        <p:nvSpPr>
+          <p:cNvPr id="2" name="Title 1"/>
+          <p:cNvSpPr>
+            <a:spLocks noGrp="1"/>
+          </p:cNvSpPr>
+          <p:nvPr>
+            <p:ph type="title"/>
+          </p:nvPr>
+        </p:nvSpPr>
         <p:spPr>
           <a:xfrm>
-            <a:off x="0" y="4375150"/>
-            <a:ext cx="12192000" cy="2482850"/>
+            <a:off x="1484313" y="3308581"/>
+            <a:ext cx="10018709" cy="1468800"/>
           </a:xfrm>
-          <a:prstGeom prst="rect">
-            <a:avLst/>
-          </a:prstGeom>
         </p:spPr>
-      </p:pic>
-      <p:sp>
-        <p:nvSpPr>
-          <p:cNvPr id="2" name="Title 1"/>
-          <p:cNvSpPr>
-            <a:spLocks noGrp="1"/>
-          </p:cNvSpPr>
-          <p:nvPr>
-            <p:ph type="title"/>
+        <p:txBody>
+          <a:bodyPr anchor="b">
+            <a:normAutofit/>
+          </a:bodyPr>
+          <a:lstStyle>
+            <a:lvl1pPr algn="r">
+              <a:defRPr sz="3200" b="0" cap="none"/>
+            </a:lvl1pPr>
+          </a:lstStyle>
+          <a:p>
+            <a:r>
+              <a:rPr lang="en-US"/>
+              <a:t>Click to edit Master title style</a:t>
+            </a:r>
+            <a:endParaRPr lang="en-US" dirty="0"/>
+          </a:p>
+        </p:txBody>
+      </p:sp>
+      <p:sp>
+        <p:nvSpPr>
+          <p:cNvPr id="3" name="Text Placeholder 2"/>
+          <p:cNvSpPr>
+            <a:spLocks noGrp="1"/>
+          </p:cNvSpPr>
+          <p:nvPr>
+            <p:ph type="body" idx="1"/>
           </p:nvPr>
         </p:nvSpPr>
         <p:spPr>
           <a:xfrm>
-            <a:off x="1024495" y="1124701"/>
-            <a:ext cx="10146186" cy="2511835"/>
+            <a:off x="1484312" y="4777381"/>
+            <a:ext cx="10018710" cy="860400"/>
           </a:xfrm>
         </p:spPr>
         <p:txBody>
-          <a:bodyPr anchor="b"/>
+          <a:bodyPr anchor="t">
+            <a:normAutofit/>
+          </a:bodyPr>
           <a:lstStyle>
-            <a:lvl1pPr algn="l">
-              <a:defRPr sz="3200"/>
-            </a:lvl1pPr>
-          </a:lstStyle>
-          <a:p>
-            <a:r>
-              <a:rPr lang="en-US"/>
-              <a:t>Click to edit Master title style</a:t>
-            </a:r>
-            <a:endParaRPr lang="en-US" dirty="0"/>
-          </a:p>
-        </p:txBody>
-      </p:sp>
-      <p:sp>
-        <p:nvSpPr>
-          <p:cNvPr id="4" name="Text Placeholder 3"/>
-          <p:cNvSpPr>
-            <a:spLocks noGrp="1"/>
-          </p:cNvSpPr>
-          <p:nvPr>
-            <p:ph type="body" sz="half" idx="2"/>
-          </p:nvPr>
-        </p:nvSpPr>
-        <p:spPr>
-          <a:xfrm>
-            <a:off x="1024467" y="3648315"/>
-            <a:ext cx="10144654" cy="999885"/>
-          </a:xfrm>
-        </p:spPr>
-        <p:txBody>
-          <a:bodyPr anchor="t"/>
-          <a:lstStyle>
-            <a:lvl1pPr marL="0" indent="0">
-              <a:buNone/>
-              <a:defRPr sz="1600"/>
+            <a:lvl1pPr marL="0" indent="0" algn="r">
+              <a:buNone/>
+              <a:defRPr sz="2000">
+                <a:solidFill>
+                  <a:schemeClr val="tx1"/>
+                </a:solidFill>
+              </a:defRPr>
             </a:lvl1pPr>
             <a:lvl2pPr marL="457200" indent="0">
               <a:buNone/>
-              <a:defRPr sz="1400"/>
+              <a:defRPr sz="1800">
+                <a:solidFill>
+                  <a:schemeClr val="tx1">
+                    <a:tint val="75000"/>
+                  </a:schemeClr>
+                </a:solidFill>
+              </a:defRPr>
             </a:lvl2pPr>
             <a:lvl3pPr marL="914400" indent="0">
               <a:buNone/>
-              <a:defRPr sz="1200"/>
+              <a:defRPr sz="1600">
+                <a:solidFill>
+                  <a:schemeClr val="tx1">
+                    <a:tint val="75000"/>
+                  </a:schemeClr>
+                </a:solidFill>
+              </a:defRPr>
             </a:lvl3pPr>
             <a:lvl4pPr marL="1371600" indent="0">
               <a:buNone/>
-              <a:defRPr sz="1000"/>
+              <a:defRPr sz="1400">
+                <a:solidFill>
+                  <a:schemeClr val="tx1">
+                    <a:tint val="75000"/>
+                  </a:schemeClr>
+                </a:solidFill>
+              </a:defRPr>
             </a:lvl4pPr>
             <a:lvl5pPr marL="1828800" indent="0">
               <a:buNone/>
-              <a:defRPr sz="1000"/>
+              <a:defRPr sz="1400">
+                <a:solidFill>
+                  <a:schemeClr val="tx1">
+                    <a:tint val="75000"/>
+                  </a:schemeClr>
+                </a:solidFill>
+              </a:defRPr>
             </a:lvl5pPr>
             <a:lvl6pPr marL="2286000" indent="0">
               <a:buNone/>
-              <a:defRPr sz="1000"/>
+              <a:defRPr sz="1400">
+                <a:solidFill>
+                  <a:schemeClr val="tx1">
+                    <a:tint val="75000"/>
+                  </a:schemeClr>
+                </a:solidFill>
+              </a:defRPr>
             </a:lvl6pPr>
             <a:lvl7pPr marL="2743200" indent="0">
               <a:buNone/>
-              <a:defRPr sz="1000"/>
+              <a:defRPr sz="1400">
+                <a:solidFill>
+                  <a:schemeClr val="tx1">
+                    <a:tint val="75000"/>
+                  </a:schemeClr>
+                </a:solidFill>
+              </a:defRPr>
             </a:lvl7pPr>
             <a:lvl8pPr marL="3200400" indent="0">
               <a:buNone/>
-              <a:defRPr sz="1000"/>
+              <a:defRPr sz="1400">
+                <a:solidFill>
+                  <a:schemeClr val="tx1">
+                    <a:tint val="75000"/>
+                  </a:schemeClr>
+                </a:solidFill>
+              </a:defRPr>
             </a:lvl8pPr>
             <a:lvl9pPr marL="3657600" indent="0">
               <a:buNone/>
-              <a:defRPr sz="1000"/>
+              <a:defRPr sz="1400">
+                <a:solidFill>
+                  <a:schemeClr val="tx1">
+                    <a:tint val="75000"/>
+                  </a:schemeClr>
+                </a:solidFill>
+              </a:defRPr>
             </a:lvl9pPr>
           </a:lstStyle>
           <a:p>
@@ -1546,7 +1953,7 @@
       </p:sp>
       <p:sp>
         <p:nvSpPr>
-          <p:cNvPr id="5" name="Date Placeholder 4"/>
+          <p:cNvPr id="4" name="Date Placeholder 3"/>
           <p:cNvSpPr>
             <a:spLocks noGrp="1"/>
           </p:cNvSpPr>
@@ -1554,19 +1961,10 @@
             <p:ph type="dt" sz="half" idx="10"/>
           </p:nvPr>
         </p:nvSpPr>
-        <p:spPr>
-          <a:xfrm>
-            <a:off x="7814452" y="378883"/>
-            <a:ext cx="2910840" cy="365125"/>
-          </a:xfrm>
-        </p:spPr>
+        <p:spPr/>
         <p:txBody>
           <a:bodyPr/>
-          <a:lstStyle>
-            <a:lvl1pPr algn="r">
-              <a:defRPr/>
-            </a:lvl1pPr>
-          </a:lstStyle>
+          <a:lstStyle/>
           <a:p>
             <a:fld id="{462A01D3-2F6B-42A1-9A4B-0488DC6A75CB}" type="datetimeFigureOut">
               <a:rPr lang="en-US" smtClean="0"/>
@@ -1578,7 +1976,7 @@
       </p:sp>
       <p:sp>
         <p:nvSpPr>
-          <p:cNvPr id="6" name="Footer Placeholder 5"/>
+          <p:cNvPr id="5" name="Footer Placeholder 4"/>
           <p:cNvSpPr>
             <a:spLocks noGrp="1"/>
           </p:cNvSpPr>
@@ -1586,12 +1984,7 @@
             <p:ph type="ftr" sz="quarter" idx="11"/>
           </p:nvPr>
         </p:nvSpPr>
-        <p:spPr>
-          <a:xfrm>
-            <a:off x="685800" y="378883"/>
-            <a:ext cx="6991492" cy="365125"/>
-          </a:xfrm>
-        </p:spPr>
+        <p:spPr/>
         <p:txBody>
           <a:bodyPr/>
           <a:lstStyle/>
@@ -1602,7 +1995,7 @@
       </p:sp>
       <p:sp>
         <p:nvSpPr>
-          <p:cNvPr id="7" name="Slide Number Placeholder 6"/>
+          <p:cNvPr id="6" name="Slide Number Placeholder 5"/>
           <p:cNvSpPr>
             <a:spLocks noGrp="1"/>
           </p:cNvSpPr>
@@ -1610,12 +2003,7 @@
             <p:ph type="sldNum" sz="quarter" idx="12"/>
           </p:nvPr>
         </p:nvSpPr>
-        <p:spPr>
-          <a:xfrm>
-            <a:off x="10862452" y="381000"/>
-            <a:ext cx="643748" cy="365125"/>
-          </a:xfrm>
-        </p:spPr>
+        <p:spPr/>
         <p:txBody>
           <a:bodyPr/>
           <a:lstStyle/>
@@ -1631,19 +2019,22 @@
     </p:spTree>
     <p:extLst>
       <p:ext uri="{BB962C8B-B14F-4D97-AF65-F5344CB8AC3E}">
-        <p14:creationId xmlns:p14="http://schemas.microsoft.com/office/powerpoint/2010/main" val="1736346955"/>
+        <p14:creationId xmlns:p14="http://schemas.microsoft.com/office/powerpoint/2010/main" val="2559816697"/>
       </p:ext>
     </p:extLst>
   </p:cSld>
   <p:clrMapOvr>
     <a:masterClrMapping/>
   </p:clrMapOvr>
+  <p:transition>
+    <p:fade/>
+  </p:transition>
 </p:sldLayout>
 </file>
 
 <file path=ppt/slideLayouts/slideLayout14.xml><?xml version="1.0" encoding="utf-8"?>
 <p:sldLayout xmlns:a="http://schemas.openxmlformats.org/drawingml/2006/main" xmlns:r="http://schemas.openxmlformats.org/officeDocument/2006/relationships" xmlns:p="http://schemas.openxmlformats.org/presentationml/2006/main" preserve="1">
-  <p:cSld name="3 Column">
+  <p:cSld name="Quote Name Card">
     <p:spTree>
       <p:nvGrpSpPr>
         <p:cNvPr id="1" name=""/>
@@ -1660,97 +2051,316 @@
       </p:grpSpPr>
       <p:sp>
         <p:nvSpPr>
-          <p:cNvPr id="15" name="Title 1"/>
-          <p:cNvSpPr>
-            <a:spLocks noGrp="1"/>
-          </p:cNvSpPr>
-          <p:nvPr>
-            <p:ph type="title"/>
-          </p:nvPr>
+          <p:cNvPr id="14" name="TextBox 13"/>
+          <p:cNvSpPr txBox="1"/>
+          <p:nvPr/>
         </p:nvSpPr>
         <p:spPr>
           <a:xfrm>
-            <a:off x="2895600" y="761999"/>
-            <a:ext cx="8610599" cy="1303867"/>
+            <a:off x="1598612" y="863023"/>
+            <a:ext cx="609600" cy="584776"/>
           </a:xfrm>
+          <a:prstGeom prst="rect">
+            <a:avLst/>
+          </a:prstGeom>
         </p:spPr>
         <p:txBody>
-          <a:bodyPr/>
-          <a:lstStyle/>
-          <a:p>
-            <a:r>
-              <a:rPr lang="en-US"/>
-              <a:t>Click to edit Master title style</a:t>
-            </a:r>
-            <a:endParaRPr lang="en-US" dirty="0"/>
-          </a:p>
-        </p:txBody>
-      </p:sp>
-      <p:sp>
-        <p:nvSpPr>
-          <p:cNvPr id="7" name="Text Placeholder 2"/>
-          <p:cNvSpPr>
-            <a:spLocks noGrp="1"/>
-          </p:cNvSpPr>
-          <p:nvPr>
-            <p:ph type="body" idx="1"/>
-          </p:nvPr>
-        </p:nvSpPr>
-        <p:spPr>
-          <a:xfrm>
-            <a:off x="685800" y="2202080"/>
-            <a:ext cx="3456432" cy="617320"/>
-          </a:xfrm>
-        </p:spPr>
-        <p:txBody>
-          <a:bodyPr anchor="b">
+          <a:bodyPr vert="horz" lIns="91440" tIns="45720" rIns="91440" bIns="45720" rtlCol="0" anchor="ctr">
             <a:noAutofit/>
           </a:bodyPr>
           <a:lstStyle>
-            <a:lvl1pPr marL="0" indent="0">
-              <a:buNone/>
-              <a:defRPr sz="2400" b="0">
-                <a:solidFill>
-                  <a:schemeClr val="tx1"/>
-                </a:solidFill>
+            <a:lvl1pPr>
+              <a:spcBef>
+                <a:spcPct val="0"/>
+              </a:spcBef>
+              <a:buNone/>
+              <a:defRPr sz="3200" b="0" cap="all">
+                <a:ln w="3175" cmpd="sng">
+                  <a:noFill/>
+                </a:ln>
+                <a:effectLst>
+                  <a:glow rad="38100">
+                    <a:schemeClr val="bg1">
+                      <a:lumMod val="65000"/>
+                      <a:lumOff val="35000"/>
+                      <a:alpha val="40000"/>
+                    </a:schemeClr>
+                  </a:glow>
+                  <a:outerShdw blurRad="28575" dist="38100" dir="14040000" algn="tl" rotWithShape="0">
+                    <a:srgbClr val="000000">
+                      <a:alpha val="25000"/>
+                    </a:srgbClr>
+                  </a:outerShdw>
+                </a:effectLst>
               </a:defRPr>
             </a:lvl1pPr>
-            <a:lvl2pPr marL="457200" indent="0">
-              <a:buNone/>
-              <a:defRPr sz="2000" b="1"/>
+            <a:lvl2pPr>
+              <a:defRPr>
+                <a:solidFill>
+                  <a:schemeClr val="tx2"/>
+                </a:solidFill>
+              </a:defRPr>
             </a:lvl2pPr>
-            <a:lvl3pPr marL="914400" indent="0">
-              <a:buNone/>
-              <a:defRPr sz="1800" b="1"/>
+            <a:lvl3pPr>
+              <a:defRPr>
+                <a:solidFill>
+                  <a:schemeClr val="tx2"/>
+                </a:solidFill>
+              </a:defRPr>
             </a:lvl3pPr>
-            <a:lvl4pPr marL="1371600" indent="0">
-              <a:buNone/>
-              <a:defRPr sz="1600" b="1"/>
+            <a:lvl4pPr>
+              <a:defRPr>
+                <a:solidFill>
+                  <a:schemeClr val="tx2"/>
+                </a:solidFill>
+              </a:defRPr>
             </a:lvl4pPr>
-            <a:lvl5pPr marL="1828800" indent="0">
-              <a:buNone/>
-              <a:defRPr sz="1600" b="1"/>
+            <a:lvl5pPr>
+              <a:defRPr>
+                <a:solidFill>
+                  <a:schemeClr val="tx2"/>
+                </a:solidFill>
+              </a:defRPr>
             </a:lvl5pPr>
-            <a:lvl6pPr marL="2286000" indent="0">
-              <a:buNone/>
-              <a:defRPr sz="1600" b="1"/>
+            <a:lvl6pPr>
+              <a:defRPr>
+                <a:solidFill>
+                  <a:schemeClr val="tx2"/>
+                </a:solidFill>
+              </a:defRPr>
             </a:lvl6pPr>
-            <a:lvl7pPr marL="2743200" indent="0">
-              <a:buNone/>
-              <a:defRPr sz="1600" b="1"/>
+            <a:lvl7pPr>
+              <a:defRPr>
+                <a:solidFill>
+                  <a:schemeClr val="tx2"/>
+                </a:solidFill>
+              </a:defRPr>
             </a:lvl7pPr>
-            <a:lvl8pPr marL="3200400" indent="0">
-              <a:buNone/>
-              <a:defRPr sz="1600" b="1"/>
+            <a:lvl8pPr>
+              <a:defRPr>
+                <a:solidFill>
+                  <a:schemeClr val="tx2"/>
+                </a:solidFill>
+              </a:defRPr>
             </a:lvl8pPr>
-            <a:lvl9pPr marL="3657600" indent="0">
-              <a:buNone/>
-              <a:defRPr sz="1600" b="1"/>
+            <a:lvl9pPr>
+              <a:defRPr>
+                <a:solidFill>
+                  <a:schemeClr val="tx2"/>
+                </a:solidFill>
+              </a:defRPr>
             </a:lvl9pPr>
           </a:lstStyle>
           <a:p>
             <a:pPr lvl="0"/>
             <a:r>
+              <a:rPr lang="en-US" sz="8000" dirty="0">
+                <a:solidFill>
+                  <a:schemeClr val="tx1"/>
+                </a:solidFill>
+                <a:effectLst/>
+              </a:rPr>
+              <a:t>“</a:t>
+            </a:r>
+          </a:p>
+        </p:txBody>
+      </p:sp>
+      <p:sp>
+        <p:nvSpPr>
+          <p:cNvPr id="15" name="TextBox 14"/>
+          <p:cNvSpPr txBox="1"/>
+          <p:nvPr/>
+        </p:nvSpPr>
+        <p:spPr>
+          <a:xfrm>
+            <a:off x="10893425" y="2819399"/>
+            <a:ext cx="609600" cy="584776"/>
+          </a:xfrm>
+          <a:prstGeom prst="rect">
+            <a:avLst/>
+          </a:prstGeom>
+        </p:spPr>
+        <p:txBody>
+          <a:bodyPr vert="horz" lIns="91440" tIns="45720" rIns="91440" bIns="45720" rtlCol="0" anchor="ctr">
+            <a:noAutofit/>
+          </a:bodyPr>
+          <a:lstStyle>
+            <a:lvl1pPr>
+              <a:spcBef>
+                <a:spcPct val="0"/>
+              </a:spcBef>
+              <a:buNone/>
+              <a:defRPr sz="3200" b="0" cap="all">
+                <a:ln w="3175" cmpd="sng">
+                  <a:noFill/>
+                </a:ln>
+                <a:effectLst>
+                  <a:glow rad="38100">
+                    <a:schemeClr val="bg1">
+                      <a:lumMod val="65000"/>
+                      <a:lumOff val="35000"/>
+                      <a:alpha val="40000"/>
+                    </a:schemeClr>
+                  </a:glow>
+                  <a:outerShdw blurRad="28575" dist="38100" dir="14040000" algn="tl" rotWithShape="0">
+                    <a:srgbClr val="000000">
+                      <a:alpha val="25000"/>
+                    </a:srgbClr>
+                  </a:outerShdw>
+                </a:effectLst>
+              </a:defRPr>
+            </a:lvl1pPr>
+            <a:lvl2pPr>
+              <a:defRPr>
+                <a:solidFill>
+                  <a:schemeClr val="tx2"/>
+                </a:solidFill>
+              </a:defRPr>
+            </a:lvl2pPr>
+            <a:lvl3pPr>
+              <a:defRPr>
+                <a:solidFill>
+                  <a:schemeClr val="tx2"/>
+                </a:solidFill>
+              </a:defRPr>
+            </a:lvl3pPr>
+            <a:lvl4pPr>
+              <a:defRPr>
+                <a:solidFill>
+                  <a:schemeClr val="tx2"/>
+                </a:solidFill>
+              </a:defRPr>
+            </a:lvl4pPr>
+            <a:lvl5pPr>
+              <a:defRPr>
+                <a:solidFill>
+                  <a:schemeClr val="tx2"/>
+                </a:solidFill>
+              </a:defRPr>
+            </a:lvl5pPr>
+            <a:lvl6pPr>
+              <a:defRPr>
+                <a:solidFill>
+                  <a:schemeClr val="tx2"/>
+                </a:solidFill>
+              </a:defRPr>
+            </a:lvl6pPr>
+            <a:lvl7pPr>
+              <a:defRPr>
+                <a:solidFill>
+                  <a:schemeClr val="tx2"/>
+                </a:solidFill>
+              </a:defRPr>
+            </a:lvl7pPr>
+            <a:lvl8pPr>
+              <a:defRPr>
+                <a:solidFill>
+                  <a:schemeClr val="tx2"/>
+                </a:solidFill>
+              </a:defRPr>
+            </a:lvl8pPr>
+            <a:lvl9pPr>
+              <a:defRPr>
+                <a:solidFill>
+                  <a:schemeClr val="tx2"/>
+                </a:solidFill>
+              </a:defRPr>
+            </a:lvl9pPr>
+          </a:lstStyle>
+          <a:p>
+            <a:pPr lvl="0" algn="r"/>
+            <a:r>
+              <a:rPr lang="en-US" sz="8000" dirty="0">
+                <a:solidFill>
+                  <a:schemeClr val="tx1"/>
+                </a:solidFill>
+                <a:effectLst/>
+              </a:rPr>
+              <a:t>”</a:t>
+            </a:r>
+          </a:p>
+        </p:txBody>
+      </p:sp>
+      <p:sp>
+        <p:nvSpPr>
+          <p:cNvPr id="2" name="Title 1"/>
+          <p:cNvSpPr>
+            <a:spLocks noGrp="1"/>
+          </p:cNvSpPr>
+          <p:nvPr>
+            <p:ph type="title"/>
+          </p:nvPr>
+        </p:nvSpPr>
+        <p:spPr>
+          <a:xfrm>
+            <a:off x="2208212" y="685800"/>
+            <a:ext cx="8990012" cy="2743199"/>
+          </a:xfrm>
+        </p:spPr>
+        <p:txBody>
+          <a:bodyPr anchor="ctr">
+            <a:normAutofit/>
+          </a:bodyPr>
+          <a:lstStyle>
+            <a:lvl1pPr algn="ctr">
+              <a:defRPr sz="3200" b="0" cap="none">
+                <a:solidFill>
+                  <a:schemeClr val="tx1"/>
+                </a:solidFill>
+              </a:defRPr>
+            </a:lvl1pPr>
+          </a:lstStyle>
+          <a:p>
+            <a:r>
+              <a:rPr lang="en-US"/>
+              <a:t>Click to edit Master title style</a:t>
+            </a:r>
+            <a:endParaRPr lang="en-US" dirty="0"/>
+          </a:p>
+        </p:txBody>
+      </p:sp>
+      <p:sp>
+        <p:nvSpPr>
+          <p:cNvPr id="10" name="Text Placeholder 9"/>
+          <p:cNvSpPr>
+            <a:spLocks noGrp="1"/>
+          </p:cNvSpPr>
+          <p:nvPr>
+            <p:ph type="body" sz="quarter" idx="13"/>
+          </p:nvPr>
+        </p:nvSpPr>
+        <p:spPr>
+          <a:xfrm>
+            <a:off x="1484313" y="3886200"/>
+            <a:ext cx="10018710" cy="889000"/>
+          </a:xfrm>
+        </p:spPr>
+        <p:txBody>
+          <a:bodyPr vert="horz" lIns="91440" tIns="45720" rIns="91440" bIns="45720" rtlCol="0" anchor="b">
+            <a:normAutofit/>
+          </a:bodyPr>
+          <a:lstStyle>
+            <a:lvl1pPr algn="r">
+              <a:buNone/>
+              <a:defRPr lang="en-US" sz="2400" b="0" cap="none" dirty="0">
+                <a:ln w="3175" cmpd="sng">
+                  <a:noFill/>
+                </a:ln>
+                <a:solidFill>
+                  <a:schemeClr val="tx1"/>
+                </a:solidFill>
+                <a:effectLst/>
+              </a:defRPr>
+            </a:lvl1pPr>
+          </a:lstStyle>
+          <a:p>
+            <a:pPr marL="0" lvl="0">
+              <a:spcBef>
+                <a:spcPct val="0"/>
+              </a:spcBef>
+              <a:buNone/>
+            </a:pPr>
+            <a:r>
               <a:rPr lang="en-US"/>
               <a:t>Click to edit Master text styles</a:t>
             </a:r>
@@ -1759,18 +2369,18 @@
       </p:sp>
       <p:sp>
         <p:nvSpPr>
-          <p:cNvPr id="8" name="Text Placeholder 3"/>
-          <p:cNvSpPr>
-            <a:spLocks noGrp="1"/>
-          </p:cNvSpPr>
-          <p:nvPr>
-            <p:ph type="body" sz="half" idx="15"/>
+          <p:cNvPr id="3" name="Text Placeholder 2"/>
+          <p:cNvSpPr>
+            <a:spLocks noGrp="1"/>
+          </p:cNvSpPr>
+          <p:nvPr>
+            <p:ph type="body" idx="1"/>
           </p:nvPr>
         </p:nvSpPr>
         <p:spPr>
           <a:xfrm>
-            <a:off x="685799" y="2904565"/>
-            <a:ext cx="3456432" cy="3314132"/>
+            <a:off x="1484312" y="4775200"/>
+            <a:ext cx="10018710" cy="1016000"/>
           </a:xfrm>
         </p:spPr>
         <p:txBody>
@@ -1778,41 +2388,93 @@
             <a:normAutofit/>
           </a:bodyPr>
           <a:lstStyle>
-            <a:lvl1pPr marL="0" indent="0">
-              <a:buNone/>
-              <a:defRPr sz="1400"/>
+            <a:lvl1pPr marL="0" indent="0" algn="r">
+              <a:buNone/>
+              <a:defRPr sz="1800">
+                <a:solidFill>
+                  <a:schemeClr val="tx1"/>
+                </a:solidFill>
+              </a:defRPr>
             </a:lvl1pPr>
             <a:lvl2pPr marL="457200" indent="0">
               <a:buNone/>
-              <a:defRPr sz="1200"/>
+              <a:defRPr sz="1800">
+                <a:solidFill>
+                  <a:schemeClr val="tx1">
+                    <a:tint val="75000"/>
+                  </a:schemeClr>
+                </a:solidFill>
+              </a:defRPr>
             </a:lvl2pPr>
             <a:lvl3pPr marL="914400" indent="0">
               <a:buNone/>
-              <a:defRPr sz="1000"/>
+              <a:defRPr sz="1600">
+                <a:solidFill>
+                  <a:schemeClr val="tx1">
+                    <a:tint val="75000"/>
+                  </a:schemeClr>
+                </a:solidFill>
+              </a:defRPr>
             </a:lvl3pPr>
             <a:lvl4pPr marL="1371600" indent="0">
               <a:buNone/>
-              <a:defRPr sz="900"/>
+              <a:defRPr sz="1400">
+                <a:solidFill>
+                  <a:schemeClr val="tx1">
+                    <a:tint val="75000"/>
+                  </a:schemeClr>
+                </a:solidFill>
+              </a:defRPr>
             </a:lvl4pPr>
             <a:lvl5pPr marL="1828800" indent="0">
               <a:buNone/>
-              <a:defRPr sz="900"/>
+              <a:defRPr sz="1400">
+                <a:solidFill>
+                  <a:schemeClr val="tx1">
+                    <a:tint val="75000"/>
+                  </a:schemeClr>
+                </a:solidFill>
+              </a:defRPr>
             </a:lvl5pPr>
             <a:lvl6pPr marL="2286000" indent="0">
               <a:buNone/>
-              <a:defRPr sz="900"/>
+              <a:defRPr sz="1400">
+                <a:solidFill>
+                  <a:schemeClr val="tx1">
+                    <a:tint val="75000"/>
+                  </a:schemeClr>
+                </a:solidFill>
+              </a:defRPr>
             </a:lvl6pPr>
             <a:lvl7pPr marL="2743200" indent="0">
               <a:buNone/>
-              <a:defRPr sz="900"/>
+              <a:defRPr sz="1400">
+                <a:solidFill>
+                  <a:schemeClr val="tx1">
+                    <a:tint val="75000"/>
+                  </a:schemeClr>
+                </a:solidFill>
+              </a:defRPr>
             </a:lvl7pPr>
             <a:lvl8pPr marL="3200400" indent="0">
               <a:buNone/>
-              <a:defRPr sz="900"/>
+              <a:defRPr sz="1400">
+                <a:solidFill>
+                  <a:schemeClr val="tx1">
+                    <a:tint val="75000"/>
+                  </a:schemeClr>
+                </a:solidFill>
+              </a:defRPr>
             </a:lvl8pPr>
             <a:lvl9pPr marL="3657600" indent="0">
               <a:buNone/>
-              <a:defRPr sz="900"/>
+              <a:defRPr sz="1400">
+                <a:solidFill>
+                  <a:schemeClr val="tx1">
+                    <a:tint val="75000"/>
+                  </a:schemeClr>
+                </a:solidFill>
+              </a:defRPr>
             </a:lvl9pPr>
           </a:lstStyle>
           <a:p>
@@ -1826,283 +2488,7 @@
       </p:sp>
       <p:sp>
         <p:nvSpPr>
-          <p:cNvPr id="9" name="Text Placeholder 4"/>
-          <p:cNvSpPr>
-            <a:spLocks noGrp="1"/>
-          </p:cNvSpPr>
-          <p:nvPr>
-            <p:ph type="body" sz="quarter" idx="3"/>
-          </p:nvPr>
-        </p:nvSpPr>
-        <p:spPr>
-          <a:xfrm>
-            <a:off x="4368800" y="2201333"/>
-            <a:ext cx="3456432" cy="626534"/>
-          </a:xfrm>
-        </p:spPr>
-        <p:txBody>
-          <a:bodyPr anchor="b">
-            <a:noAutofit/>
-          </a:bodyPr>
-          <a:lstStyle>
-            <a:lvl1pPr marL="0" indent="0">
-              <a:buNone/>
-              <a:defRPr sz="2400" b="0">
-                <a:solidFill>
-                  <a:schemeClr val="tx1"/>
-                </a:solidFill>
-              </a:defRPr>
-            </a:lvl1pPr>
-            <a:lvl2pPr marL="457200" indent="0">
-              <a:buNone/>
-              <a:defRPr sz="2000" b="1"/>
-            </a:lvl2pPr>
-            <a:lvl3pPr marL="914400" indent="0">
-              <a:buNone/>
-              <a:defRPr sz="1800" b="1"/>
-            </a:lvl3pPr>
-            <a:lvl4pPr marL="1371600" indent="0">
-              <a:buNone/>
-              <a:defRPr sz="1600" b="1"/>
-            </a:lvl4pPr>
-            <a:lvl5pPr marL="1828800" indent="0">
-              <a:buNone/>
-              <a:defRPr sz="1600" b="1"/>
-            </a:lvl5pPr>
-            <a:lvl6pPr marL="2286000" indent="0">
-              <a:buNone/>
-              <a:defRPr sz="1600" b="1"/>
-            </a:lvl6pPr>
-            <a:lvl7pPr marL="2743200" indent="0">
-              <a:buNone/>
-              <a:defRPr sz="1600" b="1"/>
-            </a:lvl7pPr>
-            <a:lvl8pPr marL="3200400" indent="0">
-              <a:buNone/>
-              <a:defRPr sz="1600" b="1"/>
-            </a:lvl8pPr>
-            <a:lvl9pPr marL="3657600" indent="0">
-              <a:buNone/>
-              <a:defRPr sz="1600" b="1"/>
-            </a:lvl9pPr>
-          </a:lstStyle>
-          <a:p>
-            <a:pPr lvl="0"/>
-            <a:r>
-              <a:rPr lang="en-US"/>
-              <a:t>Click to edit Master text styles</a:t>
-            </a:r>
-          </a:p>
-        </p:txBody>
-      </p:sp>
-      <p:sp>
-        <p:nvSpPr>
-          <p:cNvPr id="10" name="Text Placeholder 3"/>
-          <p:cNvSpPr>
-            <a:spLocks noGrp="1"/>
-          </p:cNvSpPr>
-          <p:nvPr>
-            <p:ph type="body" sz="half" idx="16"/>
-          </p:nvPr>
-        </p:nvSpPr>
-        <p:spPr>
-          <a:xfrm>
-            <a:off x="4366858" y="2904067"/>
-            <a:ext cx="3456432" cy="3314618"/>
-          </a:xfrm>
-        </p:spPr>
-        <p:txBody>
-          <a:bodyPr anchor="t">
-            <a:normAutofit/>
-          </a:bodyPr>
-          <a:lstStyle>
-            <a:lvl1pPr marL="0" indent="0">
-              <a:buNone/>
-              <a:defRPr sz="1400"/>
-            </a:lvl1pPr>
-            <a:lvl2pPr marL="457200" indent="0">
-              <a:buNone/>
-              <a:defRPr sz="1200"/>
-            </a:lvl2pPr>
-            <a:lvl3pPr marL="914400" indent="0">
-              <a:buNone/>
-              <a:defRPr sz="1000"/>
-            </a:lvl3pPr>
-            <a:lvl4pPr marL="1371600" indent="0">
-              <a:buNone/>
-              <a:defRPr sz="900"/>
-            </a:lvl4pPr>
-            <a:lvl5pPr marL="1828800" indent="0">
-              <a:buNone/>
-              <a:defRPr sz="900"/>
-            </a:lvl5pPr>
-            <a:lvl6pPr marL="2286000" indent="0">
-              <a:buNone/>
-              <a:defRPr sz="900"/>
-            </a:lvl6pPr>
-            <a:lvl7pPr marL="2743200" indent="0">
-              <a:buNone/>
-              <a:defRPr sz="900"/>
-            </a:lvl7pPr>
-            <a:lvl8pPr marL="3200400" indent="0">
-              <a:buNone/>
-              <a:defRPr sz="900"/>
-            </a:lvl8pPr>
-            <a:lvl9pPr marL="3657600" indent="0">
-              <a:buNone/>
-              <a:defRPr sz="900"/>
-            </a:lvl9pPr>
-          </a:lstStyle>
-          <a:p>
-            <a:pPr lvl="0"/>
-            <a:r>
-              <a:rPr lang="en-US"/>
-              <a:t>Click to edit Master text styles</a:t>
-            </a:r>
-          </a:p>
-        </p:txBody>
-      </p:sp>
-      <p:sp>
-        <p:nvSpPr>
-          <p:cNvPr id="11" name="Text Placeholder 4"/>
-          <p:cNvSpPr>
-            <a:spLocks noGrp="1"/>
-          </p:cNvSpPr>
-          <p:nvPr>
-            <p:ph type="body" sz="quarter" idx="13"/>
-          </p:nvPr>
-        </p:nvSpPr>
-        <p:spPr>
-          <a:xfrm>
-            <a:off x="8051800" y="2192866"/>
-            <a:ext cx="3456432" cy="626534"/>
-          </a:xfrm>
-        </p:spPr>
-        <p:txBody>
-          <a:bodyPr anchor="b">
-            <a:noAutofit/>
-          </a:bodyPr>
-          <a:lstStyle>
-            <a:lvl1pPr marL="0" indent="0">
-              <a:buNone/>
-              <a:defRPr sz="2400" b="0">
-                <a:solidFill>
-                  <a:schemeClr val="tx1"/>
-                </a:solidFill>
-              </a:defRPr>
-            </a:lvl1pPr>
-            <a:lvl2pPr marL="457200" indent="0">
-              <a:buNone/>
-              <a:defRPr sz="2000" b="1"/>
-            </a:lvl2pPr>
-            <a:lvl3pPr marL="914400" indent="0">
-              <a:buNone/>
-              <a:defRPr sz="1800" b="1"/>
-            </a:lvl3pPr>
-            <a:lvl4pPr marL="1371600" indent="0">
-              <a:buNone/>
-              <a:defRPr sz="1600" b="1"/>
-            </a:lvl4pPr>
-            <a:lvl5pPr marL="1828800" indent="0">
-              <a:buNone/>
-              <a:defRPr sz="1600" b="1"/>
-            </a:lvl5pPr>
-            <a:lvl6pPr marL="2286000" indent="0">
-              <a:buNone/>
-              <a:defRPr sz="1600" b="1"/>
-            </a:lvl6pPr>
-            <a:lvl7pPr marL="2743200" indent="0">
-              <a:buNone/>
-              <a:defRPr sz="1600" b="1"/>
-            </a:lvl7pPr>
-            <a:lvl8pPr marL="3200400" indent="0">
-              <a:buNone/>
-              <a:defRPr sz="1600" b="1"/>
-            </a:lvl8pPr>
-            <a:lvl9pPr marL="3657600" indent="0">
-              <a:buNone/>
-              <a:defRPr sz="1600" b="1"/>
-            </a:lvl9pPr>
-          </a:lstStyle>
-          <a:p>
-            <a:pPr lvl="0"/>
-            <a:r>
-              <a:rPr lang="en-US"/>
-              <a:t>Click to edit Master text styles</a:t>
-            </a:r>
-          </a:p>
-        </p:txBody>
-      </p:sp>
-      <p:sp>
-        <p:nvSpPr>
-          <p:cNvPr id="12" name="Text Placeholder 3"/>
-          <p:cNvSpPr>
-            <a:spLocks noGrp="1"/>
-          </p:cNvSpPr>
-          <p:nvPr>
-            <p:ph type="body" sz="half" idx="17"/>
-          </p:nvPr>
-        </p:nvSpPr>
-        <p:spPr>
-          <a:xfrm>
-            <a:off x="8051801" y="2904565"/>
-            <a:ext cx="3456432" cy="3314132"/>
-          </a:xfrm>
-        </p:spPr>
-        <p:txBody>
-          <a:bodyPr anchor="t">
-            <a:normAutofit/>
-          </a:bodyPr>
-          <a:lstStyle>
-            <a:lvl1pPr marL="0" indent="0">
-              <a:buNone/>
-              <a:defRPr sz="1400"/>
-            </a:lvl1pPr>
-            <a:lvl2pPr marL="457200" indent="0">
-              <a:buNone/>
-              <a:defRPr sz="1200"/>
-            </a:lvl2pPr>
-            <a:lvl3pPr marL="914400" indent="0">
-              <a:buNone/>
-              <a:defRPr sz="1000"/>
-            </a:lvl3pPr>
-            <a:lvl4pPr marL="1371600" indent="0">
-              <a:buNone/>
-              <a:defRPr sz="900"/>
-            </a:lvl4pPr>
-            <a:lvl5pPr marL="1828800" indent="0">
-              <a:buNone/>
-              <a:defRPr sz="900"/>
-            </a:lvl5pPr>
-            <a:lvl6pPr marL="2286000" indent="0">
-              <a:buNone/>
-              <a:defRPr sz="900"/>
-            </a:lvl6pPr>
-            <a:lvl7pPr marL="2743200" indent="0">
-              <a:buNone/>
-              <a:defRPr sz="900"/>
-            </a:lvl7pPr>
-            <a:lvl8pPr marL="3200400" indent="0">
-              <a:buNone/>
-              <a:defRPr sz="900"/>
-            </a:lvl8pPr>
-            <a:lvl9pPr marL="3657600" indent="0">
-              <a:buNone/>
-              <a:defRPr sz="900"/>
-            </a:lvl9pPr>
-          </a:lstStyle>
-          <a:p>
-            <a:pPr lvl="0"/>
-            <a:r>
-              <a:rPr lang="en-US"/>
-              <a:t>Click to edit Master text styles</a:t>
-            </a:r>
-          </a:p>
-        </p:txBody>
-      </p:sp>
-      <p:sp>
-        <p:nvSpPr>
-          <p:cNvPr id="3" name="Date Placeholder 2"/>
+          <p:cNvPr id="4" name="Date Placeholder 3"/>
           <p:cNvSpPr>
             <a:spLocks noGrp="1"/>
           </p:cNvSpPr>
@@ -2125,7 +2511,7 @@
       </p:sp>
       <p:sp>
         <p:nvSpPr>
-          <p:cNvPr id="4" name="Footer Placeholder 3"/>
+          <p:cNvPr id="5" name="Footer Placeholder 4"/>
           <p:cNvSpPr>
             <a:spLocks noGrp="1"/>
           </p:cNvSpPr>
@@ -2144,7 +2530,7 @@
       </p:sp>
       <p:sp>
         <p:nvSpPr>
-          <p:cNvPr id="5" name="Slide Number Placeholder 4"/>
+          <p:cNvPr id="6" name="Slide Number Placeholder 5"/>
           <p:cNvSpPr>
             <a:spLocks noGrp="1"/>
           </p:cNvSpPr>
@@ -2168,19 +2554,22 @@
     </p:spTree>
     <p:extLst>
       <p:ext uri="{BB962C8B-B14F-4D97-AF65-F5344CB8AC3E}">
-        <p14:creationId xmlns:p14="http://schemas.microsoft.com/office/powerpoint/2010/main" val="4045364065"/>
+        <p14:creationId xmlns:p14="http://schemas.microsoft.com/office/powerpoint/2010/main" val="3238952939"/>
       </p:ext>
     </p:extLst>
   </p:cSld>
   <p:clrMapOvr>
     <a:masterClrMapping/>
   </p:clrMapOvr>
+  <p:transition>
+    <p:fade/>
+  </p:transition>
 </p:sldLayout>
 </file>
 
 <file path=ppt/slideLayouts/slideLayout15.xml><?xml version="1.0" encoding="utf-8"?>
 <p:sldLayout xmlns:a="http://schemas.openxmlformats.org/drawingml/2006/main" xmlns:r="http://schemas.openxmlformats.org/officeDocument/2006/relationships" xmlns:p="http://schemas.openxmlformats.org/presentationml/2006/main" preserve="1">
-  <p:cSld name="3 Picture Column">
+  <p:cSld name="True or False">
     <p:spTree>
       <p:nvGrpSpPr>
         <p:cNvPr id="1" name=""/>
@@ -2197,7 +2586,7 @@
       </p:grpSpPr>
       <p:sp>
         <p:nvSpPr>
-          <p:cNvPr id="30" name="Title 1"/>
+          <p:cNvPr id="2" name="Title 1"/>
           <p:cNvSpPr>
             <a:spLocks noGrp="1"/>
           </p:cNvSpPr>
@@ -2207,14 +2596,21 @@
         </p:nvSpPr>
         <p:spPr>
           <a:xfrm>
-            <a:off x="2895600" y="762000"/>
-            <a:ext cx="8610599" cy="1295400"/>
+            <a:off x="1484313" y="685800"/>
+            <a:ext cx="10018712" cy="2727325"/>
           </a:xfrm>
         </p:spPr>
         <p:txBody>
-          <a:bodyPr/>
-          <a:lstStyle/>
-          <a:p>
+          <a:bodyPr vert="horz" lIns="91440" tIns="45720" rIns="91440" bIns="45720" rtlCol="0" anchor="ctr">
+            <a:normAutofit/>
+          </a:bodyPr>
+          <a:lstStyle>
+            <a:lvl1pPr>
+              <a:defRPr lang="en-US" b="0" dirty="0"/>
+            </a:lvl1pPr>
+          </a:lstStyle>
+          <a:p>
+            <a:pPr marL="0" lvl="0"/>
             <a:r>
               <a:rPr lang="en-US"/>
               <a:t>Click to edit Master title style</a:t>
@@ -2225,68 +2621,45 @@
       </p:sp>
       <p:sp>
         <p:nvSpPr>
-          <p:cNvPr id="19" name="Text Placeholder 2"/>
-          <p:cNvSpPr>
-            <a:spLocks noGrp="1"/>
-          </p:cNvSpPr>
-          <p:nvPr>
-            <p:ph type="body" idx="1"/>
+          <p:cNvPr id="10" name="Text Placeholder 9"/>
+          <p:cNvSpPr>
+            <a:spLocks noGrp="1"/>
+          </p:cNvSpPr>
+          <p:nvPr>
+            <p:ph type="body" sz="quarter" idx="13"/>
           </p:nvPr>
         </p:nvSpPr>
         <p:spPr>
           <a:xfrm>
-            <a:off x="688618" y="4191000"/>
-            <a:ext cx="3451582" cy="682765"/>
+            <a:off x="1484312" y="3505200"/>
+            <a:ext cx="10018713" cy="838200"/>
           </a:xfrm>
         </p:spPr>
         <p:txBody>
-          <a:bodyPr anchor="b">
-            <a:noAutofit/>
+          <a:bodyPr vert="horz" lIns="91440" tIns="45720" rIns="91440" bIns="45720" rtlCol="0" anchor="b">
+            <a:normAutofit/>
           </a:bodyPr>
           <a:lstStyle>
-            <a:lvl1pPr marL="0" indent="0">
-              <a:buNone/>
-              <a:defRPr sz="2400" b="0">
+            <a:lvl1pPr>
+              <a:buNone/>
+              <a:defRPr lang="en-US" sz="2800" b="0" cap="none" dirty="0">
+                <a:ln w="3175" cmpd="sng">
+                  <a:noFill/>
+                </a:ln>
                 <a:solidFill>
                   <a:schemeClr val="tx1"/>
                 </a:solidFill>
+                <a:effectLst/>
               </a:defRPr>
             </a:lvl1pPr>
-            <a:lvl2pPr marL="457200" indent="0">
-              <a:buNone/>
-              <a:defRPr sz="2000" b="1"/>
-            </a:lvl2pPr>
-            <a:lvl3pPr marL="914400" indent="0">
-              <a:buNone/>
-              <a:defRPr sz="1800" b="1"/>
-            </a:lvl3pPr>
-            <a:lvl4pPr marL="1371600" indent="0">
-              <a:buNone/>
-              <a:defRPr sz="1600" b="1"/>
-            </a:lvl4pPr>
-            <a:lvl5pPr marL="1828800" indent="0">
-              <a:buNone/>
-              <a:defRPr sz="1600" b="1"/>
-            </a:lvl5pPr>
-            <a:lvl6pPr marL="2286000" indent="0">
-              <a:buNone/>
-              <a:defRPr sz="1600" b="1"/>
-            </a:lvl6pPr>
-            <a:lvl7pPr marL="2743200" indent="0">
-              <a:buNone/>
-              <a:defRPr sz="1600" b="1"/>
-            </a:lvl7pPr>
-            <a:lvl8pPr marL="3200400" indent="0">
-              <a:buNone/>
-              <a:defRPr sz="1600" b="1"/>
-            </a:lvl8pPr>
-            <a:lvl9pPr marL="3657600" indent="0">
-              <a:buNone/>
-              <a:defRPr sz="1600" b="1"/>
-            </a:lvl9pPr>
           </a:lstStyle>
           <a:p>
-            <a:pPr lvl="0"/>
+            <a:pPr marL="0" lvl="0">
+              <a:spcBef>
+                <a:spcPct val="0"/>
+              </a:spcBef>
+              <a:buNone/>
+            </a:pPr>
             <a:r>
               <a:rPr lang="en-US"/>
               <a:t>Click to edit Master text styles</a:t>
@@ -2296,142 +2669,115 @@
       </p:sp>
       <p:sp>
         <p:nvSpPr>
-          <p:cNvPr id="20" name="Picture Placeholder 2"/>
-          <p:cNvSpPr>
-            <a:spLocks noGrp="1" noChangeAspect="1"/>
-          </p:cNvSpPr>
-          <p:nvPr>
-            <p:ph type="pic" idx="15"/>
+          <p:cNvPr id="3" name="Text Placeholder 2"/>
+          <p:cNvSpPr>
+            <a:spLocks noGrp="1"/>
+          </p:cNvSpPr>
+          <p:nvPr>
+            <p:ph type="body" idx="1"/>
           </p:nvPr>
         </p:nvSpPr>
         <p:spPr>
           <a:xfrm>
-            <a:off x="688618" y="2362200"/>
-            <a:ext cx="3451582" cy="1524000"/>
+            <a:off x="1484311" y="4343400"/>
+            <a:ext cx="10018713" cy="1447800"/>
           </a:xfrm>
-          <a:prstGeom prst="roundRect">
-            <a:avLst>
-              <a:gd name="adj" fmla="val 0"/>
-            </a:avLst>
-          </a:prstGeom>
-          <a:effectLst>
-            <a:outerShdw blurRad="50800" dist="50800" dir="5400000" algn="tl" rotWithShape="0">
-              <a:srgbClr val="000000">
-                <a:alpha val="43000"/>
-              </a:srgbClr>
-            </a:outerShdw>
-          </a:effectLst>
         </p:spPr>
         <p:txBody>
           <a:bodyPr anchor="t">
             <a:normAutofit/>
           </a:bodyPr>
           <a:lstStyle>
-            <a:lvl1pPr marL="0" indent="0" algn="ctr">
-              <a:buNone/>
-              <a:defRPr sz="1600"/>
+            <a:lvl1pPr marL="0" indent="0" algn="l">
+              <a:buNone/>
+              <a:defRPr sz="1800">
+                <a:solidFill>
+                  <a:schemeClr val="tx1"/>
+                </a:solidFill>
+              </a:defRPr>
             </a:lvl1pPr>
             <a:lvl2pPr marL="457200" indent="0">
               <a:buNone/>
-              <a:defRPr sz="1600"/>
+              <a:defRPr sz="1800">
+                <a:solidFill>
+                  <a:schemeClr val="tx1">
+                    <a:tint val="75000"/>
+                  </a:schemeClr>
+                </a:solidFill>
+              </a:defRPr>
             </a:lvl2pPr>
             <a:lvl3pPr marL="914400" indent="0">
               <a:buNone/>
-              <a:defRPr sz="1600"/>
+              <a:defRPr sz="1600">
+                <a:solidFill>
+                  <a:schemeClr val="tx1">
+                    <a:tint val="75000"/>
+                  </a:schemeClr>
+                </a:solidFill>
+              </a:defRPr>
             </a:lvl3pPr>
             <a:lvl4pPr marL="1371600" indent="0">
               <a:buNone/>
-              <a:defRPr sz="1600"/>
+              <a:defRPr sz="1400">
+                <a:solidFill>
+                  <a:schemeClr val="tx1">
+                    <a:tint val="75000"/>
+                  </a:schemeClr>
+                </a:solidFill>
+              </a:defRPr>
             </a:lvl4pPr>
             <a:lvl5pPr marL="1828800" indent="0">
               <a:buNone/>
-              <a:defRPr sz="1600"/>
+              <a:defRPr sz="1400">
+                <a:solidFill>
+                  <a:schemeClr val="tx1">
+                    <a:tint val="75000"/>
+                  </a:schemeClr>
+                </a:solidFill>
+              </a:defRPr>
             </a:lvl5pPr>
             <a:lvl6pPr marL="2286000" indent="0">
               <a:buNone/>
-              <a:defRPr sz="1600"/>
+              <a:defRPr sz="1400">
+                <a:solidFill>
+                  <a:schemeClr val="tx1">
+                    <a:tint val="75000"/>
+                  </a:schemeClr>
+                </a:solidFill>
+              </a:defRPr>
             </a:lvl6pPr>
             <a:lvl7pPr marL="2743200" indent="0">
               <a:buNone/>
-              <a:defRPr sz="1600"/>
+              <a:defRPr sz="1400">
+                <a:solidFill>
+                  <a:schemeClr val="tx1">
+                    <a:tint val="75000"/>
+                  </a:schemeClr>
+                </a:solidFill>
+              </a:defRPr>
             </a:lvl7pPr>
             <a:lvl8pPr marL="3200400" indent="0">
               <a:buNone/>
-              <a:defRPr sz="1600"/>
+              <a:defRPr sz="1400">
+                <a:solidFill>
+                  <a:schemeClr val="tx1">
+                    <a:tint val="75000"/>
+                  </a:schemeClr>
+                </a:solidFill>
+              </a:defRPr>
             </a:lvl8pPr>
             <a:lvl9pPr marL="3657600" indent="0">
               <a:buNone/>
-              <a:defRPr sz="1600"/>
+              <a:defRPr sz="1400">
+                <a:solidFill>
+                  <a:schemeClr val="tx1">
+                    <a:tint val="75000"/>
+                  </a:schemeClr>
+                </a:solidFill>
+              </a:defRPr>
             </a:lvl9pPr>
           </a:lstStyle>
           <a:p>
-            <a:r>
-              <a:rPr lang="en-US"/>
-              <a:t>Click icon to add picture</a:t>
-            </a:r>
-            <a:endParaRPr lang="en-US" dirty="0"/>
-          </a:p>
-        </p:txBody>
-      </p:sp>
-      <p:sp>
-        <p:nvSpPr>
-          <p:cNvPr id="21" name="Text Placeholder 3"/>
-          <p:cNvSpPr>
-            <a:spLocks noGrp="1"/>
-          </p:cNvSpPr>
-          <p:nvPr>
-            <p:ph type="body" sz="half" idx="18"/>
-          </p:nvPr>
-        </p:nvSpPr>
-        <p:spPr>
-          <a:xfrm>
-            <a:off x="688618" y="4873764"/>
-            <a:ext cx="3451582" cy="1344921"/>
-          </a:xfrm>
-        </p:spPr>
-        <p:txBody>
-          <a:bodyPr anchor="t">
-            <a:normAutofit/>
-          </a:bodyPr>
-          <a:lstStyle>
-            <a:lvl1pPr marL="0" indent="0">
-              <a:buNone/>
-              <a:defRPr sz="1400"/>
-            </a:lvl1pPr>
-            <a:lvl2pPr marL="457200" indent="0">
-              <a:buNone/>
-              <a:defRPr sz="1200"/>
-            </a:lvl2pPr>
-            <a:lvl3pPr marL="914400" indent="0">
-              <a:buNone/>
-              <a:defRPr sz="1000"/>
-            </a:lvl3pPr>
-            <a:lvl4pPr marL="1371600" indent="0">
-              <a:buNone/>
-              <a:defRPr sz="900"/>
-            </a:lvl4pPr>
-            <a:lvl5pPr marL="1828800" indent="0">
-              <a:buNone/>
-              <a:defRPr sz="900"/>
-            </a:lvl5pPr>
-            <a:lvl6pPr marL="2286000" indent="0">
-              <a:buNone/>
-              <a:defRPr sz="900"/>
-            </a:lvl6pPr>
-            <a:lvl7pPr marL="2743200" indent="0">
-              <a:buNone/>
-              <a:defRPr sz="900"/>
-            </a:lvl7pPr>
-            <a:lvl8pPr marL="3200400" indent="0">
-              <a:buNone/>
-              <a:defRPr sz="900"/>
-            </a:lvl8pPr>
-            <a:lvl9pPr marL="3657600" indent="0">
-              <a:buNone/>
-              <a:defRPr sz="900"/>
-            </a:lvl9pPr>
-          </a:lstStyle>
-          <a:p>
             <a:pPr lvl="0"/>
             <a:r>
               <a:rPr lang="en-US"/>
@@ -2442,441 +2788,7 @@
       </p:sp>
       <p:sp>
         <p:nvSpPr>
-          <p:cNvPr id="22" name="Text Placeholder 4"/>
-          <p:cNvSpPr>
-            <a:spLocks noGrp="1"/>
-          </p:cNvSpPr>
-          <p:nvPr>
-            <p:ph type="body" sz="quarter" idx="3"/>
-          </p:nvPr>
-        </p:nvSpPr>
-        <p:spPr>
-          <a:xfrm>
-            <a:off x="4374263" y="4191000"/>
-            <a:ext cx="3448935" cy="682765"/>
-          </a:xfrm>
-        </p:spPr>
-        <p:txBody>
-          <a:bodyPr anchor="b">
-            <a:noAutofit/>
-          </a:bodyPr>
-          <a:lstStyle>
-            <a:lvl1pPr marL="0" indent="0">
-              <a:buNone/>
-              <a:defRPr sz="2400" b="0">
-                <a:solidFill>
-                  <a:schemeClr val="tx1"/>
-                </a:solidFill>
-              </a:defRPr>
-            </a:lvl1pPr>
-            <a:lvl2pPr marL="457200" indent="0">
-              <a:buNone/>
-              <a:defRPr sz="2000" b="1"/>
-            </a:lvl2pPr>
-            <a:lvl3pPr marL="914400" indent="0">
-              <a:buNone/>
-              <a:defRPr sz="1800" b="1"/>
-            </a:lvl3pPr>
-            <a:lvl4pPr marL="1371600" indent="0">
-              <a:buNone/>
-              <a:defRPr sz="1600" b="1"/>
-            </a:lvl4pPr>
-            <a:lvl5pPr marL="1828800" indent="0">
-              <a:buNone/>
-              <a:defRPr sz="1600" b="1"/>
-            </a:lvl5pPr>
-            <a:lvl6pPr marL="2286000" indent="0">
-              <a:buNone/>
-              <a:defRPr sz="1600" b="1"/>
-            </a:lvl6pPr>
-            <a:lvl7pPr marL="2743200" indent="0">
-              <a:buNone/>
-              <a:defRPr sz="1600" b="1"/>
-            </a:lvl7pPr>
-            <a:lvl8pPr marL="3200400" indent="0">
-              <a:buNone/>
-              <a:defRPr sz="1600" b="1"/>
-            </a:lvl8pPr>
-            <a:lvl9pPr marL="3657600" indent="0">
-              <a:buNone/>
-              <a:defRPr sz="1600" b="1"/>
-            </a:lvl9pPr>
-          </a:lstStyle>
-          <a:p>
-            <a:pPr lvl="0"/>
-            <a:r>
-              <a:rPr lang="en-US"/>
-              <a:t>Click to edit Master text styles</a:t>
-            </a:r>
-          </a:p>
-        </p:txBody>
-      </p:sp>
-      <p:sp>
-        <p:nvSpPr>
-          <p:cNvPr id="23" name="Picture Placeholder 2"/>
-          <p:cNvSpPr>
-            <a:spLocks noGrp="1" noChangeAspect="1"/>
-          </p:cNvSpPr>
-          <p:nvPr>
-            <p:ph type="pic" idx="21"/>
-          </p:nvPr>
-        </p:nvSpPr>
-        <p:spPr>
-          <a:xfrm>
-            <a:off x="4374263" y="2362200"/>
-            <a:ext cx="3448936" cy="1524000"/>
-          </a:xfrm>
-          <a:prstGeom prst="roundRect">
-            <a:avLst>
-              <a:gd name="adj" fmla="val 0"/>
-            </a:avLst>
-          </a:prstGeom>
-          <a:effectLst>
-            <a:outerShdw blurRad="50800" dist="50800" dir="5400000" algn="tl" rotWithShape="0">
-              <a:srgbClr val="000000">
-                <a:alpha val="43000"/>
-              </a:srgbClr>
-            </a:outerShdw>
-          </a:effectLst>
-        </p:spPr>
-        <p:txBody>
-          <a:bodyPr anchor="t">
-            <a:normAutofit/>
-          </a:bodyPr>
-          <a:lstStyle>
-            <a:lvl1pPr marL="0" indent="0" algn="ctr">
-              <a:buNone/>
-              <a:defRPr sz="1600"/>
-            </a:lvl1pPr>
-            <a:lvl2pPr marL="457200" indent="0">
-              <a:buNone/>
-              <a:defRPr sz="1600"/>
-            </a:lvl2pPr>
-            <a:lvl3pPr marL="914400" indent="0">
-              <a:buNone/>
-              <a:defRPr sz="1600"/>
-            </a:lvl3pPr>
-            <a:lvl4pPr marL="1371600" indent="0">
-              <a:buNone/>
-              <a:defRPr sz="1600"/>
-            </a:lvl4pPr>
-            <a:lvl5pPr marL="1828800" indent="0">
-              <a:buNone/>
-              <a:defRPr sz="1600"/>
-            </a:lvl5pPr>
-            <a:lvl6pPr marL="2286000" indent="0">
-              <a:buNone/>
-              <a:defRPr sz="1600"/>
-            </a:lvl6pPr>
-            <a:lvl7pPr marL="2743200" indent="0">
-              <a:buNone/>
-              <a:defRPr sz="1600"/>
-            </a:lvl7pPr>
-            <a:lvl8pPr marL="3200400" indent="0">
-              <a:buNone/>
-              <a:defRPr sz="1600"/>
-            </a:lvl8pPr>
-            <a:lvl9pPr marL="3657600" indent="0">
-              <a:buNone/>
-              <a:defRPr sz="1600"/>
-            </a:lvl9pPr>
-          </a:lstStyle>
-          <a:p>
-            <a:r>
-              <a:rPr lang="en-US"/>
-              <a:t>Click icon to add picture</a:t>
-            </a:r>
-            <a:endParaRPr lang="en-US" dirty="0"/>
-          </a:p>
-        </p:txBody>
-      </p:sp>
-      <p:sp>
-        <p:nvSpPr>
-          <p:cNvPr id="24" name="Text Placeholder 3"/>
-          <p:cNvSpPr>
-            <a:spLocks noGrp="1"/>
-          </p:cNvSpPr>
-          <p:nvPr>
-            <p:ph type="body" sz="half" idx="19"/>
-          </p:nvPr>
-        </p:nvSpPr>
-        <p:spPr>
-          <a:xfrm>
-            <a:off x="4374264" y="4873763"/>
-            <a:ext cx="3448935" cy="1344921"/>
-          </a:xfrm>
-        </p:spPr>
-        <p:txBody>
-          <a:bodyPr anchor="t">
-            <a:normAutofit/>
-          </a:bodyPr>
-          <a:lstStyle>
-            <a:lvl1pPr marL="0" indent="0">
-              <a:buNone/>
-              <a:defRPr sz="1400"/>
-            </a:lvl1pPr>
-            <a:lvl2pPr marL="457200" indent="0">
-              <a:buNone/>
-              <a:defRPr sz="1200"/>
-            </a:lvl2pPr>
-            <a:lvl3pPr marL="914400" indent="0">
-              <a:buNone/>
-              <a:defRPr sz="1000"/>
-            </a:lvl3pPr>
-            <a:lvl4pPr marL="1371600" indent="0">
-              <a:buNone/>
-              <a:defRPr sz="900"/>
-            </a:lvl4pPr>
-            <a:lvl5pPr marL="1828800" indent="0">
-              <a:buNone/>
-              <a:defRPr sz="900"/>
-            </a:lvl5pPr>
-            <a:lvl6pPr marL="2286000" indent="0">
-              <a:buNone/>
-              <a:defRPr sz="900"/>
-            </a:lvl6pPr>
-            <a:lvl7pPr marL="2743200" indent="0">
-              <a:buNone/>
-              <a:defRPr sz="900"/>
-            </a:lvl7pPr>
-            <a:lvl8pPr marL="3200400" indent="0">
-              <a:buNone/>
-              <a:defRPr sz="900"/>
-            </a:lvl8pPr>
-            <a:lvl9pPr marL="3657600" indent="0">
-              <a:buNone/>
-              <a:defRPr sz="900"/>
-            </a:lvl9pPr>
-          </a:lstStyle>
-          <a:p>
-            <a:pPr lvl="0"/>
-            <a:r>
-              <a:rPr lang="en-US"/>
-              <a:t>Click to edit Master text styles</a:t>
-            </a:r>
-          </a:p>
-        </p:txBody>
-      </p:sp>
-      <p:sp>
-        <p:nvSpPr>
-          <p:cNvPr id="25" name="Text Placeholder 4"/>
-          <p:cNvSpPr>
-            <a:spLocks noGrp="1"/>
-          </p:cNvSpPr>
-          <p:nvPr>
-            <p:ph type="body" sz="quarter" idx="13"/>
-          </p:nvPr>
-        </p:nvSpPr>
-        <p:spPr>
-          <a:xfrm>
-            <a:off x="8049731" y="4191000"/>
-            <a:ext cx="3456469" cy="682765"/>
-          </a:xfrm>
-        </p:spPr>
-        <p:txBody>
-          <a:bodyPr anchor="b">
-            <a:noAutofit/>
-          </a:bodyPr>
-          <a:lstStyle>
-            <a:lvl1pPr marL="0" indent="0">
-              <a:buNone/>
-              <a:defRPr sz="2400" b="0">
-                <a:solidFill>
-                  <a:schemeClr val="tx1"/>
-                </a:solidFill>
-              </a:defRPr>
-            </a:lvl1pPr>
-            <a:lvl2pPr marL="457200" indent="0">
-              <a:buNone/>
-              <a:defRPr sz="2000" b="1"/>
-            </a:lvl2pPr>
-            <a:lvl3pPr marL="914400" indent="0">
-              <a:buNone/>
-              <a:defRPr sz="1800" b="1"/>
-            </a:lvl3pPr>
-            <a:lvl4pPr marL="1371600" indent="0">
-              <a:buNone/>
-              <a:defRPr sz="1600" b="1"/>
-            </a:lvl4pPr>
-            <a:lvl5pPr marL="1828800" indent="0">
-              <a:buNone/>
-              <a:defRPr sz="1600" b="1"/>
-            </a:lvl5pPr>
-            <a:lvl6pPr marL="2286000" indent="0">
-              <a:buNone/>
-              <a:defRPr sz="1600" b="1"/>
-            </a:lvl6pPr>
-            <a:lvl7pPr marL="2743200" indent="0">
-              <a:buNone/>
-              <a:defRPr sz="1600" b="1"/>
-            </a:lvl7pPr>
-            <a:lvl8pPr marL="3200400" indent="0">
-              <a:buNone/>
-              <a:defRPr sz="1600" b="1"/>
-            </a:lvl8pPr>
-            <a:lvl9pPr marL="3657600" indent="0">
-              <a:buNone/>
-              <a:defRPr sz="1600" b="1"/>
-            </a:lvl9pPr>
-          </a:lstStyle>
-          <a:p>
-            <a:pPr lvl="0"/>
-            <a:r>
-              <a:rPr lang="en-US"/>
-              <a:t>Click to edit Master text styles</a:t>
-            </a:r>
-          </a:p>
-        </p:txBody>
-      </p:sp>
-      <p:sp>
-        <p:nvSpPr>
-          <p:cNvPr id="26" name="Picture Placeholder 2"/>
-          <p:cNvSpPr>
-            <a:spLocks noGrp="1" noChangeAspect="1"/>
-          </p:cNvSpPr>
-          <p:nvPr>
-            <p:ph type="pic" idx="22"/>
-          </p:nvPr>
-        </p:nvSpPr>
-        <p:spPr>
-          <a:xfrm>
-            <a:off x="8049855" y="2362200"/>
-            <a:ext cx="3447878" cy="1524000"/>
-          </a:xfrm>
-          <a:prstGeom prst="roundRect">
-            <a:avLst>
-              <a:gd name="adj" fmla="val 0"/>
-            </a:avLst>
-          </a:prstGeom>
-          <a:effectLst>
-            <a:outerShdw blurRad="50800" dist="50800" dir="5400000" algn="tl" rotWithShape="0">
-              <a:srgbClr val="000000">
-                <a:alpha val="43000"/>
-              </a:srgbClr>
-            </a:outerShdw>
-          </a:effectLst>
-        </p:spPr>
-        <p:txBody>
-          <a:bodyPr anchor="t">
-            <a:normAutofit/>
-          </a:bodyPr>
-          <a:lstStyle>
-            <a:lvl1pPr marL="0" indent="0" algn="ctr">
-              <a:buNone/>
-              <a:defRPr sz="1600"/>
-            </a:lvl1pPr>
-            <a:lvl2pPr marL="457200" indent="0">
-              <a:buNone/>
-              <a:defRPr sz="1600"/>
-            </a:lvl2pPr>
-            <a:lvl3pPr marL="914400" indent="0">
-              <a:buNone/>
-              <a:defRPr sz="1600"/>
-            </a:lvl3pPr>
-            <a:lvl4pPr marL="1371600" indent="0">
-              <a:buNone/>
-              <a:defRPr sz="1600"/>
-            </a:lvl4pPr>
-            <a:lvl5pPr marL="1828800" indent="0">
-              <a:buNone/>
-              <a:defRPr sz="1600"/>
-            </a:lvl5pPr>
-            <a:lvl6pPr marL="2286000" indent="0">
-              <a:buNone/>
-              <a:defRPr sz="1600"/>
-            </a:lvl6pPr>
-            <a:lvl7pPr marL="2743200" indent="0">
-              <a:buNone/>
-              <a:defRPr sz="1600"/>
-            </a:lvl7pPr>
-            <a:lvl8pPr marL="3200400" indent="0">
-              <a:buNone/>
-              <a:defRPr sz="1600"/>
-            </a:lvl8pPr>
-            <a:lvl9pPr marL="3657600" indent="0">
-              <a:buNone/>
-              <a:defRPr sz="1600"/>
-            </a:lvl9pPr>
-          </a:lstStyle>
-          <a:p>
-            <a:r>
-              <a:rPr lang="en-US"/>
-              <a:t>Click icon to add picture</a:t>
-            </a:r>
-            <a:endParaRPr lang="en-US" dirty="0"/>
-          </a:p>
-        </p:txBody>
-      </p:sp>
-      <p:sp>
-        <p:nvSpPr>
-          <p:cNvPr id="27" name="Text Placeholder 3"/>
-          <p:cNvSpPr>
-            <a:spLocks noGrp="1"/>
-          </p:cNvSpPr>
-          <p:nvPr>
-            <p:ph type="body" sz="half" idx="20"/>
-          </p:nvPr>
-        </p:nvSpPr>
-        <p:spPr>
-          <a:xfrm>
-            <a:off x="8049731" y="4873761"/>
-            <a:ext cx="3452445" cy="1344921"/>
-          </a:xfrm>
-        </p:spPr>
-        <p:txBody>
-          <a:bodyPr anchor="t">
-            <a:normAutofit/>
-          </a:bodyPr>
-          <a:lstStyle>
-            <a:lvl1pPr marL="0" indent="0">
-              <a:buNone/>
-              <a:defRPr sz="1400"/>
-            </a:lvl1pPr>
-            <a:lvl2pPr marL="457200" indent="0">
-              <a:buNone/>
-              <a:defRPr sz="1200"/>
-            </a:lvl2pPr>
-            <a:lvl3pPr marL="914400" indent="0">
-              <a:buNone/>
-              <a:defRPr sz="1000"/>
-            </a:lvl3pPr>
-            <a:lvl4pPr marL="1371600" indent="0">
-              <a:buNone/>
-              <a:defRPr sz="900"/>
-            </a:lvl4pPr>
-            <a:lvl5pPr marL="1828800" indent="0">
-              <a:buNone/>
-              <a:defRPr sz="900"/>
-            </a:lvl5pPr>
-            <a:lvl6pPr marL="2286000" indent="0">
-              <a:buNone/>
-              <a:defRPr sz="900"/>
-            </a:lvl6pPr>
-            <a:lvl7pPr marL="2743200" indent="0">
-              <a:buNone/>
-              <a:defRPr sz="900"/>
-            </a:lvl7pPr>
-            <a:lvl8pPr marL="3200400" indent="0">
-              <a:buNone/>
-              <a:defRPr sz="900"/>
-            </a:lvl8pPr>
-            <a:lvl9pPr marL="3657600" indent="0">
-              <a:buNone/>
-              <a:defRPr sz="900"/>
-            </a:lvl9pPr>
-          </a:lstStyle>
-          <a:p>
-            <a:pPr lvl="0"/>
-            <a:r>
-              <a:rPr lang="en-US"/>
-              <a:t>Click to edit Master text styles</a:t>
-            </a:r>
-          </a:p>
-        </p:txBody>
-      </p:sp>
-      <p:sp>
-        <p:nvSpPr>
-          <p:cNvPr id="3" name="Date Placeholder 2"/>
+          <p:cNvPr id="4" name="Date Placeholder 3"/>
           <p:cNvSpPr>
             <a:spLocks noGrp="1"/>
           </p:cNvSpPr>
@@ -2899,7 +2811,7 @@
       </p:sp>
       <p:sp>
         <p:nvSpPr>
-          <p:cNvPr id="4" name="Footer Placeholder 3"/>
+          <p:cNvPr id="5" name="Footer Placeholder 4"/>
           <p:cNvSpPr>
             <a:spLocks noGrp="1"/>
           </p:cNvSpPr>
@@ -2918,7 +2830,7 @@
       </p:sp>
       <p:sp>
         <p:nvSpPr>
-          <p:cNvPr id="5" name="Slide Number Placeholder 4"/>
+          <p:cNvPr id="6" name="Slide Number Placeholder 5"/>
           <p:cNvSpPr>
             <a:spLocks noGrp="1"/>
           </p:cNvSpPr>
@@ -2942,13 +2854,16 @@
     </p:spTree>
     <p:extLst>
       <p:ext uri="{BB962C8B-B14F-4D97-AF65-F5344CB8AC3E}">
-        <p14:creationId xmlns:p14="http://schemas.microsoft.com/office/powerpoint/2010/main" val="2025319673"/>
+        <p14:creationId xmlns:p14="http://schemas.microsoft.com/office/powerpoint/2010/main" val="3955092105"/>
       </p:ext>
     </p:extLst>
   </p:cSld>
   <p:clrMapOvr>
     <a:masterClrMapping/>
   </p:clrMapOvr>
+  <p:transition>
+    <p:fade/>
+  </p:transition>
 </p:sldLayout>
 </file>
 
@@ -2982,7 +2897,11 @@
         <p:spPr/>
         <p:txBody>
           <a:bodyPr/>
-          <a:lstStyle/>
+          <a:lstStyle>
+            <a:lvl1pPr algn="ctr">
+              <a:defRPr/>
+            </a:lvl1pPr>
+          </a:lstStyle>
           <a:p>
             <a:r>
               <a:rPr lang="en-US"/>
@@ -3002,14 +2921,9 @@
             <p:ph type="body" orient="vert" idx="1"/>
           </p:nvPr>
         </p:nvSpPr>
-        <p:spPr>
-          <a:xfrm>
-            <a:off x="685800" y="2194559"/>
-            <a:ext cx="10820400" cy="4024125"/>
-          </a:xfrm>
-        </p:spPr>
-        <p:txBody>
-          <a:bodyPr vert="eaVert"/>
+        <p:spPr/>
+        <p:txBody>
+          <a:bodyPr vert="eaVert" anchor="t"/>
           <a:lstStyle/>
           <a:p>
             <a:pPr lvl="0"/>
@@ -3117,18 +3031,21 @@
     </p:spTree>
     <p:extLst>
       <p:ext uri="{BB962C8B-B14F-4D97-AF65-F5344CB8AC3E}">
-        <p14:creationId xmlns:p14="http://schemas.microsoft.com/office/powerpoint/2010/main" val="2166512420"/>
+        <p14:creationId xmlns:p14="http://schemas.microsoft.com/office/powerpoint/2010/main" val="3906986235"/>
       </p:ext>
     </p:extLst>
   </p:cSld>
   <p:clrMapOvr>
     <a:masterClrMapping/>
   </p:clrMapOvr>
+  <p:transition>
+    <p:fade/>
+  </p:transition>
 </p:sldLayout>
 </file>
 
 <file path=ppt/slideLayouts/slideLayout17.xml><?xml version="1.0" encoding="utf-8"?>
-<p:sldLayout xmlns:a="http://schemas.openxmlformats.org/drawingml/2006/main" xmlns:r="http://schemas.openxmlformats.org/officeDocument/2006/relationships" xmlns:p="http://schemas.openxmlformats.org/presentationml/2006/main" showMasterSp="0" type="vertTitleAndTx" preserve="1">
+<p:sldLayout xmlns:a="http://schemas.openxmlformats.org/drawingml/2006/main" xmlns:r="http://schemas.openxmlformats.org/officeDocument/2006/relationships" xmlns:p="http://schemas.openxmlformats.org/presentationml/2006/main" type="vertTitleAndTx" preserve="1">
   <p:cSld name="Vertical Title and Text">
     <p:spTree>
       <p:nvGrpSpPr>
@@ -3144,86 +3061,52 @@
           <a:chExt cx="0" cy="0"/>
         </a:xfrm>
       </p:grpSpPr>
-      <p:pic>
-        <p:nvPicPr>
-          <p:cNvPr id="8" name="Picture 7" descr="C0-HD-BTM.png"/>
-          <p:cNvPicPr>
-            <a:picLocks noChangeAspect="1"/>
-          </p:cNvPicPr>
-          <p:nvPr/>
-        </p:nvPicPr>
-        <p:blipFill>
-          <a:blip r:embed="rId2">
-            <a:extLst>
-              <a:ext uri="{28A0092B-C50C-407E-A947-70E740481C1C}">
-                <a14:useLocalDpi xmlns:a14="http://schemas.microsoft.com/office/drawing/2010/main" val="0"/>
-              </a:ext>
-            </a:extLst>
-          </a:blip>
-          <a:stretch>
-            <a:fillRect/>
-          </a:stretch>
-        </p:blipFill>
+      <p:sp>
+        <p:nvSpPr>
+          <p:cNvPr id="2" name="Vertical Title 1"/>
+          <p:cNvSpPr>
+            <a:spLocks noGrp="1"/>
+          </p:cNvSpPr>
+          <p:nvPr>
+            <p:ph type="title" orient="vert"/>
+          </p:nvPr>
+        </p:nvSpPr>
         <p:spPr>
           <a:xfrm>
-            <a:off x="0" y="4375150"/>
-            <a:ext cx="12192000" cy="2482850"/>
+            <a:off x="9732655" y="685800"/>
+            <a:ext cx="1770369" cy="5105400"/>
           </a:xfrm>
-          <a:prstGeom prst="rect">
-            <a:avLst/>
-          </a:prstGeom>
         </p:spPr>
-      </p:pic>
-      <p:sp>
-        <p:nvSpPr>
-          <p:cNvPr id="2" name="Vertical Title 1"/>
-          <p:cNvSpPr>
-            <a:spLocks noGrp="1"/>
-          </p:cNvSpPr>
-          <p:nvPr>
-            <p:ph type="title" orient="vert"/>
+        <p:txBody>
+          <a:bodyPr vert="eaVert"/>
+          <a:lstStyle/>
+          <a:p>
+            <a:r>
+              <a:rPr lang="en-US"/>
+              <a:t>Click to edit Master title style</a:t>
+            </a:r>
+            <a:endParaRPr lang="en-US" dirty="0"/>
+          </a:p>
+        </p:txBody>
+      </p:sp>
+      <p:sp>
+        <p:nvSpPr>
+          <p:cNvPr id="3" name="Vertical Text Placeholder 2"/>
+          <p:cNvSpPr>
+            <a:spLocks noGrp="1"/>
+          </p:cNvSpPr>
+          <p:nvPr>
+            <p:ph type="body" orient="vert" idx="1"/>
           </p:nvPr>
         </p:nvSpPr>
         <p:spPr>
           <a:xfrm>
-            <a:off x="9448800" y="745066"/>
-            <a:ext cx="2057400" cy="3903133"/>
+            <a:off x="1484312" y="685800"/>
+            <a:ext cx="8019742" cy="5105400"/>
           </a:xfrm>
         </p:spPr>
         <p:txBody>
-          <a:bodyPr vert="eaVert"/>
-          <a:lstStyle>
-            <a:lvl1pPr algn="l">
-              <a:defRPr/>
-            </a:lvl1pPr>
-          </a:lstStyle>
-          <a:p>
-            <a:r>
-              <a:rPr lang="en-US"/>
-              <a:t>Click to edit Master title style</a:t>
-            </a:r>
-            <a:endParaRPr lang="en-US" dirty="0"/>
-          </a:p>
-        </p:txBody>
-      </p:sp>
-      <p:sp>
-        <p:nvSpPr>
-          <p:cNvPr id="3" name="Vertical Text Placeholder 2"/>
-          <p:cNvSpPr>
-            <a:spLocks noGrp="1"/>
-          </p:cNvSpPr>
-          <p:nvPr>
-            <p:ph type="body" orient="vert" idx="1"/>
-          </p:nvPr>
-        </p:nvSpPr>
-        <p:spPr>
-          <a:xfrm>
-            <a:off x="1024466" y="745067"/>
-            <a:ext cx="8204201" cy="3903133"/>
-          </a:xfrm>
-        </p:spPr>
-        <p:txBody>
-          <a:bodyPr vert="eaVert"/>
+          <a:bodyPr vert="eaVert" anchor="t"/>
           <a:lstStyle/>
           <a:p>
             <a:pPr lvl="0"/>
@@ -3273,19 +3156,10 @@
             <p:ph type="dt" sz="half" idx="10"/>
           </p:nvPr>
         </p:nvSpPr>
-        <p:spPr>
-          <a:xfrm>
-            <a:off x="7814452" y="379941"/>
-            <a:ext cx="2910840" cy="365125"/>
-          </a:xfrm>
-        </p:spPr>
+        <p:spPr/>
         <p:txBody>
           <a:bodyPr/>
-          <a:lstStyle>
-            <a:lvl1pPr algn="r">
-              <a:defRPr/>
-            </a:lvl1pPr>
-          </a:lstStyle>
+          <a:lstStyle/>
           <a:p>
             <a:fld id="{462A01D3-2F6B-42A1-9A4B-0488DC6A75CB}" type="datetimeFigureOut">
               <a:rPr lang="en-US" smtClean="0"/>
@@ -3305,12 +3179,7 @@
             <p:ph type="ftr" sz="quarter" idx="11"/>
           </p:nvPr>
         </p:nvSpPr>
-        <p:spPr>
-          <a:xfrm>
-            <a:off x="685800" y="381000"/>
-            <a:ext cx="6991492" cy="365125"/>
-          </a:xfrm>
-        </p:spPr>
+        <p:spPr/>
         <p:txBody>
           <a:bodyPr/>
           <a:lstStyle/>
@@ -3329,12 +3198,7 @@
             <p:ph type="sldNum" sz="quarter" idx="12"/>
           </p:nvPr>
         </p:nvSpPr>
-        <p:spPr>
-          <a:xfrm>
-            <a:off x="10862452" y="381000"/>
-            <a:ext cx="643748" cy="365125"/>
-          </a:xfrm>
-        </p:spPr>
+        <p:spPr/>
         <p:txBody>
           <a:bodyPr/>
           <a:lstStyle/>
@@ -3350,13 +3214,16 @@
     </p:spTree>
     <p:extLst>
       <p:ext uri="{BB962C8B-B14F-4D97-AF65-F5344CB8AC3E}">
-        <p14:creationId xmlns:p14="http://schemas.microsoft.com/office/powerpoint/2010/main" val="1254205336"/>
+        <p14:creationId xmlns:p14="http://schemas.microsoft.com/office/powerpoint/2010/main" val="4230232716"/>
       </p:ext>
     </p:extLst>
   </p:cSld>
   <p:clrMapOvr>
     <a:masterClrMapping/>
   </p:clrMapOvr>
+  <p:transition>
+    <p:fade/>
+  </p:transition>
 </p:sldLayout>
 </file>
 
@@ -3548,13 +3415,16 @@
     </p:spTree>
     <p:extLst>
       <p:ext uri="{BB962C8B-B14F-4D97-AF65-F5344CB8AC3E}">
-        <p14:creationId xmlns:p14="http://schemas.microsoft.com/office/powerpoint/2010/main" val="3269223982"/>
+        <p14:creationId xmlns:p14="http://schemas.microsoft.com/office/powerpoint/2010/main" val="346544717"/>
       </p:ext>
     </p:extLst>
   </p:cSld>
   <p:clrMapOvr>
     <a:masterClrMapping/>
   </p:clrMapOvr>
+  <p:transition>
+    <p:fade/>
+  </p:transition>
 </p:sldLayout>
 </file>
 
@@ -3610,7 +3480,7 @@
         </p:nvSpPr>
         <p:spPr/>
         <p:txBody>
-          <a:bodyPr/>
+          <a:bodyPr anchor="ctr"/>
           <a:lstStyle/>
           <a:p>
             <a:pPr lvl="0"/>
@@ -3702,7 +3572,12 @@
             <p:ph type="sldNum" sz="quarter" idx="12"/>
           </p:nvPr>
         </p:nvSpPr>
-        <p:spPr/>
+        <p:spPr>
+          <a:xfrm>
+            <a:off x="10951856" y="5867131"/>
+            <a:ext cx="551167" cy="365125"/>
+          </a:xfrm>
+        </p:spPr>
         <p:txBody>
           <a:bodyPr/>
           <a:lstStyle/>
@@ -3718,18 +3593,21 @@
     </p:spTree>
     <p:extLst>
       <p:ext uri="{BB962C8B-B14F-4D97-AF65-F5344CB8AC3E}">
-        <p14:creationId xmlns:p14="http://schemas.microsoft.com/office/powerpoint/2010/main" val="874563211"/>
+        <p14:creationId xmlns:p14="http://schemas.microsoft.com/office/powerpoint/2010/main" val="3788588342"/>
       </p:ext>
     </p:extLst>
   </p:cSld>
   <p:clrMapOvr>
     <a:masterClrMapping/>
   </p:clrMapOvr>
+  <p:transition>
+    <p:fade/>
+  </p:transition>
 </p:sldLayout>
 </file>
 
 <file path=ppt/slideLayouts/slideLayout3.xml><?xml version="1.0" encoding="utf-8"?>
-<p:sldLayout xmlns:a="http://schemas.openxmlformats.org/drawingml/2006/main" xmlns:r="http://schemas.openxmlformats.org/officeDocument/2006/relationships" xmlns:p="http://schemas.openxmlformats.org/presentationml/2006/main" showMasterSp="0" type="secHead" preserve="1">
+<p:sldLayout xmlns:a="http://schemas.openxmlformats.org/drawingml/2006/main" xmlns:r="http://schemas.openxmlformats.org/officeDocument/2006/relationships" xmlns:p="http://schemas.openxmlformats.org/presentationml/2006/main" type="secHead" preserve="1">
   <p:cSld name="Section Header">
     <p:spTree>
       <p:nvGrpSpPr>
@@ -3745,180 +3623,146 @@
           <a:chExt cx="0" cy="0"/>
         </a:xfrm>
       </p:grpSpPr>
-      <p:pic>
-        <p:nvPicPr>
-          <p:cNvPr id="9" name="Picture 8" descr="C0-HD-BTM.png"/>
-          <p:cNvPicPr>
-            <a:picLocks noChangeAspect="1"/>
-          </p:cNvPicPr>
-          <p:nvPr/>
-        </p:nvPicPr>
-        <p:blipFill>
-          <a:blip r:embed="rId2">
-            <a:extLst>
-              <a:ext uri="{28A0092B-C50C-407E-A947-70E740481C1C}">
-                <a14:useLocalDpi xmlns:a14="http://schemas.microsoft.com/office/drawing/2010/main" val="0"/>
-              </a:ext>
-            </a:extLst>
-          </a:blip>
-          <a:stretch>
-            <a:fillRect/>
-          </a:stretch>
-        </p:blipFill>
+      <p:sp>
+        <p:nvSpPr>
+          <p:cNvPr id="2" name="Title 1"/>
+          <p:cNvSpPr>
+            <a:spLocks noGrp="1"/>
+          </p:cNvSpPr>
+          <p:nvPr>
+            <p:ph type="title"/>
+          </p:nvPr>
+        </p:nvSpPr>
         <p:spPr>
           <a:xfrm>
-            <a:off x="0" y="4375150"/>
-            <a:ext cx="12192000" cy="2482850"/>
+            <a:off x="2572279" y="2666999"/>
+            <a:ext cx="8930747" cy="2110382"/>
           </a:xfrm>
-          <a:prstGeom prst="rect">
-            <a:avLst/>
-          </a:prstGeom>
         </p:spPr>
-      </p:pic>
-      <p:sp>
-        <p:nvSpPr>
-          <p:cNvPr id="2" name="Title 1"/>
-          <p:cNvSpPr>
-            <a:spLocks noGrp="1"/>
-          </p:cNvSpPr>
-          <p:nvPr>
-            <p:ph type="title"/>
+        <p:txBody>
+          <a:bodyPr anchor="b"/>
+          <a:lstStyle>
+            <a:lvl1pPr algn="r">
+              <a:defRPr sz="4000" b="0" cap="none"/>
+            </a:lvl1pPr>
+          </a:lstStyle>
+          <a:p>
+            <a:r>
+              <a:rPr lang="en-US"/>
+              <a:t>Click to edit Master title style</a:t>
+            </a:r>
+            <a:endParaRPr lang="en-US" dirty="0"/>
+          </a:p>
+        </p:txBody>
+      </p:sp>
+      <p:sp>
+        <p:nvSpPr>
+          <p:cNvPr id="3" name="Text Placeholder 2"/>
+          <p:cNvSpPr>
+            <a:spLocks noGrp="1"/>
+          </p:cNvSpPr>
+          <p:nvPr>
+            <p:ph type="body" idx="1"/>
           </p:nvPr>
         </p:nvSpPr>
         <p:spPr>
           <a:xfrm>
-            <a:off x="685800" y="753533"/>
-            <a:ext cx="10820399" cy="2801935"/>
+            <a:off x="2572278" y="4777381"/>
+            <a:ext cx="8930748" cy="860400"/>
           </a:xfrm>
         </p:spPr>
         <p:txBody>
-          <a:bodyPr anchor="b">
-            <a:normAutofit/>
-          </a:bodyPr>
-          <a:lstStyle>
-            <a:lvl1pPr algn="r">
-              <a:defRPr sz="4000"/>
-            </a:lvl1pPr>
-          </a:lstStyle>
-          <a:p>
-            <a:r>
-              <a:rPr lang="en-US"/>
-              <a:t>Click to edit Master title style</a:t>
-            </a:r>
-            <a:endParaRPr lang="en-US" dirty="0"/>
-          </a:p>
-        </p:txBody>
-      </p:sp>
-      <p:sp>
-        <p:nvSpPr>
-          <p:cNvPr id="3" name="Text Placeholder 2"/>
-          <p:cNvSpPr>
-            <a:spLocks noGrp="1"/>
-          </p:cNvSpPr>
-          <p:nvPr>
-            <p:ph type="body" idx="1"/>
-          </p:nvPr>
-        </p:nvSpPr>
-        <p:spPr>
-          <a:xfrm>
-            <a:off x="1024467" y="3641725"/>
-            <a:ext cx="10490200" cy="955675"/>
-          </a:xfrm>
-        </p:spPr>
-        <p:txBody>
-          <a:bodyPr>
+          <a:bodyPr anchor="t">
             <a:normAutofit/>
           </a:bodyPr>
           <a:lstStyle>
             <a:lvl1pPr marL="0" indent="0" algn="r">
               <a:buNone/>
-              <a:defRPr sz="2200">
+              <a:defRPr sz="2000">
+                <a:solidFill>
+                  <a:schemeClr val="tx1"/>
+                </a:solidFill>
+              </a:defRPr>
+            </a:lvl1pPr>
+            <a:lvl2pPr marL="457200" indent="0">
+              <a:buNone/>
+              <a:defRPr sz="1800">
                 <a:solidFill>
                   <a:schemeClr val="tx1">
                     <a:tint val="75000"/>
                   </a:schemeClr>
                 </a:solidFill>
               </a:defRPr>
-            </a:lvl1pPr>
-            <a:lvl2pPr marL="457200" indent="0">
-              <a:buNone/>
-              <a:defRPr sz="2000">
+            </a:lvl2pPr>
+            <a:lvl3pPr marL="914400" indent="0">
+              <a:buNone/>
+              <a:defRPr sz="1600">
                 <a:solidFill>
                   <a:schemeClr val="tx1">
                     <a:tint val="75000"/>
                   </a:schemeClr>
                 </a:solidFill>
               </a:defRPr>
-            </a:lvl2pPr>
-            <a:lvl3pPr marL="914400" indent="0">
-              <a:buNone/>
-              <a:defRPr sz="1800">
+            </a:lvl3pPr>
+            <a:lvl4pPr marL="1371600" indent="0">
+              <a:buNone/>
+              <a:defRPr sz="1400">
                 <a:solidFill>
                   <a:schemeClr val="tx1">
                     <a:tint val="75000"/>
                   </a:schemeClr>
                 </a:solidFill>
               </a:defRPr>
-            </a:lvl3pPr>
-            <a:lvl4pPr marL="1371600" indent="0">
-              <a:buNone/>
-              <a:defRPr sz="1600">
+            </a:lvl4pPr>
+            <a:lvl5pPr marL="1828800" indent="0">
+              <a:buNone/>
+              <a:defRPr sz="1400">
                 <a:solidFill>
                   <a:schemeClr val="tx1">
                     <a:tint val="75000"/>
                   </a:schemeClr>
                 </a:solidFill>
               </a:defRPr>
-            </a:lvl4pPr>
-            <a:lvl5pPr marL="1828800" indent="0">
-              <a:buNone/>
-              <a:defRPr sz="1600">
+            </a:lvl5pPr>
+            <a:lvl6pPr marL="2286000" indent="0">
+              <a:buNone/>
+              <a:defRPr sz="1400">
                 <a:solidFill>
                   <a:schemeClr val="tx1">
                     <a:tint val="75000"/>
                   </a:schemeClr>
                 </a:solidFill>
               </a:defRPr>
-            </a:lvl5pPr>
-            <a:lvl6pPr marL="2286000" indent="0">
-              <a:buNone/>
-              <a:defRPr sz="1600">
+            </a:lvl6pPr>
+            <a:lvl7pPr marL="2743200" indent="0">
+              <a:buNone/>
+              <a:defRPr sz="1400">
                 <a:solidFill>
                   <a:schemeClr val="tx1">
                     <a:tint val="75000"/>
                   </a:schemeClr>
                 </a:solidFill>
               </a:defRPr>
-            </a:lvl6pPr>
-            <a:lvl7pPr marL="2743200" indent="0">
-              <a:buNone/>
-              <a:defRPr sz="1600">
+            </a:lvl7pPr>
+            <a:lvl8pPr marL="3200400" indent="0">
+              <a:buNone/>
+              <a:defRPr sz="1400">
                 <a:solidFill>
                   <a:schemeClr val="tx1">
                     <a:tint val="75000"/>
                   </a:schemeClr>
                 </a:solidFill>
               </a:defRPr>
-            </a:lvl7pPr>
-            <a:lvl8pPr marL="3200400" indent="0">
-              <a:buNone/>
-              <a:defRPr sz="1600">
+            </a:lvl8pPr>
+            <a:lvl9pPr marL="3657600" indent="0">
+              <a:buNone/>
+              <a:defRPr sz="1400">
                 <a:solidFill>
                   <a:schemeClr val="tx1">
                     <a:tint val="75000"/>
                   </a:schemeClr>
                 </a:solidFill>
               </a:defRPr>
-            </a:lvl8pPr>
-            <a:lvl9pPr marL="3657600" indent="0">
-              <a:buNone/>
-              <a:defRPr sz="1600">
-                <a:solidFill>
-                  <a:schemeClr val="tx1">
-                    <a:tint val="75000"/>
-                  </a:schemeClr>
-                </a:solidFill>
-              </a:defRPr>
             </a:lvl9pPr>
           </a:lstStyle>
           <a:p>
@@ -3940,19 +3784,10 @@
             <p:ph type="dt" sz="half" idx="10"/>
           </p:nvPr>
         </p:nvSpPr>
-        <p:spPr>
-          <a:xfrm>
-            <a:off x="7814452" y="381000"/>
-            <a:ext cx="2910840" cy="365125"/>
-          </a:xfrm>
-        </p:spPr>
+        <p:spPr/>
         <p:txBody>
           <a:bodyPr/>
-          <a:lstStyle>
-            <a:lvl1pPr algn="r">
-              <a:defRPr/>
-            </a:lvl1pPr>
-          </a:lstStyle>
+          <a:lstStyle/>
           <a:p>
             <a:fld id="{462A01D3-2F6B-42A1-9A4B-0488DC6A75CB}" type="datetimeFigureOut">
               <a:rPr lang="en-US" smtClean="0"/>
@@ -3972,12 +3807,7 @@
             <p:ph type="ftr" sz="quarter" idx="11"/>
           </p:nvPr>
         </p:nvSpPr>
-        <p:spPr>
-          <a:xfrm>
-            <a:off x="685800" y="381001"/>
-            <a:ext cx="6991492" cy="364065"/>
-          </a:xfrm>
-        </p:spPr>
+        <p:spPr/>
         <p:txBody>
           <a:bodyPr/>
           <a:lstStyle/>
@@ -3996,12 +3826,7 @@
             <p:ph type="sldNum" sz="quarter" idx="12"/>
           </p:nvPr>
         </p:nvSpPr>
-        <p:spPr>
-          <a:xfrm>
-            <a:off x="10862452" y="381000"/>
-            <a:ext cx="643748" cy="365125"/>
-          </a:xfrm>
-        </p:spPr>
+        <p:spPr/>
         <p:txBody>
           <a:bodyPr/>
           <a:lstStyle/>
@@ -4017,13 +3842,16 @@
     </p:spTree>
     <p:extLst>
       <p:ext uri="{BB962C8B-B14F-4D97-AF65-F5344CB8AC3E}">
-        <p14:creationId xmlns:p14="http://schemas.microsoft.com/office/powerpoint/2010/main" val="2283227317"/>
+        <p14:creationId xmlns:p14="http://schemas.microsoft.com/office/powerpoint/2010/main" val="678520438"/>
       </p:ext>
     </p:extLst>
   </p:cSld>
   <p:clrMapOvr>
     <a:masterClrMapping/>
   </p:clrMapOvr>
+  <p:transition>
+    <p:fade/>
+  </p:transition>
 </p:sldLayout>
 </file>
 
@@ -4054,7 +3882,12 @@
             <p:ph type="title"/>
           </p:nvPr>
         </p:nvSpPr>
-        <p:spPr/>
+        <p:spPr>
+          <a:xfrm>
+            <a:off x="1484311" y="685800"/>
+            <a:ext cx="10018713" cy="1752599"/>
+          </a:xfrm>
+        </p:spPr>
         <p:txBody>
           <a:bodyPr/>
           <a:lstStyle/>
@@ -4079,13 +3912,43 @@
         </p:nvSpPr>
         <p:spPr>
           <a:xfrm>
-            <a:off x="685800" y="2194559"/>
-            <a:ext cx="5334000" cy="4024125"/>
+            <a:off x="1484312" y="2666999"/>
+            <a:ext cx="4895055" cy="3124201"/>
           </a:xfrm>
         </p:spPr>
         <p:txBody>
-          <a:bodyPr/>
-          <a:lstStyle/>
+          <a:bodyPr>
+            <a:normAutofit/>
+          </a:bodyPr>
+          <a:lstStyle>
+            <a:lvl1pPr>
+              <a:defRPr sz="1800"/>
+            </a:lvl1pPr>
+            <a:lvl2pPr>
+              <a:defRPr sz="1600"/>
+            </a:lvl2pPr>
+            <a:lvl3pPr>
+              <a:defRPr sz="1400"/>
+            </a:lvl3pPr>
+            <a:lvl4pPr>
+              <a:defRPr sz="1200"/>
+            </a:lvl4pPr>
+            <a:lvl5pPr>
+              <a:defRPr sz="1200"/>
+            </a:lvl5pPr>
+            <a:lvl6pPr>
+              <a:defRPr sz="1200"/>
+            </a:lvl6pPr>
+            <a:lvl7pPr>
+              <a:defRPr sz="1200"/>
+            </a:lvl7pPr>
+            <a:lvl8pPr>
+              <a:defRPr sz="1200"/>
+            </a:lvl8pPr>
+            <a:lvl9pPr>
+              <a:defRPr sz="1200"/>
+            </a:lvl9pPr>
+          </a:lstStyle>
           <a:p>
             <a:pPr lvl="0"/>
             <a:r>
@@ -4136,13 +3999,43 @@
         </p:nvSpPr>
         <p:spPr>
           <a:xfrm>
-            <a:off x="6172200" y="2194559"/>
-            <a:ext cx="5334000" cy="4024125"/>
+            <a:off x="6607967" y="2667000"/>
+            <a:ext cx="4895056" cy="3124200"/>
           </a:xfrm>
         </p:spPr>
         <p:txBody>
-          <a:bodyPr/>
-          <a:lstStyle/>
+          <a:bodyPr>
+            <a:normAutofit/>
+          </a:bodyPr>
+          <a:lstStyle>
+            <a:lvl1pPr>
+              <a:defRPr sz="1800"/>
+            </a:lvl1pPr>
+            <a:lvl2pPr>
+              <a:defRPr sz="1600"/>
+            </a:lvl2pPr>
+            <a:lvl3pPr>
+              <a:defRPr sz="1400"/>
+            </a:lvl3pPr>
+            <a:lvl4pPr>
+              <a:defRPr sz="1200"/>
+            </a:lvl4pPr>
+            <a:lvl5pPr>
+              <a:defRPr sz="1200"/>
+            </a:lvl5pPr>
+            <a:lvl6pPr>
+              <a:defRPr sz="1200"/>
+            </a:lvl6pPr>
+            <a:lvl7pPr>
+              <a:defRPr sz="1200"/>
+            </a:lvl7pPr>
+            <a:lvl8pPr>
+              <a:defRPr sz="1200"/>
+            </a:lvl8pPr>
+            <a:lvl9pPr>
+              <a:defRPr sz="1200"/>
+            </a:lvl9pPr>
+          </a:lstStyle>
           <a:p>
             <a:pPr lvl="0"/>
             <a:r>
@@ -4249,13 +4142,16 @@
     </p:spTree>
     <p:extLst>
       <p:ext uri="{BB962C8B-B14F-4D97-AF65-F5344CB8AC3E}">
-        <p14:creationId xmlns:p14="http://schemas.microsoft.com/office/powerpoint/2010/main" val="1008094104"/>
+        <p14:creationId xmlns:p14="http://schemas.microsoft.com/office/powerpoint/2010/main" val="2955124496"/>
       </p:ext>
     </p:extLst>
   </p:cSld>
   <p:clrMapOvr>
     <a:masterClrMapping/>
   </p:clrMapOvr>
+  <p:transition>
+    <p:fade/>
+  </p:transition>
 </p:sldLayout>
 </file>
 
@@ -4286,50 +4182,211 @@
             <p:ph type="title"/>
           </p:nvPr>
         </p:nvSpPr>
+        <p:spPr/>
+        <p:txBody>
+          <a:bodyPr/>
+          <a:lstStyle>
+            <a:lvl1pPr>
+              <a:defRPr/>
+            </a:lvl1pPr>
+          </a:lstStyle>
+          <a:p>
+            <a:r>
+              <a:rPr lang="en-US"/>
+              <a:t>Click to edit Master title style</a:t>
+            </a:r>
+            <a:endParaRPr lang="en-US" dirty="0"/>
+          </a:p>
+        </p:txBody>
+      </p:sp>
+      <p:sp>
+        <p:nvSpPr>
+          <p:cNvPr id="3" name="Text Placeholder 2"/>
+          <p:cNvSpPr>
+            <a:spLocks noGrp="1"/>
+          </p:cNvSpPr>
+          <p:nvPr>
+            <p:ph type="body" idx="1"/>
+          </p:nvPr>
+        </p:nvSpPr>
         <p:spPr>
           <a:xfrm>
-            <a:off x="2895600" y="762000"/>
-            <a:ext cx="8610600" cy="1295400"/>
+            <a:off x="1772179" y="2658533"/>
+            <a:ext cx="4607188" cy="576262"/>
           </a:xfrm>
         </p:spPr>
         <p:txBody>
-          <a:bodyPr/>
-          <a:lstStyle/>
-          <a:p>
+          <a:bodyPr anchor="b">
+            <a:noAutofit/>
+          </a:bodyPr>
+          <a:lstStyle>
+            <a:lvl1pPr marL="0" indent="0">
+              <a:buNone/>
+              <a:defRPr sz="2800" b="0">
+                <a:solidFill>
+                  <a:schemeClr val="accent1">
+                    <a:lumMod val="75000"/>
+                  </a:schemeClr>
+                </a:solidFill>
+              </a:defRPr>
+            </a:lvl1pPr>
+            <a:lvl2pPr marL="457200" indent="0">
+              <a:buNone/>
+              <a:defRPr sz="2000" b="1"/>
+            </a:lvl2pPr>
+            <a:lvl3pPr marL="914400" indent="0">
+              <a:buNone/>
+              <a:defRPr sz="1800" b="1"/>
+            </a:lvl3pPr>
+            <a:lvl4pPr marL="1371600" indent="0">
+              <a:buNone/>
+              <a:defRPr sz="1600" b="1"/>
+            </a:lvl4pPr>
+            <a:lvl5pPr marL="1828800" indent="0">
+              <a:buNone/>
+              <a:defRPr sz="1600" b="1"/>
+            </a:lvl5pPr>
+            <a:lvl6pPr marL="2286000" indent="0">
+              <a:buNone/>
+              <a:defRPr sz="1600" b="1"/>
+            </a:lvl6pPr>
+            <a:lvl7pPr marL="2743200" indent="0">
+              <a:buNone/>
+              <a:defRPr sz="1600" b="1"/>
+            </a:lvl7pPr>
+            <a:lvl8pPr marL="3200400" indent="0">
+              <a:buNone/>
+              <a:defRPr sz="1600" b="1"/>
+            </a:lvl8pPr>
+            <a:lvl9pPr marL="3657600" indent="0">
+              <a:buNone/>
+              <a:defRPr sz="1600" b="1"/>
+            </a:lvl9pPr>
+          </a:lstStyle>
+          <a:p>
+            <a:pPr lvl="0"/>
             <a:r>
               <a:rPr lang="en-US"/>
-              <a:t>Click to edit Master title style</a:t>
-            </a:r>
-            <a:endParaRPr lang="en-US" dirty="0"/>
-          </a:p>
-        </p:txBody>
-      </p:sp>
-      <p:sp>
-        <p:nvSpPr>
-          <p:cNvPr id="3" name="Text Placeholder 2"/>
-          <p:cNvSpPr>
-            <a:spLocks noGrp="1"/>
-          </p:cNvSpPr>
-          <p:nvPr>
-            <p:ph type="body" idx="1"/>
+              <a:t>Click to edit Master text styles</a:t>
+            </a:r>
+          </a:p>
+        </p:txBody>
+      </p:sp>
+      <p:sp>
+        <p:nvSpPr>
+          <p:cNvPr id="4" name="Content Placeholder 3"/>
+          <p:cNvSpPr>
+            <a:spLocks noGrp="1"/>
+          </p:cNvSpPr>
+          <p:nvPr>
+            <p:ph sz="half" idx="2"/>
           </p:nvPr>
         </p:nvSpPr>
         <p:spPr>
           <a:xfrm>
-            <a:off x="914409" y="2183802"/>
-            <a:ext cx="5079991" cy="823912"/>
+            <a:off x="1484311" y="3335337"/>
+            <a:ext cx="4895056" cy="2455862"/>
           </a:xfrm>
         </p:spPr>
         <p:txBody>
-          <a:bodyPr anchor="b">
+          <a:bodyPr anchor="t">
             <a:normAutofit/>
           </a:bodyPr>
           <a:lstStyle>
+            <a:lvl1pPr>
+              <a:defRPr sz="1800"/>
+            </a:lvl1pPr>
+            <a:lvl2pPr>
+              <a:defRPr sz="1600"/>
+            </a:lvl2pPr>
+            <a:lvl3pPr>
+              <a:defRPr sz="1400"/>
+            </a:lvl3pPr>
+            <a:lvl4pPr>
+              <a:defRPr sz="1200"/>
+            </a:lvl4pPr>
+            <a:lvl5pPr>
+              <a:defRPr sz="1200"/>
+            </a:lvl5pPr>
+            <a:lvl6pPr>
+              <a:defRPr sz="1200"/>
+            </a:lvl6pPr>
+            <a:lvl7pPr>
+              <a:defRPr sz="1200"/>
+            </a:lvl7pPr>
+            <a:lvl8pPr>
+              <a:defRPr sz="1200"/>
+            </a:lvl8pPr>
+            <a:lvl9pPr>
+              <a:defRPr sz="1200"/>
+            </a:lvl9pPr>
+          </a:lstStyle>
+          <a:p>
+            <a:pPr lvl="0"/>
+            <a:r>
+              <a:rPr lang="en-US"/>
+              <a:t>Click to edit Master text styles</a:t>
+            </a:r>
+          </a:p>
+          <a:p>
+            <a:pPr lvl="1"/>
+            <a:r>
+              <a:rPr lang="en-US"/>
+              <a:t>Second level</a:t>
+            </a:r>
+          </a:p>
+          <a:p>
+            <a:pPr lvl="2"/>
+            <a:r>
+              <a:rPr lang="en-US"/>
+              <a:t>Third level</a:t>
+            </a:r>
+          </a:p>
+          <a:p>
+            <a:pPr lvl="3"/>
+            <a:r>
+              <a:rPr lang="en-US"/>
+              <a:t>Fourth level</a:t>
+            </a:r>
+          </a:p>
+          <a:p>
+            <a:pPr lvl="4"/>
+            <a:r>
+              <a:rPr lang="en-US"/>
+              <a:t>Fifth level</a:t>
+            </a:r>
+            <a:endParaRPr lang="en-US" dirty="0"/>
+          </a:p>
+        </p:txBody>
+      </p:sp>
+      <p:sp>
+        <p:nvSpPr>
+          <p:cNvPr id="5" name="Text Placeholder 4"/>
+          <p:cNvSpPr>
+            <a:spLocks noGrp="1"/>
+          </p:cNvSpPr>
+          <p:nvPr>
+            <p:ph type="body" sz="quarter" idx="3"/>
+          </p:nvPr>
+        </p:nvSpPr>
+        <p:spPr>
+          <a:xfrm>
+            <a:off x="6880487" y="2667000"/>
+            <a:ext cx="4622537" cy="576262"/>
+          </a:xfrm>
+        </p:spPr>
+        <p:txBody>
+          <a:bodyPr anchor="b">
+            <a:noAutofit/>
+          </a:bodyPr>
+          <a:lstStyle>
             <a:lvl1pPr marL="0" indent="0">
               <a:buNone/>
               <a:defRPr sz="2800" b="0">
                 <a:solidFill>
-                  <a:schemeClr val="tx1"/>
+                  <a:schemeClr val="accent1">
+                    <a:lumMod val="75000"/>
+                  </a:schemeClr>
                 </a:solidFill>
               </a:defRPr>
             </a:lvl1pPr>
@@ -4377,151 +4434,53 @@
       </p:sp>
       <p:sp>
         <p:nvSpPr>
-          <p:cNvPr id="4" name="Content Placeholder 3"/>
-          <p:cNvSpPr>
-            <a:spLocks noGrp="1"/>
-          </p:cNvSpPr>
-          <p:nvPr>
-            <p:ph sz="half" idx="2"/>
+          <p:cNvPr id="6" name="Content Placeholder 5"/>
+          <p:cNvSpPr>
+            <a:spLocks noGrp="1"/>
+          </p:cNvSpPr>
+          <p:nvPr>
+            <p:ph sz="quarter" idx="4"/>
           </p:nvPr>
         </p:nvSpPr>
         <p:spPr>
           <a:xfrm>
-            <a:off x="685800" y="3132666"/>
-            <a:ext cx="5311775" cy="3086019"/>
+            <a:off x="6607967" y="3335337"/>
+            <a:ext cx="4895056" cy="2455862"/>
           </a:xfrm>
         </p:spPr>
         <p:txBody>
-          <a:bodyPr/>
-          <a:lstStyle/>
-          <a:p>
-            <a:pPr lvl="0"/>
-            <a:r>
-              <a:rPr lang="en-US"/>
-              <a:t>Click to edit Master text styles</a:t>
-            </a:r>
-          </a:p>
-          <a:p>
-            <a:pPr lvl="1"/>
-            <a:r>
-              <a:rPr lang="en-US"/>
-              <a:t>Second level</a:t>
-            </a:r>
-          </a:p>
-          <a:p>
-            <a:pPr lvl="2"/>
-            <a:r>
-              <a:rPr lang="en-US"/>
-              <a:t>Third level</a:t>
-            </a:r>
-          </a:p>
-          <a:p>
-            <a:pPr lvl="3"/>
-            <a:r>
-              <a:rPr lang="en-US"/>
-              <a:t>Fourth level</a:t>
-            </a:r>
-          </a:p>
-          <a:p>
-            <a:pPr lvl="4"/>
-            <a:r>
-              <a:rPr lang="en-US"/>
-              <a:t>Fifth level</a:t>
-            </a:r>
-            <a:endParaRPr lang="en-US" dirty="0"/>
-          </a:p>
-        </p:txBody>
-      </p:sp>
-      <p:sp>
-        <p:nvSpPr>
-          <p:cNvPr id="5" name="Text Placeholder 4"/>
-          <p:cNvSpPr>
-            <a:spLocks noGrp="1"/>
-          </p:cNvSpPr>
-          <p:nvPr>
-            <p:ph type="body" sz="quarter" idx="3"/>
-          </p:nvPr>
-        </p:nvSpPr>
-        <p:spPr>
-          <a:xfrm>
-            <a:off x="6400800" y="2183802"/>
-            <a:ext cx="5105400" cy="823912"/>
-          </a:xfrm>
-        </p:spPr>
-        <p:txBody>
-          <a:bodyPr anchor="b">
+          <a:bodyPr anchor="t">
             <a:normAutofit/>
           </a:bodyPr>
           <a:lstStyle>
-            <a:lvl1pPr marL="0" indent="0">
-              <a:buNone/>
-              <a:defRPr sz="2800" b="0">
-                <a:solidFill>
-                  <a:schemeClr val="tx1"/>
-                </a:solidFill>
-              </a:defRPr>
+            <a:lvl1pPr>
+              <a:defRPr sz="1800"/>
             </a:lvl1pPr>
-            <a:lvl2pPr marL="457200" indent="0">
-              <a:buNone/>
-              <a:defRPr sz="2000" b="1"/>
+            <a:lvl2pPr>
+              <a:defRPr sz="1600"/>
             </a:lvl2pPr>
-            <a:lvl3pPr marL="914400" indent="0">
-              <a:buNone/>
-              <a:defRPr sz="1800" b="1"/>
+            <a:lvl3pPr>
+              <a:defRPr sz="1400"/>
             </a:lvl3pPr>
-            <a:lvl4pPr marL="1371600" indent="0">
-              <a:buNone/>
-              <a:defRPr sz="1600" b="1"/>
+            <a:lvl4pPr>
+              <a:defRPr sz="1200"/>
             </a:lvl4pPr>
-            <a:lvl5pPr marL="1828800" indent="0">
-              <a:buNone/>
-              <a:defRPr sz="1600" b="1"/>
+            <a:lvl5pPr>
+              <a:defRPr sz="1200"/>
             </a:lvl5pPr>
-            <a:lvl6pPr marL="2286000" indent="0">
-              <a:buNone/>
-              <a:defRPr sz="1600" b="1"/>
+            <a:lvl6pPr>
+              <a:defRPr sz="1200"/>
             </a:lvl6pPr>
-            <a:lvl7pPr marL="2743200" indent="0">
-              <a:buNone/>
-              <a:defRPr sz="1600" b="1"/>
+            <a:lvl7pPr>
+              <a:defRPr sz="1200"/>
             </a:lvl7pPr>
-            <a:lvl8pPr marL="3200400" indent="0">
-              <a:buNone/>
-              <a:defRPr sz="1600" b="1"/>
+            <a:lvl8pPr>
+              <a:defRPr sz="1200"/>
             </a:lvl8pPr>
-            <a:lvl9pPr marL="3657600" indent="0">
-              <a:buNone/>
-              <a:defRPr sz="1600" b="1"/>
+            <a:lvl9pPr>
+              <a:defRPr sz="1200"/>
             </a:lvl9pPr>
           </a:lstStyle>
-          <a:p>
-            <a:pPr lvl="0"/>
-            <a:r>
-              <a:rPr lang="en-US"/>
-              <a:t>Click to edit Master text styles</a:t>
-            </a:r>
-          </a:p>
-        </p:txBody>
-      </p:sp>
-      <p:sp>
-        <p:nvSpPr>
-          <p:cNvPr id="6" name="Content Placeholder 5"/>
-          <p:cNvSpPr>
-            <a:spLocks noGrp="1"/>
-          </p:cNvSpPr>
-          <p:nvPr>
-            <p:ph sz="quarter" idx="4"/>
-          </p:nvPr>
-        </p:nvSpPr>
-        <p:spPr>
-          <a:xfrm>
-            <a:off x="6172200" y="3132666"/>
-            <a:ext cx="5334000" cy="3086019"/>
-          </a:xfrm>
-        </p:spPr>
-        <p:txBody>
-          <a:bodyPr/>
-          <a:lstStyle/>
           <a:p>
             <a:pPr lvl="0"/>
             <a:r>
@@ -4628,13 +4587,16 @@
     </p:spTree>
     <p:extLst>
       <p:ext uri="{BB962C8B-B14F-4D97-AF65-F5344CB8AC3E}">
-        <p14:creationId xmlns:p14="http://schemas.microsoft.com/office/powerpoint/2010/main" val="1500067267"/>
+        <p14:creationId xmlns:p14="http://schemas.microsoft.com/office/powerpoint/2010/main" val="31897507"/>
       </p:ext>
     </p:extLst>
   </p:cSld>
   <p:clrMapOvr>
     <a:masterClrMapping/>
   </p:clrMapOvr>
+  <p:transition>
+    <p:fade/>
+  </p:transition>
 </p:sldLayout>
 </file>
 
@@ -4746,13 +4708,16 @@
     </p:spTree>
     <p:extLst>
       <p:ext uri="{BB962C8B-B14F-4D97-AF65-F5344CB8AC3E}">
-        <p14:creationId xmlns:p14="http://schemas.microsoft.com/office/powerpoint/2010/main" val="2515493349"/>
+        <p14:creationId xmlns:p14="http://schemas.microsoft.com/office/powerpoint/2010/main" val="4288321698"/>
       </p:ext>
     </p:extLst>
   </p:cSld>
   <p:clrMapOvr>
     <a:masterClrMapping/>
   </p:clrMapOvr>
+  <p:transition>
+    <p:fade/>
+  </p:transition>
 </p:sldLayout>
 </file>
 
@@ -4841,13 +4806,16 @@
     </p:spTree>
     <p:extLst>
       <p:ext uri="{BB962C8B-B14F-4D97-AF65-F5344CB8AC3E}">
-        <p14:creationId xmlns:p14="http://schemas.microsoft.com/office/powerpoint/2010/main" val="1757458889"/>
+        <p14:creationId xmlns:p14="http://schemas.microsoft.com/office/powerpoint/2010/main" val="1436791961"/>
       </p:ext>
     </p:extLst>
   </p:cSld>
   <p:clrMapOvr>
     <a:masterClrMapping/>
   </p:clrMapOvr>
+  <p:transition>
+    <p:fade/>
+  </p:transition>
 </p:sldLayout>
 </file>
 
@@ -4880,15 +4848,17 @@
         </p:nvSpPr>
         <p:spPr>
           <a:xfrm>
-            <a:off x="685800" y="1524000"/>
-            <a:ext cx="4114800" cy="1600200"/>
+            <a:off x="1484312" y="1600200"/>
+            <a:ext cx="3549121" cy="1371600"/>
           </a:xfrm>
         </p:spPr>
         <p:txBody>
-          <a:bodyPr anchor="b"/>
+          <a:bodyPr anchor="b">
+            <a:normAutofit/>
+          </a:bodyPr>
           <a:lstStyle>
-            <a:lvl1pPr algn="l">
-              <a:defRPr sz="3200"/>
+            <a:lvl1pPr algn="ctr">
+              <a:defRPr sz="2400" b="0"/>
             </a:lvl1pPr>
           </a:lstStyle>
           <a:p>
@@ -4912,13 +4882,43 @@
         </p:nvSpPr>
         <p:spPr>
           <a:xfrm>
-            <a:off x="4995582" y="746759"/>
-            <a:ext cx="6510618" cy="5471925"/>
+            <a:off x="5262033" y="685799"/>
+            <a:ext cx="6240990" cy="5105401"/>
           </a:xfrm>
         </p:spPr>
         <p:txBody>
-          <a:bodyPr anchor="ctr"/>
-          <a:lstStyle/>
+          <a:bodyPr anchor="ctr">
+            <a:normAutofit/>
+          </a:bodyPr>
+          <a:lstStyle>
+            <a:lvl1pPr>
+              <a:defRPr sz="2000"/>
+            </a:lvl1pPr>
+            <a:lvl2pPr>
+              <a:defRPr sz="1800"/>
+            </a:lvl2pPr>
+            <a:lvl3pPr>
+              <a:defRPr sz="1600"/>
+            </a:lvl3pPr>
+            <a:lvl4pPr>
+              <a:defRPr sz="1400"/>
+            </a:lvl4pPr>
+            <a:lvl5pPr>
+              <a:defRPr sz="1400"/>
+            </a:lvl5pPr>
+            <a:lvl6pPr>
+              <a:defRPr sz="1400"/>
+            </a:lvl6pPr>
+            <a:lvl7pPr>
+              <a:defRPr sz="1400"/>
+            </a:lvl7pPr>
+            <a:lvl8pPr>
+              <a:defRPr sz="1400"/>
+            </a:lvl8pPr>
+            <a:lvl9pPr>
+              <a:defRPr sz="1400"/>
+            </a:lvl9pPr>
+          </a:lstStyle>
           <a:p>
             <a:pPr lvl="0"/>
             <a:r>
@@ -4969,48 +4969,50 @@
         </p:nvSpPr>
         <p:spPr>
           <a:xfrm>
-            <a:off x="685800" y="3124199"/>
-            <a:ext cx="4114800" cy="3094485"/>
+            <a:off x="1484312" y="2971800"/>
+            <a:ext cx="3549121" cy="1828800"/>
           </a:xfrm>
         </p:spPr>
         <p:txBody>
-          <a:bodyPr/>
+          <a:bodyPr>
+            <a:normAutofit/>
+          </a:bodyPr>
           <a:lstStyle>
-            <a:lvl1pPr marL="0" indent="0">
+            <a:lvl1pPr marL="0" indent="0" algn="ctr">
               <a:buNone/>
               <a:defRPr sz="1600"/>
             </a:lvl1pPr>
             <a:lvl2pPr marL="457200" indent="0">
               <a:buNone/>
-              <a:defRPr sz="1400"/>
+              <a:defRPr sz="1200"/>
             </a:lvl2pPr>
             <a:lvl3pPr marL="914400" indent="0">
               <a:buNone/>
-              <a:defRPr sz="1200"/>
+              <a:defRPr sz="1000"/>
             </a:lvl3pPr>
             <a:lvl4pPr marL="1371600" indent="0">
               <a:buNone/>
-              <a:defRPr sz="1000"/>
+              <a:defRPr sz="900"/>
             </a:lvl4pPr>
             <a:lvl5pPr marL="1828800" indent="0">
               <a:buNone/>
-              <a:defRPr sz="1000"/>
+              <a:defRPr sz="900"/>
             </a:lvl5pPr>
             <a:lvl6pPr marL="2286000" indent="0">
               <a:buNone/>
-              <a:defRPr sz="1000"/>
+              <a:defRPr sz="900"/>
             </a:lvl6pPr>
             <a:lvl7pPr marL="2743200" indent="0">
               <a:buNone/>
-              <a:defRPr sz="1000"/>
+              <a:defRPr sz="900"/>
             </a:lvl7pPr>
             <a:lvl8pPr marL="3200400" indent="0">
               <a:buNone/>
-              <a:defRPr sz="1000"/>
+              <a:defRPr sz="900"/>
             </a:lvl8pPr>
             <a:lvl9pPr marL="3657600" indent="0">
               <a:buNone/>
-              <a:defRPr sz="1000"/>
+              <a:defRPr sz="900"/>
             </a:lvl9pPr>
           </a:lstStyle>
           <a:p>
@@ -5090,13 +5092,16 @@
     </p:spTree>
     <p:extLst>
       <p:ext uri="{BB962C8B-B14F-4D97-AF65-F5344CB8AC3E}">
-        <p14:creationId xmlns:p14="http://schemas.microsoft.com/office/powerpoint/2010/main" val="2332652035"/>
+        <p14:creationId xmlns:p14="http://schemas.microsoft.com/office/powerpoint/2010/main" val="3551822850"/>
       </p:ext>
     </p:extLst>
   </p:cSld>
   <p:clrMapOvr>
     <a:masterClrMapping/>
   </p:clrMapOvr>
+  <p:transition>
+    <p:fade/>
+  </p:transition>
 </p:sldLayout>
 </file>
 
@@ -5129,15 +5134,17 @@
         </p:nvSpPr>
         <p:spPr>
           <a:xfrm>
-            <a:off x="685800" y="1524000"/>
-            <a:ext cx="6873240" cy="1600200"/>
+            <a:off x="1482724" y="1752599"/>
+            <a:ext cx="5426158" cy="1371600"/>
           </a:xfrm>
         </p:spPr>
         <p:txBody>
-          <a:bodyPr anchor="b"/>
+          <a:bodyPr anchor="b">
+            <a:normAutofit/>
+          </a:bodyPr>
           <a:lstStyle>
-            <a:lvl1pPr algn="l">
-              <a:defRPr sz="3200"/>
+            <a:lvl1pPr algn="ctr">
+              <a:defRPr sz="2800" b="0"/>
             </a:lvl1pPr>
           </a:lstStyle>
           <a:p>
@@ -5151,7 +5158,7 @@
       </p:sp>
       <p:sp>
         <p:nvSpPr>
-          <p:cNvPr id="3" name="Picture Placeholder 2"/>
+          <p:cNvPr id="14" name="Picture Placeholder 2"/>
           <p:cNvSpPr>
             <a:spLocks noGrp="1" noChangeAspect="1"/>
           </p:cNvSpPr>
@@ -5161,113 +5168,145 @@
         </p:nvSpPr>
         <p:spPr>
           <a:xfrm>
-            <a:off x="7861238" y="751241"/>
-            <a:ext cx="3644962" cy="5467443"/>
+            <a:off x="7594682" y="914400"/>
+            <a:ext cx="3280974" cy="4572000"/>
           </a:xfrm>
+          <a:prstGeom prst="roundRect">
+            <a:avLst>
+              <a:gd name="adj" fmla="val 4280"/>
+            </a:avLst>
+          </a:prstGeom>
+          <a:ln w="38100">
+            <a:gradFill flip="none" rotWithShape="1">
+              <a:gsLst>
+                <a:gs pos="0">
+                  <a:schemeClr val="bg2"/>
+                </a:gs>
+                <a:gs pos="100000">
+                  <a:schemeClr val="bg2">
+                    <a:lumMod val="75000"/>
+                  </a:schemeClr>
+                </a:gs>
+              </a:gsLst>
+              <a:lin ang="5400000" scaled="0"/>
+              <a:tileRect/>
+            </a:gradFill>
+          </a:ln>
+          <a:effectLst>
+            <a:innerShdw blurRad="57150" dist="38100" dir="14460000">
+              <a:srgbClr val="000000">
+                <a:alpha val="70000"/>
+              </a:srgbClr>
+            </a:innerShdw>
+          </a:effectLst>
         </p:spPr>
         <p:txBody>
-          <a:bodyPr anchor="t"/>
+          <a:bodyPr anchor="t">
+            <a:normAutofit/>
+          </a:bodyPr>
           <a:lstStyle>
-            <a:lvl1pPr marL="0" indent="0">
-              <a:buNone/>
-              <a:defRPr sz="3200"/>
-            </a:lvl1pPr>
-            <a:lvl2pPr marL="457200" indent="0">
-              <a:buNone/>
-              <a:defRPr sz="2800"/>
-            </a:lvl2pPr>
-            <a:lvl3pPr marL="914400" indent="0">
-              <a:buNone/>
-              <a:defRPr sz="2400"/>
-            </a:lvl3pPr>
-            <a:lvl4pPr marL="1371600" indent="0">
-              <a:buNone/>
-              <a:defRPr sz="2000"/>
-            </a:lvl4pPr>
-            <a:lvl5pPr marL="1828800" indent="0">
-              <a:buNone/>
-              <a:defRPr sz="2000"/>
-            </a:lvl5pPr>
-            <a:lvl6pPr marL="2286000" indent="0">
-              <a:buNone/>
-              <a:defRPr sz="2000"/>
-            </a:lvl6pPr>
-            <a:lvl7pPr marL="2743200" indent="0">
-              <a:buNone/>
-              <a:defRPr sz="2000"/>
-            </a:lvl7pPr>
-            <a:lvl8pPr marL="3200400" indent="0">
-              <a:buNone/>
-              <a:defRPr sz="2000"/>
-            </a:lvl8pPr>
-            <a:lvl9pPr marL="3657600" indent="0">
-              <a:buNone/>
-              <a:defRPr sz="2000"/>
-            </a:lvl9pPr>
-          </a:lstStyle>
-          <a:p>
-            <a:r>
-              <a:rPr lang="en-US"/>
-              <a:t>Click icon to add picture</a:t>
-            </a:r>
-            <a:endParaRPr lang="en-US" dirty="0"/>
-          </a:p>
-        </p:txBody>
-      </p:sp>
-      <p:sp>
-        <p:nvSpPr>
-          <p:cNvPr id="4" name="Text Placeholder 3"/>
-          <p:cNvSpPr>
-            <a:spLocks noGrp="1"/>
-          </p:cNvSpPr>
-          <p:nvPr>
-            <p:ph type="body" sz="half" idx="2"/>
-          </p:nvPr>
-        </p:nvSpPr>
-        <p:spPr>
-          <a:xfrm>
-            <a:off x="685800" y="3124199"/>
-            <a:ext cx="6873240" cy="3094485"/>
-          </a:xfrm>
-        </p:spPr>
-        <p:txBody>
-          <a:bodyPr/>
-          <a:lstStyle>
-            <a:lvl1pPr marL="0" indent="0">
+            <a:lvl1pPr marL="0" indent="0" algn="ctr">
               <a:buNone/>
               <a:defRPr sz="1600"/>
             </a:lvl1pPr>
             <a:lvl2pPr marL="457200" indent="0">
               <a:buNone/>
-              <a:defRPr sz="1400"/>
+              <a:defRPr sz="1600"/>
             </a:lvl2pPr>
             <a:lvl3pPr marL="914400" indent="0">
               <a:buNone/>
-              <a:defRPr sz="1200"/>
+              <a:defRPr sz="1600"/>
             </a:lvl3pPr>
             <a:lvl4pPr marL="1371600" indent="0">
               <a:buNone/>
-              <a:defRPr sz="1000"/>
+              <a:defRPr sz="1600"/>
             </a:lvl4pPr>
             <a:lvl5pPr marL="1828800" indent="0">
               <a:buNone/>
-              <a:defRPr sz="1000"/>
+              <a:defRPr sz="1600"/>
             </a:lvl5pPr>
             <a:lvl6pPr marL="2286000" indent="0">
               <a:buNone/>
-              <a:defRPr sz="1000"/>
+              <a:defRPr sz="1600"/>
             </a:lvl6pPr>
             <a:lvl7pPr marL="2743200" indent="0">
               <a:buNone/>
-              <a:defRPr sz="1000"/>
+              <a:defRPr sz="1600"/>
             </a:lvl7pPr>
             <a:lvl8pPr marL="3200400" indent="0">
               <a:buNone/>
-              <a:defRPr sz="1000"/>
+              <a:defRPr sz="1600"/>
             </a:lvl8pPr>
             <a:lvl9pPr marL="3657600" indent="0">
               <a:buNone/>
+              <a:defRPr sz="1600"/>
+            </a:lvl9pPr>
+          </a:lstStyle>
+          <a:p>
+            <a:r>
+              <a:rPr lang="en-US"/>
+              <a:t>Click icon to add picture</a:t>
+            </a:r>
+            <a:endParaRPr lang="en-US" dirty="0"/>
+          </a:p>
+        </p:txBody>
+      </p:sp>
+      <p:sp>
+        <p:nvSpPr>
+          <p:cNvPr id="4" name="Text Placeholder 3"/>
+          <p:cNvSpPr>
+            <a:spLocks noGrp="1"/>
+          </p:cNvSpPr>
+          <p:nvPr>
+            <p:ph type="body" sz="half" idx="2"/>
+          </p:nvPr>
+        </p:nvSpPr>
+        <p:spPr>
+          <a:xfrm>
+            <a:off x="1482724" y="3124199"/>
+            <a:ext cx="5426158" cy="1828800"/>
+          </a:xfrm>
+        </p:spPr>
+        <p:txBody>
+          <a:bodyPr>
+            <a:normAutofit/>
+          </a:bodyPr>
+          <a:lstStyle>
+            <a:lvl1pPr marL="0" indent="0" algn="ctr">
+              <a:buNone/>
+              <a:defRPr sz="1800"/>
+            </a:lvl1pPr>
+            <a:lvl2pPr marL="457200" indent="0">
+              <a:buNone/>
+              <a:defRPr sz="1200"/>
+            </a:lvl2pPr>
+            <a:lvl3pPr marL="914400" indent="0">
+              <a:buNone/>
               <a:defRPr sz="1000"/>
+            </a:lvl3pPr>
+            <a:lvl4pPr marL="1371600" indent="0">
+              <a:buNone/>
+              <a:defRPr sz="900"/>
+            </a:lvl4pPr>
+            <a:lvl5pPr marL="1828800" indent="0">
+              <a:buNone/>
+              <a:defRPr sz="900"/>
+            </a:lvl5pPr>
+            <a:lvl6pPr marL="2286000" indent="0">
+              <a:buNone/>
+              <a:defRPr sz="900"/>
+            </a:lvl6pPr>
+            <a:lvl7pPr marL="2743200" indent="0">
+              <a:buNone/>
+              <a:defRPr sz="900"/>
+            </a:lvl7pPr>
+            <a:lvl8pPr marL="3200400" indent="0">
+              <a:buNone/>
+              <a:defRPr sz="900"/>
+            </a:lvl8pPr>
+            <a:lvl9pPr marL="3657600" indent="0">
+              <a:buNone/>
+              <a:defRPr sz="900"/>
             </a:lvl9pPr>
           </a:lstStyle>
           <a:p>
@@ -5347,13 +5386,16 @@
     </p:spTree>
     <p:extLst>
       <p:ext uri="{BB962C8B-B14F-4D97-AF65-F5344CB8AC3E}">
-        <p14:creationId xmlns:p14="http://schemas.microsoft.com/office/powerpoint/2010/main" val="2533086670"/>
+        <p14:creationId xmlns:p14="http://schemas.microsoft.com/office/powerpoint/2010/main" val="4012018768"/>
       </p:ext>
     </p:extLst>
   </p:cSld>
   <p:clrMapOvr>
     <a:masterClrMapping/>
   </p:clrMapOvr>
+  <p:transition>
+    <p:fade/>
+  </p:transition>
 </p:sldLayout>
 </file>
 
@@ -5361,8 +5403,8 @@
 <p:sldMaster xmlns:a="http://schemas.openxmlformats.org/drawingml/2006/main" xmlns:r="http://schemas.openxmlformats.org/officeDocument/2006/relationships" xmlns:p="http://schemas.openxmlformats.org/presentationml/2006/main">
   <p:cSld>
     <p:bg>
-      <p:bgRef idx="1001">
-        <a:schemeClr val="bg1"/>
+      <p:bgRef idx="1002">
+        <a:schemeClr val="bg2"/>
       </p:bgRef>
     </p:bg>
     <p:spTree>
@@ -5379,145 +5421,510 @@
           <a:chExt cx="0" cy="0"/>
         </a:xfrm>
       </p:grpSpPr>
-      <p:pic>
-        <p:nvPicPr>
-          <p:cNvPr id="7" name="Picture 6" descr="C0-HD-TOP.png"/>
-          <p:cNvPicPr>
-            <a:picLocks noChangeAspect="1"/>
-          </p:cNvPicPr>
+      <p:grpSp>
+        <p:nvGrpSpPr>
+          <p:cNvPr id="7" name="Group 6"/>
+          <p:cNvGrpSpPr/>
           <p:nvPr/>
-        </p:nvPicPr>
-        <p:blipFill>
-          <a:blip r:embed="rId20">
-            <a:extLst>
-              <a:ext uri="{28A0092B-C50C-407E-A947-70E740481C1C}">
-                <a14:useLocalDpi xmlns:a14="http://schemas.microsoft.com/office/drawing/2010/main" val="0"/>
-              </a:ext>
-            </a:extLst>
-          </a:blip>
-          <a:stretch>
-            <a:fillRect/>
-          </a:stretch>
-        </p:blipFill>
+        </p:nvGrpSpPr>
+        <p:grpSpPr>
+          <a:xfrm>
+            <a:off x="150812" y="0"/>
+            <a:ext cx="2436813" cy="6858001"/>
+            <a:chOff x="1320800" y="0"/>
+            <a:chExt cx="2436813" cy="6858001"/>
+          </a:xfrm>
+        </p:grpSpPr>
+        <p:sp>
+          <p:nvSpPr>
+            <p:cNvPr id="8" name="Freeform 6"/>
+            <p:cNvSpPr/>
+            <p:nvPr/>
+          </p:nvSpPr>
+          <p:spPr bwMode="auto">
+            <a:xfrm>
+              <a:off x="1627188" y="0"/>
+              <a:ext cx="1122363" cy="5329238"/>
+            </a:xfrm>
+            <a:custGeom>
+              <a:avLst/>
+              <a:gdLst/>
+              <a:ahLst/>
+              <a:cxnLst/>
+              <a:rect l="0" t="0" r="r" b="b"/>
+              <a:pathLst>
+                <a:path w="707" h="3357">
+                  <a:moveTo>
+                    <a:pt x="0" y="3330"/>
+                  </a:moveTo>
+                  <a:lnTo>
+                    <a:pt x="156" y="3357"/>
+                  </a:lnTo>
+                  <a:lnTo>
+                    <a:pt x="707" y="0"/>
+                  </a:lnTo>
+                  <a:lnTo>
+                    <a:pt x="547" y="0"/>
+                  </a:lnTo>
+                  <a:lnTo>
+                    <a:pt x="0" y="3330"/>
+                  </a:lnTo>
+                  <a:close/>
+                </a:path>
+              </a:pathLst>
+            </a:custGeom>
+            <a:solidFill>
+              <a:schemeClr val="accent1"/>
+            </a:solidFill>
+            <a:ln>
+              <a:noFill/>
+            </a:ln>
+          </p:spPr>
+        </p:sp>
+        <p:sp>
+          <p:nvSpPr>
+            <p:cNvPr id="9" name="Freeform 7"/>
+            <p:cNvSpPr/>
+            <p:nvPr/>
+          </p:nvSpPr>
+          <p:spPr bwMode="auto">
+            <a:xfrm>
+              <a:off x="1320800" y="0"/>
+              <a:ext cx="1117600" cy="5276850"/>
+            </a:xfrm>
+            <a:custGeom>
+              <a:avLst/>
+              <a:gdLst/>
+              <a:ahLst/>
+              <a:cxnLst/>
+              <a:rect l="0" t="0" r="r" b="b"/>
+              <a:pathLst>
+                <a:path w="704" h="3324">
+                  <a:moveTo>
+                    <a:pt x="704" y="0"/>
+                  </a:moveTo>
+                  <a:lnTo>
+                    <a:pt x="545" y="0"/>
+                  </a:lnTo>
+                  <a:lnTo>
+                    <a:pt x="0" y="3300"/>
+                  </a:lnTo>
+                  <a:lnTo>
+                    <a:pt x="157" y="3324"/>
+                  </a:lnTo>
+                  <a:lnTo>
+                    <a:pt x="704" y="0"/>
+                  </a:lnTo>
+                  <a:close/>
+                </a:path>
+              </a:pathLst>
+            </a:custGeom>
+            <a:solidFill>
+              <a:schemeClr val="tx1">
+                <a:lumMod val="65000"/>
+                <a:lumOff val="35000"/>
+              </a:schemeClr>
+            </a:solidFill>
+            <a:ln>
+              <a:noFill/>
+            </a:ln>
+          </p:spPr>
+        </p:sp>
+        <p:sp>
+          <p:nvSpPr>
+            <p:cNvPr id="10" name="Freeform 8"/>
+            <p:cNvSpPr/>
+            <p:nvPr/>
+          </p:nvSpPr>
+          <p:spPr bwMode="auto">
+            <a:xfrm>
+              <a:off x="1320800" y="5238750"/>
+              <a:ext cx="1228725" cy="1619250"/>
+            </a:xfrm>
+            <a:custGeom>
+              <a:avLst/>
+              <a:gdLst/>
+              <a:ahLst/>
+              <a:cxnLst/>
+              <a:rect l="0" t="0" r="r" b="b"/>
+              <a:pathLst>
+                <a:path w="774" h="1020">
+                  <a:moveTo>
+                    <a:pt x="0" y="0"/>
+                  </a:moveTo>
+                  <a:lnTo>
+                    <a:pt x="740" y="1020"/>
+                  </a:lnTo>
+                  <a:lnTo>
+                    <a:pt x="774" y="1020"/>
+                  </a:lnTo>
+                  <a:lnTo>
+                    <a:pt x="0" y="0"/>
+                  </a:lnTo>
+                  <a:close/>
+                </a:path>
+              </a:pathLst>
+            </a:custGeom>
+            <a:solidFill>
+              <a:schemeClr val="tx1">
+                <a:lumMod val="85000"/>
+                <a:lumOff val="15000"/>
+              </a:schemeClr>
+            </a:solidFill>
+            <a:ln>
+              <a:noFill/>
+            </a:ln>
+          </p:spPr>
+        </p:sp>
+        <p:sp>
+          <p:nvSpPr>
+            <p:cNvPr id="11" name="Freeform 9"/>
+            <p:cNvSpPr/>
+            <p:nvPr/>
+          </p:nvSpPr>
+          <p:spPr bwMode="auto">
+            <a:xfrm>
+              <a:off x="1627188" y="5291138"/>
+              <a:ext cx="1495425" cy="1566863"/>
+            </a:xfrm>
+            <a:custGeom>
+              <a:avLst/>
+              <a:gdLst/>
+              <a:ahLst/>
+              <a:cxnLst/>
+              <a:rect l="0" t="0" r="r" b="b"/>
+              <a:pathLst>
+                <a:path w="942" h="987">
+                  <a:moveTo>
+                    <a:pt x="0" y="0"/>
+                  </a:moveTo>
+                  <a:lnTo>
+                    <a:pt x="909" y="987"/>
+                  </a:lnTo>
+                  <a:lnTo>
+                    <a:pt x="942" y="987"/>
+                  </a:lnTo>
+                  <a:lnTo>
+                    <a:pt x="0" y="0"/>
+                  </a:lnTo>
+                  <a:close/>
+                </a:path>
+              </a:pathLst>
+            </a:custGeom>
+            <a:solidFill>
+              <a:schemeClr val="accent1">
+                <a:lumMod val="50000"/>
+              </a:schemeClr>
+            </a:solidFill>
+            <a:ln>
+              <a:noFill/>
+            </a:ln>
+          </p:spPr>
+        </p:sp>
+        <p:sp>
+          <p:nvSpPr>
+            <p:cNvPr id="12" name="Freeform 10"/>
+            <p:cNvSpPr/>
+            <p:nvPr/>
+          </p:nvSpPr>
+          <p:spPr bwMode="auto">
+            <a:xfrm>
+              <a:off x="1627188" y="5286375"/>
+              <a:ext cx="2130425" cy="1571625"/>
+            </a:xfrm>
+            <a:custGeom>
+              <a:avLst/>
+              <a:gdLst/>
+              <a:ahLst/>
+              <a:cxnLst/>
+              <a:rect l="0" t="0" r="r" b="b"/>
+              <a:pathLst>
+                <a:path w="1342" h="990">
+                  <a:moveTo>
+                    <a:pt x="0" y="3"/>
+                  </a:moveTo>
+                  <a:lnTo>
+                    <a:pt x="942" y="990"/>
+                  </a:lnTo>
+                  <a:lnTo>
+                    <a:pt x="1342" y="990"/>
+                  </a:lnTo>
+                  <a:lnTo>
+                    <a:pt x="156" y="27"/>
+                  </a:lnTo>
+                  <a:lnTo>
+                    <a:pt x="0" y="0"/>
+                  </a:lnTo>
+                  <a:lnTo>
+                    <a:pt x="0" y="3"/>
+                  </a:lnTo>
+                  <a:close/>
+                </a:path>
+              </a:pathLst>
+            </a:custGeom>
+            <a:solidFill>
+              <a:schemeClr val="accent1">
+                <a:lumMod val="75000"/>
+              </a:schemeClr>
+            </a:solidFill>
+            <a:ln>
+              <a:noFill/>
+            </a:ln>
+          </p:spPr>
+        </p:sp>
+        <p:sp>
+          <p:nvSpPr>
+            <p:cNvPr id="13" name="Freeform 11"/>
+            <p:cNvSpPr/>
+            <p:nvPr/>
+          </p:nvSpPr>
+          <p:spPr bwMode="auto">
+            <a:xfrm>
+              <a:off x="1320800" y="5238750"/>
+              <a:ext cx="1695450" cy="1619250"/>
+            </a:xfrm>
+            <a:custGeom>
+              <a:avLst/>
+              <a:gdLst/>
+              <a:ahLst/>
+              <a:cxnLst/>
+              <a:rect l="0" t="0" r="r" b="b"/>
+              <a:pathLst>
+                <a:path w="1068" h="1020">
+                  <a:moveTo>
+                    <a:pt x="1068" y="1020"/>
+                  </a:moveTo>
+                  <a:lnTo>
+                    <a:pt x="184" y="60"/>
+                  </a:lnTo>
+                  <a:lnTo>
+                    <a:pt x="154" y="27"/>
+                  </a:lnTo>
+                  <a:lnTo>
+                    <a:pt x="157" y="27"/>
+                  </a:lnTo>
+                  <a:lnTo>
+                    <a:pt x="157" y="24"/>
+                  </a:lnTo>
+                  <a:lnTo>
+                    <a:pt x="154" y="24"/>
+                  </a:lnTo>
+                  <a:lnTo>
+                    <a:pt x="0" y="0"/>
+                  </a:lnTo>
+                  <a:lnTo>
+                    <a:pt x="0" y="0"/>
+                  </a:lnTo>
+                  <a:lnTo>
+                    <a:pt x="774" y="1020"/>
+                  </a:lnTo>
+                  <a:lnTo>
+                    <a:pt x="1068" y="1020"/>
+                  </a:lnTo>
+                  <a:close/>
+                </a:path>
+              </a:pathLst>
+            </a:custGeom>
+            <a:solidFill>
+              <a:schemeClr val="tx1">
+                <a:lumMod val="75000"/>
+                <a:lumOff val="25000"/>
+              </a:schemeClr>
+            </a:solidFill>
+            <a:ln>
+              <a:noFill/>
+            </a:ln>
+          </p:spPr>
+        </p:sp>
+      </p:grpSp>
+      <p:sp>
+        <p:nvSpPr>
+          <p:cNvPr id="2" name="Title Placeholder 1"/>
+          <p:cNvSpPr>
+            <a:spLocks noGrp="1"/>
+          </p:cNvSpPr>
+          <p:nvPr>
+            <p:ph type="title"/>
+          </p:nvPr>
+        </p:nvSpPr>
         <p:spPr>
           <a:xfrm>
-            <a:off x="0" y="0"/>
-            <a:ext cx="12192000" cy="1441450"/>
+            <a:off x="1484311" y="685800"/>
+            <a:ext cx="10018713" cy="1752599"/>
+          </a:xfrm>
+          <a:prstGeom prst="rect">
+            <a:avLst/>
+          </a:prstGeom>
+          <a:effectLst/>
+        </p:spPr>
+        <p:txBody>
+          <a:bodyPr vert="horz" lIns="91440" tIns="45720" rIns="91440" bIns="45720" rtlCol="0" anchor="ctr">
+            <a:normAutofit/>
+          </a:bodyPr>
+          <a:lstStyle/>
+          <a:p>
+            <a:r>
+              <a:rPr lang="en-US"/>
+              <a:t>Click to edit Master title style</a:t>
+            </a:r>
+            <a:endParaRPr lang="en-US" dirty="0"/>
+          </a:p>
+        </p:txBody>
+      </p:sp>
+      <p:sp>
+        <p:nvSpPr>
+          <p:cNvPr id="3" name="Text Placeholder 2"/>
+          <p:cNvSpPr>
+            <a:spLocks noGrp="1"/>
+          </p:cNvSpPr>
+          <p:nvPr>
+            <p:ph type="body" idx="1"/>
+          </p:nvPr>
+        </p:nvSpPr>
+        <p:spPr>
+          <a:xfrm>
+            <a:off x="1484310" y="2666999"/>
+            <a:ext cx="10018713" cy="3124201"/>
           </a:xfrm>
           <a:prstGeom prst="rect">
             <a:avLst/>
           </a:prstGeom>
         </p:spPr>
-      </p:pic>
-      <p:sp>
-        <p:nvSpPr>
-          <p:cNvPr id="2" name="Title Placeholder 1"/>
-          <p:cNvSpPr>
-            <a:spLocks noGrp="1"/>
-          </p:cNvSpPr>
-          <p:nvPr>
-            <p:ph type="title"/>
+        <p:txBody>
+          <a:bodyPr vert="horz" lIns="91440" tIns="45720" rIns="91440" bIns="45720" rtlCol="0" anchor="ctr">
+            <a:normAutofit/>
+          </a:bodyPr>
+          <a:lstStyle/>
+          <a:p>
+            <a:pPr lvl="0"/>
+            <a:r>
+              <a:rPr lang="en-US"/>
+              <a:t>Click to edit Master text styles</a:t>
+            </a:r>
+          </a:p>
+          <a:p>
+            <a:pPr lvl="1"/>
+            <a:r>
+              <a:rPr lang="en-US"/>
+              <a:t>Second level</a:t>
+            </a:r>
+          </a:p>
+          <a:p>
+            <a:pPr lvl="2"/>
+            <a:r>
+              <a:rPr lang="en-US"/>
+              <a:t>Third level</a:t>
+            </a:r>
+          </a:p>
+          <a:p>
+            <a:pPr lvl="3"/>
+            <a:r>
+              <a:rPr lang="en-US"/>
+              <a:t>Fourth level</a:t>
+            </a:r>
+          </a:p>
+          <a:p>
+            <a:pPr lvl="4"/>
+            <a:r>
+              <a:rPr lang="en-US"/>
+              <a:t>Fifth level</a:t>
+            </a:r>
+            <a:endParaRPr lang="en-US" dirty="0"/>
+          </a:p>
+        </p:txBody>
+      </p:sp>
+      <p:sp>
+        <p:nvSpPr>
+          <p:cNvPr id="4" name="Date Placeholder 3"/>
+          <p:cNvSpPr>
+            <a:spLocks noGrp="1"/>
+          </p:cNvSpPr>
+          <p:nvPr>
+            <p:ph type="dt" sz="half" idx="2"/>
           </p:nvPr>
         </p:nvSpPr>
         <p:spPr>
           <a:xfrm>
-            <a:off x="2895600" y="764373"/>
-            <a:ext cx="8610600" cy="1293028"/>
+            <a:off x="9732656" y="5883275"/>
+            <a:ext cx="1143000" cy="365125"/>
           </a:xfrm>
           <a:prstGeom prst="rect">
             <a:avLst/>
           </a:prstGeom>
         </p:spPr>
         <p:txBody>
-          <a:bodyPr vert="horz" lIns="91440" tIns="45720" rIns="91440" bIns="45720" rtlCol="0" anchor="ctr">
-            <a:normAutofit/>
-          </a:bodyPr>
-          <a:lstStyle/>
-          <a:p>
-            <a:r>
-              <a:rPr lang="en-US"/>
-              <a:t>Click to edit Master title style</a:t>
-            </a:r>
-            <a:endParaRPr lang="en-US" dirty="0"/>
-          </a:p>
-        </p:txBody>
-      </p:sp>
-      <p:sp>
-        <p:nvSpPr>
-          <p:cNvPr id="3" name="Text Placeholder 2"/>
-          <p:cNvSpPr>
-            <a:spLocks noGrp="1"/>
-          </p:cNvSpPr>
-          <p:nvPr>
-            <p:ph type="body" idx="1"/>
+          <a:bodyPr vert="horz" lIns="91440" tIns="45720" rIns="91440" bIns="45720" rtlCol="0" anchor="ctr"/>
+          <a:lstStyle>
+            <a:lvl1pPr algn="r">
+              <a:defRPr sz="1000" b="0" i="0">
+                <a:solidFill>
+                  <a:schemeClr val="tx1"/>
+                </a:solidFill>
+                <a:effectLst/>
+                <a:latin typeface="+mn-lt"/>
+              </a:defRPr>
+            </a:lvl1pPr>
+          </a:lstStyle>
+          <a:p>
+            <a:fld id="{462A01D3-2F6B-42A1-9A4B-0488DC6A75CB}" type="datetimeFigureOut">
+              <a:rPr lang="en-US" smtClean="0"/>
+              <a:t>10/20/2025</a:t>
+            </a:fld>
+            <a:endParaRPr lang="en-US"/>
+          </a:p>
+        </p:txBody>
+      </p:sp>
+      <p:sp>
+        <p:nvSpPr>
+          <p:cNvPr id="5" name="Footer Placeholder 4"/>
+          <p:cNvSpPr>
+            <a:spLocks noGrp="1"/>
+          </p:cNvSpPr>
+          <p:nvPr>
+            <p:ph type="ftr" sz="quarter" idx="3"/>
           </p:nvPr>
         </p:nvSpPr>
         <p:spPr>
           <a:xfrm>
-            <a:off x="685800" y="2194560"/>
-            <a:ext cx="10820400" cy="4024125"/>
+            <a:off x="2572279" y="5883275"/>
+            <a:ext cx="7084177" cy="365125"/>
           </a:xfrm>
           <a:prstGeom prst="rect">
             <a:avLst/>
           </a:prstGeom>
         </p:spPr>
         <p:txBody>
-          <a:bodyPr vert="horz" lIns="91440" tIns="45720" rIns="91440" bIns="45720" rtlCol="0">
-            <a:normAutofit/>
-          </a:bodyPr>
-          <a:lstStyle/>
-          <a:p>
-            <a:pPr lvl="0"/>
-            <a:r>
-              <a:rPr lang="en-US"/>
-              <a:t>Click to edit Master text styles</a:t>
-            </a:r>
-          </a:p>
-          <a:p>
-            <a:pPr lvl="1"/>
-            <a:r>
-              <a:rPr lang="en-US"/>
-              <a:t>Second level</a:t>
-            </a:r>
-          </a:p>
-          <a:p>
-            <a:pPr lvl="2"/>
-            <a:r>
-              <a:rPr lang="en-US"/>
-              <a:t>Third level</a:t>
-            </a:r>
-          </a:p>
-          <a:p>
-            <a:pPr lvl="3"/>
-            <a:r>
-              <a:rPr lang="en-US"/>
-              <a:t>Fourth level</a:t>
-            </a:r>
-          </a:p>
-          <a:p>
-            <a:pPr lvl="4"/>
-            <a:r>
-              <a:rPr lang="en-US"/>
-              <a:t>Fifth level</a:t>
-            </a:r>
-            <a:endParaRPr lang="en-US" dirty="0"/>
-          </a:p>
-        </p:txBody>
-      </p:sp>
-      <p:sp>
-        <p:nvSpPr>
-          <p:cNvPr id="4" name="Date Placeholder 3"/>
-          <p:cNvSpPr>
-            <a:spLocks noGrp="1"/>
-          </p:cNvSpPr>
-          <p:nvPr>
-            <p:ph type="dt" sz="half" idx="2"/>
+          <a:bodyPr vert="horz" lIns="91440" tIns="45720" rIns="91440" bIns="45720" rtlCol="0" anchor="ctr"/>
+          <a:lstStyle>
+            <a:lvl1pPr algn="l">
+              <a:defRPr sz="1000" b="0" i="0">
+                <a:solidFill>
+                  <a:schemeClr val="tx1"/>
+                </a:solidFill>
+                <a:effectLst/>
+                <a:latin typeface="+mn-lt"/>
+              </a:defRPr>
+            </a:lvl1pPr>
+          </a:lstStyle>
+          <a:p>
+            <a:endParaRPr lang="en-US"/>
+          </a:p>
+        </p:txBody>
+      </p:sp>
+      <p:sp>
+        <p:nvSpPr>
+          <p:cNvPr id="6" name="Slide Number Placeholder 5"/>
+          <p:cNvSpPr>
+            <a:spLocks noGrp="1"/>
+          </p:cNvSpPr>
+          <p:nvPr>
+            <p:ph type="sldNum" sz="quarter" idx="4"/>
           </p:nvPr>
         </p:nvSpPr>
         <p:spPr>
           <a:xfrm>
-            <a:off x="8595360" y="6356350"/>
-            <a:ext cx="2910840" cy="365125"/>
+            <a:off x="10951856" y="5883275"/>
+            <a:ext cx="551167" cy="365125"/>
           </a:xfrm>
           <a:prstGeom prst="rect">
             <a:avLst/>
@@ -5527,90 +5934,12 @@
           <a:bodyPr vert="horz" lIns="91440" tIns="45720" rIns="91440" bIns="45720" rtlCol="0" anchor="ctr"/>
           <a:lstStyle>
             <a:lvl1pPr algn="r">
-              <a:defRPr sz="1050">
-                <a:solidFill>
-                  <a:schemeClr val="tx1">
-                    <a:tint val="75000"/>
-                  </a:schemeClr>
-                </a:solidFill>
-              </a:defRPr>
-            </a:lvl1pPr>
-          </a:lstStyle>
-          <a:p>
-            <a:fld id="{462A01D3-2F6B-42A1-9A4B-0488DC6A75CB}" type="datetimeFigureOut">
-              <a:rPr lang="en-US" smtClean="0"/>
-              <a:t>10/20/2025</a:t>
-            </a:fld>
-            <a:endParaRPr lang="en-US"/>
-          </a:p>
-        </p:txBody>
-      </p:sp>
-      <p:sp>
-        <p:nvSpPr>
-          <p:cNvPr id="5" name="Footer Placeholder 4"/>
-          <p:cNvSpPr>
-            <a:spLocks noGrp="1"/>
-          </p:cNvSpPr>
-          <p:nvPr>
-            <p:ph type="ftr" sz="quarter" idx="3"/>
-          </p:nvPr>
-        </p:nvSpPr>
-        <p:spPr>
-          <a:xfrm>
-            <a:off x="685800" y="6355845"/>
-            <a:ext cx="7772400" cy="365125"/>
-          </a:xfrm>
-          <a:prstGeom prst="rect">
-            <a:avLst/>
-          </a:prstGeom>
-        </p:spPr>
-        <p:txBody>
-          <a:bodyPr vert="horz" lIns="91440" tIns="45720" rIns="91440" bIns="45720" rtlCol="0" anchor="ctr"/>
-          <a:lstStyle>
-            <a:lvl1pPr algn="l">
-              <a:defRPr sz="1050">
-                <a:solidFill>
-                  <a:schemeClr val="tx1">
-                    <a:tint val="75000"/>
-                  </a:schemeClr>
-                </a:solidFill>
-              </a:defRPr>
-            </a:lvl1pPr>
-          </a:lstStyle>
-          <a:p>
-            <a:endParaRPr lang="en-US"/>
-          </a:p>
-        </p:txBody>
-      </p:sp>
-      <p:sp>
-        <p:nvSpPr>
-          <p:cNvPr id="6" name="Slide Number Placeholder 5"/>
-          <p:cNvSpPr>
-            <a:spLocks noGrp="1"/>
-          </p:cNvSpPr>
-          <p:nvPr>
-            <p:ph type="sldNum" sz="quarter" idx="4"/>
-          </p:nvPr>
-        </p:nvSpPr>
-        <p:spPr>
-          <a:xfrm>
-            <a:off x="8763000" y="381000"/>
-            <a:ext cx="2743200" cy="365125"/>
-          </a:xfrm>
-          <a:prstGeom prst="rect">
-            <a:avLst/>
-          </a:prstGeom>
-        </p:spPr>
-        <p:txBody>
-          <a:bodyPr vert="horz" lIns="91440" tIns="45720" rIns="91440" bIns="45720" rtlCol="0" anchor="ctr"/>
-          <a:lstStyle>
-            <a:lvl1pPr algn="r">
-              <a:defRPr sz="1050">
-                <a:solidFill>
-                  <a:schemeClr val="tx1">
-                    <a:tint val="75000"/>
-                  </a:schemeClr>
-                </a:solidFill>
+              <a:defRPr sz="1000" b="0" i="0">
+                <a:solidFill>
+                  <a:schemeClr val="tx1"/>
+                </a:solidFill>
+                <a:effectLst/>
+                <a:latin typeface="+mn-lt"/>
               </a:defRPr>
             </a:lvl1pPr>
           </a:lstStyle>
@@ -5626,209 +5955,332 @@
     </p:spTree>
     <p:extLst>
       <p:ext uri="{BB962C8B-B14F-4D97-AF65-F5344CB8AC3E}">
-        <p14:creationId xmlns:p14="http://schemas.microsoft.com/office/powerpoint/2010/main" val="2291203841"/>
+        <p14:creationId xmlns:p14="http://schemas.microsoft.com/office/powerpoint/2010/main" val="2994755502"/>
       </p:ext>
     </p:extLst>
   </p:cSld>
   <p:clrMap bg1="dk1" tx1="lt1" bg2="dk2" tx2="lt2" accent1="accent1" accent2="accent2" accent3="accent3" accent4="accent4" accent5="accent5" accent6="accent6" hlink="hlink" folHlink="folHlink"/>
   <p:sldLayoutIdLst>
-    <p:sldLayoutId id="2147483662" r:id="rId1"/>
-    <p:sldLayoutId id="2147483663" r:id="rId2"/>
-    <p:sldLayoutId id="2147483664" r:id="rId3"/>
-    <p:sldLayoutId id="2147483665" r:id="rId4"/>
-    <p:sldLayoutId id="2147483666" r:id="rId5"/>
-    <p:sldLayoutId id="2147483667" r:id="rId6"/>
-    <p:sldLayoutId id="2147483668" r:id="rId7"/>
-    <p:sldLayoutId id="2147483669" r:id="rId8"/>
-    <p:sldLayoutId id="2147483670" r:id="rId9"/>
-    <p:sldLayoutId id="2147483671" r:id="rId10"/>
-    <p:sldLayoutId id="2147483672" r:id="rId11"/>
-    <p:sldLayoutId id="2147483673" r:id="rId12"/>
-    <p:sldLayoutId id="2147483674" r:id="rId13"/>
-    <p:sldLayoutId id="2147483675" r:id="rId14"/>
-    <p:sldLayoutId id="2147483676" r:id="rId15"/>
-    <p:sldLayoutId id="2147483677" r:id="rId16"/>
-    <p:sldLayoutId id="2147483678" r:id="rId17"/>
-    <p:sldLayoutId id="2147483679" r:id="rId18"/>
+    <p:sldLayoutId id="2147483681" r:id="rId1"/>
+    <p:sldLayoutId id="2147483682" r:id="rId2"/>
+    <p:sldLayoutId id="2147483683" r:id="rId3"/>
+    <p:sldLayoutId id="2147483684" r:id="rId4"/>
+    <p:sldLayoutId id="2147483685" r:id="rId5"/>
+    <p:sldLayoutId id="2147483686" r:id="rId6"/>
+    <p:sldLayoutId id="2147483687" r:id="rId7"/>
+    <p:sldLayoutId id="2147483688" r:id="rId8"/>
+    <p:sldLayoutId id="2147483689" r:id="rId9"/>
+    <p:sldLayoutId id="2147483690" r:id="rId10"/>
+    <p:sldLayoutId id="2147483691" r:id="rId11"/>
+    <p:sldLayoutId id="2147483692" r:id="rId12"/>
+    <p:sldLayoutId id="2147483693" r:id="rId13"/>
+    <p:sldLayoutId id="2147483694" r:id="rId14"/>
+    <p:sldLayoutId id="2147483695" r:id="rId15"/>
+    <p:sldLayoutId id="2147483696" r:id="rId16"/>
+    <p:sldLayoutId id="2147483697" r:id="rId17"/>
+    <p:sldLayoutId id="2147483698" r:id="rId18"/>
   </p:sldLayoutIdLst>
+  <p:transition>
+    <p:fade/>
+  </p:transition>
   <p:txStyles>
     <p:titleStyle>
-      <a:lvl1pPr algn="r" defTabSz="914400" rtl="0" eaLnBrk="1" latinLnBrk="0" hangingPunct="1">
-        <a:lnSpc>
-          <a:spcPct val="90000"/>
-        </a:lnSpc>
+      <a:lvl1pPr algn="ctr" defTabSz="457200" rtl="0" eaLnBrk="1" latinLnBrk="0" hangingPunct="1">
         <a:spcBef>
           <a:spcPct val="0"/>
         </a:spcBef>
         <a:buNone/>
-        <a:defRPr sz="4000" kern="1200" cap="all" baseline="0">
+        <a:defRPr sz="4000" kern="1200" cap="none">
+          <a:ln w="3175" cmpd="sng">
+            <a:noFill/>
+          </a:ln>
           <a:solidFill>
             <a:schemeClr val="tx1"/>
           </a:solidFill>
+          <a:effectLst/>
           <a:latin typeface="+mj-lt"/>
           <a:ea typeface="+mj-ea"/>
           <a:cs typeface="+mj-cs"/>
         </a:defRPr>
       </a:lvl1pPr>
+      <a:lvl2pPr eaLnBrk="1" hangingPunct="1">
+        <a:defRPr>
+          <a:solidFill>
+            <a:schemeClr val="tx2"/>
+          </a:solidFill>
+        </a:defRPr>
+      </a:lvl2pPr>
+      <a:lvl3pPr eaLnBrk="1" hangingPunct="1">
+        <a:defRPr>
+          <a:solidFill>
+            <a:schemeClr val="tx2"/>
+          </a:solidFill>
+        </a:defRPr>
+      </a:lvl3pPr>
+      <a:lvl4pPr eaLnBrk="1" hangingPunct="1">
+        <a:defRPr>
+          <a:solidFill>
+            <a:schemeClr val="tx2"/>
+          </a:solidFill>
+        </a:defRPr>
+      </a:lvl4pPr>
+      <a:lvl5pPr eaLnBrk="1" hangingPunct="1">
+        <a:defRPr>
+          <a:solidFill>
+            <a:schemeClr val="tx2"/>
+          </a:solidFill>
+        </a:defRPr>
+      </a:lvl5pPr>
+      <a:lvl6pPr eaLnBrk="1" hangingPunct="1">
+        <a:defRPr>
+          <a:solidFill>
+            <a:schemeClr val="tx2"/>
+          </a:solidFill>
+        </a:defRPr>
+      </a:lvl6pPr>
+      <a:lvl7pPr eaLnBrk="1" hangingPunct="1">
+        <a:defRPr>
+          <a:solidFill>
+            <a:schemeClr val="tx2"/>
+          </a:solidFill>
+        </a:defRPr>
+      </a:lvl7pPr>
+      <a:lvl8pPr eaLnBrk="1" hangingPunct="1">
+        <a:defRPr>
+          <a:solidFill>
+            <a:schemeClr val="tx2"/>
+          </a:solidFill>
+        </a:defRPr>
+      </a:lvl8pPr>
+      <a:lvl9pPr eaLnBrk="1" hangingPunct="1">
+        <a:defRPr>
+          <a:solidFill>
+            <a:schemeClr val="tx2"/>
+          </a:solidFill>
+        </a:defRPr>
+      </a:lvl9pPr>
     </p:titleStyle>
     <p:bodyStyle>
-      <a:lvl1pPr marL="228600" indent="-228600" algn="l" defTabSz="914400" rtl="0" eaLnBrk="1" latinLnBrk="0" hangingPunct="1">
-        <a:lnSpc>
-          <a:spcPct val="90000"/>
-        </a:lnSpc>
+      <a:lvl1pPr marL="285750" indent="-285750" algn="l" defTabSz="457200" rtl="0" eaLnBrk="1" latinLnBrk="0" hangingPunct="1">
         <a:spcBef>
-          <a:spcPts val="1000"/>
+          <a:spcPct val="20000"/>
         </a:spcBef>
-        <a:buFont typeface="Arial" panose="020B0604020202020204" pitchFamily="34" charset="0"/>
+        <a:spcAft>
+          <a:spcPts val="600"/>
+        </a:spcAft>
+        <a:buClr>
+          <a:schemeClr val="accent1">
+            <a:lumMod val="75000"/>
+          </a:schemeClr>
+        </a:buClr>
+        <a:buSzPct val="145000"/>
+        <a:buFont typeface="Arial"/>
         <a:buChar char="•"/>
-        <a:defRPr sz="2200" kern="1200">
+        <a:defRPr sz="2400" kern="1200" cap="none">
           <a:solidFill>
             <a:schemeClr val="tx1"/>
           </a:solidFill>
+          <a:effectLst/>
           <a:latin typeface="+mn-lt"/>
           <a:ea typeface="+mn-ea"/>
           <a:cs typeface="+mn-cs"/>
         </a:defRPr>
       </a:lvl1pPr>
-      <a:lvl2pPr marL="685800" indent="-228600" algn="l" defTabSz="914400" rtl="0" eaLnBrk="1" latinLnBrk="0" hangingPunct="1">
-        <a:lnSpc>
-          <a:spcPct val="90000"/>
-        </a:lnSpc>
+      <a:lvl2pPr marL="742950" indent="-285750" algn="l" defTabSz="457200" rtl="0" eaLnBrk="1" latinLnBrk="0" hangingPunct="1">
         <a:spcBef>
-          <a:spcPts val="500"/>
+          <a:spcPct val="20000"/>
         </a:spcBef>
-        <a:buFont typeface="Arial" panose="020B0604020202020204" pitchFamily="34" charset="0"/>
+        <a:spcAft>
+          <a:spcPts val="600"/>
+        </a:spcAft>
+        <a:buClr>
+          <a:schemeClr val="accent1">
+            <a:lumMod val="75000"/>
+          </a:schemeClr>
+        </a:buClr>
+        <a:buSzPct val="145000"/>
+        <a:buFont typeface="Arial"/>
         <a:buChar char="•"/>
-        <a:defRPr sz="2000" kern="1200">
+        <a:defRPr sz="2000" kern="1200" cap="none">
           <a:solidFill>
             <a:schemeClr val="tx1"/>
           </a:solidFill>
+          <a:effectLst/>
           <a:latin typeface="+mn-lt"/>
           <a:ea typeface="+mn-ea"/>
           <a:cs typeface="+mn-cs"/>
         </a:defRPr>
       </a:lvl2pPr>
-      <a:lvl3pPr marL="1143000" indent="-228600" algn="l" defTabSz="914400" rtl="0" eaLnBrk="1" latinLnBrk="0" hangingPunct="1">
-        <a:lnSpc>
-          <a:spcPct val="90000"/>
-        </a:lnSpc>
+      <a:lvl3pPr marL="1200150" indent="-285750" algn="l" defTabSz="457200" rtl="0" eaLnBrk="1" latinLnBrk="0" hangingPunct="1">
         <a:spcBef>
-          <a:spcPts val="500"/>
+          <a:spcPct val="20000"/>
         </a:spcBef>
-        <a:buFont typeface="Arial" panose="020B0604020202020204" pitchFamily="34" charset="0"/>
+        <a:spcAft>
+          <a:spcPts val="600"/>
+        </a:spcAft>
+        <a:buClr>
+          <a:schemeClr val="accent1">
+            <a:lumMod val="75000"/>
+          </a:schemeClr>
+        </a:buClr>
+        <a:buSzPct val="145000"/>
+        <a:buFont typeface="Arial"/>
         <a:buChar char="•"/>
-        <a:defRPr sz="1800" kern="1200">
+        <a:defRPr sz="1800" kern="1200" cap="none">
           <a:solidFill>
             <a:schemeClr val="tx1"/>
           </a:solidFill>
+          <a:effectLst/>
           <a:latin typeface="+mn-lt"/>
           <a:ea typeface="+mn-ea"/>
           <a:cs typeface="+mn-cs"/>
         </a:defRPr>
       </a:lvl3pPr>
-      <a:lvl4pPr marL="1600200" indent="-228600" algn="l" defTabSz="914400" rtl="0" eaLnBrk="1" latinLnBrk="0" hangingPunct="1">
-        <a:lnSpc>
-          <a:spcPct val="90000"/>
-        </a:lnSpc>
+      <a:lvl4pPr marL="1543050" indent="-171450" algn="l" defTabSz="457200" rtl="0" eaLnBrk="1" latinLnBrk="0" hangingPunct="1">
         <a:spcBef>
-          <a:spcPts val="500"/>
+          <a:spcPct val="20000"/>
         </a:spcBef>
-        <a:buFont typeface="Arial" panose="020B0604020202020204" pitchFamily="34" charset="0"/>
+        <a:spcAft>
+          <a:spcPts val="600"/>
+        </a:spcAft>
+        <a:buClr>
+          <a:schemeClr val="accent1">
+            <a:lumMod val="75000"/>
+          </a:schemeClr>
+        </a:buClr>
+        <a:buSzPct val="145000"/>
+        <a:buFont typeface="Arial"/>
         <a:buChar char="•"/>
-        <a:defRPr sz="1600" kern="1200">
+        <a:defRPr sz="1600" kern="1200" cap="none">
           <a:solidFill>
             <a:schemeClr val="tx1"/>
           </a:solidFill>
+          <a:effectLst/>
           <a:latin typeface="+mn-lt"/>
           <a:ea typeface="+mn-ea"/>
           <a:cs typeface="+mn-cs"/>
         </a:defRPr>
       </a:lvl4pPr>
-      <a:lvl5pPr marL="2057400" indent="-228600" algn="l" defTabSz="914400" rtl="0" eaLnBrk="1" latinLnBrk="0" hangingPunct="1">
-        <a:lnSpc>
-          <a:spcPct val="90000"/>
-        </a:lnSpc>
+      <a:lvl5pPr marL="2000250" indent="-171450" algn="l" defTabSz="457200" rtl="0" eaLnBrk="1" latinLnBrk="0" hangingPunct="1">
         <a:spcBef>
-          <a:spcPts val="500"/>
+          <a:spcPct val="20000"/>
         </a:spcBef>
-        <a:buFont typeface="Arial" panose="020B0604020202020204" pitchFamily="34" charset="0"/>
+        <a:spcAft>
+          <a:spcPts val="600"/>
+        </a:spcAft>
+        <a:buClr>
+          <a:schemeClr val="accent1">
+            <a:lumMod val="75000"/>
+          </a:schemeClr>
+        </a:buClr>
+        <a:buSzPct val="145000"/>
+        <a:buFont typeface="Arial"/>
         <a:buChar char="•"/>
-        <a:defRPr sz="1600" kern="1200">
+        <a:defRPr sz="1400" kern="1200" cap="none">
           <a:solidFill>
             <a:schemeClr val="tx1"/>
           </a:solidFill>
+          <a:effectLst/>
           <a:latin typeface="+mn-lt"/>
           <a:ea typeface="+mn-ea"/>
           <a:cs typeface="+mn-cs"/>
         </a:defRPr>
       </a:lvl5pPr>
-      <a:lvl6pPr marL="2514600" indent="-228600" algn="l" defTabSz="914400" rtl="0" eaLnBrk="1" latinLnBrk="0" hangingPunct="1">
-        <a:lnSpc>
-          <a:spcPct val="90000"/>
-        </a:lnSpc>
+      <a:lvl6pPr marL="2514600" indent="-228600" algn="l" defTabSz="457200" rtl="0" eaLnBrk="1" latinLnBrk="0" hangingPunct="1">
         <a:spcBef>
-          <a:spcPts val="500"/>
+          <a:spcPct val="20000"/>
         </a:spcBef>
-        <a:buFont typeface="Arial" panose="020B0604020202020204" pitchFamily="34" charset="0"/>
+        <a:spcAft>
+          <a:spcPts val="600"/>
+        </a:spcAft>
+        <a:buClr>
+          <a:schemeClr val="accent1">
+            <a:lumMod val="75000"/>
+          </a:schemeClr>
+        </a:buClr>
+        <a:buSzPct val="145000"/>
+        <a:buFont typeface="Arial"/>
         <a:buChar char="•"/>
-        <a:defRPr sz="1600" kern="1200">
+        <a:defRPr sz="1400" kern="1200" cap="none">
           <a:solidFill>
             <a:schemeClr val="tx1"/>
           </a:solidFill>
+          <a:effectLst/>
           <a:latin typeface="+mn-lt"/>
           <a:ea typeface="+mn-ea"/>
           <a:cs typeface="+mn-cs"/>
         </a:defRPr>
       </a:lvl6pPr>
-      <a:lvl7pPr marL="2971800" indent="-228600" algn="l" defTabSz="914400" rtl="0" eaLnBrk="1" latinLnBrk="0" hangingPunct="1">
-        <a:lnSpc>
-          <a:spcPct val="90000"/>
-        </a:lnSpc>
+      <a:lvl7pPr marL="2971800" indent="-228600" algn="l" defTabSz="457200" rtl="0" eaLnBrk="1" latinLnBrk="0" hangingPunct="1">
         <a:spcBef>
-          <a:spcPts val="500"/>
+          <a:spcPct val="20000"/>
         </a:spcBef>
-        <a:buFont typeface="Arial" panose="020B0604020202020204" pitchFamily="34" charset="0"/>
+        <a:spcAft>
+          <a:spcPts val="600"/>
+        </a:spcAft>
+        <a:buClr>
+          <a:schemeClr val="accent1">
+            <a:lumMod val="75000"/>
+          </a:schemeClr>
+        </a:buClr>
+        <a:buSzPct val="145000"/>
+        <a:buFont typeface="Arial"/>
         <a:buChar char="•"/>
-        <a:defRPr sz="1600" kern="1200">
+        <a:defRPr sz="1400" kern="1200" cap="none">
           <a:solidFill>
             <a:schemeClr val="tx1"/>
           </a:solidFill>
+          <a:effectLst/>
           <a:latin typeface="+mn-lt"/>
           <a:ea typeface="+mn-ea"/>
           <a:cs typeface="+mn-cs"/>
         </a:defRPr>
       </a:lvl7pPr>
-      <a:lvl8pPr marL="3429000" indent="-228600" algn="l" defTabSz="914400" rtl="0" eaLnBrk="1" latinLnBrk="0" hangingPunct="1">
-        <a:lnSpc>
-          <a:spcPct val="90000"/>
-        </a:lnSpc>
+      <a:lvl8pPr marL="3429000" indent="-228600" algn="l" defTabSz="457200" rtl="0" eaLnBrk="1" latinLnBrk="0" hangingPunct="1">
         <a:spcBef>
-          <a:spcPts val="500"/>
+          <a:spcPct val="20000"/>
         </a:spcBef>
-        <a:buFont typeface="Arial" panose="020B0604020202020204" pitchFamily="34" charset="0"/>
+        <a:spcAft>
+          <a:spcPts val="600"/>
+        </a:spcAft>
+        <a:buClr>
+          <a:schemeClr val="accent1">
+            <a:lumMod val="75000"/>
+          </a:schemeClr>
+        </a:buClr>
+        <a:buSzPct val="145000"/>
+        <a:buFont typeface="Arial"/>
         <a:buChar char="•"/>
-        <a:defRPr sz="1600" kern="1200">
+        <a:defRPr sz="1400" kern="1200" cap="none">
           <a:solidFill>
             <a:schemeClr val="tx1"/>
           </a:solidFill>
+          <a:effectLst/>
           <a:latin typeface="+mn-lt"/>
           <a:ea typeface="+mn-ea"/>
           <a:cs typeface="+mn-cs"/>
         </a:defRPr>
       </a:lvl8pPr>
-      <a:lvl9pPr marL="3886200" indent="-228600" algn="l" defTabSz="914400" rtl="0" eaLnBrk="1" latinLnBrk="0" hangingPunct="1">
-        <a:lnSpc>
-          <a:spcPct val="90000"/>
-        </a:lnSpc>
+      <a:lvl9pPr marL="3886200" indent="-228600" algn="l" defTabSz="457200" rtl="0" eaLnBrk="1" latinLnBrk="0" hangingPunct="1">
         <a:spcBef>
-          <a:spcPts val="500"/>
+          <a:spcPct val="20000"/>
         </a:spcBef>
-        <a:buFont typeface="Arial" panose="020B0604020202020204" pitchFamily="34" charset="0"/>
+        <a:spcAft>
+          <a:spcPts val="600"/>
+        </a:spcAft>
+        <a:buClr>
+          <a:schemeClr val="accent1">
+            <a:lumMod val="75000"/>
+          </a:schemeClr>
+        </a:buClr>
+        <a:buSzPct val="145000"/>
+        <a:buFont typeface="Arial"/>
         <a:buChar char="•"/>
-        <a:defRPr sz="1600" kern="1200">
+        <a:defRPr sz="1400" kern="1200" cap="none">
           <a:solidFill>
             <a:schemeClr val="tx1"/>
           </a:solidFill>
+          <a:effectLst/>
           <a:latin typeface="+mn-lt"/>
           <a:ea typeface="+mn-ea"/>
           <a:cs typeface="+mn-cs"/>
@@ -5839,7 +6291,7 @@
       <a:defPPr>
         <a:defRPr lang="en-US"/>
       </a:defPPr>
-      <a:lvl1pPr marL="0" algn="l" defTabSz="914400" rtl="0" eaLnBrk="1" latinLnBrk="0" hangingPunct="1">
+      <a:lvl1pPr marL="0" algn="l" defTabSz="457200" rtl="0" eaLnBrk="1" latinLnBrk="0" hangingPunct="1">
         <a:defRPr sz="1800" kern="1200">
           <a:solidFill>
             <a:schemeClr val="tx1"/>
@@ -5849,7 +6301,7 @@
           <a:cs typeface="+mn-cs"/>
         </a:defRPr>
       </a:lvl1pPr>
-      <a:lvl2pPr marL="457200" algn="l" defTabSz="914400" rtl="0" eaLnBrk="1" latinLnBrk="0" hangingPunct="1">
+      <a:lvl2pPr marL="457200" algn="l" defTabSz="457200" rtl="0" eaLnBrk="1" latinLnBrk="0" hangingPunct="1">
         <a:defRPr sz="1800" kern="1200">
           <a:solidFill>
             <a:schemeClr val="tx1"/>
@@ -5859,7 +6311,7 @@
           <a:cs typeface="+mn-cs"/>
         </a:defRPr>
       </a:lvl2pPr>
-      <a:lvl3pPr marL="914400" algn="l" defTabSz="914400" rtl="0" eaLnBrk="1" latinLnBrk="0" hangingPunct="1">
+      <a:lvl3pPr marL="914400" algn="l" defTabSz="457200" rtl="0" eaLnBrk="1" latinLnBrk="0" hangingPunct="1">
         <a:defRPr sz="1800" kern="1200">
           <a:solidFill>
             <a:schemeClr val="tx1"/>
@@ -5869,7 +6321,7 @@
           <a:cs typeface="+mn-cs"/>
         </a:defRPr>
       </a:lvl3pPr>
-      <a:lvl4pPr marL="1371600" algn="l" defTabSz="914400" rtl="0" eaLnBrk="1" latinLnBrk="0" hangingPunct="1">
+      <a:lvl4pPr marL="1371600" algn="l" defTabSz="457200" rtl="0" eaLnBrk="1" latinLnBrk="0" hangingPunct="1">
         <a:defRPr sz="1800" kern="1200">
           <a:solidFill>
             <a:schemeClr val="tx1"/>
@@ -5879,7 +6331,7 @@
           <a:cs typeface="+mn-cs"/>
         </a:defRPr>
       </a:lvl4pPr>
-      <a:lvl5pPr marL="1828800" algn="l" defTabSz="914400" rtl="0" eaLnBrk="1" latinLnBrk="0" hangingPunct="1">
+      <a:lvl5pPr marL="1828800" algn="l" defTabSz="457200" rtl="0" eaLnBrk="1" latinLnBrk="0" hangingPunct="1">
         <a:defRPr sz="1800" kern="1200">
           <a:solidFill>
             <a:schemeClr val="tx1"/>
@@ -5889,7 +6341,7 @@
           <a:cs typeface="+mn-cs"/>
         </a:defRPr>
       </a:lvl5pPr>
-      <a:lvl6pPr marL="2286000" algn="l" defTabSz="914400" rtl="0" eaLnBrk="1" latinLnBrk="0" hangingPunct="1">
+      <a:lvl6pPr marL="2286000" algn="l" defTabSz="457200" rtl="0" eaLnBrk="1" latinLnBrk="0" hangingPunct="1">
         <a:defRPr sz="1800" kern="1200">
           <a:solidFill>
             <a:schemeClr val="tx1"/>
@@ -5899,7 +6351,7 @@
           <a:cs typeface="+mn-cs"/>
         </a:defRPr>
       </a:lvl6pPr>
-      <a:lvl7pPr marL="2743200" algn="l" defTabSz="914400" rtl="0" eaLnBrk="1" latinLnBrk="0" hangingPunct="1">
+      <a:lvl7pPr marL="2743200" algn="l" defTabSz="457200" rtl="0" eaLnBrk="1" latinLnBrk="0" hangingPunct="1">
         <a:defRPr sz="1800" kern="1200">
           <a:solidFill>
             <a:schemeClr val="tx1"/>
@@ -5909,7 +6361,7 @@
           <a:cs typeface="+mn-cs"/>
         </a:defRPr>
       </a:lvl7pPr>
-      <a:lvl8pPr marL="3200400" algn="l" defTabSz="914400" rtl="0" eaLnBrk="1" latinLnBrk="0" hangingPunct="1">
+      <a:lvl8pPr marL="3200400" algn="l" defTabSz="457200" rtl="0" eaLnBrk="1" latinLnBrk="0" hangingPunct="1">
         <a:defRPr sz="1800" kern="1200">
           <a:solidFill>
             <a:schemeClr val="tx1"/>
@@ -5919,7 +6371,7 @@
           <a:cs typeface="+mn-cs"/>
         </a:defRPr>
       </a:lvl8pPr>
-      <a:lvl9pPr marL="3657600" algn="l" defTabSz="914400" rtl="0" eaLnBrk="1" latinLnBrk="0" hangingPunct="1">
+      <a:lvl9pPr marL="3657600" algn="l" defTabSz="457200" rtl="0" eaLnBrk="1" latinLnBrk="0" hangingPunct="1">
         <a:defRPr sz="1800" kern="1200">
           <a:solidFill>
             <a:schemeClr val="tx1"/>
@@ -5953,10 +6405,10 @@
       </p:grpSpPr>
       <p:sp>
         <p:nvSpPr>
-          <p:cNvPr id="2" name="Title 1">
+          <p:cNvPr id="7" name="Title 6">
             <a:extLst>
               <a:ext uri="{FF2B5EF4-FFF2-40B4-BE49-F238E27FC236}">
-                <a16:creationId xmlns:a16="http://schemas.microsoft.com/office/drawing/2014/main" id="{B6F8B9AF-D601-4171-A2E2-4EF91FDA8755}"/>
+                <a16:creationId xmlns:a16="http://schemas.microsoft.com/office/drawing/2014/main" id="{EB674170-48D9-4B72-A05C-DC8ACB2F4EF7}"/>
               </a:ext>
             </a:extLst>
           </p:cNvPr>
@@ -5967,26 +6419,38 @@
             <p:ph type="ctrTitle"/>
           </p:nvPr>
         </p:nvSpPr>
-        <p:spPr/>
+        <p:spPr>
+          <a:xfrm>
+            <a:off x="747846" y="1890615"/>
+            <a:ext cx="9448800" cy="1825096"/>
+          </a:xfrm>
+        </p:spPr>
         <p:txBody>
           <a:bodyPr>
             <a:normAutofit fontScale="90000"/>
           </a:bodyPr>
           <a:lstStyle/>
           <a:p>
-            <a:r>
-              <a:rPr lang="en-US"/>
-              <a:t>NatioID – National Digital Identity &amp; Voting Platform</a:t>
-            </a:r>
-          </a:p>
-        </p:txBody>
-      </p:sp>
-      <p:sp>
-        <p:nvSpPr>
-          <p:cNvPr id="3" name="Subtitle 2">
+            <a:br>
+              <a:rPr lang="en-US" b="1" dirty="0">
+                <a:latin typeface="Algerian" panose="04020705040A02060702" pitchFamily="82" charset="0"/>
+              </a:rPr>
+            </a:br>
+            <a:r>
+              <a:rPr lang="en-US" b="1" dirty="0">
+                <a:latin typeface="Algerian" panose="04020705040A02060702" pitchFamily="82" charset="0"/>
+              </a:rPr>
+              <a:t>NatioID</a:t>
+            </a:r>
+          </a:p>
+        </p:txBody>
+      </p:sp>
+      <p:sp>
+        <p:nvSpPr>
+          <p:cNvPr id="9" name="Subtitle 8">
             <a:extLst>
               <a:ext uri="{FF2B5EF4-FFF2-40B4-BE49-F238E27FC236}">
-                <a16:creationId xmlns:a16="http://schemas.microsoft.com/office/drawing/2014/main" id="{E90FE3B5-A510-44A3-93D9-30B570F606D3}"/>
+                <a16:creationId xmlns:a16="http://schemas.microsoft.com/office/drawing/2014/main" id="{6EE5C03D-526F-4354-8B07-EA701D0A2538}"/>
               </a:ext>
             </a:extLst>
           </p:cNvPr>
@@ -5997,29 +6461,51 @@
             <p:ph type="subTitle" idx="1"/>
           </p:nvPr>
         </p:nvSpPr>
-        <p:spPr/>
+        <p:spPr>
+          <a:xfrm>
+            <a:off x="1371600" y="3934020"/>
+            <a:ext cx="9448800" cy="2126915"/>
+          </a:xfrm>
+        </p:spPr>
         <p:txBody>
           <a:bodyPr>
-            <a:normAutofit fontScale="47500" lnSpcReduction="20000"/>
+            <a:normAutofit fontScale="92500" lnSpcReduction="10000"/>
           </a:bodyPr>
           <a:lstStyle/>
           <a:p>
             <a:r>
-              <a:rPr lang="en-US"/>
+              <a:rPr lang="en-US" sz="2400" dirty="0"/>
+              <a:t>National Digital Identity &amp; Voting Platform</a:t>
+            </a:r>
+          </a:p>
+          <a:p>
+            <a:r>
+              <a:rPr lang="en-US" sz="2400" dirty="0"/>
               <a:t>Web &amp; Mobile Application</a:t>
             </a:r>
           </a:p>
           <a:p>
-            <a:r>
-              <a:rPr lang="en-US"/>
-              <a:t>Presented by: Abdulazeez Adam A.</a:t>
-            </a:r>
-          </a:p>
-          <a:p>
-            <a:r>
-              <a:rPr lang="en-US"/>
+            <a:endParaRPr lang="en-US" dirty="0"/>
+          </a:p>
+          <a:p>
+            <a:r>
+              <a:rPr lang="en-US" b="1" i="1" dirty="0"/>
+              <a:t>Presented by: Abdulazeez </a:t>
+            </a:r>
+            <a:r>
+              <a:rPr lang="en-US" b="1" i="1" dirty="0" err="1"/>
+              <a:t>Adam.A</a:t>
+            </a:r>
+            <a:endParaRPr lang="en-US" b="1" i="1" dirty="0"/>
+          </a:p>
+          <a:p>
+            <a:r>
+              <a:rPr lang="en-US" b="1" i="1" dirty="0"/>
               <a:t>Contact: abdulazeezadam09@gmail.com</a:t>
             </a:r>
+          </a:p>
+          <a:p>
+            <a:endParaRPr lang="en-US" dirty="0"/>
           </a:p>
         </p:txBody>
       </p:sp>
@@ -6033,6 +6519,18 @@
   <p:clrMapOvr>
     <a:masterClrMapping/>
   </p:clrMapOvr>
+  <mc:AlternateContent xmlns:mc="http://schemas.openxmlformats.org/markup-compatibility/2006">
+    <mc:Choice xmlns:p15="http://schemas.microsoft.com/office/powerpoint/2012/main" Requires="p15">
+      <p:transition xmlns:p14="http://schemas.microsoft.com/office/powerpoint/2010/main" spd="med" p14:dur="700">
+        <p15:prstTrans prst="curtains"/>
+      </p:transition>
+    </mc:Choice>
+    <mc:Fallback>
+      <p:transition spd="med">
+        <p:fade/>
+      </p:transition>
+    </mc:Fallback>
+  </mc:AlternateContent>
 </p:sld>
 </file>
 
@@ -6074,8 +6572,11 @@
           <a:bodyPr/>
           <a:lstStyle/>
           <a:p>
-            <a:r>
-              <a:rPr lang="en-US"/>
+            <a:pPr algn="r"/>
+            <a:r>
+              <a:rPr lang="en-US" dirty="0">
+                <a:latin typeface="Algerian" panose="04020705040A02060702" pitchFamily="82" charset="0"/>
+              </a:rPr>
               <a:t>Deployment &amp; Accessibility</a:t>
             </a:r>
           </a:p>
@@ -6099,28 +6600,125 @@
         </p:nvSpPr>
         <p:spPr/>
         <p:txBody>
-          <a:bodyPr/>
+          <a:bodyPr>
+            <a:normAutofit fontScale="70000" lnSpcReduction="20000"/>
+          </a:bodyPr>
           <a:lstStyle/>
           <a:p>
-            <a:r>
-              <a:rPr lang="en-US"/>
-              <a:t>• Web: https://natio-id.vercel.app</a:t>
-            </a:r>
-          </a:p>
-          <a:p>
-            <a:r>
-              <a:rPr lang="en-US"/>
-              <a:t>• Mobile: https://expo.dev/artifacts/eas/9Mm3k4YvGpyrZudo6t2zfN.aab</a:t>
-            </a:r>
-          </a:p>
-          <a:p>
-            <a:r>
-              <a:rPr lang="en-US"/>
-              <a:t>• Cross-platform compatibility</a:t>
-            </a:r>
-          </a:p>
-          <a:p>
-            <a:endParaRPr lang="en-US"/>
+            <a:pPr marL="0" indent="0">
+              <a:buNone/>
+            </a:pPr>
+            <a:r>
+              <a:rPr lang="en-US" dirty="0">
+                <a:latin typeface="Arial Rounded MT Bold" panose="020F0704030504030204" pitchFamily="34" charset="0"/>
+              </a:rPr>
+              <a:t>• Web: </a:t>
+            </a:r>
+            <a:r>
+              <a:rPr lang="en-US" dirty="0">
+                <a:latin typeface="Arial Rounded MT Bold" panose="020F0704030504030204" pitchFamily="34" charset="0"/>
+                <a:hlinkClick r:id="rId2"/>
+              </a:rPr>
+              <a:t>https://natio-id.vercel.app</a:t>
+            </a:r>
+            <a:endParaRPr lang="en-US" dirty="0">
+              <a:latin typeface="Arial Rounded MT Bold" panose="020F0704030504030204" pitchFamily="34" charset="0"/>
+            </a:endParaRPr>
+          </a:p>
+          <a:p>
+            <a:pPr marL="0" indent="0">
+              <a:buNone/>
+            </a:pPr>
+            <a:endParaRPr lang="en-US" dirty="0">
+              <a:latin typeface="Arial Rounded MT Bold" panose="020F0704030504030204" pitchFamily="34" charset="0"/>
+            </a:endParaRPr>
+          </a:p>
+          <a:p>
+            <a:pPr marL="0" indent="0">
+              <a:buNone/>
+            </a:pPr>
+            <a:r>
+              <a:rPr lang="en-US" dirty="0">
+                <a:latin typeface="Arial Rounded MT Bold" panose="020F0704030504030204" pitchFamily="34" charset="0"/>
+              </a:rPr>
+              <a:t>• Mobile (.</a:t>
+            </a:r>
+            <a:r>
+              <a:rPr lang="en-US" dirty="0" err="1">
+                <a:latin typeface="Arial Rounded MT Bold" panose="020F0704030504030204" pitchFamily="34" charset="0"/>
+              </a:rPr>
+              <a:t>apk</a:t>
+            </a:r>
+            <a:r>
+              <a:rPr lang="en-US" dirty="0">
+                <a:latin typeface="Arial Rounded MT Bold" panose="020F0704030504030204" pitchFamily="34" charset="0"/>
+              </a:rPr>
+              <a:t>): https://expo.dev/accounts/ainfiniti/projects/natioid/builds/f66d46db-007c-4da7-9cda-db6db180115e </a:t>
+            </a:r>
+          </a:p>
+          <a:p>
+            <a:pPr marL="0" indent="0">
+              <a:buNone/>
+            </a:pPr>
+            <a:endParaRPr lang="en-US" dirty="0">
+              <a:latin typeface="Arial Rounded MT Bold" panose="020F0704030504030204" pitchFamily="34" charset="0"/>
+            </a:endParaRPr>
+          </a:p>
+          <a:p>
+            <a:pPr marL="0" indent="0">
+              <a:buNone/>
+            </a:pPr>
+            <a:r>
+              <a:rPr lang="en-US" dirty="0">
+                <a:latin typeface="Arial Rounded MT Bold" panose="020F0704030504030204" pitchFamily="34" charset="0"/>
+              </a:rPr>
+              <a:t>• Platform compatibility:</a:t>
+            </a:r>
+            <a:br>
+              <a:rPr lang="en-US" dirty="0">
+                <a:latin typeface="Arial Rounded MT Bold" panose="020F0704030504030204" pitchFamily="34" charset="0"/>
+              </a:rPr>
+            </a:br>
+            <a:r>
+              <a:rPr lang="en-US" dirty="0">
+                <a:latin typeface="Arial Rounded MT Bold" panose="020F0704030504030204" pitchFamily="34" charset="0"/>
+              </a:rPr>
+              <a:t>- Web app(Admin): Runs on any modern browser (Windows, macOS, Linux),</a:t>
+            </a:r>
+          </a:p>
+          <a:p>
+            <a:pPr marL="0" indent="0">
+              <a:buNone/>
+            </a:pPr>
+            <a:r>
+              <a:rPr lang="en-US" dirty="0">
+                <a:latin typeface="Arial Rounded MT Bold" panose="020F0704030504030204" pitchFamily="34" charset="0"/>
+              </a:rPr>
+              <a:t>   desktop-only (Not responsive) — Intentional for security + usability control.</a:t>
+            </a:r>
+          </a:p>
+          <a:p>
+            <a:pPr>
+              <a:buFontTx/>
+              <a:buChar char="-"/>
+            </a:pPr>
+            <a:r>
+              <a:rPr lang="en-US" dirty="0">
+                <a:latin typeface="Arial Rounded MT Bold" panose="020F0704030504030204" pitchFamily="34" charset="0"/>
+              </a:rPr>
+              <a:t>Mobile app (Expo + React Native) currently supports Android. </a:t>
+            </a:r>
+          </a:p>
+          <a:p>
+            <a:pPr marL="0" indent="0">
+              <a:buNone/>
+            </a:pPr>
+            <a:r>
+              <a:rPr lang="en-US" dirty="0">
+                <a:latin typeface="Arial Rounded MT Bold" panose="020F0704030504030204" pitchFamily="34" charset="0"/>
+              </a:rPr>
+              <a:t>- iOS support is planned for future builds, pending additional resources.</a:t>
+            </a:r>
           </a:p>
         </p:txBody>
       </p:sp>
@@ -6134,6 +6732,9 @@
   <p:clrMapOvr>
     <a:masterClrMapping/>
   </p:clrMapOvr>
+  <p:transition>
+    <p:fade/>
+  </p:transition>
 </p:sld>
 </file>
 
@@ -6170,13 +6771,21 @@
             <p:ph type="title"/>
           </p:nvPr>
         </p:nvSpPr>
-        <p:spPr/>
+        <p:spPr>
+          <a:xfrm>
+            <a:off x="2895600" y="443531"/>
+            <a:ext cx="8610600" cy="1293028"/>
+          </a:xfrm>
+        </p:spPr>
         <p:txBody>
           <a:bodyPr/>
           <a:lstStyle/>
           <a:p>
-            <a:r>
-              <a:rPr lang="en-US"/>
+            <a:pPr algn="r"/>
+            <a:r>
+              <a:rPr lang="en-US" dirty="0">
+                <a:latin typeface="Algerian" panose="04020705040A02060702" pitchFamily="82" charset="0"/>
+              </a:rPr>
               <a:t>Limitations / Roadmap</a:t>
             </a:r>
           </a:p>
@@ -6198,24 +6807,130 @@
             <p:ph type="body" idx="1"/>
           </p:nvPr>
         </p:nvSpPr>
-        <p:spPr/>
-        <p:txBody>
-          <a:bodyPr/>
+        <p:spPr>
+          <a:xfrm>
+            <a:off x="1210234" y="1736559"/>
+            <a:ext cx="10295965" cy="4375483"/>
+          </a:xfrm>
+        </p:spPr>
+        <p:txBody>
+          <a:bodyPr>
+            <a:normAutofit fontScale="92500" lnSpcReduction="10000"/>
+          </a:bodyPr>
           <a:lstStyle/>
           <a:p>
-            <a:r>
-              <a:rPr lang="en-US"/>
-              <a:t>• Currently frontend-only.</a:t>
-            </a:r>
-          </a:p>
-          <a:p>
-            <a:r>
-              <a:rPr lang="en-US"/>
-              <a:t>• Future: Biometric/OTP login, API security, notifications.</a:t>
-            </a:r>
-          </a:p>
-          <a:p>
-            <a:endParaRPr lang="en-US"/>
+            <a:pPr marL="0" indent="0">
+              <a:buNone/>
+            </a:pPr>
+            <a:r>
+              <a:rPr lang="en-US" sz="2000" dirty="0">
+                <a:latin typeface="Arial Rounded MT Bold" panose="020F0704030504030204" pitchFamily="34" charset="0"/>
+              </a:rPr>
+              <a:t>• Currently frontend-only (no real backend/API; uses dummy data).  </a:t>
+            </a:r>
+          </a:p>
+          <a:p>
+            <a:pPr marL="0" indent="0">
+              <a:buNone/>
+            </a:pPr>
+            <a:r>
+              <a:rPr lang="en-US" sz="2000" dirty="0">
+                <a:latin typeface="Arial Rounded MT Bold" panose="020F0704030504030204" pitchFamily="34" charset="0"/>
+              </a:rPr>
+              <a:t>• Limited to Android (iOS version planned).  </a:t>
+            </a:r>
+          </a:p>
+          <a:p>
+            <a:pPr marL="0" indent="0">
+              <a:buNone/>
+            </a:pPr>
+            <a:r>
+              <a:rPr lang="en-US" sz="2000" dirty="0">
+                <a:latin typeface="Arial Rounded MT Bold" panose="020F0704030504030204" pitchFamily="34" charset="0"/>
+              </a:rPr>
+              <a:t>• No persistent database — data resets on reload.  </a:t>
+            </a:r>
+          </a:p>
+          <a:p>
+            <a:pPr marL="0" indent="0">
+              <a:buNone/>
+            </a:pPr>
+            <a:r>
+              <a:rPr lang="en-US" sz="2000" dirty="0">
+                <a:latin typeface="Arial Rounded MT Bold" panose="020F0704030504030204" pitchFamily="34" charset="0"/>
+              </a:rPr>
+              <a:t>• Biometric &amp; OTP login planned for future security.  </a:t>
+            </a:r>
+          </a:p>
+          <a:p>
+            <a:pPr marL="0" indent="0">
+              <a:buNone/>
+            </a:pPr>
+            <a:r>
+              <a:rPr lang="en-US" sz="2000" dirty="0">
+                <a:latin typeface="Arial Rounded MT Bold" panose="020F0704030504030204" pitchFamily="34" charset="0"/>
+              </a:rPr>
+              <a:t>• Admin authentication is basic; will be upgraded to secure login.  </a:t>
+            </a:r>
+          </a:p>
+          <a:p>
+            <a:pPr marL="0" indent="0">
+              <a:buNone/>
+            </a:pPr>
+            <a:r>
+              <a:rPr lang="en-US" sz="2000" dirty="0">
+                <a:latin typeface="Arial Rounded MT Bold" panose="020F0704030504030204" pitchFamily="34" charset="0"/>
+              </a:rPr>
+              <a:t>• No real-time updates yet (e.g., WebSocket or polling).  </a:t>
+            </a:r>
+          </a:p>
+          <a:p>
+            <a:pPr marL="0" indent="0">
+              <a:buNone/>
+            </a:pPr>
+            <a:r>
+              <a:rPr lang="en-US" sz="2000" dirty="0">
+                <a:latin typeface="Arial Rounded MT Bold" panose="020F0704030504030204" pitchFamily="34" charset="0"/>
+              </a:rPr>
+              <a:t>• Push notifications for election reminders and updates (planned).  </a:t>
+            </a:r>
+          </a:p>
+          <a:p>
+            <a:pPr marL="0" indent="0">
+              <a:buNone/>
+            </a:pPr>
+            <a:r>
+              <a:rPr lang="en-US" sz="2000" dirty="0">
+                <a:latin typeface="Arial Rounded MT Bold" panose="020F0704030504030204" pitchFamily="34" charset="0"/>
+              </a:rPr>
+              <a:t>• Backend integration and data encryption (future phase).  </a:t>
+            </a:r>
+          </a:p>
+          <a:p>
+            <a:pPr marL="0" indent="0">
+              <a:buNone/>
+            </a:pPr>
+            <a:r>
+              <a:rPr lang="en-US" sz="2000" dirty="0">
+                <a:latin typeface="Arial Rounded MT Bold" panose="020F0704030504030204" pitchFamily="34" charset="0"/>
+              </a:rPr>
+              <a:t>• Offline support for mobile (future consideration).  </a:t>
+            </a:r>
+          </a:p>
+          <a:p>
+            <a:pPr marL="0" indent="0">
+              <a:buNone/>
+            </a:pPr>
+            <a:endParaRPr lang="en-US" dirty="0"/>
+          </a:p>
+          <a:p>
+            <a:pPr marL="0" indent="0">
+              <a:buNone/>
+            </a:pPr>
+            <a:r>
+              <a:rPr lang="en-US" sz="2000" b="1" i="1" dirty="0"/>
+              <a:t>Note: This is a prototype MVP — focused on structure and usability</a:t>
+            </a:r>
           </a:p>
         </p:txBody>
       </p:sp>
@@ -6229,6 +6944,9 @@
   <p:clrMapOvr>
     <a:masterClrMapping/>
   </p:clrMapOvr>
+  <p:transition>
+    <p:fade/>
+  </p:transition>
 </p:sld>
 </file>
 
@@ -6270,8 +6988,11 @@
           <a:bodyPr/>
           <a:lstStyle/>
           <a:p>
-            <a:r>
-              <a:rPr lang="en-US"/>
+            <a:pPr algn="r"/>
+            <a:r>
+              <a:rPr lang="en-US" dirty="0">
+                <a:latin typeface="Algerian" panose="04020705040A02060702" pitchFamily="82" charset="0"/>
+              </a:rPr>
               <a:t>Call to Action</a:t>
             </a:r>
           </a:p>
@@ -6295,28 +7016,49 @@
         </p:nvSpPr>
         <p:spPr/>
         <p:txBody>
-          <a:bodyPr/>
+          <a:bodyPr>
+            <a:normAutofit/>
+          </a:bodyPr>
           <a:lstStyle/>
           <a:p>
             <a:r>
-              <a:rPr lang="en-US"/>
-              <a:t>• Seeking funding and pilot opportunities.</a:t>
-            </a:r>
-          </a:p>
-          <a:p>
-            <a:r>
-              <a:rPr lang="en-US"/>
-              <a:t>• Open for partnerships with agencies or NGOs.</a:t>
-            </a:r>
-          </a:p>
-          <a:p>
-            <a:r>
-              <a:rPr lang="en-US"/>
-              <a:t>• Contact for demo or discussion.</a:t>
-            </a:r>
-          </a:p>
-          <a:p>
-            <a:endParaRPr lang="en-US"/>
+              <a:rPr lang="en-US" sz="1700" dirty="0">
+                <a:latin typeface="Arial Rounded MT Bold" panose="020F0704030504030204" pitchFamily="34" charset="0"/>
+              </a:rPr>
+              <a:t>Seeking funding to support backend development, security features, and deployment at scale.  </a:t>
+            </a:r>
+          </a:p>
+          <a:p>
+            <a:r>
+              <a:rPr lang="en-US" sz="1700" dirty="0">
+                <a:latin typeface="Arial Rounded MT Bold" panose="020F0704030504030204" pitchFamily="34" charset="0"/>
+              </a:rPr>
+              <a:t>Open to pilot programs with government agencies, electoral bodies, or civic tech organizations.  </a:t>
+            </a:r>
+          </a:p>
+          <a:p>
+            <a:r>
+              <a:rPr lang="en-US" sz="1700" dirty="0">
+                <a:latin typeface="Arial Rounded MT Bold" panose="020F0704030504030204" pitchFamily="34" charset="0"/>
+              </a:rPr>
+              <a:t>Welcoming partnerships with NGOs, policy makers, or tech incubators working on digital governance.  </a:t>
+            </a:r>
+          </a:p>
+          <a:p>
+            <a:r>
+              <a:rPr lang="en-US" sz="1700" dirty="0">
+                <a:latin typeface="Arial Rounded MT Bold" panose="020F0704030504030204" pitchFamily="34" charset="0"/>
+              </a:rPr>
+              <a:t>Available for demos, presentations, or feedback sessions.  </a:t>
+            </a:r>
+          </a:p>
+          <a:p>
+            <a:r>
+              <a:rPr lang="en-US" sz="1700" dirty="0">
+                <a:latin typeface="Arial Rounded MT Bold" panose="020F0704030504030204" pitchFamily="34" charset="0"/>
+              </a:rPr>
+              <a:t>Let’s collaborate to make digital identity and voting secure, inclusive, and accessible.</a:t>
+            </a:r>
           </a:p>
         </p:txBody>
       </p:sp>
@@ -6330,6 +7072,9 @@
   <p:clrMapOvr>
     <a:masterClrMapping/>
   </p:clrMapOvr>
+  <p:transition>
+    <p:fade/>
+  </p:transition>
 </p:sld>
 </file>
 
@@ -6355,6 +7100,480 @@
           <p:cNvPr id="2" name="Title 1">
             <a:extLst>
               <a:ext uri="{FF2B5EF4-FFF2-40B4-BE49-F238E27FC236}">
+                <a16:creationId xmlns:a16="http://schemas.microsoft.com/office/drawing/2014/main" id="{CB27BC52-EB3F-47A6-89D3-DBB95F72A167}"/>
+              </a:ext>
+            </a:extLst>
+          </p:cNvPr>
+          <p:cNvSpPr>
+            <a:spLocks noGrp="1"/>
+          </p:cNvSpPr>
+          <p:nvPr>
+            <p:ph type="title"/>
+          </p:nvPr>
+        </p:nvSpPr>
+        <p:spPr/>
+        <p:txBody>
+          <a:bodyPr/>
+          <a:lstStyle/>
+          <a:p>
+            <a:pPr algn="r"/>
+            <a:r>
+              <a:rPr lang="en-US" dirty="0">
+                <a:latin typeface="Algerian" panose="04020705040A02060702" pitchFamily="82" charset="0"/>
+              </a:rPr>
+              <a:t>Who Is This For?</a:t>
+            </a:r>
+          </a:p>
+        </p:txBody>
+      </p:sp>
+      <p:sp>
+        <p:nvSpPr>
+          <p:cNvPr id="3" name="Content Placeholder 2">
+            <a:extLst>
+              <a:ext uri="{FF2B5EF4-FFF2-40B4-BE49-F238E27FC236}">
+                <a16:creationId xmlns:a16="http://schemas.microsoft.com/office/drawing/2014/main" id="{A6F55A37-37A8-45FC-94BC-90F2E24B7726}"/>
+              </a:ext>
+            </a:extLst>
+          </p:cNvPr>
+          <p:cNvSpPr>
+            <a:spLocks noGrp="1"/>
+          </p:cNvSpPr>
+          <p:nvPr>
+            <p:ph idx="1"/>
+          </p:nvPr>
+        </p:nvSpPr>
+        <p:spPr/>
+        <p:txBody>
+          <a:bodyPr>
+            <a:normAutofit/>
+          </a:bodyPr>
+          <a:lstStyle/>
+          <a:p>
+            <a:r>
+              <a:rPr lang="en-US" sz="1900" dirty="0">
+                <a:latin typeface="Arial Rounded MT Bold" panose="020F0704030504030204" pitchFamily="34" charset="0"/>
+              </a:rPr>
+              <a:t>Government agencies overseeing national elections.</a:t>
+            </a:r>
+          </a:p>
+          <a:p>
+            <a:r>
+              <a:rPr lang="en-US" sz="1900" dirty="0">
+                <a:latin typeface="Arial Rounded MT Bold" panose="020F0704030504030204" pitchFamily="34" charset="0"/>
+              </a:rPr>
+              <a:t>Electoral commissions managing voter identity and results.</a:t>
+            </a:r>
+          </a:p>
+          <a:p>
+            <a:r>
+              <a:rPr lang="en-US" sz="1900" dirty="0">
+                <a:latin typeface="Arial Rounded MT Bold" panose="020F0704030504030204" pitchFamily="34" charset="0"/>
+              </a:rPr>
+              <a:t>NGOs and civil society organizations focused on electoral integrity.</a:t>
+            </a:r>
+          </a:p>
+          <a:p>
+            <a:r>
+              <a:rPr lang="en-US" sz="1900" dirty="0">
+                <a:latin typeface="Arial Rounded MT Bold" panose="020F0704030504030204" pitchFamily="34" charset="0"/>
+              </a:rPr>
+              <a:t>Technology partners or sponsors interested in secure civic platforms.</a:t>
+            </a:r>
+          </a:p>
+          <a:p>
+            <a:r>
+              <a:rPr lang="en-US" sz="1900" dirty="0">
+                <a:latin typeface="Arial Rounded MT Bold" panose="020F0704030504030204" pitchFamily="34" charset="0"/>
+              </a:rPr>
+              <a:t>Citizens needing a reliable digital voting channel.</a:t>
+            </a:r>
+          </a:p>
+        </p:txBody>
+      </p:sp>
+    </p:spTree>
+    <p:extLst>
+      <p:ext uri="{BB962C8B-B14F-4D97-AF65-F5344CB8AC3E}">
+        <p14:creationId xmlns:p14="http://schemas.microsoft.com/office/powerpoint/2010/main" val="252505553"/>
+      </p:ext>
+    </p:extLst>
+  </p:cSld>
+  <p:clrMapOvr>
+    <a:masterClrMapping/>
+  </p:clrMapOvr>
+  <p:transition>
+    <p:fade/>
+  </p:transition>
+</p:sld>
+</file>
+
+<file path=ppt/slides/slide14.xml><?xml version="1.0" encoding="utf-8"?>
+<p:sld xmlns:a="http://schemas.openxmlformats.org/drawingml/2006/main" xmlns:r="http://schemas.openxmlformats.org/officeDocument/2006/relationships" xmlns:p="http://schemas.openxmlformats.org/presentationml/2006/main">
+  <p:cSld>
+    <p:spTree>
+      <p:nvGrpSpPr>
+        <p:cNvPr id="1" name=""/>
+        <p:cNvGrpSpPr/>
+        <p:nvPr/>
+      </p:nvGrpSpPr>
+      <p:grpSpPr>
+        <a:xfrm>
+          <a:off x="0" y="0"/>
+          <a:ext cx="0" cy="0"/>
+          <a:chOff x="0" y="0"/>
+          <a:chExt cx="0" cy="0"/>
+        </a:xfrm>
+      </p:grpSpPr>
+      <p:sp>
+        <p:nvSpPr>
+          <p:cNvPr id="2" name="Title 1">
+            <a:extLst>
+              <a:ext uri="{FF2B5EF4-FFF2-40B4-BE49-F238E27FC236}">
+                <a16:creationId xmlns:a16="http://schemas.microsoft.com/office/drawing/2014/main" id="{A0E07FF3-8E9B-42EF-B66A-42292123B754}"/>
+              </a:ext>
+            </a:extLst>
+          </p:cNvPr>
+          <p:cNvSpPr>
+            <a:spLocks noGrp="1"/>
+          </p:cNvSpPr>
+          <p:nvPr>
+            <p:ph type="title"/>
+          </p:nvPr>
+        </p:nvSpPr>
+        <p:spPr/>
+        <p:txBody>
+          <a:bodyPr/>
+          <a:lstStyle/>
+          <a:p>
+            <a:pPr algn="r"/>
+            <a:r>
+              <a:rPr lang="en-US" dirty="0">
+                <a:latin typeface="Algerian" panose="04020705040A02060702" pitchFamily="82" charset="0"/>
+              </a:rPr>
+              <a:t>Why NatioID Matters</a:t>
+            </a:r>
+          </a:p>
+        </p:txBody>
+      </p:sp>
+      <p:sp>
+        <p:nvSpPr>
+          <p:cNvPr id="3" name="Content Placeholder 2">
+            <a:extLst>
+              <a:ext uri="{FF2B5EF4-FFF2-40B4-BE49-F238E27FC236}">
+                <a16:creationId xmlns:a16="http://schemas.microsoft.com/office/drawing/2014/main" id="{F45E506B-3B1E-4BA1-B217-88D45419126B}"/>
+              </a:ext>
+            </a:extLst>
+          </p:cNvPr>
+          <p:cNvSpPr>
+            <a:spLocks noGrp="1"/>
+          </p:cNvSpPr>
+          <p:nvPr>
+            <p:ph idx="1"/>
+          </p:nvPr>
+        </p:nvSpPr>
+        <p:spPr/>
+        <p:txBody>
+          <a:bodyPr>
+            <a:normAutofit/>
+          </a:bodyPr>
+          <a:lstStyle/>
+          <a:p>
+            <a:r>
+              <a:rPr lang="en-US" sz="1900" dirty="0">
+                <a:latin typeface="Arial Rounded MT Bold" panose="020F0704030504030204" pitchFamily="34" charset="0"/>
+              </a:rPr>
+              <a:t>Reduce election fraud through centralized digital ID.</a:t>
+            </a:r>
+          </a:p>
+          <a:p>
+            <a:r>
+              <a:rPr lang="en-US" sz="1900" dirty="0">
+                <a:latin typeface="Arial Rounded MT Bold" panose="020F0704030504030204" pitchFamily="34" charset="0"/>
+              </a:rPr>
+              <a:t>Increase transparency with real-time result monitoring.</a:t>
+            </a:r>
+          </a:p>
+          <a:p>
+            <a:r>
+              <a:rPr lang="en-US" sz="1900" dirty="0">
+                <a:latin typeface="Arial Rounded MT Bold" panose="020F0704030504030204" pitchFamily="34" charset="0"/>
+              </a:rPr>
+              <a:t>Encourage youth participation with mobile voting access.</a:t>
+            </a:r>
+          </a:p>
+          <a:p>
+            <a:r>
+              <a:rPr lang="en-US" sz="1900" dirty="0">
+                <a:latin typeface="Arial Rounded MT Bold" panose="020F0704030504030204" pitchFamily="34" charset="0"/>
+              </a:rPr>
+              <a:t>Eliminate polling unit violence and manual error.</a:t>
+            </a:r>
+          </a:p>
+          <a:p>
+            <a:r>
+              <a:rPr lang="en-US" sz="1900" dirty="0">
+                <a:latin typeface="Arial Rounded MT Bold" panose="020F0704030504030204" pitchFamily="34" charset="0"/>
+              </a:rPr>
+              <a:t>Replace scattered paper-based systems with unified digital infrastructure.</a:t>
+            </a:r>
+          </a:p>
+        </p:txBody>
+      </p:sp>
+    </p:spTree>
+    <p:extLst>
+      <p:ext uri="{BB962C8B-B14F-4D97-AF65-F5344CB8AC3E}">
+        <p14:creationId xmlns:p14="http://schemas.microsoft.com/office/powerpoint/2010/main" val="2998606307"/>
+      </p:ext>
+    </p:extLst>
+  </p:cSld>
+  <p:clrMapOvr>
+    <a:masterClrMapping/>
+  </p:clrMapOvr>
+  <p:transition>
+    <p:fade/>
+  </p:transition>
+</p:sld>
+</file>
+
+<file path=ppt/slides/slide15.xml><?xml version="1.0" encoding="utf-8"?>
+<p:sld xmlns:a="http://schemas.openxmlformats.org/drawingml/2006/main" xmlns:r="http://schemas.openxmlformats.org/officeDocument/2006/relationships" xmlns:p="http://schemas.openxmlformats.org/presentationml/2006/main">
+  <p:cSld>
+    <p:spTree>
+      <p:nvGrpSpPr>
+        <p:cNvPr id="1" name=""/>
+        <p:cNvGrpSpPr/>
+        <p:nvPr/>
+      </p:nvGrpSpPr>
+      <p:grpSpPr>
+        <a:xfrm>
+          <a:off x="0" y="0"/>
+          <a:ext cx="0" cy="0"/>
+          <a:chOff x="0" y="0"/>
+          <a:chExt cx="0" cy="0"/>
+        </a:xfrm>
+      </p:grpSpPr>
+      <p:sp>
+        <p:nvSpPr>
+          <p:cNvPr id="2" name="Title 1">
+            <a:extLst>
+              <a:ext uri="{FF2B5EF4-FFF2-40B4-BE49-F238E27FC236}">
+                <a16:creationId xmlns:a16="http://schemas.microsoft.com/office/drawing/2014/main" id="{81D2B473-794B-4376-81BA-C4B4AC78BCDF}"/>
+              </a:ext>
+            </a:extLst>
+          </p:cNvPr>
+          <p:cNvSpPr>
+            <a:spLocks noGrp="1"/>
+          </p:cNvSpPr>
+          <p:nvPr>
+            <p:ph type="title"/>
+          </p:nvPr>
+        </p:nvSpPr>
+        <p:spPr/>
+        <p:txBody>
+          <a:bodyPr/>
+          <a:lstStyle/>
+          <a:p>
+            <a:pPr algn="r"/>
+            <a:r>
+              <a:rPr lang="en-US" dirty="0">
+                <a:latin typeface="Algerian" panose="04020705040A02060702" pitchFamily="82" charset="0"/>
+              </a:rPr>
+              <a:t>User Journey Overview</a:t>
+            </a:r>
+          </a:p>
+        </p:txBody>
+      </p:sp>
+      <p:sp>
+        <p:nvSpPr>
+          <p:cNvPr id="3" name="Content Placeholder 2">
+            <a:extLst>
+              <a:ext uri="{FF2B5EF4-FFF2-40B4-BE49-F238E27FC236}">
+                <a16:creationId xmlns:a16="http://schemas.microsoft.com/office/drawing/2014/main" id="{049B5465-1134-499E-BE71-04A72325290F}"/>
+              </a:ext>
+            </a:extLst>
+          </p:cNvPr>
+          <p:cNvSpPr>
+            <a:spLocks noGrp="1"/>
+          </p:cNvSpPr>
+          <p:nvPr>
+            <p:ph idx="1"/>
+          </p:nvPr>
+        </p:nvSpPr>
+        <p:spPr/>
+        <p:txBody>
+          <a:bodyPr>
+            <a:noAutofit/>
+          </a:bodyPr>
+          <a:lstStyle/>
+          <a:p>
+            <a:pPr marL="0" indent="0">
+              <a:buNone/>
+            </a:pPr>
+            <a:r>
+              <a:rPr lang="en-US" sz="1900" b="1" dirty="0">
+                <a:latin typeface="Arial Rounded MT Bold" panose="020F0704030504030204" pitchFamily="34" charset="0"/>
+              </a:rPr>
+              <a:t>Citizen</a:t>
+            </a:r>
+            <a:r>
+              <a:rPr lang="en-US" sz="1700" dirty="0">
+                <a:latin typeface="Arial Rounded MT Bold" panose="020F0704030504030204" pitchFamily="34" charset="0"/>
+              </a:rPr>
+              <a:t>:</a:t>
+            </a:r>
+          </a:p>
+          <a:p>
+            <a:pPr marL="457200" indent="-457200">
+              <a:buAutoNum type="arabicPeriod"/>
+            </a:pPr>
+            <a:r>
+              <a:rPr lang="en-US" sz="1700" dirty="0">
+                <a:latin typeface="Arial Rounded MT Bold" panose="020F0704030504030204" pitchFamily="34" charset="0"/>
+              </a:rPr>
+              <a:t>Register with personal details via mobile app.</a:t>
+            </a:r>
+          </a:p>
+          <a:p>
+            <a:pPr marL="457200" indent="-457200">
+              <a:buAutoNum type="arabicPeriod"/>
+            </a:pPr>
+            <a:r>
+              <a:rPr lang="en-US" sz="1700" dirty="0">
+                <a:latin typeface="Arial Rounded MT Bold" panose="020F0704030504030204" pitchFamily="34" charset="0"/>
+              </a:rPr>
+              <a:t>View available elections.</a:t>
+            </a:r>
+          </a:p>
+          <a:p>
+            <a:pPr marL="457200" indent="-457200">
+              <a:buAutoNum type="arabicPeriod"/>
+            </a:pPr>
+            <a:r>
+              <a:rPr lang="en-US" sz="1700" dirty="0">
+                <a:latin typeface="Arial Rounded MT Bold" panose="020F0704030504030204" pitchFamily="34" charset="0"/>
+              </a:rPr>
+              <a:t>Cast secure vote.</a:t>
+            </a:r>
+          </a:p>
+          <a:p>
+            <a:pPr marL="457200" indent="-457200">
+              <a:buAutoNum type="arabicPeriod"/>
+            </a:pPr>
+            <a:r>
+              <a:rPr lang="en-US" sz="1700" dirty="0">
+                <a:latin typeface="Arial Rounded MT Bold" panose="020F0704030504030204" pitchFamily="34" charset="0"/>
+              </a:rPr>
+              <a:t>Track results.</a:t>
+            </a:r>
+          </a:p>
+          <a:p>
+            <a:pPr marL="0" indent="0">
+              <a:buNone/>
+            </a:pPr>
+            <a:endParaRPr lang="en-US" sz="1700" dirty="0">
+              <a:latin typeface="Arial Rounded MT Bold" panose="020F0704030504030204" pitchFamily="34" charset="0"/>
+            </a:endParaRPr>
+          </a:p>
+          <a:p>
+            <a:pPr marL="0" indent="0">
+              <a:buNone/>
+            </a:pPr>
+            <a:r>
+              <a:rPr lang="en-US" sz="1900" b="1" dirty="0">
+                <a:latin typeface="Arial Rounded MT Bold" panose="020F0704030504030204" pitchFamily="34" charset="0"/>
+              </a:rPr>
+              <a:t>Admin</a:t>
+            </a:r>
+            <a:r>
+              <a:rPr lang="en-US" sz="1700" dirty="0">
+                <a:latin typeface="Arial Rounded MT Bold" panose="020F0704030504030204" pitchFamily="34" charset="0"/>
+              </a:rPr>
+              <a:t>:</a:t>
+            </a:r>
+          </a:p>
+          <a:p>
+            <a:pPr marL="457200" indent="-457200">
+              <a:buAutoNum type="arabicPeriod"/>
+            </a:pPr>
+            <a:r>
+              <a:rPr lang="en-US" sz="1700" dirty="0">
+                <a:latin typeface="Arial Rounded MT Bold" panose="020F0704030504030204" pitchFamily="34" charset="0"/>
+              </a:rPr>
+              <a:t>Create elections.</a:t>
+            </a:r>
+          </a:p>
+          <a:p>
+            <a:pPr marL="457200" indent="-457200">
+              <a:buAutoNum type="arabicPeriod"/>
+            </a:pPr>
+            <a:r>
+              <a:rPr lang="en-US" sz="1700" dirty="0">
+                <a:latin typeface="Arial Rounded MT Bold" panose="020F0704030504030204" pitchFamily="34" charset="0"/>
+              </a:rPr>
+              <a:t>Add/manage candidates. </a:t>
+            </a:r>
+          </a:p>
+          <a:p>
+            <a:pPr marL="457200" indent="-457200">
+              <a:buAutoNum type="arabicPeriod"/>
+            </a:pPr>
+            <a:r>
+              <a:rPr lang="en-US" sz="1700" dirty="0">
+                <a:latin typeface="Arial Rounded MT Bold" panose="020F0704030504030204" pitchFamily="34" charset="0"/>
+              </a:rPr>
+              <a:t>Monitor results in real time.</a:t>
+            </a:r>
+          </a:p>
+          <a:p>
+            <a:pPr marL="457200" indent="-457200">
+              <a:buAutoNum type="arabicPeriod"/>
+            </a:pPr>
+            <a:r>
+              <a:rPr lang="en-US" sz="1700" dirty="0">
+                <a:latin typeface="Arial Rounded MT Bold" panose="020F0704030504030204" pitchFamily="34" charset="0"/>
+              </a:rPr>
+              <a:t>Respond to complaints.</a:t>
+            </a:r>
+          </a:p>
+        </p:txBody>
+      </p:sp>
+    </p:spTree>
+    <p:extLst>
+      <p:ext uri="{BB962C8B-B14F-4D97-AF65-F5344CB8AC3E}">
+        <p14:creationId xmlns:p14="http://schemas.microsoft.com/office/powerpoint/2010/main" val="117766027"/>
+      </p:ext>
+    </p:extLst>
+  </p:cSld>
+  <p:clrMapOvr>
+    <a:masterClrMapping/>
+  </p:clrMapOvr>
+  <p:transition>
+    <p:fade/>
+  </p:transition>
+</p:sld>
+</file>
+
+<file path=ppt/slides/slide16.xml><?xml version="1.0" encoding="utf-8"?>
+<p:sld xmlns:a="http://schemas.openxmlformats.org/drawingml/2006/main" xmlns:r="http://schemas.openxmlformats.org/officeDocument/2006/relationships" xmlns:p="http://schemas.openxmlformats.org/presentationml/2006/main">
+  <p:cSld>
+    <p:spTree>
+      <p:nvGrpSpPr>
+        <p:cNvPr id="1" name=""/>
+        <p:cNvGrpSpPr/>
+        <p:nvPr/>
+      </p:nvGrpSpPr>
+      <p:grpSpPr>
+        <a:xfrm>
+          <a:off x="0" y="0"/>
+          <a:ext cx="0" cy="0"/>
+          <a:chOff x="0" y="0"/>
+          <a:chExt cx="0" cy="0"/>
+        </a:xfrm>
+      </p:grpSpPr>
+      <p:sp>
+        <p:nvSpPr>
+          <p:cNvPr id="2" name="Title 1">
+            <a:extLst>
+              <a:ext uri="{FF2B5EF4-FFF2-40B4-BE49-F238E27FC236}">
                 <a16:creationId xmlns:a16="http://schemas.microsoft.com/office/drawing/2014/main" id="{05F9FA35-E798-4A2E-A5F7-75F57585D3C7}"/>
               </a:ext>
             </a:extLst>
@@ -6366,13 +7585,20 @@
             <p:ph type="title"/>
           </p:nvPr>
         </p:nvSpPr>
-        <p:spPr/>
+        <p:spPr>
+          <a:xfrm>
+            <a:off x="4331368" y="1502309"/>
+            <a:ext cx="2987841" cy="1048385"/>
+          </a:xfrm>
+        </p:spPr>
         <p:txBody>
           <a:bodyPr/>
           <a:lstStyle/>
           <a:p>
             <a:r>
-              <a:rPr lang="en-US"/>
+              <a:rPr lang="en-US" dirty="0">
+                <a:latin typeface="Algerian" panose="04020705040A02060702" pitchFamily="82" charset="0"/>
+              </a:rPr>
               <a:t>Thank You</a:t>
             </a:r>
           </a:p>
@@ -6394,24 +7620,74 @@
             <p:ph type="body" idx="1"/>
           </p:nvPr>
         </p:nvSpPr>
-        <p:spPr/>
-        <p:txBody>
-          <a:bodyPr/>
+        <p:spPr>
+          <a:xfrm>
+            <a:off x="2578769" y="3145055"/>
+            <a:ext cx="7431505" cy="2000686"/>
+          </a:xfrm>
+        </p:spPr>
+        <p:txBody>
+          <a:bodyPr>
+            <a:normAutofit fontScale="70000" lnSpcReduction="20000"/>
+          </a:bodyPr>
           <a:lstStyle/>
           <a:p>
             <a:r>
-              <a:rPr lang="fr-FR"/>
-              <a:t>• Questions?</a:t>
-            </a:r>
-          </a:p>
-          <a:p>
-            <a:r>
-              <a:rPr lang="fr-FR"/>
-              <a:t>• Contact: abdulazeezadam09@gmail.com</a:t>
-            </a:r>
-          </a:p>
-          <a:p>
-            <a:endParaRPr lang="en-US"/>
+              <a:rPr lang="en-US" dirty="0">
+                <a:latin typeface="Arial Rounded MT Bold" panose="020F0704030504030204" pitchFamily="34" charset="0"/>
+              </a:rPr>
+              <a:t>We appreciate your time and attention.  </a:t>
+            </a:r>
+          </a:p>
+          <a:p>
+            <a:r>
+              <a:rPr lang="en-US" dirty="0">
+                <a:latin typeface="Arial Rounded MT Bold" panose="020F0704030504030204" pitchFamily="34" charset="0"/>
+              </a:rPr>
+              <a:t>Questions or feedback? We're happy to discuss.  </a:t>
+            </a:r>
+          </a:p>
+          <a:p>
+            <a:r>
+              <a:rPr lang="en-US" dirty="0">
+                <a:latin typeface="Arial Rounded MT Bold" panose="020F0704030504030204" pitchFamily="34" charset="0"/>
+              </a:rPr>
+              <a:t>Contact: abdulazeezadam09@gmail.com </a:t>
+            </a:r>
+          </a:p>
+          <a:p>
+            <a:r>
+              <a:rPr lang="en-US" dirty="0">
+                <a:latin typeface="Arial Rounded MT Bold" panose="020F0704030504030204" pitchFamily="34" charset="0"/>
+              </a:rPr>
+              <a:t>GitHub: </a:t>
+            </a:r>
+            <a:r>
+              <a:rPr lang="en-US" dirty="0">
+                <a:latin typeface="Arial Rounded MT Bold" panose="020F0704030504030204" pitchFamily="34" charset="0"/>
+                <a:hlinkClick r:id="rId2"/>
+              </a:rPr>
+              <a:t>https://github.com/Ainfiniti01/NatioID</a:t>
+            </a:r>
+            <a:endParaRPr lang="en-US" dirty="0">
+              <a:latin typeface="Arial Rounded MT Bold" panose="020F0704030504030204" pitchFamily="34" charset="0"/>
+            </a:endParaRPr>
+          </a:p>
+          <a:p>
+            <a:r>
+              <a:rPr lang="en-US" dirty="0">
+                <a:latin typeface="Arial Rounded MT Bold" panose="020F0704030504030204" pitchFamily="34" charset="0"/>
+              </a:rPr>
+              <a:t>Docs folder: Contains feature writeups, screenshots, and license.</a:t>
+            </a:r>
+          </a:p>
+          <a:p>
+            <a:r>
+              <a:rPr lang="en-US" dirty="0">
+                <a:latin typeface="Arial Rounded MT Bold" panose="020F0704030504030204" pitchFamily="34" charset="0"/>
+              </a:rPr>
+              <a:t>Presentation resources available on request.</a:t>
+            </a:r>
           </a:p>
         </p:txBody>
       </p:sp>
@@ -6425,6 +7701,9 @@
   <p:clrMapOvr>
     <a:masterClrMapping/>
   </p:clrMapOvr>
+  <p:transition>
+    <p:fade/>
+  </p:transition>
 </p:sld>
 </file>
 
@@ -6466,8 +7745,11 @@
           <a:bodyPr/>
           <a:lstStyle/>
           <a:p>
-            <a:r>
-              <a:rPr lang="en-US"/>
+            <a:pPr algn="r"/>
+            <a:r>
+              <a:rPr lang="en-US" dirty="0">
+                <a:latin typeface="Algerian" panose="04020705040A02060702" pitchFamily="82" charset="0"/>
+              </a:rPr>
               <a:t>Project Overview</a:t>
             </a:r>
           </a:p>
@@ -6491,34 +7773,107 @@
         </p:nvSpPr>
         <p:spPr/>
         <p:txBody>
-          <a:bodyPr/>
+          <a:bodyPr>
+            <a:normAutofit fontScale="70000" lnSpcReduction="20000"/>
+          </a:bodyPr>
           <a:lstStyle/>
           <a:p>
             <a:r>
-              <a:rPr lang="en-US"/>
-              <a:t>• A unified digital identity and voting system for citizens and government.</a:t>
-            </a:r>
-          </a:p>
-          <a:p>
-            <a:r>
-              <a:rPr lang="en-US"/>
-              <a:t>• Solves inefficiency and fraud in traditional ID &amp; voting systems.</a:t>
-            </a:r>
-          </a:p>
-          <a:p>
-            <a:r>
-              <a:rPr lang="en-US"/>
-              <a:t>• Targets citizens, administrators, and government agencies.</a:t>
-            </a:r>
-          </a:p>
-          <a:p>
-            <a:r>
-              <a:rPr lang="en-US"/>
-              <a:t>• Platforms: Web (React + Vite) and Mobile (Expo React Native).</a:t>
-            </a:r>
-          </a:p>
-          <a:p>
-            <a:endParaRPr lang="en-US"/>
+              <a:rPr lang="en-US" dirty="0">
+                <a:latin typeface="Arial Rounded MT Bold" panose="020F0704030504030204" pitchFamily="34" charset="0"/>
+              </a:rPr>
+              <a:t>NatioID – Unified Digital Identity &amp; Voting Platform- </a:t>
+            </a:r>
+          </a:p>
+          <a:p>
+            <a:r>
+              <a:rPr lang="en-US" dirty="0">
+                <a:latin typeface="Arial Rounded MT Bold" panose="020F0704030504030204" pitchFamily="34" charset="0"/>
+              </a:rPr>
+              <a:t>A centralized platform for secure digital identification and voting.</a:t>
+            </a:r>
+          </a:p>
+          <a:p>
+            <a:r>
+              <a:rPr lang="en-US" dirty="0">
+                <a:latin typeface="Arial Rounded MT Bold" panose="020F0704030504030204" pitchFamily="34" charset="0"/>
+              </a:rPr>
+              <a:t>Designed for government agencies, election bodies, and citizens. </a:t>
+            </a:r>
+          </a:p>
+          <a:p>
+            <a:r>
+              <a:rPr lang="en-US" dirty="0">
+                <a:latin typeface="Arial Rounded MT Bold" panose="020F0704030504030204" pitchFamily="34" charset="0"/>
+              </a:rPr>
+              <a:t> Solves inefficiencies and fraud in traditional ID and voting systems.</a:t>
+            </a:r>
+          </a:p>
+          <a:p>
+            <a:r>
+              <a:rPr lang="en-US" dirty="0">
+                <a:latin typeface="Arial Rounded MT Bold" panose="020F0704030504030204" pitchFamily="34" charset="0"/>
+              </a:rPr>
+              <a:t> Dual interfaces: Admin Dashboard and Citizen Portal. </a:t>
+            </a:r>
+          </a:p>
+          <a:p>
+            <a:r>
+              <a:rPr lang="en-US" dirty="0">
+                <a:latin typeface="Arial Rounded MT Bold" panose="020F0704030504030204" pitchFamily="34" charset="0"/>
+              </a:rPr>
+              <a:t>Scalable for national-level elections and population-wide identity management.</a:t>
+            </a:r>
+          </a:p>
+          <a:p>
+            <a:r>
+              <a:rPr lang="en-US" dirty="0">
+                <a:latin typeface="Arial Rounded MT Bold" panose="020F0704030504030204" pitchFamily="34" charset="0"/>
+              </a:rPr>
+              <a:t>Accessible on: </a:t>
+            </a:r>
+          </a:p>
+          <a:p>
+            <a:pPr marL="0" indent="0">
+              <a:buNone/>
+            </a:pPr>
+            <a:r>
+              <a:rPr lang="en-US" dirty="0">
+                <a:latin typeface="Arial Rounded MT Bold" panose="020F0704030504030204" pitchFamily="34" charset="0"/>
+              </a:rPr>
+              <a:t>    - Web: Built with React + </a:t>
+            </a:r>
+            <a:r>
+              <a:rPr lang="en-US" dirty="0" err="1">
+                <a:latin typeface="Arial Rounded MT Bold" panose="020F0704030504030204" pitchFamily="34" charset="0"/>
+              </a:rPr>
+              <a:t>Vite</a:t>
+            </a:r>
+            <a:r>
+              <a:rPr lang="en-US" dirty="0">
+                <a:latin typeface="Arial Rounded MT Bold" panose="020F0704030504030204" pitchFamily="34" charset="0"/>
+              </a:rPr>
+              <a:t>   </a:t>
+            </a:r>
+          </a:p>
+          <a:p>
+            <a:pPr marL="0" indent="0">
+              <a:buNone/>
+            </a:pPr>
+            <a:r>
+              <a:rPr lang="en-US" dirty="0">
+                <a:latin typeface="Arial Rounded MT Bold" panose="020F0704030504030204" pitchFamily="34" charset="0"/>
+              </a:rPr>
+              <a:t>    - Mobile: Developed using Expo (React Native)</a:t>
+            </a:r>
+          </a:p>
+          <a:p>
+            <a:pPr marL="0" indent="0">
+              <a:buNone/>
+            </a:pPr>
+            <a:endParaRPr lang="en-US" dirty="0">
+              <a:latin typeface="Arial Rounded MT Bold" panose="020F0704030504030204" pitchFamily="34" charset="0"/>
+            </a:endParaRPr>
           </a:p>
         </p:txBody>
       </p:sp>
@@ -6532,6 +7887,9 @@
   <p:clrMapOvr>
     <a:masterClrMapping/>
   </p:clrMapOvr>
+  <p:transition>
+    <p:fade/>
+  </p:transition>
 </p:sld>
 </file>
 
@@ -6568,13 +7926,21 @@
             <p:ph type="title"/>
           </p:nvPr>
         </p:nvSpPr>
-        <p:spPr/>
+        <p:spPr>
+          <a:xfrm>
+            <a:off x="2895600" y="251026"/>
+            <a:ext cx="8610600" cy="1293028"/>
+          </a:xfrm>
+        </p:spPr>
         <p:txBody>
           <a:bodyPr/>
           <a:lstStyle/>
           <a:p>
-            <a:r>
-              <a:rPr lang="en-US"/>
+            <a:pPr algn="r"/>
+            <a:r>
+              <a:rPr lang="en-US" dirty="0">
+                <a:latin typeface="Algerian" panose="04020705040A02060702" pitchFamily="82" charset="0"/>
+              </a:rPr>
               <a:t>Problem Statement &amp; Goal</a:t>
             </a:r>
           </a:p>
@@ -6596,30 +7962,123 @@
             <p:ph type="body" idx="1"/>
           </p:nvPr>
         </p:nvSpPr>
-        <p:spPr/>
-        <p:txBody>
-          <a:bodyPr/>
+        <p:spPr>
+          <a:xfrm>
+            <a:off x="1219200" y="1761423"/>
+            <a:ext cx="10287000" cy="4511040"/>
+          </a:xfrm>
+        </p:spPr>
+        <p:txBody>
+          <a:bodyPr>
+            <a:normAutofit/>
+          </a:bodyPr>
           <a:lstStyle/>
           <a:p>
-            <a:r>
-              <a:rPr lang="en-US"/>
-              <a:t>• Manual registration and voting cause inefficiency and fraud.</a:t>
-            </a:r>
-          </a:p>
-          <a:p>
-            <a:r>
-              <a:rPr lang="en-US"/>
-              <a:t>• No unified citizen data management.</a:t>
-            </a:r>
-          </a:p>
-          <a:p>
-            <a:r>
-              <a:rPr lang="en-US"/>
-              <a:t>• Goal: Create a secure, accessible, and transparent system.</a:t>
-            </a:r>
-          </a:p>
-          <a:p>
-            <a:endParaRPr lang="en-US"/>
+            <a:pPr marL="0" indent="0">
+              <a:buNone/>
+            </a:pPr>
+            <a:r>
+              <a:rPr lang="en-US" sz="1700" dirty="0">
+                <a:latin typeface="Arial Rounded MT Bold" panose="020F0704030504030204" pitchFamily="34" charset="0"/>
+              </a:rPr>
+              <a:t>❌Problems Identified  </a:t>
+            </a:r>
+          </a:p>
+          <a:p>
+            <a:pPr marL="0" indent="0">
+              <a:buNone/>
+            </a:pPr>
+            <a:r>
+              <a:rPr lang="en-US" sz="1700" dirty="0">
+                <a:latin typeface="Arial Rounded MT Bold" panose="020F0704030504030204" pitchFamily="34" charset="0"/>
+              </a:rPr>
+              <a:t>• Manual ID registration and voting processes are prone to fraud, delays, and errors.</a:t>
+            </a:r>
+          </a:p>
+          <a:p>
+            <a:pPr marL="0" indent="0">
+              <a:buNone/>
+            </a:pPr>
+            <a:r>
+              <a:rPr lang="en-US" sz="1700" dirty="0">
+                <a:latin typeface="Arial Rounded MT Bold" panose="020F0704030504030204" pitchFamily="34" charset="0"/>
+              </a:rPr>
+              <a:t>• Lack of a centralized system for citizen data and election oversight. </a:t>
+            </a:r>
+          </a:p>
+          <a:p>
+            <a:pPr marL="0" indent="0">
+              <a:buNone/>
+            </a:pPr>
+            <a:r>
+              <a:rPr lang="en-US" sz="1700" dirty="0">
+                <a:latin typeface="Arial Rounded MT Bold" panose="020F0704030504030204" pitchFamily="34" charset="0"/>
+              </a:rPr>
+              <a:t>• Limited transparency and real-time access for both voters and administrators.</a:t>
+            </a:r>
+          </a:p>
+          <a:p>
+            <a:pPr marL="0" indent="0">
+              <a:buNone/>
+            </a:pPr>
+            <a:r>
+              <a:rPr lang="en-US" sz="1700" dirty="0">
+                <a:latin typeface="Arial Rounded MT Bold" panose="020F0704030504030204" pitchFamily="34" charset="0"/>
+              </a:rPr>
+              <a:t>• Many young citizens do not have Voter IDs, making it hard to engage in elections.</a:t>
+            </a:r>
+          </a:p>
+          <a:p>
+            <a:pPr marL="0" indent="0">
+              <a:buNone/>
+            </a:pPr>
+            <a:r>
+              <a:rPr lang="en-US" sz="1700" dirty="0">
+                <a:latin typeface="Arial Rounded MT Bold" panose="020F0704030504030204" pitchFamily="34" charset="0"/>
+              </a:rPr>
+              <a:t>• Physical voting increases risk of violence, fights, and even loss of life at polling stations.  </a:t>
+            </a:r>
+          </a:p>
+          <a:p>
+            <a:pPr marL="0" indent="0">
+              <a:buNone/>
+            </a:pPr>
+            <a:r>
+              <a:rPr lang="en-US" sz="1700" dirty="0">
+                <a:latin typeface="Arial Rounded MT Bold" panose="020F0704030504030204" pitchFamily="34" charset="0"/>
+              </a:rPr>
+              <a:t>• Low youth participation — many see voting as stressful, time-wasting, or feel disconnected. </a:t>
+            </a:r>
+          </a:p>
+          <a:p>
+            <a:pPr marL="0" indent="0">
+              <a:buNone/>
+            </a:pPr>
+            <a:endParaRPr lang="en-US" sz="1700" dirty="0">
+              <a:latin typeface="Arial Rounded MT Bold" panose="020F0704030504030204" pitchFamily="34" charset="0"/>
+            </a:endParaRPr>
+          </a:p>
+          <a:p>
+            <a:pPr marL="0" indent="0">
+              <a:buNone/>
+            </a:pPr>
+            <a:r>
+              <a:rPr lang="en-US" sz="1700" dirty="0">
+                <a:latin typeface="Arial Rounded MT Bold" panose="020F0704030504030204" pitchFamily="34" charset="0"/>
+              </a:rPr>
+              <a:t>🎯 Project Goal</a:t>
+            </a:r>
+          </a:p>
+          <a:p>
+            <a:pPr marL="0" indent="0">
+              <a:buNone/>
+            </a:pPr>
+            <a:r>
+              <a:rPr lang="en-US" sz="1700" dirty="0">
+                <a:latin typeface="Arial Rounded MT Bold" panose="020F0704030504030204" pitchFamily="34" charset="0"/>
+              </a:rPr>
+              <a:t>To build a secure, unified, and accessible digital platform for citizen identity and electronic voting, promoting transparency and trust in governance.</a:t>
+            </a:r>
           </a:p>
         </p:txBody>
       </p:sp>
@@ -6633,6 +8092,9 @@
   <p:clrMapOvr>
     <a:masterClrMapping/>
   </p:clrMapOvr>
+  <p:transition>
+    <p:fade/>
+  </p:transition>
 </p:sld>
 </file>
 
@@ -6669,14 +8131,22 @@
             <p:ph type="title"/>
           </p:nvPr>
         </p:nvSpPr>
-        <p:spPr/>
+        <p:spPr>
+          <a:xfrm>
+            <a:off x="2895600" y="299152"/>
+            <a:ext cx="8610600" cy="1293028"/>
+          </a:xfrm>
+        </p:spPr>
         <p:txBody>
           <a:bodyPr/>
           <a:lstStyle/>
           <a:p>
-            <a:r>
-              <a:rPr lang="en-US"/>
-              <a:t>Core Features</a:t>
+            <a:pPr algn="r"/>
+            <a:r>
+              <a:rPr lang="en-US" dirty="0">
+                <a:latin typeface="Algerian" panose="04020705040A02060702" pitchFamily="82" charset="0"/>
+              </a:rPr>
+              <a:t>KEY Features</a:t>
             </a:r>
           </a:p>
         </p:txBody>
@@ -6697,30 +8167,150 @@
             <p:ph type="body" idx="1"/>
           </p:nvPr>
         </p:nvSpPr>
-        <p:spPr/>
-        <p:txBody>
-          <a:bodyPr/>
+        <p:spPr>
+          <a:xfrm>
+            <a:off x="1470212" y="1592180"/>
+            <a:ext cx="10035988" cy="4663440"/>
+          </a:xfrm>
+        </p:spPr>
+        <p:txBody>
+          <a:bodyPr>
+            <a:noAutofit/>
+          </a:bodyPr>
           <a:lstStyle/>
           <a:p>
             <a:r>
-              <a:rPr lang="en-US"/>
-              <a:t>• Admin Portal: Manage citizens, elections, complaints, and live results.</a:t>
-            </a:r>
-          </a:p>
-          <a:p>
-            <a:r>
-              <a:rPr lang="en-US"/>
-              <a:t>• Citizen Portal: Apply for ID, vote, and submit feedback.</a:t>
-            </a:r>
-          </a:p>
-          <a:p>
-            <a:r>
-              <a:rPr lang="en-US"/>
-              <a:t>• Mobile App: Lightweight mirror of citizen portal built with Expo.</a:t>
-            </a:r>
-          </a:p>
-          <a:p>
-            <a:endParaRPr lang="en-US"/>
+              <a:rPr lang="en-US" sz="1700" dirty="0">
+                <a:latin typeface="Arial Rounded MT Bold" panose="020F0704030504030204" pitchFamily="34" charset="0"/>
+              </a:rPr>
+              <a:t>🔐 Admin Portal (Web App)</a:t>
+            </a:r>
+          </a:p>
+          <a:p>
+            <a:pPr marL="0" indent="0">
+              <a:buNone/>
+            </a:pPr>
+            <a:r>
+              <a:rPr lang="en-US" sz="1700" dirty="0">
+                <a:latin typeface="Arial Rounded MT Bold" panose="020F0704030504030204" pitchFamily="34" charset="0"/>
+              </a:rPr>
+              <a:t>  - Manage citizens and ID applications</a:t>
+            </a:r>
+          </a:p>
+          <a:p>
+            <a:pPr marL="0" indent="0">
+              <a:buNone/>
+            </a:pPr>
+            <a:r>
+              <a:rPr lang="en-US" sz="1700" dirty="0">
+                <a:latin typeface="Arial Rounded MT Bold" panose="020F0704030504030204" pitchFamily="34" charset="0"/>
+              </a:rPr>
+              <a:t>  - Create, edit, and launch elections</a:t>
+            </a:r>
+          </a:p>
+          <a:p>
+            <a:pPr marL="0" indent="0">
+              <a:buNone/>
+            </a:pPr>
+            <a:r>
+              <a:rPr lang="en-US" sz="1700" dirty="0">
+                <a:latin typeface="Arial Rounded MT Bold" panose="020F0704030504030204" pitchFamily="34" charset="0"/>
+              </a:rPr>
+              <a:t>  - Monitor live voting results</a:t>
+            </a:r>
+          </a:p>
+          <a:p>
+            <a:pPr marL="0" indent="0">
+              <a:buNone/>
+            </a:pPr>
+            <a:r>
+              <a:rPr lang="en-US" sz="1700" dirty="0">
+                <a:latin typeface="Arial Rounded MT Bold" panose="020F0704030504030204" pitchFamily="34" charset="0"/>
+              </a:rPr>
+              <a:t>  - Control candidate data &amp; campaigns</a:t>
+            </a:r>
+          </a:p>
+          <a:p>
+            <a:pPr marL="0" indent="0">
+              <a:buNone/>
+            </a:pPr>
+            <a:r>
+              <a:rPr lang="en-US" sz="1700" dirty="0">
+                <a:latin typeface="Arial Rounded MT Bold" panose="020F0704030504030204" pitchFamily="34" charset="0"/>
+              </a:rPr>
+              <a:t>  - Handle and escalate complaints</a:t>
+            </a:r>
+          </a:p>
+          <a:p>
+            <a:pPr marL="0" indent="0">
+              <a:buNone/>
+            </a:pPr>
+            <a:r>
+              <a:rPr lang="en-US" sz="1700" dirty="0">
+                <a:latin typeface="Arial Rounded MT Bold" panose="020F0704030504030204" pitchFamily="34" charset="0"/>
+              </a:rPr>
+              <a:t>  - Admin user management</a:t>
+            </a:r>
+          </a:p>
+          <a:p>
+            <a:pPr marL="0" indent="0">
+              <a:buNone/>
+            </a:pPr>
+            <a:endParaRPr lang="en-US" sz="1700" dirty="0">
+              <a:latin typeface="Arial Rounded MT Bold" panose="020F0704030504030204" pitchFamily="34" charset="0"/>
+            </a:endParaRPr>
+          </a:p>
+          <a:p>
+            <a:r>
+              <a:rPr lang="en-US" sz="1700" dirty="0">
+                <a:latin typeface="Arial Rounded MT Bold" panose="020F0704030504030204" pitchFamily="34" charset="0"/>
+              </a:rPr>
+              <a:t>🧍 Citizen Portal (📱 Mobile App - Expo)</a:t>
+            </a:r>
+          </a:p>
+          <a:p>
+            <a:pPr marL="0" indent="0">
+              <a:buNone/>
+            </a:pPr>
+            <a:r>
+              <a:rPr lang="en-US" sz="1700" dirty="0">
+                <a:latin typeface="Arial Rounded MT Bold" panose="020F0704030504030204" pitchFamily="34" charset="0"/>
+              </a:rPr>
+              <a:t>  - Apply for National ID</a:t>
+            </a:r>
+          </a:p>
+          <a:p>
+            <a:pPr marL="0" indent="0">
+              <a:buNone/>
+            </a:pPr>
+            <a:r>
+              <a:rPr lang="en-US" sz="1700" dirty="0">
+                <a:latin typeface="Arial Rounded MT Bold" panose="020F0704030504030204" pitchFamily="34" charset="0"/>
+              </a:rPr>
+              <a:t>  - Vote in elections securely</a:t>
+            </a:r>
+          </a:p>
+          <a:p>
+            <a:pPr marL="0" indent="0">
+              <a:buNone/>
+            </a:pPr>
+            <a:r>
+              <a:rPr lang="en-US" sz="1700" dirty="0">
+                <a:latin typeface="Arial Rounded MT Bold" panose="020F0704030504030204" pitchFamily="34" charset="0"/>
+              </a:rPr>
+              <a:t>  - View candidate campaigns </a:t>
+            </a:r>
+          </a:p>
+          <a:p>
+            <a:pPr marL="0" indent="0">
+              <a:buNone/>
+            </a:pPr>
+            <a:r>
+              <a:rPr lang="en-US" sz="1700" dirty="0">
+                <a:latin typeface="Arial Rounded MT Bold" panose="020F0704030504030204" pitchFamily="34" charset="0"/>
+              </a:rPr>
+              <a:t> - Submit feedback and complaints</a:t>
+            </a:r>
           </a:p>
         </p:txBody>
       </p:sp>
@@ -6734,6 +8324,9 @@
   <p:clrMapOvr>
     <a:masterClrMapping/>
   </p:clrMapOvr>
+  <p:transition>
+    <p:fade/>
+  </p:transition>
 </p:sld>
 </file>
 
@@ -6775,8 +8368,11 @@
           <a:bodyPr/>
           <a:lstStyle/>
           <a:p>
-            <a:r>
-              <a:rPr lang="en-US"/>
+            <a:pPr algn="r"/>
+            <a:r>
+              <a:rPr lang="en-US" dirty="0">
+                <a:latin typeface="Algerian" panose="04020705040A02060702" pitchFamily="82" charset="0"/>
+              </a:rPr>
               <a:t>Technical Architecture</a:t>
             </a:r>
           </a:p>
@@ -6800,34 +8396,110 @@
         </p:nvSpPr>
         <p:spPr/>
         <p:txBody>
-          <a:bodyPr/>
+          <a:bodyPr>
+            <a:normAutofit fontScale="85000" lnSpcReduction="20000"/>
+          </a:bodyPr>
           <a:lstStyle/>
           <a:p>
-            <a:r>
-              <a:rPr lang="en-US"/>
-              <a:t>• Frontend (Web): React + Vite + Tailwind CSS</a:t>
-            </a:r>
-          </a:p>
-          <a:p>
-            <a:r>
-              <a:rPr lang="en-US"/>
+            <a:pPr marL="0" indent="0">
+              <a:buNone/>
+            </a:pPr>
+            <a:r>
+              <a:rPr lang="en-US" dirty="0"/>
+              <a:t>• </a:t>
+            </a:r>
+            <a:r>
+              <a:rPr lang="en-US" sz="2200" dirty="0">
+                <a:latin typeface="Arial Rounded MT Bold" panose="020F0704030504030204" pitchFamily="34" charset="0"/>
+              </a:rPr>
+              <a:t>Frontend (Web): React + </a:t>
+            </a:r>
+            <a:r>
+              <a:rPr lang="en-US" sz="2200" dirty="0" err="1">
+                <a:latin typeface="Arial Rounded MT Bold" panose="020F0704030504030204" pitchFamily="34" charset="0"/>
+              </a:rPr>
+              <a:t>Vite</a:t>
+            </a:r>
+            <a:r>
+              <a:rPr lang="en-US" sz="2200" dirty="0">
+                <a:latin typeface="Arial Rounded MT Bold" panose="020F0704030504030204" pitchFamily="34" charset="0"/>
+              </a:rPr>
+              <a:t> + Tailwind CSS</a:t>
+            </a:r>
+          </a:p>
+          <a:p>
+            <a:pPr marL="0" indent="0">
+              <a:buNone/>
+            </a:pPr>
+            <a:r>
+              <a:rPr lang="en-US" sz="2200" dirty="0">
+                <a:latin typeface="Arial Rounded MT Bold" panose="020F0704030504030204" pitchFamily="34" charset="0"/>
+              </a:rPr>
               <a:t>• Mobile: Expo + React Native</a:t>
             </a:r>
           </a:p>
           <a:p>
-            <a:r>
-              <a:rPr lang="en-US"/>
-              <a:t>• State Management: Zustand / Context API</a:t>
-            </a:r>
-          </a:p>
-          <a:p>
-            <a:r>
-              <a:rPr lang="en-US"/>
-              <a:t>• Hosting: Vercel (Web), EAS Build (Mobile)</a:t>
-            </a:r>
-          </a:p>
-          <a:p>
-            <a:endParaRPr lang="en-US"/>
+            <a:pPr marL="0" indent="0">
+              <a:buNone/>
+            </a:pPr>
+            <a:r>
+              <a:rPr lang="en-US" sz="2200" dirty="0">
+                <a:latin typeface="Arial Rounded MT Bold" panose="020F0704030504030204" pitchFamily="34" charset="0"/>
+              </a:rPr>
+              <a:t>• Hosting: </a:t>
+            </a:r>
+            <a:r>
+              <a:rPr lang="en-US" sz="2200" dirty="0" err="1">
+                <a:latin typeface="Arial Rounded MT Bold" panose="020F0704030504030204" pitchFamily="34" charset="0"/>
+              </a:rPr>
+              <a:t>Vercel</a:t>
+            </a:r>
+            <a:r>
+              <a:rPr lang="en-US" sz="2200" dirty="0">
+                <a:latin typeface="Arial Rounded MT Bold" panose="020F0704030504030204" pitchFamily="34" charset="0"/>
+              </a:rPr>
+              <a:t> (Web), EAS Build (Mobile)</a:t>
+            </a:r>
+          </a:p>
+          <a:p>
+            <a:r>
+              <a:rPr lang="en-US" sz="2200" dirty="0">
+                <a:latin typeface="Arial Rounded MT Bold" panose="020F0704030504030204" pitchFamily="34" charset="0"/>
+              </a:rPr>
+              <a:t>Routing: React Router (Web), Expo Router (Mobile)</a:t>
+            </a:r>
+          </a:p>
+          <a:p>
+            <a:endParaRPr lang="en-US" dirty="0"/>
+          </a:p>
+          <a:p>
+            <a:endParaRPr lang="en-US" dirty="0"/>
+          </a:p>
+          <a:p>
+            <a:pPr marL="0" indent="0">
+              <a:buNone/>
+            </a:pPr>
+            <a:r>
+              <a:rPr lang="en-US" sz="2400" b="1" i="1" dirty="0"/>
+              <a:t>📝Note:</a:t>
+            </a:r>
+          </a:p>
+          <a:p>
+            <a:pPr marL="0" indent="0">
+              <a:buNone/>
+            </a:pPr>
+            <a:r>
+              <a:rPr lang="en-US" sz="1900" i="1" dirty="0"/>
+              <a:t>This version uses </a:t>
+            </a:r>
+            <a:r>
+              <a:rPr lang="en-US" sz="1900" b="1" i="1" dirty="0"/>
+              <a:t>dummy hardcoded data only</a:t>
+            </a:r>
+            <a:r>
+              <a:rPr lang="en-US" sz="1900" i="1" dirty="0"/>
+              <a:t>, with no real backend or live API integration (for demonstration purposes).</a:t>
+            </a:r>
           </a:p>
         </p:txBody>
       </p:sp>
@@ -6841,6 +8513,9 @@
   <p:clrMapOvr>
     <a:masterClrMapping/>
   </p:clrMapOvr>
+  <p:transition>
+    <p:fade/>
+  </p:transition>
 </p:sld>
 </file>
 
@@ -6877,13 +8552,21 @@
             <p:ph type="title"/>
           </p:nvPr>
         </p:nvSpPr>
-        <p:spPr/>
+        <p:spPr>
+          <a:xfrm>
+            <a:off x="1385699" y="0"/>
+            <a:ext cx="10018713" cy="1752599"/>
+          </a:xfrm>
+        </p:spPr>
         <p:txBody>
           <a:bodyPr/>
           <a:lstStyle/>
           <a:p>
-            <a:r>
-              <a:rPr lang="en-US"/>
+            <a:pPr algn="r"/>
+            <a:r>
+              <a:rPr lang="en-US" dirty="0">
+                <a:latin typeface="Algerian" panose="04020705040A02060702" pitchFamily="82" charset="0"/>
+              </a:rPr>
               <a:t>Admin Dashboard – Screenshots</a:t>
             </a:r>
           </a:p>
@@ -6905,33 +8588,165 @@
             <p:ph type="body" idx="1"/>
           </p:nvPr>
         </p:nvSpPr>
-        <p:spPr/>
-        <p:txBody>
-          <a:bodyPr/>
+        <p:spPr>
+          <a:xfrm>
+            <a:off x="1385698" y="1095760"/>
+            <a:ext cx="10018713" cy="3124201"/>
+          </a:xfrm>
+        </p:spPr>
+        <p:txBody>
+          <a:bodyPr>
+            <a:normAutofit/>
+          </a:bodyPr>
           <a:lstStyle/>
           <a:p>
-            <a:r>
-              <a:rPr lang="en-US"/>
+            <a:pPr marL="0" indent="0">
+              <a:buNone/>
+            </a:pPr>
+            <a:r>
+              <a:rPr lang="en-US" sz="1700" dirty="0">
+                <a:latin typeface="Arial Rounded MT Bold" panose="020F0704030504030204" pitchFamily="34" charset="0"/>
+              </a:rPr>
               <a:t>• Dashboard Overview</a:t>
             </a:r>
           </a:p>
           <a:p>
-            <a:r>
-              <a:rPr lang="en-US"/>
+            <a:pPr marL="0" indent="0">
+              <a:buNone/>
+            </a:pPr>
+            <a:r>
+              <a:rPr lang="en-US" sz="1700" dirty="0">
+                <a:latin typeface="Arial Rounded MT Bold" panose="020F0704030504030204" pitchFamily="34" charset="0"/>
+              </a:rPr>
               <a:t>• Manage Elections &amp; Candidates</a:t>
             </a:r>
           </a:p>
           <a:p>
-            <a:r>
-              <a:rPr lang="en-US"/>
+            <a:pPr marL="0" indent="0">
+              <a:buNone/>
+            </a:pPr>
+            <a:r>
+              <a:rPr lang="en-US" sz="1700" dirty="0">
+                <a:latin typeface="Arial Rounded MT Bold" panose="020F0704030504030204" pitchFamily="34" charset="0"/>
+              </a:rPr>
               <a:t>• View Real-Time Results</a:t>
             </a:r>
           </a:p>
           <a:p>
-            <a:endParaRPr lang="en-US"/>
-          </a:p>
-        </p:txBody>
-      </p:sp>
+            <a:endParaRPr lang="en-US" sz="1700" dirty="0">
+              <a:latin typeface="Arial Rounded MT Bold" panose="020F0704030504030204" pitchFamily="34" charset="0"/>
+            </a:endParaRPr>
+          </a:p>
+        </p:txBody>
+      </p:sp>
+      <p:pic>
+        <p:nvPicPr>
+          <p:cNvPr id="9" name="Picture 8">
+            <a:extLst>
+              <a:ext uri="{FF2B5EF4-FFF2-40B4-BE49-F238E27FC236}">
+                <a16:creationId xmlns:a16="http://schemas.microsoft.com/office/drawing/2014/main" id="{6F2CA4CE-8E7D-4044-9A82-073908CCB015}"/>
+              </a:ext>
+            </a:extLst>
+          </p:cNvPr>
+          <p:cNvPicPr>
+            <a:picLocks noChangeAspect="1"/>
+          </p:cNvPicPr>
+          <p:nvPr/>
+        </p:nvPicPr>
+        <p:blipFill>
+          <a:blip r:embed="rId2">
+            <a:extLst>
+              <a:ext uri="{28A0092B-C50C-407E-A947-70E740481C1C}">
+                <a14:useLocalDpi xmlns:a14="http://schemas.microsoft.com/office/drawing/2010/main" val="0"/>
+              </a:ext>
+            </a:extLst>
+          </a:blip>
+          <a:stretch>
+            <a:fillRect/>
+          </a:stretch>
+        </p:blipFill>
+        <p:spPr>
+          <a:xfrm>
+            <a:off x="493295" y="3700281"/>
+            <a:ext cx="3577389" cy="2586982"/>
+          </a:xfrm>
+          <a:prstGeom prst="rect">
+            <a:avLst/>
+          </a:prstGeom>
+        </p:spPr>
+      </p:pic>
+      <p:pic>
+        <p:nvPicPr>
+          <p:cNvPr id="11" name="Picture 10">
+            <a:extLst>
+              <a:ext uri="{FF2B5EF4-FFF2-40B4-BE49-F238E27FC236}">
+                <a16:creationId xmlns:a16="http://schemas.microsoft.com/office/drawing/2014/main" id="{2C00356B-D6EB-4D25-BC8C-A86BB1C2E271}"/>
+              </a:ext>
+            </a:extLst>
+          </p:cNvPr>
+          <p:cNvPicPr>
+            <a:picLocks noChangeAspect="1"/>
+          </p:cNvPicPr>
+          <p:nvPr/>
+        </p:nvPicPr>
+        <p:blipFill>
+          <a:blip r:embed="rId3">
+            <a:extLst>
+              <a:ext uri="{28A0092B-C50C-407E-A947-70E740481C1C}">
+                <a14:useLocalDpi xmlns:a14="http://schemas.microsoft.com/office/drawing/2010/main" val="0"/>
+              </a:ext>
+            </a:extLst>
+          </a:blip>
+          <a:stretch>
+            <a:fillRect/>
+          </a:stretch>
+        </p:blipFill>
+        <p:spPr>
+          <a:xfrm>
+            <a:off x="4386513" y="3837440"/>
+            <a:ext cx="3678656" cy="2449823"/>
+          </a:xfrm>
+          <a:prstGeom prst="rect">
+            <a:avLst/>
+          </a:prstGeom>
+        </p:spPr>
+      </p:pic>
+      <p:pic>
+        <p:nvPicPr>
+          <p:cNvPr id="13" name="Picture 12">
+            <a:extLst>
+              <a:ext uri="{FF2B5EF4-FFF2-40B4-BE49-F238E27FC236}">
+                <a16:creationId xmlns:a16="http://schemas.microsoft.com/office/drawing/2014/main" id="{A33096E3-DF6C-48CF-8E70-836CEE12AF86}"/>
+              </a:ext>
+            </a:extLst>
+          </p:cNvPr>
+          <p:cNvPicPr>
+            <a:picLocks noChangeAspect="1"/>
+          </p:cNvPicPr>
+          <p:nvPr/>
+        </p:nvPicPr>
+        <p:blipFill>
+          <a:blip r:embed="rId4">
+            <a:extLst>
+              <a:ext uri="{28A0092B-C50C-407E-A947-70E740481C1C}">
+                <a14:useLocalDpi xmlns:a14="http://schemas.microsoft.com/office/drawing/2010/main" val="0"/>
+              </a:ext>
+            </a:extLst>
+          </a:blip>
+          <a:stretch>
+            <a:fillRect/>
+          </a:stretch>
+        </p:blipFill>
+        <p:spPr>
+          <a:xfrm>
+            <a:off x="8380998" y="3768862"/>
+            <a:ext cx="3678657" cy="2449823"/>
+          </a:xfrm>
+          <a:prstGeom prst="rect">
+            <a:avLst/>
+          </a:prstGeom>
+        </p:spPr>
+      </p:pic>
     </p:spTree>
     <p:extLst>
       <p:ext uri="{BB962C8B-B14F-4D97-AF65-F5344CB8AC3E}">
@@ -6942,6 +8757,18 @@
   <p:clrMapOvr>
     <a:masterClrMapping/>
   </p:clrMapOvr>
+  <mc:AlternateContent xmlns:mc="http://schemas.openxmlformats.org/markup-compatibility/2006">
+    <mc:Choice xmlns:p14="http://schemas.microsoft.com/office/powerpoint/2010/main" Requires="p14">
+      <p:transition spd="med" p14:dur="700">
+        <p14:warp dir="in"/>
+      </p:transition>
+    </mc:Choice>
+    <mc:Fallback>
+      <p:transition spd="med">
+        <p:fade/>
+      </p:transition>
+    </mc:Fallback>
+  </mc:AlternateContent>
 </p:sld>
 </file>
 
@@ -6978,13 +8805,21 @@
             <p:ph type="title"/>
           </p:nvPr>
         </p:nvSpPr>
-        <p:spPr/>
+        <p:spPr>
+          <a:xfrm>
+            <a:off x="1609817" y="160421"/>
+            <a:ext cx="10018713" cy="1752599"/>
+          </a:xfrm>
+        </p:spPr>
         <p:txBody>
           <a:bodyPr/>
           <a:lstStyle/>
           <a:p>
-            <a:r>
-              <a:rPr lang="en-US"/>
+            <a:pPr algn="r"/>
+            <a:r>
+              <a:rPr lang="en-US" dirty="0">
+                <a:latin typeface="Algerian" panose="04020705040A02060702" pitchFamily="82" charset="0"/>
+              </a:rPr>
               <a:t>Citizen App – Screenshots</a:t>
             </a:r>
           </a:p>
@@ -7006,33 +8841,129 @@
             <p:ph type="body" idx="1"/>
           </p:nvPr>
         </p:nvSpPr>
-        <p:spPr/>
-        <p:txBody>
-          <a:bodyPr/>
+        <p:spPr>
+          <a:xfrm>
+            <a:off x="1521584" y="1036720"/>
+            <a:ext cx="10018713" cy="3124201"/>
+          </a:xfrm>
+        </p:spPr>
+        <p:txBody>
+          <a:bodyPr>
+            <a:normAutofit/>
+          </a:bodyPr>
           <a:lstStyle/>
           <a:p>
-            <a:r>
-              <a:rPr lang="en-US"/>
-              <a:t>• View Elections</a:t>
-            </a:r>
-          </a:p>
-          <a:p>
-            <a:r>
-              <a:rPr lang="en-US"/>
+            <a:pPr marL="0" indent="0">
+              <a:buNone/>
+            </a:pPr>
+            <a:r>
+              <a:rPr lang="en-US" sz="1700" dirty="0">
+                <a:latin typeface="Arial Rounded MT Bold" panose="020F0704030504030204" pitchFamily="34" charset="0"/>
+              </a:rPr>
+              <a:t>• Dashboard</a:t>
+            </a:r>
+          </a:p>
+          <a:p>
+            <a:pPr marL="0" indent="0">
+              <a:buNone/>
+            </a:pPr>
+            <a:r>
+              <a:rPr lang="en-US" sz="1700" dirty="0">
+                <a:latin typeface="Arial Rounded MT Bold" panose="020F0704030504030204" pitchFamily="34" charset="0"/>
+              </a:rPr>
               <a:t>• View Candidate Campaigns</a:t>
             </a:r>
           </a:p>
           <a:p>
-            <a:r>
-              <a:rPr lang="en-US"/>
+            <a:pPr marL="0" indent="0">
+              <a:buNone/>
+            </a:pPr>
+            <a:r>
+              <a:rPr lang="en-US" sz="1700" dirty="0">
+                <a:latin typeface="Arial Rounded MT Bold" panose="020F0704030504030204" pitchFamily="34" charset="0"/>
+              </a:rPr>
               <a:t>• Vote with One Tap</a:t>
             </a:r>
           </a:p>
           <a:p>
-            <a:endParaRPr lang="en-US"/>
-          </a:p>
-        </p:txBody>
-      </p:sp>
+            <a:endParaRPr lang="en-US" sz="1700" dirty="0">
+              <a:latin typeface="Arial Rounded MT Bold" panose="020F0704030504030204" pitchFamily="34" charset="0"/>
+            </a:endParaRPr>
+          </a:p>
+        </p:txBody>
+      </p:sp>
+      <p:pic>
+        <p:nvPicPr>
+          <p:cNvPr id="5" name="Picture 4">
+            <a:extLst>
+              <a:ext uri="{FF2B5EF4-FFF2-40B4-BE49-F238E27FC236}">
+                <a16:creationId xmlns:a16="http://schemas.microsoft.com/office/drawing/2014/main" id="{A6D99385-5943-4027-96D9-2F470E8D68B2}"/>
+              </a:ext>
+            </a:extLst>
+          </p:cNvPr>
+          <p:cNvPicPr>
+            <a:picLocks noChangeAspect="1"/>
+          </p:cNvPicPr>
+          <p:nvPr/>
+        </p:nvPicPr>
+        <p:blipFill>
+          <a:blip r:embed="rId2">
+            <a:extLst>
+              <a:ext uri="{28A0092B-C50C-407E-A947-70E740481C1C}">
+                <a14:useLocalDpi xmlns:a14="http://schemas.microsoft.com/office/drawing/2010/main" val="0"/>
+              </a:ext>
+            </a:extLst>
+          </a:blip>
+          <a:stretch>
+            <a:fillRect/>
+          </a:stretch>
+        </p:blipFill>
+        <p:spPr>
+          <a:xfrm>
+            <a:off x="9464842" y="2057401"/>
+            <a:ext cx="2041358" cy="4487778"/>
+          </a:xfrm>
+          <a:prstGeom prst="rect">
+            <a:avLst/>
+          </a:prstGeom>
+        </p:spPr>
+      </p:pic>
+      <p:pic>
+        <p:nvPicPr>
+          <p:cNvPr id="7" name="Picture 6">
+            <a:extLst>
+              <a:ext uri="{FF2B5EF4-FFF2-40B4-BE49-F238E27FC236}">
+                <a16:creationId xmlns:a16="http://schemas.microsoft.com/office/drawing/2014/main" id="{FEAD2725-7D63-44D1-9F65-C90051E43113}"/>
+              </a:ext>
+            </a:extLst>
+          </p:cNvPr>
+          <p:cNvPicPr>
+            <a:picLocks noChangeAspect="1"/>
+          </p:cNvPicPr>
+          <p:nvPr/>
+        </p:nvPicPr>
+        <p:blipFill>
+          <a:blip r:embed="rId3">
+            <a:extLst>
+              <a:ext uri="{28A0092B-C50C-407E-A947-70E740481C1C}">
+                <a14:useLocalDpi xmlns:a14="http://schemas.microsoft.com/office/drawing/2010/main" val="0"/>
+              </a:ext>
+            </a:extLst>
+          </a:blip>
+          <a:stretch>
+            <a:fillRect/>
+          </a:stretch>
+        </p:blipFill>
+        <p:spPr>
+          <a:xfrm>
+            <a:off x="6530941" y="1962733"/>
+            <a:ext cx="2407519" cy="4487778"/>
+          </a:xfrm>
+          <a:prstGeom prst="rect">
+            <a:avLst/>
+          </a:prstGeom>
+        </p:spPr>
+      </p:pic>
     </p:spTree>
     <p:extLst>
       <p:ext uri="{BB962C8B-B14F-4D97-AF65-F5344CB8AC3E}">
@@ -7043,6 +8974,18 @@
   <p:clrMapOvr>
     <a:masterClrMapping/>
   </p:clrMapOvr>
+  <mc:AlternateContent xmlns:mc="http://schemas.openxmlformats.org/markup-compatibility/2006">
+    <mc:Choice xmlns:p14="http://schemas.microsoft.com/office/powerpoint/2010/main" Requires="p14">
+      <p:transition spd="med" p14:dur="700">
+        <p14:warp dir="in"/>
+      </p:transition>
+    </mc:Choice>
+    <mc:Fallback>
+      <p:transition spd="med">
+        <p:fade/>
+      </p:transition>
+    </mc:Fallback>
+  </mc:AlternateContent>
 </p:sld>
 </file>
 
@@ -7079,13 +9022,21 @@
             <p:ph type="title"/>
           </p:nvPr>
         </p:nvSpPr>
-        <p:spPr/>
+        <p:spPr>
+          <a:xfrm>
+            <a:off x="2895600" y="299152"/>
+            <a:ext cx="8610600" cy="1293028"/>
+          </a:xfrm>
+        </p:spPr>
         <p:txBody>
           <a:bodyPr/>
           <a:lstStyle/>
           <a:p>
-            <a:r>
-              <a:rPr lang="en-US"/>
+            <a:pPr algn="r"/>
+            <a:r>
+              <a:rPr lang="en-US" dirty="0">
+                <a:latin typeface="Algerian" panose="04020705040A02060702" pitchFamily="82" charset="0"/>
+              </a:rPr>
               <a:t>System Flow</a:t>
             </a:r>
           </a:p>
@@ -7107,24 +9058,188 @@
             <p:ph type="body" idx="1"/>
           </p:nvPr>
         </p:nvSpPr>
-        <p:spPr/>
-        <p:txBody>
-          <a:bodyPr/>
+        <p:spPr>
+          <a:xfrm>
+            <a:off x="1532965" y="1416937"/>
+            <a:ext cx="9860940" cy="4999905"/>
+          </a:xfrm>
+        </p:spPr>
+        <p:txBody>
+          <a:bodyPr>
+            <a:normAutofit fontScale="70000" lnSpcReduction="20000"/>
+          </a:bodyPr>
           <a:lstStyle/>
           <a:p>
-            <a:r>
-              <a:rPr lang="en-US"/>
-              <a:t>• Citizen: Register/Login ? View Elections ? Vote</a:t>
-            </a:r>
-          </a:p>
-          <a:p>
-            <a:r>
-              <a:rPr lang="en-US"/>
-              <a:t>• Admin: Create Election ? Add Candidates ? Monitor Results</a:t>
-            </a:r>
-          </a:p>
-          <a:p>
-            <a:endParaRPr lang="en-US"/>
+            <a:pPr marL="0" indent="0">
+              <a:buNone/>
+            </a:pPr>
+            <a:r>
+              <a:rPr lang="en-US" sz="2400" b="1" dirty="0">
+                <a:latin typeface="Arial Rounded MT Bold" panose="020F0704030504030204" pitchFamily="34" charset="0"/>
+              </a:rPr>
+              <a:t>🧍 Citizen Portal (Mobile App) </a:t>
+            </a:r>
+          </a:p>
+          <a:p>
+            <a:pPr>
+              <a:buFontTx/>
+              <a:buChar char="-"/>
+            </a:pPr>
+            <a:r>
+              <a:rPr lang="en-US" dirty="0">
+                <a:latin typeface="Arial Rounded MT Bold" panose="020F0704030504030204" pitchFamily="34" charset="0"/>
+              </a:rPr>
+              <a:t>Register / Login  </a:t>
+            </a:r>
+          </a:p>
+          <a:p>
+            <a:pPr>
+              <a:buFontTx/>
+              <a:buChar char="-"/>
+            </a:pPr>
+            <a:r>
+              <a:rPr lang="en-US" dirty="0">
+                <a:latin typeface="Arial Rounded MT Bold" panose="020F0704030504030204" pitchFamily="34" charset="0"/>
+              </a:rPr>
+              <a:t>View Elections </a:t>
+            </a:r>
+          </a:p>
+          <a:p>
+            <a:pPr>
+              <a:buFontTx/>
+              <a:buChar char="-"/>
+            </a:pPr>
+            <a:r>
+              <a:rPr lang="en-US" dirty="0">
+                <a:latin typeface="Arial Rounded MT Bold" panose="020F0704030504030204" pitchFamily="34" charset="0"/>
+              </a:rPr>
+              <a:t>Vote in Active Elections </a:t>
+            </a:r>
+          </a:p>
+          <a:p>
+            <a:pPr>
+              <a:buFontTx/>
+              <a:buChar char="-"/>
+            </a:pPr>
+            <a:r>
+              <a:rPr lang="en-US" dirty="0">
+                <a:latin typeface="Arial Rounded MT Bold" panose="020F0704030504030204" pitchFamily="34" charset="0"/>
+              </a:rPr>
+              <a:t>View Candidate Campaigns </a:t>
+            </a:r>
+          </a:p>
+          <a:p>
+            <a:pPr marL="0" indent="0">
+              <a:buNone/>
+            </a:pPr>
+            <a:r>
+              <a:rPr lang="en-US" dirty="0">
+                <a:latin typeface="Arial Rounded MT Bold" panose="020F0704030504030204" pitchFamily="34" charset="0"/>
+              </a:rPr>
+              <a:t>- Submit Complaints  - Access Digital ID</a:t>
+            </a:r>
+          </a:p>
+          <a:p>
+            <a:pPr marL="0" indent="0">
+              <a:buNone/>
+            </a:pPr>
+            <a:endParaRPr lang="en-US" dirty="0">
+              <a:latin typeface="Arial Rounded MT Bold" panose="020F0704030504030204" pitchFamily="34" charset="0"/>
+            </a:endParaRPr>
+          </a:p>
+          <a:p>
+            <a:pPr marL="0" indent="0">
+              <a:buNone/>
+            </a:pPr>
+            <a:r>
+              <a:rPr lang="en-US" sz="2400" b="1" dirty="0">
+                <a:latin typeface="Arial Rounded MT Bold" panose="020F0704030504030204" pitchFamily="34" charset="0"/>
+              </a:rPr>
+              <a:t>🔐 Admin Portal (Web App)  </a:t>
+            </a:r>
+          </a:p>
+          <a:p>
+            <a:pPr>
+              <a:buFontTx/>
+              <a:buChar char="-"/>
+            </a:pPr>
+            <a:r>
+              <a:rPr lang="en-US" dirty="0">
+                <a:latin typeface="Arial Rounded MT Bold" panose="020F0704030504030204" pitchFamily="34" charset="0"/>
+              </a:rPr>
+              <a:t>Login &amp; Manage Admins </a:t>
+            </a:r>
+          </a:p>
+          <a:p>
+            <a:pPr>
+              <a:buFontTx/>
+              <a:buChar char="-"/>
+            </a:pPr>
+            <a:r>
+              <a:rPr lang="en-US" dirty="0">
+                <a:latin typeface="Arial Rounded MT Bold" panose="020F0704030504030204" pitchFamily="34" charset="0"/>
+              </a:rPr>
+              <a:t>Create / Edit Elections  </a:t>
+            </a:r>
+          </a:p>
+          <a:p>
+            <a:pPr>
+              <a:buFontTx/>
+              <a:buChar char="-"/>
+            </a:pPr>
+            <a:r>
+              <a:rPr lang="en-US" dirty="0">
+                <a:latin typeface="Arial Rounded MT Bold" panose="020F0704030504030204" pitchFamily="34" charset="0"/>
+              </a:rPr>
+              <a:t>Add / Manage Candidates </a:t>
+            </a:r>
+          </a:p>
+          <a:p>
+            <a:pPr>
+              <a:buFontTx/>
+              <a:buChar char="-"/>
+            </a:pPr>
+            <a:r>
+              <a:rPr lang="en-US" dirty="0">
+                <a:latin typeface="Arial Rounded MT Bold" panose="020F0704030504030204" pitchFamily="34" charset="0"/>
+              </a:rPr>
+              <a:t>Monitor Live Results  </a:t>
+            </a:r>
+          </a:p>
+          <a:p>
+            <a:pPr>
+              <a:buFontTx/>
+              <a:buChar char="-"/>
+            </a:pPr>
+            <a:r>
+              <a:rPr lang="en-US" dirty="0">
+                <a:latin typeface="Arial Rounded MT Bold" panose="020F0704030504030204" pitchFamily="34" charset="0"/>
+              </a:rPr>
+              <a:t>Manage Complaints </a:t>
+            </a:r>
+          </a:p>
+          <a:p>
+            <a:pPr>
+              <a:buFontTx/>
+              <a:buChar char="-"/>
+            </a:pPr>
+            <a:r>
+              <a:rPr lang="en-US" dirty="0">
+                <a:latin typeface="Arial Rounded MT Bold" panose="020F0704030504030204" pitchFamily="34" charset="0"/>
+              </a:rPr>
+              <a:t>View Registered Citizens </a:t>
+            </a:r>
+          </a:p>
+          <a:p>
+            <a:pPr marL="0" indent="0">
+              <a:buNone/>
+            </a:pPr>
+            <a:r>
+              <a:rPr lang="en-US" dirty="0">
+                <a:latin typeface="Arial Rounded MT Bold" panose="020F0704030504030204" pitchFamily="34" charset="0"/>
+              </a:rPr>
+              <a:t>- Launch / End Elections </a:t>
+            </a:r>
           </a:p>
         </p:txBody>
       </p:sp>
@@ -7138,6 +9253,9 @@
   <p:clrMapOvr>
     <a:masterClrMapping/>
   </p:clrMapOvr>
+  <p:transition>
+    <p:fade/>
+  </p:transition>
 </p:sld>
 </file>
 
@@ -7174,13 +9292,21 @@
             <p:ph type="title"/>
           </p:nvPr>
         </p:nvSpPr>
-        <p:spPr/>
+        <p:spPr>
+          <a:xfrm>
+            <a:off x="2895600" y="639315"/>
+            <a:ext cx="8610600" cy="1293028"/>
+          </a:xfrm>
+        </p:spPr>
         <p:txBody>
           <a:bodyPr/>
           <a:lstStyle/>
           <a:p>
-            <a:r>
-              <a:rPr lang="en-US"/>
+            <a:pPr algn="r"/>
+            <a:r>
+              <a:rPr lang="en-US" dirty="0">
+                <a:latin typeface="Algerian" panose="04020705040A02060702" pitchFamily="82" charset="0"/>
+              </a:rPr>
               <a:t>Security &amp; Privacy</a:t>
             </a:r>
           </a:p>
@@ -7202,36 +9328,135 @@
             <p:ph type="body" idx="1"/>
           </p:nvPr>
         </p:nvSpPr>
-        <p:spPr/>
-        <p:txBody>
-          <a:bodyPr/>
+        <p:spPr>
+          <a:xfrm>
+            <a:off x="1255058" y="1932343"/>
+            <a:ext cx="10251141" cy="4024125"/>
+          </a:xfrm>
+        </p:spPr>
+        <p:txBody>
+          <a:bodyPr>
+            <a:normAutofit fontScale="70000" lnSpcReduction="20000"/>
+          </a:bodyPr>
           <a:lstStyle/>
           <a:p>
             <a:r>
-              <a:rPr lang="en-US"/>
-              <a:t>• Role-based access (Admin/Citizen)</a:t>
-            </a:r>
-          </a:p>
-          <a:p>
-            <a:r>
-              <a:rPr lang="en-US"/>
-              <a:t>• Session timeout &amp; UI blur (optional)</a:t>
-            </a:r>
-          </a:p>
-          <a:p>
-            <a:r>
-              <a:rPr lang="en-US"/>
-              <a:t>• Planned: OTP &amp; biometric linking</a:t>
-            </a:r>
-          </a:p>
-          <a:p>
-            <a:r>
-              <a:rPr lang="en-US"/>
-              <a:t>• Secure HTTPS communication</a:t>
-            </a:r>
-          </a:p>
-          <a:p>
-            <a:endParaRPr lang="en-US"/>
+              <a:rPr lang="en-US" dirty="0">
+                <a:latin typeface="Arial Rounded MT Bold" panose="020F0704030504030204" pitchFamily="34" charset="0"/>
+              </a:rPr>
+              <a:t>Admin (Web App): </a:t>
+            </a:r>
+          </a:p>
+          <a:p>
+            <a:pPr>
+              <a:buFontTx/>
+              <a:buChar char="-"/>
+            </a:pPr>
+            <a:r>
+              <a:rPr lang="en-US" dirty="0">
+                <a:latin typeface="Arial Rounded MT Bold" panose="020F0704030504030204" pitchFamily="34" charset="0"/>
+              </a:rPr>
+              <a:t>Role-Based Access Control  </a:t>
+            </a:r>
+          </a:p>
+          <a:p>
+            <a:pPr>
+              <a:buFontTx/>
+              <a:buChar char="-"/>
+            </a:pPr>
+            <a:r>
+              <a:rPr lang="en-US" dirty="0">
+                <a:latin typeface="Arial Rounded MT Bold" panose="020F0704030504030204" pitchFamily="34" charset="0"/>
+              </a:rPr>
+              <a:t>Secure HTTPS Communication </a:t>
+            </a:r>
+          </a:p>
+          <a:p>
+            <a:pPr marL="0" indent="0">
+              <a:buNone/>
+            </a:pPr>
+            <a:r>
+              <a:rPr lang="en-US" dirty="0">
+                <a:latin typeface="Arial Rounded MT Bold" panose="020F0704030504030204" pitchFamily="34" charset="0"/>
+              </a:rPr>
+              <a:t>- Optional: Session Timeout &amp; UI Blur on Inactivity  </a:t>
+            </a:r>
+          </a:p>
+          <a:p>
+            <a:endParaRPr lang="en-US" dirty="0">
+              <a:latin typeface="Arial Rounded MT Bold" panose="020F0704030504030204" pitchFamily="34" charset="0"/>
+            </a:endParaRPr>
+          </a:p>
+          <a:p>
+            <a:r>
+              <a:rPr lang="en-US" dirty="0">
+                <a:latin typeface="Arial Rounded MT Bold" panose="020F0704030504030204" pitchFamily="34" charset="0"/>
+              </a:rPr>
+              <a:t>Citizen (Mobile App): </a:t>
+            </a:r>
+          </a:p>
+          <a:p>
+            <a:pPr marL="0" indent="0">
+              <a:buNone/>
+            </a:pPr>
+            <a:r>
+              <a:rPr lang="en-US" dirty="0">
+                <a:latin typeface="Arial Rounded MT Bold" panose="020F0704030504030204" pitchFamily="34" charset="0"/>
+              </a:rPr>
+              <a:t>-  Screenshot Restriction</a:t>
+            </a:r>
+          </a:p>
+          <a:p>
+            <a:pPr>
+              <a:buFontTx/>
+              <a:buChar char="-"/>
+            </a:pPr>
+            <a:r>
+              <a:rPr lang="en-US" dirty="0">
+                <a:latin typeface="Arial Rounded MT Bold" panose="020F0704030504030204" pitchFamily="34" charset="0"/>
+              </a:rPr>
+              <a:t>Planned: OTP Verification &amp; Biometric Linking  </a:t>
+            </a:r>
+          </a:p>
+          <a:p>
+            <a:pPr>
+              <a:buFontTx/>
+              <a:buChar char="-"/>
+            </a:pPr>
+            <a:r>
+              <a:rPr lang="en-US" dirty="0">
+                <a:latin typeface="Arial Rounded MT Bold" panose="020F0704030504030204" pitchFamily="34" charset="0"/>
+              </a:rPr>
+              <a:t>Device-based Access (No login roles)</a:t>
+            </a:r>
+          </a:p>
+          <a:p>
+            <a:pPr>
+              <a:buFontTx/>
+              <a:buChar char="-"/>
+            </a:pPr>
+            <a:r>
+              <a:rPr lang="en-US" dirty="0">
+                <a:latin typeface="Arial Rounded MT Bold" panose="020F0704030504030204" pitchFamily="34" charset="0"/>
+              </a:rPr>
+              <a:t>Secure Voting Flow (no duplicate votes)  </a:t>
+            </a:r>
+          </a:p>
+          <a:p>
+            <a:pPr>
+              <a:buFontTx/>
+              <a:buChar char="-"/>
+            </a:pPr>
+            <a:endParaRPr lang="en-US" dirty="0"/>
+          </a:p>
+          <a:p>
+            <a:pPr marL="0" indent="0">
+              <a:buNone/>
+            </a:pPr>
+            <a:r>
+              <a:rPr lang="en-US" sz="1700" b="1" i="1" dirty="0"/>
+              <a:t>Note: Some features are simulated with hardcoded data; no real backend or auth service is implemented.</a:t>
+            </a:r>
           </a:p>
         </p:txBody>
       </p:sp>
@@ -7245,13 +9470,16 @@
   <p:clrMapOvr>
     <a:masterClrMapping/>
   </p:clrMapOvr>
+  <p:transition>
+    <p:fade/>
+  </p:transition>
 </p:sld>
 </file>
 
 <file path=ppt/theme/theme1.xml><?xml version="1.0" encoding="utf-8"?>
-<a:theme xmlns:a="http://schemas.openxmlformats.org/drawingml/2006/main" name="Vapor Trail">
+<a:theme xmlns:a="http://schemas.openxmlformats.org/drawingml/2006/main" name="Parallax">
   <a:themeElements>
-    <a:clrScheme name="Vapor Trail">
+    <a:clrScheme name="Parallax">
       <a:dk1>
         <a:sysClr val="windowText" lastClr="000000"/>
       </a:dk1>
@@ -7259,52 +9487,52 @@
         <a:sysClr val="window" lastClr="FFFFFF"/>
       </a:lt1>
       <a:dk2>
-        <a:srgbClr val="454545"/>
+        <a:srgbClr val="212121"/>
       </a:dk2>
       <a:lt2>
-        <a:srgbClr val="DADADA"/>
+        <a:srgbClr val="CDD0D1"/>
       </a:lt2>
       <a:accent1>
-        <a:srgbClr val="DF2E28"/>
+        <a:srgbClr val="30ACEC"/>
       </a:accent1>
       <a:accent2>
-        <a:srgbClr val="FE801A"/>
+        <a:srgbClr val="80C34F"/>
       </a:accent2>
       <a:accent3>
-        <a:srgbClr val="E9BF35"/>
+        <a:srgbClr val="E29D3E"/>
       </a:accent3>
       <a:accent4>
-        <a:srgbClr val="81BB42"/>
+        <a:srgbClr val="D64A3B"/>
       </a:accent4>
       <a:accent5>
-        <a:srgbClr val="32C7A9"/>
+        <a:srgbClr val="D64787"/>
       </a:accent5>
       <a:accent6>
-        <a:srgbClr val="4A9BDC"/>
+        <a:srgbClr val="A666E1"/>
       </a:accent6>
       <a:hlink>
-        <a:srgbClr val="F0532B"/>
+        <a:srgbClr val="3085ED"/>
       </a:hlink>
       <a:folHlink>
-        <a:srgbClr val="F38B53"/>
+        <a:srgbClr val="82B6F4"/>
       </a:folHlink>
     </a:clrScheme>
-    <a:fontScheme name="Vapor Trail">
+    <a:fontScheme name="Parallax">
       <a:majorFont>
-        <a:latin typeface="Century Gothic" panose="020B0502020202020204"/>
+        <a:latin typeface="Corbel" panose="020B0503020204020204"/>
         <a:ea typeface=""/>
         <a:cs typeface=""/>
-        <a:font script="Jpan" typeface="ＭＳ Ｐゴシック"/>
-        <a:font script="Hang" typeface="맑은 고딕"/>
-        <a:font script="Hans" typeface="宋体"/>
+        <a:font script="Jpan" typeface="HGｺﾞｼｯｸM"/>
+        <a:font script="Hang" typeface="HY엽서L"/>
+        <a:font script="Hans" typeface="华文楷体"/>
         <a:font script="Hant" typeface="新細明體"/>
-        <a:font script="Arab" typeface="Times New Roman"/>
-        <a:font script="Hebr" typeface="Times New Roman"/>
-        <a:font script="Thai" typeface="Angsana New"/>
+        <a:font script="Arab" typeface="Tahoma"/>
+        <a:font script="Hebr" typeface="Miriam"/>
+        <a:font script="Thai" typeface="DilleniaUPC"/>
         <a:font script="Ethi" typeface="Nyala"/>
         <a:font script="Beng" typeface="Vrinda"/>
         <a:font script="Gujr" typeface="Shruti"/>
-        <a:font script="Khmr" typeface="MoolBoran"/>
+        <a:font script="Khmr" typeface="DaunPenh"/>
         <a:font script="Knda" typeface="Tunga"/>
         <a:font script="Guru" typeface="Raavi"/>
         <a:font script="Cans" typeface="Euphemia"/>
@@ -7321,21 +9549,21 @@
         <a:font script="Laoo" typeface="DokChampa"/>
         <a:font script="Sinh" typeface="Iskoola Pota"/>
         <a:font script="Mong" typeface="Mongolian Baiti"/>
-        <a:font script="Viet" typeface="Times New Roman"/>
+        <a:font script="Viet" typeface="Arial"/>
         <a:font script="Uigh" typeface="Microsoft Uighur"/>
         <a:font script="Geor" typeface="Sylfaen"/>
       </a:majorFont>
       <a:minorFont>
-        <a:latin typeface="Century Gothic" panose="020B0502020202020204"/>
+        <a:latin typeface="Corbel" panose="020B0503020204020204"/>
         <a:ea typeface=""/>
         <a:cs typeface=""/>
-        <a:font script="Jpan" typeface="ＭＳ Ｐゴシック"/>
-        <a:font script="Hang" typeface="맑은 고딕"/>
-        <a:font script="Hans" typeface="宋体"/>
+        <a:font script="Jpan" typeface="HGｺﾞｼｯｸM"/>
+        <a:font script="Hang" typeface="HY엽서L"/>
+        <a:font script="Hans" typeface="华文楷体"/>
         <a:font script="Hant" typeface="新細明體"/>
-        <a:font script="Arab" typeface="Arial"/>
-        <a:font script="Hebr" typeface="Arial"/>
-        <a:font script="Thai" typeface="Cordia New"/>
+        <a:font script="Arab" typeface="Tahoma"/>
+        <a:font script="Hebr" typeface="Miriam"/>
+        <a:font script="Thai" typeface="DilleniaUPC"/>
         <a:font script="Ethi" typeface="Nyala"/>
         <a:font script="Beng" typeface="Vrinda"/>
         <a:font script="Gujr" typeface="Shruti"/>
@@ -7361,7 +9589,7 @@
         <a:font script="Geor" typeface="Sylfaen"/>
       </a:minorFont>
     </a:fontScheme>
-    <a:fmtScheme name="Vapor Trail">
+    <a:fmtScheme name="Glossy">
       <a:fillStyleLst>
         <a:solidFill>
           <a:schemeClr val="phClr"/>
@@ -7370,63 +9598,78 @@
           <a:gsLst>
             <a:gs pos="0">
               <a:schemeClr val="phClr">
-                <a:tint val="69000"/>
-                <a:alpha val="100000"/>
-                <a:satMod val="109000"/>
-                <a:lumMod val="110000"/>
+                <a:tint val="62000"/>
+                <a:satMod val="180000"/>
               </a:schemeClr>
             </a:gs>
-            <a:gs pos="52000">
+            <a:gs pos="65000">
               <a:schemeClr val="phClr">
-                <a:tint val="74000"/>
-                <a:satMod val="100000"/>
-                <a:lumMod val="104000"/>
+                <a:tint val="32000"/>
+                <a:satMod val="250000"/>
               </a:schemeClr>
             </a:gs>
             <a:gs pos="100000">
               <a:schemeClr val="phClr">
-                <a:tint val="78000"/>
-                <a:satMod val="100000"/>
-                <a:lumMod val="100000"/>
+                <a:tint val="23000"/>
+                <a:satMod val="300000"/>
               </a:schemeClr>
             </a:gs>
           </a:gsLst>
-          <a:lin ang="5400000" scaled="0"/>
+          <a:lin ang="16200000" scaled="0"/>
         </a:gradFill>
         <a:gradFill rotWithShape="1">
           <a:gsLst>
             <a:gs pos="0">
               <a:schemeClr val="phClr">
-                <a:tint val="96000"/>
-                <a:satMod val="100000"/>
-                <a:lumMod val="104000"/>
+                <a:shade val="15000"/>
+                <a:satMod val="180000"/>
               </a:schemeClr>
             </a:gs>
-            <a:gs pos="78000">
+            <a:gs pos="50000">
               <a:schemeClr val="phClr">
+                <a:shade val="45000"/>
+                <a:satMod val="170000"/>
+              </a:schemeClr>
+            </a:gs>
+            <a:gs pos="70000">
+              <a:schemeClr val="phClr">
+                <a:tint val="99000"/>
+                <a:shade val="65000"/>
+                <a:satMod val="155000"/>
+              </a:schemeClr>
+            </a:gs>
+            <a:gs pos="100000">
+              <a:schemeClr val="phClr">
+                <a:tint val="95500"/>
                 <a:shade val="100000"/>
-                <a:satMod val="110000"/>
-                <a:lumMod val="100000"/>
+                <a:satMod val="155000"/>
               </a:schemeClr>
             </a:gs>
           </a:gsLst>
-          <a:lin ang="5400000" scaled="0"/>
+          <a:lin ang="16200000" scaled="0"/>
         </a:gradFill>
       </a:fillStyleLst>
       <a:lnStyleLst>
-        <a:ln w="9525" cap="flat" cmpd="sng" algn="ctr">
+        <a:ln w="12700" cap="flat" cmpd="sng" algn="ctr">
           <a:solidFill>
-            <a:schemeClr val="phClr"/>
+            <a:schemeClr val="phClr">
+              <a:tint val="95000"/>
+              <a:shade val="95000"/>
+              <a:satMod val="120000"/>
+            </a:schemeClr>
           </a:solidFill>
           <a:prstDash val="solid"/>
         </a:ln>
-        <a:ln w="12700" cap="flat" cmpd="sng" algn="ctr">
+        <a:ln w="55000" cap="flat" cmpd="thickThin" algn="ctr">
           <a:solidFill>
-            <a:schemeClr val="phClr"/>
+            <a:schemeClr val="phClr">
+              <a:tint val="90000"/>
+              <a:satMod val="130000"/>
+            </a:schemeClr>
           </a:solidFill>
           <a:prstDash val="solid"/>
         </a:ln>
-        <a:ln w="19050" cap="flat" cmpd="sng" algn="ctr">
+        <a:ln w="50800" cap="flat" cmpd="sng" algn="ctr">
           <a:solidFill>
             <a:schemeClr val="phClr"/>
           </a:solidFill>
@@ -7435,25 +9678,28 @@
       </a:lnStyleLst>
       <a:effectStyleLst>
         <a:effectStyle>
-          <a:effectLst/>
-        </a:effectStyle>
-        <a:effectStyle>
-          <a:effectLst/>
-          <a:scene3d>
-            <a:camera prst="orthographicFront">
-              <a:rot lat="0" lon="0" rev="0"/>
-            </a:camera>
-            <a:lightRig rig="threePt" dir="t"/>
-          </a:scene3d>
-          <a:sp3d>
-            <a:bevelT w="25400" h="12700"/>
-          </a:sp3d>
+          <a:effectLst>
+            <a:outerShdw blurRad="50800" dist="38100" dir="5400000" rotWithShape="0">
+              <a:srgbClr val="000000">
+                <a:alpha val="35000"/>
+              </a:srgbClr>
+            </a:outerShdw>
+          </a:effectLst>
         </a:effectStyle>
         <a:effectStyle>
           <a:effectLst>
-            <a:outerShdw blurRad="57150" dist="19050" dir="5400000" algn="ctr" rotWithShape="0">
+            <a:outerShdw blurRad="50800" dist="38100" dir="5400000" rotWithShape="0">
               <a:srgbClr val="000000">
-                <a:alpha val="48000"/>
+                <a:alpha val="35000"/>
+              </a:srgbClr>
+            </a:outerShdw>
+          </a:effectLst>
+        </a:effectStyle>
+        <a:effectStyle>
+          <a:effectLst>
+            <a:outerShdw blurRad="63500" dist="38100" dir="5400000" rotWithShape="0">
+              <a:srgbClr val="000000">
+                <a:alpha val="45000"/>
               </a:srgbClr>
             </a:outerShdw>
           </a:effectLst>
@@ -7461,10 +9707,17 @@
             <a:camera prst="orthographicFront">
               <a:rot lat="0" lon="0" rev="0"/>
             </a:camera>
-            <a:lightRig rig="threePt" dir="t"/>
+            <a:lightRig rig="glow" dir="t">
+              <a:rot lat="0" lon="0" rev="6360000"/>
+            </a:lightRig>
           </a:scene3d>
-          <a:sp3d>
-            <a:bevelT w="50800" h="25400"/>
+          <a:sp3d contourW="1000" prstMaterial="flat">
+            <a:bevelT w="95250" h="101600"/>
+            <a:contourClr>
+              <a:schemeClr val="phClr">
+                <a:satMod val="300000"/>
+              </a:schemeClr>
+            </a:contourClr>
           </a:sp3d>
         </a:effectStyle>
       </a:effectStyleLst>
@@ -7472,39 +9725,39 @@
         <a:solidFill>
           <a:schemeClr val="phClr"/>
         </a:solidFill>
-        <a:solidFill>
-          <a:schemeClr val="phClr">
-            <a:tint val="95000"/>
-            <a:satMod val="170000"/>
-          </a:schemeClr>
-        </a:solidFill>
         <a:gradFill rotWithShape="1">
           <a:gsLst>
             <a:gs pos="0">
               <a:schemeClr val="phClr">
-                <a:tint val="93000"/>
-                <a:shade val="98000"/>
-                <a:satMod val="150000"/>
-                <a:lumMod val="102000"/>
-              </a:schemeClr>
-            </a:gs>
-            <a:gs pos="50000">
-              <a:schemeClr val="phClr">
-                <a:tint val="98000"/>
-                <a:shade val="90000"/>
-                <a:satMod val="130000"/>
-                <a:lumMod val="103000"/>
+                <a:tint val="90000"/>
+                <a:lumMod val="110000"/>
               </a:schemeClr>
             </a:gs>
             <a:gs pos="100000">
               <a:schemeClr val="phClr">
-                <a:shade val="63000"/>
-                <a:satMod val="120000"/>
+                <a:shade val="64000"/>
+                <a:lumMod val="98000"/>
               </a:schemeClr>
             </a:gs>
           </a:gsLst>
           <a:lin ang="5400000" scaled="0"/>
         </a:gradFill>
+        <a:blipFill rotWithShape="1">
+          <a:blip xmlns:r="http://schemas.openxmlformats.org/officeDocument/2006/relationships" r:embed="rId1">
+            <a:duotone>
+              <a:schemeClr val="phClr">
+                <a:shade val="76000"/>
+                <a:satMod val="180000"/>
+              </a:schemeClr>
+              <a:schemeClr val="phClr">
+                <a:tint val="80000"/>
+                <a:satMod val="120000"/>
+                <a:lumMod val="180000"/>
+              </a:schemeClr>
+            </a:duotone>
+          </a:blip>
+          <a:stretch/>
+        </a:blipFill>
       </a:bgFillStyleLst>
     </a:fmtScheme>
   </a:themeElements>
@@ -7512,7 +9765,7 @@
   <a:extraClrSchemeLst/>
   <a:extLst>
     <a:ext uri="{05A4C25C-085E-4340-85A3-A5531E510DB2}">
-      <thm15:themeFamily xmlns:thm15="http://schemas.microsoft.com/office/thememl/2012/main" name="Vapor Trail" id="{4FDF2955-7D9C-493C-B9F9-C205151B46CD}" vid="{8F31A783-2159-4870-BC29-2BA7D038EA44}"/>
+      <thm15:themeFamily xmlns:thm15="http://schemas.microsoft.com/office/thememl/2012/main" name="Parallax" id="{3388167B-A2EB-4685-9635-1831D9AEF8C4}" vid="{4F7A876A-7598-49CA-AFC8-8EDA2551E4A7}"/>
     </a:ext>
   </a:extLst>
 </a:theme>

--- a/NatioID – National Digital Identity & Voting Platform.pptx
+++ b/NatioID – National Digital Identity & Voting Platform.pptx
@@ -4,6 +4,9 @@
   <p:sldMasterIdLst>
     <p:sldMasterId id="2147483680" r:id="rId1"/>
   </p:sldMasterIdLst>
+  <p:notesMasterIdLst>
+    <p:notesMasterId r:id="rId18"/>
+  </p:notesMasterIdLst>
   <p:sldIdLst>
     <p:sldId id="256" r:id="rId2"/>
     <p:sldId id="257" r:id="rId3"/>
@@ -120,6 +123,439 @@
     </a:lvl9pPr>
   </p:defaultTextStyle>
 </p:presentation>
+</file>
+
+<file path=ppt/notesMasters/notesMaster1.xml><?xml version="1.0" encoding="utf-8"?>
+<p:notesMaster xmlns:a="http://schemas.openxmlformats.org/drawingml/2006/main" xmlns:r="http://schemas.openxmlformats.org/officeDocument/2006/relationships" xmlns:p="http://schemas.openxmlformats.org/presentationml/2006/main">
+  <p:cSld>
+    <p:bg>
+      <p:bgRef idx="1001">
+        <a:schemeClr val="bg1"/>
+      </p:bgRef>
+    </p:bg>
+    <p:spTree>
+      <p:nvGrpSpPr>
+        <p:cNvPr id="1" name=""/>
+        <p:cNvGrpSpPr/>
+        <p:nvPr/>
+      </p:nvGrpSpPr>
+      <p:grpSpPr>
+        <a:xfrm>
+          <a:off x="0" y="0"/>
+          <a:ext cx="0" cy="0"/>
+          <a:chOff x="0" y="0"/>
+          <a:chExt cx="0" cy="0"/>
+        </a:xfrm>
+      </p:grpSpPr>
+      <p:sp>
+        <p:nvSpPr>
+          <p:cNvPr id="2" name="Header Placeholder 1"/>
+          <p:cNvSpPr>
+            <a:spLocks noGrp="1"/>
+          </p:cNvSpPr>
+          <p:nvPr>
+            <p:ph type="hdr" sz="quarter"/>
+          </p:nvPr>
+        </p:nvSpPr>
+        <p:spPr>
+          <a:xfrm>
+            <a:off x="0" y="0"/>
+            <a:ext cx="2971800" cy="458788"/>
+          </a:xfrm>
+          <a:prstGeom prst="rect">
+            <a:avLst/>
+          </a:prstGeom>
+        </p:spPr>
+        <p:txBody>
+          <a:bodyPr vert="horz" lIns="91440" tIns="45720" rIns="91440" bIns="45720" rtlCol="0"/>
+          <a:lstStyle>
+            <a:lvl1pPr algn="l">
+              <a:defRPr sz="1200"/>
+            </a:lvl1pPr>
+          </a:lstStyle>
+          <a:p>
+            <a:endParaRPr lang="en-US"/>
+          </a:p>
+        </p:txBody>
+      </p:sp>
+      <p:sp>
+        <p:nvSpPr>
+          <p:cNvPr id="3" name="Date Placeholder 2"/>
+          <p:cNvSpPr>
+            <a:spLocks noGrp="1"/>
+          </p:cNvSpPr>
+          <p:nvPr>
+            <p:ph type="dt" idx="1"/>
+          </p:nvPr>
+        </p:nvSpPr>
+        <p:spPr>
+          <a:xfrm>
+            <a:off x="3884613" y="0"/>
+            <a:ext cx="2971800" cy="458788"/>
+          </a:xfrm>
+          <a:prstGeom prst="rect">
+            <a:avLst/>
+          </a:prstGeom>
+        </p:spPr>
+        <p:txBody>
+          <a:bodyPr vert="horz" lIns="91440" tIns="45720" rIns="91440" bIns="45720" rtlCol="0"/>
+          <a:lstStyle>
+            <a:lvl1pPr algn="r">
+              <a:defRPr sz="1200"/>
+            </a:lvl1pPr>
+          </a:lstStyle>
+          <a:p>
+            <a:fld id="{37E50D13-9976-41B9-8C27-A2F9B6286BB8}" type="datetimeFigureOut">
+              <a:rPr lang="en-US" smtClean="0"/>
+              <a:t>10/21/2025</a:t>
+            </a:fld>
+            <a:endParaRPr lang="en-US"/>
+          </a:p>
+        </p:txBody>
+      </p:sp>
+      <p:sp>
+        <p:nvSpPr>
+          <p:cNvPr id="4" name="Slide Image Placeholder 3"/>
+          <p:cNvSpPr>
+            <a:spLocks noGrp="1" noRot="1" noChangeAspect="1"/>
+          </p:cNvSpPr>
+          <p:nvPr>
+            <p:ph type="sldImg" idx="2"/>
+          </p:nvPr>
+        </p:nvSpPr>
+        <p:spPr>
+          <a:xfrm>
+            <a:off x="685800" y="1143000"/>
+            <a:ext cx="5486400" cy="3086100"/>
+          </a:xfrm>
+          <a:prstGeom prst="rect">
+            <a:avLst/>
+          </a:prstGeom>
+          <a:noFill/>
+          <a:ln w="12700">
+            <a:solidFill>
+              <a:prstClr val="black"/>
+            </a:solidFill>
+          </a:ln>
+        </p:spPr>
+        <p:txBody>
+          <a:bodyPr vert="horz" lIns="91440" tIns="45720" rIns="91440" bIns="45720" rtlCol="0" anchor="ctr"/>
+          <a:lstStyle/>
+          <a:p>
+            <a:endParaRPr lang="en-US"/>
+          </a:p>
+        </p:txBody>
+      </p:sp>
+      <p:sp>
+        <p:nvSpPr>
+          <p:cNvPr id="5" name="Notes Placeholder 4"/>
+          <p:cNvSpPr>
+            <a:spLocks noGrp="1"/>
+          </p:cNvSpPr>
+          <p:nvPr>
+            <p:ph type="body" sz="quarter" idx="3"/>
+          </p:nvPr>
+        </p:nvSpPr>
+        <p:spPr>
+          <a:xfrm>
+            <a:off x="685800" y="4400550"/>
+            <a:ext cx="5486400" cy="3600450"/>
+          </a:xfrm>
+          <a:prstGeom prst="rect">
+            <a:avLst/>
+          </a:prstGeom>
+        </p:spPr>
+        <p:txBody>
+          <a:bodyPr vert="horz" lIns="91440" tIns="45720" rIns="91440" bIns="45720" rtlCol="0"/>
+          <a:lstStyle/>
+          <a:p>
+            <a:pPr lvl="0"/>
+            <a:r>
+              <a:rPr lang="en-US"/>
+              <a:t>Click to edit Master text styles</a:t>
+            </a:r>
+          </a:p>
+          <a:p>
+            <a:pPr lvl="1"/>
+            <a:r>
+              <a:rPr lang="en-US"/>
+              <a:t>Second level</a:t>
+            </a:r>
+          </a:p>
+          <a:p>
+            <a:pPr lvl="2"/>
+            <a:r>
+              <a:rPr lang="en-US"/>
+              <a:t>Third level</a:t>
+            </a:r>
+          </a:p>
+          <a:p>
+            <a:pPr lvl="3"/>
+            <a:r>
+              <a:rPr lang="en-US"/>
+              <a:t>Fourth level</a:t>
+            </a:r>
+          </a:p>
+          <a:p>
+            <a:pPr lvl="4"/>
+            <a:r>
+              <a:rPr lang="en-US"/>
+              <a:t>Fifth level</a:t>
+            </a:r>
+          </a:p>
+        </p:txBody>
+      </p:sp>
+      <p:sp>
+        <p:nvSpPr>
+          <p:cNvPr id="6" name="Footer Placeholder 5"/>
+          <p:cNvSpPr>
+            <a:spLocks noGrp="1"/>
+          </p:cNvSpPr>
+          <p:nvPr>
+            <p:ph type="ftr" sz="quarter" idx="4"/>
+          </p:nvPr>
+        </p:nvSpPr>
+        <p:spPr>
+          <a:xfrm>
+            <a:off x="0" y="8685213"/>
+            <a:ext cx="2971800" cy="458787"/>
+          </a:xfrm>
+          <a:prstGeom prst="rect">
+            <a:avLst/>
+          </a:prstGeom>
+        </p:spPr>
+        <p:txBody>
+          <a:bodyPr vert="horz" lIns="91440" tIns="45720" rIns="91440" bIns="45720" rtlCol="0" anchor="b"/>
+          <a:lstStyle>
+            <a:lvl1pPr algn="l">
+              <a:defRPr sz="1200"/>
+            </a:lvl1pPr>
+          </a:lstStyle>
+          <a:p>
+            <a:endParaRPr lang="en-US"/>
+          </a:p>
+        </p:txBody>
+      </p:sp>
+      <p:sp>
+        <p:nvSpPr>
+          <p:cNvPr id="7" name="Slide Number Placeholder 6"/>
+          <p:cNvSpPr>
+            <a:spLocks noGrp="1"/>
+          </p:cNvSpPr>
+          <p:nvPr>
+            <p:ph type="sldNum" sz="quarter" idx="5"/>
+          </p:nvPr>
+        </p:nvSpPr>
+        <p:spPr>
+          <a:xfrm>
+            <a:off x="3884613" y="8685213"/>
+            <a:ext cx="2971800" cy="458787"/>
+          </a:xfrm>
+          <a:prstGeom prst="rect">
+            <a:avLst/>
+          </a:prstGeom>
+        </p:spPr>
+        <p:txBody>
+          <a:bodyPr vert="horz" lIns="91440" tIns="45720" rIns="91440" bIns="45720" rtlCol="0" anchor="b"/>
+          <a:lstStyle>
+            <a:lvl1pPr algn="r">
+              <a:defRPr sz="1200"/>
+            </a:lvl1pPr>
+          </a:lstStyle>
+          <a:p>
+            <a:fld id="{69882E80-FAED-4EB2-B17C-9442BE45023B}" type="slidenum">
+              <a:rPr lang="en-US" smtClean="0"/>
+              <a:t>‹#›</a:t>
+            </a:fld>
+            <a:endParaRPr lang="en-US"/>
+          </a:p>
+        </p:txBody>
+      </p:sp>
+    </p:spTree>
+    <p:extLst>
+      <p:ext uri="{BB962C8B-B14F-4D97-AF65-F5344CB8AC3E}">
+        <p14:creationId xmlns:p14="http://schemas.microsoft.com/office/powerpoint/2010/main" val="1692150875"/>
+      </p:ext>
+    </p:extLst>
+  </p:cSld>
+  <p:clrMap bg1="lt1" tx1="dk1" bg2="lt2" tx2="dk2" accent1="accent1" accent2="accent2" accent3="accent3" accent4="accent4" accent5="accent5" accent6="accent6" hlink="hlink" folHlink="folHlink"/>
+  <p:notesStyle>
+    <a:lvl1pPr marL="0" algn="l" defTabSz="914400" rtl="0" eaLnBrk="1" latinLnBrk="0" hangingPunct="1">
+      <a:defRPr sz="1200" kern="1200">
+        <a:solidFill>
+          <a:schemeClr val="tx1"/>
+        </a:solidFill>
+        <a:latin typeface="+mn-lt"/>
+        <a:ea typeface="+mn-ea"/>
+        <a:cs typeface="+mn-cs"/>
+      </a:defRPr>
+    </a:lvl1pPr>
+    <a:lvl2pPr marL="457200" algn="l" defTabSz="914400" rtl="0" eaLnBrk="1" latinLnBrk="0" hangingPunct="1">
+      <a:defRPr sz="1200" kern="1200">
+        <a:solidFill>
+          <a:schemeClr val="tx1"/>
+        </a:solidFill>
+        <a:latin typeface="+mn-lt"/>
+        <a:ea typeface="+mn-ea"/>
+        <a:cs typeface="+mn-cs"/>
+      </a:defRPr>
+    </a:lvl2pPr>
+    <a:lvl3pPr marL="914400" algn="l" defTabSz="914400" rtl="0" eaLnBrk="1" latinLnBrk="0" hangingPunct="1">
+      <a:defRPr sz="1200" kern="1200">
+        <a:solidFill>
+          <a:schemeClr val="tx1"/>
+        </a:solidFill>
+        <a:latin typeface="+mn-lt"/>
+        <a:ea typeface="+mn-ea"/>
+        <a:cs typeface="+mn-cs"/>
+      </a:defRPr>
+    </a:lvl3pPr>
+    <a:lvl4pPr marL="1371600" algn="l" defTabSz="914400" rtl="0" eaLnBrk="1" latinLnBrk="0" hangingPunct="1">
+      <a:defRPr sz="1200" kern="1200">
+        <a:solidFill>
+          <a:schemeClr val="tx1"/>
+        </a:solidFill>
+        <a:latin typeface="+mn-lt"/>
+        <a:ea typeface="+mn-ea"/>
+        <a:cs typeface="+mn-cs"/>
+      </a:defRPr>
+    </a:lvl4pPr>
+    <a:lvl5pPr marL="1828800" algn="l" defTabSz="914400" rtl="0" eaLnBrk="1" latinLnBrk="0" hangingPunct="1">
+      <a:defRPr sz="1200" kern="1200">
+        <a:solidFill>
+          <a:schemeClr val="tx1"/>
+        </a:solidFill>
+        <a:latin typeface="+mn-lt"/>
+        <a:ea typeface="+mn-ea"/>
+        <a:cs typeface="+mn-cs"/>
+      </a:defRPr>
+    </a:lvl5pPr>
+    <a:lvl6pPr marL="2286000" algn="l" defTabSz="914400" rtl="0" eaLnBrk="1" latinLnBrk="0" hangingPunct="1">
+      <a:defRPr sz="1200" kern="1200">
+        <a:solidFill>
+          <a:schemeClr val="tx1"/>
+        </a:solidFill>
+        <a:latin typeface="+mn-lt"/>
+        <a:ea typeface="+mn-ea"/>
+        <a:cs typeface="+mn-cs"/>
+      </a:defRPr>
+    </a:lvl6pPr>
+    <a:lvl7pPr marL="2743200" algn="l" defTabSz="914400" rtl="0" eaLnBrk="1" latinLnBrk="0" hangingPunct="1">
+      <a:defRPr sz="1200" kern="1200">
+        <a:solidFill>
+          <a:schemeClr val="tx1"/>
+        </a:solidFill>
+        <a:latin typeface="+mn-lt"/>
+        <a:ea typeface="+mn-ea"/>
+        <a:cs typeface="+mn-cs"/>
+      </a:defRPr>
+    </a:lvl7pPr>
+    <a:lvl8pPr marL="3200400" algn="l" defTabSz="914400" rtl="0" eaLnBrk="1" latinLnBrk="0" hangingPunct="1">
+      <a:defRPr sz="1200" kern="1200">
+        <a:solidFill>
+          <a:schemeClr val="tx1"/>
+        </a:solidFill>
+        <a:latin typeface="+mn-lt"/>
+        <a:ea typeface="+mn-ea"/>
+        <a:cs typeface="+mn-cs"/>
+      </a:defRPr>
+    </a:lvl8pPr>
+    <a:lvl9pPr marL="3657600" algn="l" defTabSz="914400" rtl="0" eaLnBrk="1" latinLnBrk="0" hangingPunct="1">
+      <a:defRPr sz="1200" kern="1200">
+        <a:solidFill>
+          <a:schemeClr val="tx1"/>
+        </a:solidFill>
+        <a:latin typeface="+mn-lt"/>
+        <a:ea typeface="+mn-ea"/>
+        <a:cs typeface="+mn-cs"/>
+      </a:defRPr>
+    </a:lvl9pPr>
+  </p:notesStyle>
+</p:notesMaster>
+</file>
+
+<file path=ppt/notesSlides/notesSlide1.xml><?xml version="1.0" encoding="utf-8"?>
+<p:notes xmlns:a="http://schemas.openxmlformats.org/drawingml/2006/main" xmlns:r="http://schemas.openxmlformats.org/officeDocument/2006/relationships" xmlns:p="http://schemas.openxmlformats.org/presentationml/2006/main">
+  <p:cSld>
+    <p:spTree>
+      <p:nvGrpSpPr>
+        <p:cNvPr id="1" name=""/>
+        <p:cNvGrpSpPr/>
+        <p:nvPr/>
+      </p:nvGrpSpPr>
+      <p:grpSpPr>
+        <a:xfrm>
+          <a:off x="0" y="0"/>
+          <a:ext cx="0" cy="0"/>
+          <a:chOff x="0" y="0"/>
+          <a:chExt cx="0" cy="0"/>
+        </a:xfrm>
+      </p:grpSpPr>
+      <p:sp>
+        <p:nvSpPr>
+          <p:cNvPr id="2" name="Slide Image Placeholder 1"/>
+          <p:cNvSpPr>
+            <a:spLocks noGrp="1" noRot="1" noChangeAspect="1"/>
+          </p:cNvSpPr>
+          <p:nvPr>
+            <p:ph type="sldImg"/>
+          </p:nvPr>
+        </p:nvSpPr>
+        <p:spPr/>
+      </p:sp>
+      <p:sp>
+        <p:nvSpPr>
+          <p:cNvPr id="3" name="Notes Placeholder 2"/>
+          <p:cNvSpPr>
+            <a:spLocks noGrp="1"/>
+          </p:cNvSpPr>
+          <p:nvPr>
+            <p:ph type="body" idx="1"/>
+          </p:nvPr>
+        </p:nvSpPr>
+        <p:spPr/>
+        <p:txBody>
+          <a:bodyPr/>
+          <a:lstStyle/>
+          <a:p>
+            <a:endParaRPr lang="en-US" dirty="0"/>
+          </a:p>
+        </p:txBody>
+      </p:sp>
+      <p:sp>
+        <p:nvSpPr>
+          <p:cNvPr id="4" name="Slide Number Placeholder 3"/>
+          <p:cNvSpPr>
+            <a:spLocks noGrp="1"/>
+          </p:cNvSpPr>
+          <p:nvPr>
+            <p:ph type="sldNum" sz="quarter" idx="5"/>
+          </p:nvPr>
+        </p:nvSpPr>
+        <p:spPr/>
+        <p:txBody>
+          <a:bodyPr/>
+          <a:lstStyle/>
+          <a:p>
+            <a:fld id="{69882E80-FAED-4EB2-B17C-9442BE45023B}" type="slidenum">
+              <a:rPr lang="en-US" smtClean="0"/>
+              <a:t>6</a:t>
+            </a:fld>
+            <a:endParaRPr lang="en-US"/>
+          </a:p>
+        </p:txBody>
+      </p:sp>
+    </p:spTree>
+    <p:extLst>
+      <p:ext uri="{BB962C8B-B14F-4D97-AF65-F5344CB8AC3E}">
+        <p14:creationId xmlns:p14="http://schemas.microsoft.com/office/powerpoint/2010/main" val="188151269"/>
+      </p:ext>
+    </p:extLst>
+  </p:cSld>
+  <p:clrMapOvr>
+    <a:masterClrMapping/>
+  </p:clrMapOvr>
+</p:notes>
 </file>
 
 <file path=ppt/slideLayouts/slideLayout1.xml><?xml version="1.0" encoding="utf-8"?>
@@ -6521,12 +6957,12 @@
   </p:clrMapOvr>
   <mc:AlternateContent xmlns:mc="http://schemas.openxmlformats.org/markup-compatibility/2006">
     <mc:Choice xmlns:p15="http://schemas.microsoft.com/office/powerpoint/2012/main" Requires="p15">
-      <p:transition xmlns:p14="http://schemas.microsoft.com/office/powerpoint/2010/main" spd="med" p14:dur="700">
+      <p:transition xmlns:p14="http://schemas.microsoft.com/office/powerpoint/2010/main" spd="med" p14:dur="700" advTm="700">
         <p15:prstTrans prst="curtains"/>
       </p:transition>
     </mc:Choice>
     <mc:Fallback>
-      <p:transition spd="med">
+      <p:transition spd="med" advTm="700">
         <p:fade/>
       </p:transition>
     </mc:Fallback>
@@ -6732,7 +7168,7 @@
   <p:clrMapOvr>
     <a:masterClrMapping/>
   </p:clrMapOvr>
-  <p:transition>
+  <p:transition advTm="700">
     <p:fade/>
   </p:transition>
 </p:sld>
@@ -6944,7 +7380,7 @@
   <p:clrMapOvr>
     <a:masterClrMapping/>
   </p:clrMapOvr>
-  <p:transition>
+  <p:transition advTm="700">
     <p:fade/>
   </p:transition>
 </p:sld>
@@ -7072,7 +7508,7 @@
   <p:clrMapOvr>
     <a:masterClrMapping/>
   </p:clrMapOvr>
-  <p:transition>
+  <p:transition advTm="700">
     <p:fade/>
   </p:transition>
 </p:sld>
@@ -7200,7 +7636,7 @@
   <p:clrMapOvr>
     <a:masterClrMapping/>
   </p:clrMapOvr>
-  <p:transition>
+  <p:transition advTm="700">
     <p:fade/>
   </p:transition>
 </p:sld>
@@ -7328,7 +7764,7 @@
   <p:clrMapOvr>
     <a:masterClrMapping/>
   </p:clrMapOvr>
-  <p:transition>
+  <p:transition advTm="700">
     <p:fade/>
   </p:transition>
 </p:sld>
@@ -7546,7 +7982,7 @@
   <p:clrMapOvr>
     <a:masterClrMapping/>
   </p:clrMapOvr>
-  <p:transition>
+  <p:transition advTm="700">
     <p:fade/>
   </p:transition>
 </p:sld>
@@ -7665,7 +8101,7 @@
             <a:r>
               <a:rPr lang="en-US" dirty="0">
                 <a:latin typeface="Arial Rounded MT Bold" panose="020F0704030504030204" pitchFamily="34" charset="0"/>
-                <a:hlinkClick r:id="rId2"/>
+                <a:hlinkClick r:id="rId3"/>
               </a:rPr>
               <a:t>https://github.com/Ainfiniti01/NatioID</a:t>
             </a:r>
@@ -7701,8 +8137,13 @@
   <p:clrMapOvr>
     <a:masterClrMapping/>
   </p:clrMapOvr>
-  <p:transition>
+  <p:transition advTm="700">
     <p:fade/>
+    <p:sndAc>
+      <p:stSnd>
+        <p:snd r:embed="rId2" name="applause.wav"/>
+      </p:stSnd>
+    </p:sndAc>
   </p:transition>
 </p:sld>
 </file>
@@ -7887,7 +8328,7 @@
   <p:clrMapOvr>
     <a:masterClrMapping/>
   </p:clrMapOvr>
-  <p:transition>
+  <p:transition advTm="700">
     <p:fade/>
   </p:transition>
 </p:sld>
@@ -8092,7 +8533,7 @@
   <p:clrMapOvr>
     <a:masterClrMapping/>
   </p:clrMapOvr>
-  <p:transition>
+  <p:transition advTm="700">
     <p:fade/>
   </p:transition>
 </p:sld>
@@ -8324,7 +8765,7 @@
   <p:clrMapOvr>
     <a:masterClrMapping/>
   </p:clrMapOvr>
-  <p:transition>
+  <p:transition advTm="700">
     <p:fade/>
   </p:transition>
 </p:sld>
@@ -8513,7 +8954,7 @@
   <p:clrMapOvr>
     <a:masterClrMapping/>
   </p:clrMapOvr>
-  <p:transition>
+  <p:transition advTm="700">
     <p:fade/>
   </p:transition>
 </p:sld>
@@ -8654,7 +9095,7 @@
           <p:nvPr/>
         </p:nvPicPr>
         <p:blipFill>
-          <a:blip r:embed="rId2">
+          <a:blip r:embed="rId3">
             <a:extLst>
               <a:ext uri="{28A0092B-C50C-407E-A947-70E740481C1C}">
                 <a14:useLocalDpi xmlns:a14="http://schemas.microsoft.com/office/drawing/2010/main" val="0"/>
@@ -8690,7 +9131,7 @@
           <p:nvPr/>
         </p:nvPicPr>
         <p:blipFill>
-          <a:blip r:embed="rId3">
+          <a:blip r:embed="rId4">
             <a:extLst>
               <a:ext uri="{28A0092B-C50C-407E-A947-70E740481C1C}">
                 <a14:useLocalDpi xmlns:a14="http://schemas.microsoft.com/office/drawing/2010/main" val="0"/>
@@ -8726,7 +9167,7 @@
           <p:nvPr/>
         </p:nvPicPr>
         <p:blipFill>
-          <a:blip r:embed="rId4">
+          <a:blip r:embed="rId5">
             <a:extLst>
               <a:ext uri="{28A0092B-C50C-407E-A947-70E740481C1C}">
                 <a14:useLocalDpi xmlns:a14="http://schemas.microsoft.com/office/drawing/2010/main" val="0"/>
@@ -8759,12 +9200,12 @@
   </p:clrMapOvr>
   <mc:AlternateContent xmlns:mc="http://schemas.openxmlformats.org/markup-compatibility/2006">
     <mc:Choice xmlns:p14="http://schemas.microsoft.com/office/powerpoint/2010/main" Requires="p14">
-      <p:transition spd="med" p14:dur="700">
+      <p:transition spd="med" p14:dur="700" advTm="700">
         <p14:warp dir="in"/>
       </p:transition>
     </mc:Choice>
     <mc:Fallback>
-      <p:transition spd="med">
+      <p:transition spd="med" advTm="700">
         <p:fade/>
       </p:transition>
     </mc:Fallback>
@@ -8976,12 +9417,12 @@
   </p:clrMapOvr>
   <mc:AlternateContent xmlns:mc="http://schemas.openxmlformats.org/markup-compatibility/2006">
     <mc:Choice xmlns:p14="http://schemas.microsoft.com/office/powerpoint/2010/main" Requires="p14">
-      <p:transition spd="med" p14:dur="700">
+      <p:transition spd="med" p14:dur="700" advTm="700">
         <p14:warp dir="in"/>
       </p:transition>
     </mc:Choice>
     <mc:Fallback>
-      <p:transition spd="med">
+      <p:transition spd="med" advTm="700">
         <p:fade/>
       </p:transition>
     </mc:Fallback>
@@ -9253,7 +9694,7 @@
   <p:clrMapOvr>
     <a:masterClrMapping/>
   </p:clrMapOvr>
-  <p:transition>
+  <p:transition advTm="700">
     <p:fade/>
   </p:transition>
 </p:sld>
@@ -9470,7 +9911,7 @@
   <p:clrMapOvr>
     <a:masterClrMapping/>
   </p:clrMapOvr>
-  <p:transition>
+  <p:transition advTm="700">
     <p:fade/>
   </p:transition>
 </p:sld>
@@ -9769,4 +10210,299 @@
     </a:ext>
   </a:extLst>
 </a:theme>
+</file>
+
+<file path=ppt/theme/theme2.xml><?xml version="1.0" encoding="utf-8"?>
+<a:theme xmlns:a="http://schemas.openxmlformats.org/drawingml/2006/main" name="Office Theme">
+  <a:themeElements>
+    <a:clrScheme name="Office">
+      <a:dk1>
+        <a:sysClr val="windowText" lastClr="000000"/>
+      </a:dk1>
+      <a:lt1>
+        <a:sysClr val="window" lastClr="FFFFFF"/>
+      </a:lt1>
+      <a:dk2>
+        <a:srgbClr val="44546A"/>
+      </a:dk2>
+      <a:lt2>
+        <a:srgbClr val="E7E6E6"/>
+      </a:lt2>
+      <a:accent1>
+        <a:srgbClr val="4472C4"/>
+      </a:accent1>
+      <a:accent2>
+        <a:srgbClr val="ED7D31"/>
+      </a:accent2>
+      <a:accent3>
+        <a:srgbClr val="A5A5A5"/>
+      </a:accent3>
+      <a:accent4>
+        <a:srgbClr val="FFC000"/>
+      </a:accent4>
+      <a:accent5>
+        <a:srgbClr val="5B9BD5"/>
+      </a:accent5>
+      <a:accent6>
+        <a:srgbClr val="70AD47"/>
+      </a:accent6>
+      <a:hlink>
+        <a:srgbClr val="0563C1"/>
+      </a:hlink>
+      <a:folHlink>
+        <a:srgbClr val="954F72"/>
+      </a:folHlink>
+    </a:clrScheme>
+    <a:fontScheme name="Office">
+      <a:majorFont>
+        <a:latin typeface="Calibri Light" panose="020F0302020204030204"/>
+        <a:ea typeface=""/>
+        <a:cs typeface=""/>
+        <a:font script="Jpan" typeface="游ゴシック Light"/>
+        <a:font script="Hang" typeface="맑은 고딕"/>
+        <a:font script="Hans" typeface="等线 Light"/>
+        <a:font script="Hant" typeface="新細明體"/>
+        <a:font script="Arab" typeface="Times New Roman"/>
+        <a:font script="Hebr" typeface="Times New Roman"/>
+        <a:font script="Thai" typeface="Angsana New"/>
+        <a:font script="Ethi" typeface="Nyala"/>
+        <a:font script="Beng" typeface="Vrinda"/>
+        <a:font script="Gujr" typeface="Shruti"/>
+        <a:font script="Khmr" typeface="MoolBoran"/>
+        <a:font script="Knda" typeface="Tunga"/>
+        <a:font script="Guru" typeface="Raavi"/>
+        <a:font script="Cans" typeface="Euphemia"/>
+        <a:font script="Cher" typeface="Plantagenet Cherokee"/>
+        <a:font script="Yiii" typeface="Microsoft Yi Baiti"/>
+        <a:font script="Tibt" typeface="Microsoft Himalaya"/>
+        <a:font script="Thaa" typeface="MV Boli"/>
+        <a:font script="Deva" typeface="Mangal"/>
+        <a:font script="Telu" typeface="Gautami"/>
+        <a:font script="Taml" typeface="Latha"/>
+        <a:font script="Syrc" typeface="Estrangelo Edessa"/>
+        <a:font script="Orya" typeface="Kalinga"/>
+        <a:font script="Mlym" typeface="Kartika"/>
+        <a:font script="Laoo" typeface="DokChampa"/>
+        <a:font script="Sinh" typeface="Iskoola Pota"/>
+        <a:font script="Mong" typeface="Mongolian Baiti"/>
+        <a:font script="Viet" typeface="Times New Roman"/>
+        <a:font script="Uigh" typeface="Microsoft Uighur"/>
+        <a:font script="Geor" typeface="Sylfaen"/>
+        <a:font script="Armn" typeface="Arial"/>
+        <a:font script="Bugi" typeface="Leelawadee UI"/>
+        <a:font script="Bopo" typeface="Microsoft JhengHei"/>
+        <a:font script="Java" typeface="Javanese Text"/>
+        <a:font script="Lisu" typeface="Segoe UI"/>
+        <a:font script="Mymr" typeface="Myanmar Text"/>
+        <a:font script="Nkoo" typeface="Ebrima"/>
+        <a:font script="Olck" typeface="Nirmala UI"/>
+        <a:font script="Osma" typeface="Ebrima"/>
+        <a:font script="Phag" typeface="Phagspa"/>
+        <a:font script="Syrn" typeface="Estrangelo Edessa"/>
+        <a:font script="Syrj" typeface="Estrangelo Edessa"/>
+        <a:font script="Syre" typeface="Estrangelo Edessa"/>
+        <a:font script="Sora" typeface="Nirmala UI"/>
+        <a:font script="Tale" typeface="Microsoft Tai Le"/>
+        <a:font script="Talu" typeface="Microsoft New Tai Lue"/>
+        <a:font script="Tfng" typeface="Ebrima"/>
+      </a:majorFont>
+      <a:minorFont>
+        <a:latin typeface="Calibri" panose="020F0502020204030204"/>
+        <a:ea typeface=""/>
+        <a:cs typeface=""/>
+        <a:font script="Jpan" typeface="游ゴシック"/>
+        <a:font script="Hang" typeface="맑은 고딕"/>
+        <a:font script="Hans" typeface="等线"/>
+        <a:font script="Hant" typeface="新細明體"/>
+        <a:font script="Arab" typeface="Arial"/>
+        <a:font script="Hebr" typeface="Arial"/>
+        <a:font script="Thai" typeface="Cordia New"/>
+        <a:font script="Ethi" typeface="Nyala"/>
+        <a:font script="Beng" typeface="Vrinda"/>
+        <a:font script="Gujr" typeface="Shruti"/>
+        <a:font script="Khmr" typeface="DaunPenh"/>
+        <a:font script="Knda" typeface="Tunga"/>
+        <a:font script="Guru" typeface="Raavi"/>
+        <a:font script="Cans" typeface="Euphemia"/>
+        <a:font script="Cher" typeface="Plantagenet Cherokee"/>
+        <a:font script="Yiii" typeface="Microsoft Yi Baiti"/>
+        <a:font script="Tibt" typeface="Microsoft Himalaya"/>
+        <a:font script="Thaa" typeface="MV Boli"/>
+        <a:font script="Deva" typeface="Mangal"/>
+        <a:font script="Telu" typeface="Gautami"/>
+        <a:font script="Taml" typeface="Latha"/>
+        <a:font script="Syrc" typeface="Estrangelo Edessa"/>
+        <a:font script="Orya" typeface="Kalinga"/>
+        <a:font script="Mlym" typeface="Kartika"/>
+        <a:font script="Laoo" typeface="DokChampa"/>
+        <a:font script="Sinh" typeface="Iskoola Pota"/>
+        <a:font script="Mong" typeface="Mongolian Baiti"/>
+        <a:font script="Viet" typeface="Arial"/>
+        <a:font script="Uigh" typeface="Microsoft Uighur"/>
+        <a:font script="Geor" typeface="Sylfaen"/>
+        <a:font script="Armn" typeface="Arial"/>
+        <a:font script="Bugi" typeface="Leelawadee UI"/>
+        <a:font script="Bopo" typeface="Microsoft JhengHei"/>
+        <a:font script="Java" typeface="Javanese Text"/>
+        <a:font script="Lisu" typeface="Segoe UI"/>
+        <a:font script="Mymr" typeface="Myanmar Text"/>
+        <a:font script="Nkoo" typeface="Ebrima"/>
+        <a:font script="Olck" typeface="Nirmala UI"/>
+        <a:font script="Osma" typeface="Ebrima"/>
+        <a:font script="Phag" typeface="Phagspa"/>
+        <a:font script="Syrn" typeface="Estrangelo Edessa"/>
+        <a:font script="Syrj" typeface="Estrangelo Edessa"/>
+        <a:font script="Syre" typeface="Estrangelo Edessa"/>
+        <a:font script="Sora" typeface="Nirmala UI"/>
+        <a:font script="Tale" typeface="Microsoft Tai Le"/>
+        <a:font script="Talu" typeface="Microsoft New Tai Lue"/>
+        <a:font script="Tfng" typeface="Ebrima"/>
+      </a:minorFont>
+    </a:fontScheme>
+    <a:fmtScheme name="Office">
+      <a:fillStyleLst>
+        <a:solidFill>
+          <a:schemeClr val="phClr"/>
+        </a:solidFill>
+        <a:gradFill rotWithShape="1">
+          <a:gsLst>
+            <a:gs pos="0">
+              <a:schemeClr val="phClr">
+                <a:lumMod val="110000"/>
+                <a:satMod val="105000"/>
+                <a:tint val="67000"/>
+              </a:schemeClr>
+            </a:gs>
+            <a:gs pos="50000">
+              <a:schemeClr val="phClr">
+                <a:lumMod val="105000"/>
+                <a:satMod val="103000"/>
+                <a:tint val="73000"/>
+              </a:schemeClr>
+            </a:gs>
+            <a:gs pos="100000">
+              <a:schemeClr val="phClr">
+                <a:lumMod val="105000"/>
+                <a:satMod val="109000"/>
+                <a:tint val="81000"/>
+              </a:schemeClr>
+            </a:gs>
+          </a:gsLst>
+          <a:lin ang="5400000" scaled="0"/>
+        </a:gradFill>
+        <a:gradFill rotWithShape="1">
+          <a:gsLst>
+            <a:gs pos="0">
+              <a:schemeClr val="phClr">
+                <a:satMod val="103000"/>
+                <a:lumMod val="102000"/>
+                <a:tint val="94000"/>
+              </a:schemeClr>
+            </a:gs>
+            <a:gs pos="50000">
+              <a:schemeClr val="phClr">
+                <a:satMod val="110000"/>
+                <a:lumMod val="100000"/>
+                <a:shade val="100000"/>
+              </a:schemeClr>
+            </a:gs>
+            <a:gs pos="100000">
+              <a:schemeClr val="phClr">
+                <a:lumMod val="99000"/>
+                <a:satMod val="120000"/>
+                <a:shade val="78000"/>
+              </a:schemeClr>
+            </a:gs>
+          </a:gsLst>
+          <a:lin ang="5400000" scaled="0"/>
+        </a:gradFill>
+      </a:fillStyleLst>
+      <a:lnStyleLst>
+        <a:ln w="6350" cap="flat" cmpd="sng" algn="ctr">
+          <a:solidFill>
+            <a:schemeClr val="phClr"/>
+          </a:solidFill>
+          <a:prstDash val="solid"/>
+          <a:miter lim="800000"/>
+        </a:ln>
+        <a:ln w="12700" cap="flat" cmpd="sng" algn="ctr">
+          <a:solidFill>
+            <a:schemeClr val="phClr"/>
+          </a:solidFill>
+          <a:prstDash val="solid"/>
+          <a:miter lim="800000"/>
+        </a:ln>
+        <a:ln w="19050" cap="flat" cmpd="sng" algn="ctr">
+          <a:solidFill>
+            <a:schemeClr val="phClr"/>
+          </a:solidFill>
+          <a:prstDash val="solid"/>
+          <a:miter lim="800000"/>
+        </a:ln>
+      </a:lnStyleLst>
+      <a:effectStyleLst>
+        <a:effectStyle>
+          <a:effectLst/>
+        </a:effectStyle>
+        <a:effectStyle>
+          <a:effectLst/>
+        </a:effectStyle>
+        <a:effectStyle>
+          <a:effectLst>
+            <a:outerShdw blurRad="57150" dist="19050" dir="5400000" algn="ctr" rotWithShape="0">
+              <a:srgbClr val="000000">
+                <a:alpha val="63000"/>
+              </a:srgbClr>
+            </a:outerShdw>
+          </a:effectLst>
+        </a:effectStyle>
+      </a:effectStyleLst>
+      <a:bgFillStyleLst>
+        <a:solidFill>
+          <a:schemeClr val="phClr"/>
+        </a:solidFill>
+        <a:solidFill>
+          <a:schemeClr val="phClr">
+            <a:tint val="95000"/>
+            <a:satMod val="170000"/>
+          </a:schemeClr>
+        </a:solidFill>
+        <a:gradFill rotWithShape="1">
+          <a:gsLst>
+            <a:gs pos="0">
+              <a:schemeClr val="phClr">
+                <a:tint val="93000"/>
+                <a:satMod val="150000"/>
+                <a:shade val="98000"/>
+                <a:lumMod val="102000"/>
+              </a:schemeClr>
+            </a:gs>
+            <a:gs pos="50000">
+              <a:schemeClr val="phClr">
+                <a:tint val="98000"/>
+                <a:satMod val="130000"/>
+                <a:shade val="90000"/>
+                <a:lumMod val="103000"/>
+              </a:schemeClr>
+            </a:gs>
+            <a:gs pos="100000">
+              <a:schemeClr val="phClr">
+                <a:shade val="63000"/>
+                <a:satMod val="120000"/>
+              </a:schemeClr>
+            </a:gs>
+          </a:gsLst>
+          <a:lin ang="5400000" scaled="0"/>
+        </a:gradFill>
+      </a:bgFillStyleLst>
+    </a:fmtScheme>
+  </a:themeElements>
+  <a:objectDefaults/>
+  <a:extraClrSchemeLst/>
+  <a:extLst>
+    <a:ext uri="{05A4C25C-085E-4340-85A3-A5531E510DB2}">
+      <thm15:themeFamily xmlns:thm15="http://schemas.microsoft.com/office/thememl/2012/main" name="Office Theme" id="{62F939B6-93AF-4DB8-9C6B-D6C7DFDC589F}" vid="{4A3C46E8-61CC-4603-A589-7422A47A8E4A}"/>
+    </a:ext>
+  </a:extLst>
+</a:theme>
 </file>
--- a/NatioID – National Digital Identity & Voting Platform.pptx
+++ b/NatioID – National Digital Identity & Voting Platform.pptx
@@ -6957,12 +6957,12 @@
   </p:clrMapOvr>
   <mc:AlternateContent xmlns:mc="http://schemas.openxmlformats.org/markup-compatibility/2006">
     <mc:Choice xmlns:p15="http://schemas.microsoft.com/office/powerpoint/2012/main" Requires="p15">
-      <p:transition xmlns:p14="http://schemas.microsoft.com/office/powerpoint/2010/main" spd="med" p14:dur="700" advTm="700">
+      <p:transition spd="slow" advTm="700">
         <p15:prstTrans prst="curtains"/>
       </p:transition>
     </mc:Choice>
     <mc:Fallback>
-      <p:transition spd="med" advTm="700">
+      <p:transition spd="slow" advTm="700">
         <p:fade/>
       </p:transition>
     </mc:Fallback>
@@ -7168,7 +7168,7 @@
   <p:clrMapOvr>
     <a:masterClrMapping/>
   </p:clrMapOvr>
-  <p:transition advTm="700">
+  <p:transition spd="slow" advTm="700">
     <p:fade/>
   </p:transition>
 </p:sld>
@@ -7380,7 +7380,7 @@
   <p:clrMapOvr>
     <a:masterClrMapping/>
   </p:clrMapOvr>
-  <p:transition advTm="700">
+  <p:transition spd="slow" advTm="700">
     <p:fade/>
   </p:transition>
 </p:sld>
@@ -7508,7 +7508,7 @@
   <p:clrMapOvr>
     <a:masterClrMapping/>
   </p:clrMapOvr>
-  <p:transition advTm="700">
+  <p:transition spd="slow" advTm="700">
     <p:fade/>
   </p:transition>
 </p:sld>
@@ -7636,7 +7636,7 @@
   <p:clrMapOvr>
     <a:masterClrMapping/>
   </p:clrMapOvr>
-  <p:transition advTm="700">
+  <p:transition spd="slow" advTm="700">
     <p:fade/>
   </p:transition>
 </p:sld>
@@ -7764,7 +7764,7 @@
   <p:clrMapOvr>
     <a:masterClrMapping/>
   </p:clrMapOvr>
-  <p:transition advTm="700">
+  <p:transition spd="slow" advTm="700">
     <p:fade/>
   </p:transition>
 </p:sld>
@@ -7982,7 +7982,7 @@
   <p:clrMapOvr>
     <a:masterClrMapping/>
   </p:clrMapOvr>
-  <p:transition advTm="700">
+  <p:transition spd="slow" advTm="700">
     <p:fade/>
   </p:transition>
 </p:sld>
@@ -8137,7 +8137,7 @@
   <p:clrMapOvr>
     <a:masterClrMapping/>
   </p:clrMapOvr>
-  <p:transition advTm="700">
+  <p:transition spd="slow" advTm="700">
     <p:fade/>
     <p:sndAc>
       <p:stSnd>
@@ -8328,7 +8328,7 @@
   <p:clrMapOvr>
     <a:masterClrMapping/>
   </p:clrMapOvr>
-  <p:transition advTm="700">
+  <p:transition spd="slow" advTm="700">
     <p:fade/>
   </p:transition>
 </p:sld>
@@ -8533,7 +8533,7 @@
   <p:clrMapOvr>
     <a:masterClrMapping/>
   </p:clrMapOvr>
-  <p:transition advTm="700">
+  <p:transition spd="slow" advTm="700">
     <p:fade/>
   </p:transition>
 </p:sld>
@@ -8765,7 +8765,7 @@
   <p:clrMapOvr>
     <a:masterClrMapping/>
   </p:clrMapOvr>
-  <p:transition advTm="700">
+  <p:transition spd="slow" advTm="700">
     <p:fade/>
   </p:transition>
 </p:sld>
@@ -8954,7 +8954,7 @@
   <p:clrMapOvr>
     <a:masterClrMapping/>
   </p:clrMapOvr>
-  <p:transition advTm="700">
+  <p:transition spd="slow" advTm="700">
     <p:fade/>
   </p:transition>
 </p:sld>
@@ -9200,12 +9200,12 @@
   </p:clrMapOvr>
   <mc:AlternateContent xmlns:mc="http://schemas.openxmlformats.org/markup-compatibility/2006">
     <mc:Choice xmlns:p14="http://schemas.microsoft.com/office/powerpoint/2010/main" Requires="p14">
-      <p:transition spd="med" p14:dur="700" advTm="700">
+      <p:transition spd="slow" advTm="700">
         <p14:warp dir="in"/>
       </p:transition>
     </mc:Choice>
     <mc:Fallback>
-      <p:transition spd="med" advTm="700">
+      <p:transition spd="slow" advTm="700">
         <p:fade/>
       </p:transition>
     </mc:Fallback>
@@ -9417,12 +9417,12 @@
   </p:clrMapOvr>
   <mc:AlternateContent xmlns:mc="http://schemas.openxmlformats.org/markup-compatibility/2006">
     <mc:Choice xmlns:p14="http://schemas.microsoft.com/office/powerpoint/2010/main" Requires="p14">
-      <p:transition spd="med" p14:dur="700" advTm="700">
+      <p:transition spd="slow" advTm="700">
         <p14:warp dir="in"/>
       </p:transition>
     </mc:Choice>
     <mc:Fallback>
-      <p:transition spd="med" advTm="700">
+      <p:transition spd="slow" advTm="700">
         <p:fade/>
       </p:transition>
     </mc:Fallback>
@@ -9694,7 +9694,7 @@
   <p:clrMapOvr>
     <a:masterClrMapping/>
   </p:clrMapOvr>
-  <p:transition advTm="700">
+  <p:transition spd="slow" advTm="700">
     <p:fade/>
   </p:transition>
 </p:sld>
@@ -9911,7 +9911,7 @@
   <p:clrMapOvr>
     <a:masterClrMapping/>
   </p:clrMapOvr>
-  <p:transition advTm="700">
+  <p:transition spd="slow" advTm="700">
     <p:fade/>
   </p:transition>
 </p:sld>
